--- a/kits/kit03/Kit03_PresentationDeck.pptx
+++ b/kits/kit03/Kit03_PresentationDeck.pptx
@@ -795,7 +795,7 @@
           <a:p>
             <a:r>
               <a:rPr lang="en-US" dirty="0"/>
-              <a:t>Crossley et al. 2022: the CommonLit CLEAR corpus grounded readability in teacher judgment; level is a testable property, not a vibe. FOUNDER STORY slot lands here: the time a level label was wrong and how you caught it.</a:t>
+              <a:t>Crossley et al. 2022: the CommonLit CLEAR corpus grounded readability in teacher judgment; level is a testable property, not a vibe. Teach the three quick checks (read aloud, sentence length, try on one student) and move on.</a:t>
             </a:r>
             <a:endParaRPr lang="en-US" dirty="0"/>
           </a:p>
@@ -1323,7 +1323,7 @@
           <a:p>
             <a:r>
               <a:rPr lang="en-US" dirty="0"/>
-              <a:t>That’s from RAND (RR-A134-25): the schools whose students most need differentiated materials are least likely to be getting AI’s help making them. YOUR TAKE slot lands here; read the authors’ stated position from the script.</a:t>
+              <a:t>That’s from RAND (RR-A134-25): the schools whose students most need differentiated materials are least likely to be getting AI’s help making them. Then read the authors’ shared take from the script: in practice, equity tends to favor the struggling child, and the top end of the class gets forgotten; now that extensions cost two minutes, build the stretch on purpose.</a:t>
             </a:r>
             <a:endParaRPr lang="en-US" dirty="0"/>
           </a:p>
@@ -1411,7 +1411,7 @@
           <a:p>
             <a:r>
               <a:rPr lang="en-US" dirty="0"/>
-              <a:t>Pairs, devices out inside two minutes, announce the tool. LOCAL EXAMPLE slot: read one of the authors’ real differentiation prompts from the script (Adam’s leveled shop-safety procedure or Katelyn’s read-aloud-to-centers prompt).</a:t>
+              <a:t>Pairs, devices out inside two minutes, announce the tool. Then read Adam’s practice from the script: he levels the reading level of safety training materials and their tests/quizzes so every student understands equally; in a shop, comprehension is fingers.</a:t>
             </a:r>
             <a:endParaRPr lang="en-US" dirty="0"/>
           </a:p>
@@ -1499,7 +1499,7 @@
           <a:p>
             <a:r>
               <a:rPr lang="en-US" dirty="0"/>
-              <a:t>Deunk et al. 2018, Educational Research Review: grouping alone is not enough; the materials have to actually differ. FOUNDER STORY slot lands here; read Katelyn’s three-versions story from the script.</a:t>
+              <a:t>Deunk et al. 2018, Educational Research Review: grouping alone is not enough; the materials have to actually differ. Then read Katelyn’s story from the script: in her 8th grade literature class, scaffolds took precedence over stretching; when versions are hand-built, the stretch gets triaged.</a:t>
             </a:r>
             <a:endParaRPr lang="en-US" dirty="0"/>
           </a:p>

--- a/kits/kit03/Kit03_PresentationDeck.pptx
+++ b/kits/kit03/Kit03_PresentationDeck.pptx
@@ -1411,7 +1411,7 @@
           <a:p>
             <a:r>
               <a:rPr lang="en-US" dirty="0"/>
-              <a:t>Pairs, devices out inside two minutes, announce the tool. Then read Adam’s practice from the script: he levels the reading level of safety training materials and their tests/quizzes so every student understands equally; in a shop, comprehension is fingers.</a:t>
+              <a:t>Pairs, devices out inside two minutes, announce the tool. The standard to name here: differentiate until understanding is equal, and let AI do the drafting that used to make that impossible.</a:t>
             </a:r>
             <a:endParaRPr lang="en-US" dirty="0"/>
           </a:p>
@@ -1499,7 +1499,7 @@
           <a:p>
             <a:r>
               <a:rPr lang="en-US" dirty="0"/>
-              <a:t>Deunk et al. 2018, Educational Research Review: grouping alone is not enough; the materials have to actually differ. Then read Katelyn’s story from the script: in her 8th grade literature class, scaffolds took precedence over stretching; when versions are hand-built, the stretch gets triaged.</a:t>
+              <a:t>Deunk et al. 2018, Educational Research Review: grouping alone is not enough; the materials have to actually differ. If you chose to share the founders’ note from the front of the script, their point lands here: when versions are hand-built, the stretch gets triaged.</a:t>
             </a:r>
             <a:endParaRPr lang="en-US" dirty="0"/>
           </a:p>

--- a/kits/kit03/Kit03_PresentationDeck.pptx
+++ b/kits/kit03/Kit03_PresentationDeck.pptx
@@ -1939,7 +1939,7 @@
           <a:p>
             <a:r>
               <a:rPr lang="en-US" dirty="0"/>
-              <a:t>Callback to Deunk et al. from slide 2. Land it plainly and move to the habit.</a:t>
+              <a:t>Say: an hour ago, differentiation was a good intention priced at three hand-built versions of everything. You just built core, support, and stretch for a real lesson in twenty minutes, and the research from slide 2 says materials that actually differ are what make it work. Land it plainly and move to the habit.</a:t>
             </a:r>
             <a:endParaRPr lang="en-US" dirty="0"/>
           </a:p>

--- a/kits/kit03/Kit03_PresentationDeck.pptx
+++ b/kits/kit03/Kit03_PresentationDeck.pptx
@@ -707,7 +707,7 @@
           <a:p>
             <a:r>
               <a:rPr lang="en-US" dirty="0"/>
-              <a:t>The Kit 2 formula wearing work clothes: role, task, context, format. Ninety seconds replaces an evening. Next slide is the habit that keeps this honest.</a:t>
+              <a:t>Say: here's the same move on Ms. Rivera's screen, our running composite example. It's the Kit 2 formula wearing work clothes: role in teal, task in navy, context in amber, format in green. Ninety seconds replaces an evening. In the lab, mimic this shape with your own passage. Next slide is the habit that keeps this honest.</a:t>
             </a:r>
             <a:endParaRPr lang="en-US" dirty="0"/>
           </a:p>
@@ -4578,7 +4578,7 @@
                 <a:ea typeface="Inter" pitchFamily="34" charset="-122"/>
                 <a:cs typeface="Inter" pitchFamily="34" charset="-120"/>
               </a:rPr>
-              <a:t>MOVE 1 · THE WORKHORSE</a:t>
+              <a:t>MOVE 1 · THE WORKHORSE · ON MS. RIVERA'S SCREEN</a:t>
             </a:r>
             <a:endParaRPr lang="en-US" sz="1200" dirty="0"/>
           </a:p>
@@ -4625,26 +4625,106 @@
       </p:sp>
       <p:sp>
         <p:nvSpPr>
-          <p:cNvPr id="7" name="Shape 4"/>
-          <p:cNvSpPr/>
-          <p:nvPr/>
-        </p:nvSpPr>
-        <p:spPr>
-          <a:xfrm>
-            <a:off x="640080" y="1417320"/>
-            <a:ext cx="10972800" cy="1371600"/>
+          <p:cNvPr id="7" name="Text 4"/>
+          <p:cNvSpPr/>
+          <p:nvPr/>
+        </p:nvSpPr>
+        <p:spPr>
+          <a:xfrm>
+            <a:off x="640080" y="1298448"/>
+            <a:ext cx="10972800" cy="365760"/>
+          </a:xfrm>
+          <a:prstGeom prst="rect">
+            <a:avLst/>
+          </a:prstGeom>
+          <a:noFill/>
+          <a:ln/>
+        </p:spPr>
+        <p:txBody>
+          <a:bodyPr wrap="square" lIns="0" tIns="0" rIns="0" bIns="0" rtlCol="0" anchor="ctr"/>
+          <a:lstStyle/>
+          <a:p>
+            <a:pPr indent="0" marL="0">
+              <a:buNone/>
+            </a:pPr>
+            <a:r>
+              <a:rPr lang="en-US" sz="1600" b="1" dirty="0">
+                <a:solidFill>
+                  <a:srgbClr val="B4453A"/>
+                </a:solidFill>
+                <a:latin typeface="Inter" pitchFamily="34" charset="0"/>
+                <a:ea typeface="Inter" pitchFamily="34" charset="-122"/>
+                <a:cs typeface="Inter" pitchFamily="34" charset="-120"/>
+              </a:rPr>
+              <a:t>BEFORE   </a:t>
+            </a:r>
+            <a:pPr indent="0" marL="0">
+              <a:buNone/>
+            </a:pPr>
+            <a:r>
+              <a:rPr lang="en-US" sz="1600" i="1" dirty="0">
+                <a:solidFill>
+                  <a:srgbClr val="5B6B7A"/>
+                </a:solidFill>
+                <a:latin typeface="Inter" pitchFamily="34" charset="0"/>
+                <a:ea typeface="Inter" pitchFamily="34" charset="-122"/>
+                <a:cs typeface="Inter" pitchFamily="34" charset="-120"/>
+              </a:rPr>
+              <a:t>“Make this easier.”</a:t>
+            </a:r>
+            <a:endParaRPr lang="en-US" sz="1600" dirty="0"/>
+          </a:p>
+        </p:txBody>
+      </p:sp>
+      <p:sp>
+        <p:nvSpPr>
+          <p:cNvPr id="8" name="Shape 5"/>
+          <p:cNvSpPr/>
+          <p:nvPr/>
+        </p:nvSpPr>
+        <p:spPr>
+          <a:xfrm>
+            <a:off x="640080" y="1783080"/>
+            <a:ext cx="10972800" cy="3520440"/>
           </a:xfrm>
           <a:prstGeom prst="roundRect">
             <a:avLst>
-              <a:gd name="adj" fmla="val 6000"/>
+              <a:gd name="adj" fmla="val 2597"/>
             </a:avLst>
           </a:prstGeom>
           <a:solidFill>
-            <a:srgbClr val="FBEFED"/>
+            <a:srgbClr val="FFFFFF"/>
+          </a:solidFill>
+          <a:ln w="19050">
+            <a:solidFill>
+              <a:srgbClr val="DCE3EA"/>
+            </a:solidFill>
+            <a:prstDash val="solid"/>
+          </a:ln>
+        </p:spPr>
+      </p:sp>
+      <p:sp>
+        <p:nvSpPr>
+          <p:cNvPr id="9" name="Shape 6"/>
+          <p:cNvSpPr/>
+          <p:nvPr/>
+        </p:nvSpPr>
+        <p:spPr>
+          <a:xfrm>
+            <a:off x="640080" y="1783080"/>
+            <a:ext cx="10972800" cy="384048"/>
+          </a:xfrm>
+          <a:prstGeom prst="roundRect">
+            <a:avLst>
+              <a:gd name="adj" fmla="val 23810"/>
+            </a:avLst>
+          </a:prstGeom>
+          <a:solidFill>
+            <a:srgbClr val="13293D"/>
           </a:solidFill>
           <a:ln w="12700">
             <a:solidFill>
-              <a:srgbClr val="FBEFED"/>
+              <a:srgbClr val="13293D"/>
             </a:solidFill>
             <a:prstDash val="solid"/>
           </a:ln>
@@ -4652,104 +4732,24 @@
       </p:sp>
       <p:sp>
         <p:nvSpPr>
-          <p:cNvPr id="8" name="Text 5"/>
-          <p:cNvSpPr/>
-          <p:nvPr/>
-        </p:nvSpPr>
-        <p:spPr>
-          <a:xfrm>
-            <a:off x="914400" y="1554480"/>
-            <a:ext cx="1828800" cy="320040"/>
-          </a:xfrm>
-          <a:prstGeom prst="rect">
-            <a:avLst/>
-          </a:prstGeom>
-          <a:noFill/>
-          <a:ln/>
-        </p:spPr>
-        <p:txBody>
-          <a:bodyPr wrap="square" lIns="0" tIns="0" rIns="0" bIns="0" rtlCol="0" anchor="ctr"/>
-          <a:lstStyle/>
-          <a:p>
-            <a:pPr indent="0" marL="0">
-              <a:buNone/>
-            </a:pPr>
-            <a:r>
-              <a:rPr lang="en-US" sz="1400" b="1" dirty="0">
-                <a:solidFill>
-                  <a:srgbClr val="B4453A"/>
-                </a:solidFill>
-                <a:latin typeface="Inter" pitchFamily="34" charset="0"/>
-                <a:ea typeface="Inter" pitchFamily="34" charset="-122"/>
-                <a:cs typeface="Inter" pitchFamily="34" charset="-120"/>
-              </a:rPr>
-              <a:t>BEFORE</a:t>
-            </a:r>
-            <a:endParaRPr lang="en-US" sz="1400" dirty="0"/>
-          </a:p>
-        </p:txBody>
-      </p:sp>
-      <p:sp>
-        <p:nvSpPr>
-          <p:cNvPr id="9" name="Text 6"/>
-          <p:cNvSpPr/>
-          <p:nvPr/>
-        </p:nvSpPr>
-        <p:spPr>
-          <a:xfrm>
-            <a:off x="914400" y="1874520"/>
-            <a:ext cx="10424160" cy="822960"/>
-          </a:xfrm>
-          <a:prstGeom prst="rect">
-            <a:avLst/>
-          </a:prstGeom>
-          <a:noFill/>
-          <a:ln/>
-        </p:spPr>
-        <p:txBody>
-          <a:bodyPr wrap="square" lIns="0" tIns="0" rIns="0" bIns="0" rtlCol="0" anchor="ctr"/>
-          <a:lstStyle/>
-          <a:p>
-            <a:pPr indent="0" marL="0">
-              <a:buNone/>
-            </a:pPr>
-            <a:r>
-              <a:rPr lang="en-US" sz="1800" i="1" dirty="0">
-                <a:solidFill>
-                  <a:srgbClr val="1B1F24"/>
-                </a:solidFill>
-                <a:latin typeface="Inter" pitchFamily="34" charset="0"/>
-                <a:ea typeface="Inter" pitchFamily="34" charset="-122"/>
-                <a:cs typeface="Inter" pitchFamily="34" charset="-120"/>
-              </a:rPr>
-              <a:t>“Make this easier.”</a:t>
-            </a:r>
-            <a:endParaRPr lang="en-US" sz="1800" dirty="0"/>
-          </a:p>
-        </p:txBody>
-      </p:sp>
-      <p:sp>
-        <p:nvSpPr>
           <p:cNvPr id="10" name="Shape 7"/>
           <p:cNvSpPr/>
           <p:nvPr/>
         </p:nvSpPr>
         <p:spPr>
           <a:xfrm>
-            <a:off x="640080" y="3017520"/>
-            <a:ext cx="10972800" cy="2651760"/>
-          </a:xfrm>
-          <a:prstGeom prst="roundRect">
-            <a:avLst>
-              <a:gd name="adj" fmla="val 3103"/>
-            </a:avLst>
+            <a:off x="868680" y="1901952"/>
+            <a:ext cx="146304" cy="146304"/>
+          </a:xfrm>
+          <a:prstGeom prst="ellipse">
+            <a:avLst/>
           </a:prstGeom>
           <a:solidFill>
-            <a:srgbClr val="EAF5F3"/>
+            <a:srgbClr val="E8837A"/>
           </a:solidFill>
           <a:ln w="12700">
             <a:solidFill>
-              <a:srgbClr val="EAF5F3"/>
+              <a:srgbClr val="E8837A"/>
             </a:solidFill>
             <a:prstDash val="solid"/>
           </a:ln>
@@ -4757,30 +4757,200 @@
       </p:sp>
       <p:sp>
         <p:nvSpPr>
-          <p:cNvPr id="11" name="Text 8"/>
-          <p:cNvSpPr/>
-          <p:nvPr/>
-        </p:nvSpPr>
-        <p:spPr>
-          <a:xfrm>
-            <a:off x="914400" y="3154680"/>
-            <a:ext cx="1828800" cy="320040"/>
-          </a:xfrm>
-          <a:prstGeom prst="rect">
-            <a:avLst/>
-          </a:prstGeom>
-          <a:noFill/>
-          <a:ln/>
-        </p:spPr>
-        <p:txBody>
-          <a:bodyPr wrap="square" lIns="0" tIns="0" rIns="0" bIns="0" rtlCol="0" anchor="ctr"/>
-          <a:lstStyle/>
-          <a:p>
-            <a:pPr indent="0" marL="0">
-              <a:buNone/>
-            </a:pPr>
-            <a:r>
-              <a:rPr lang="en-US" sz="1400" b="1" dirty="0">
+          <p:cNvPr id="11" name="Shape 8"/>
+          <p:cNvSpPr/>
+          <p:nvPr/>
+        </p:nvSpPr>
+        <p:spPr>
+          <a:xfrm>
+            <a:off x="1115568" y="1901952"/>
+            <a:ext cx="146304" cy="146304"/>
+          </a:xfrm>
+          <a:prstGeom prst="ellipse">
+            <a:avLst/>
+          </a:prstGeom>
+          <a:solidFill>
+            <a:srgbClr val="F4A825"/>
+          </a:solidFill>
+          <a:ln w="12700">
+            <a:solidFill>
+              <a:srgbClr val="F4A825"/>
+            </a:solidFill>
+            <a:prstDash val="solid"/>
+          </a:ln>
+        </p:spPr>
+      </p:sp>
+      <p:sp>
+        <p:nvSpPr>
+          <p:cNvPr id="12" name="Shape 9"/>
+          <p:cNvSpPr/>
+          <p:nvPr/>
+        </p:nvSpPr>
+        <p:spPr>
+          <a:xfrm>
+            <a:off x="1362456" y="1901952"/>
+            <a:ext cx="146304" cy="146304"/>
+          </a:xfrm>
+          <a:prstGeom prst="ellipse">
+            <a:avLst/>
+          </a:prstGeom>
+          <a:solidFill>
+            <a:srgbClr val="2E7D5B"/>
+          </a:solidFill>
+          <a:ln w="12700">
+            <a:solidFill>
+              <a:srgbClr val="2E7D5B"/>
+            </a:solidFill>
+            <a:prstDash val="solid"/>
+          </a:ln>
+        </p:spPr>
+      </p:sp>
+      <p:sp>
+        <p:nvSpPr>
+          <p:cNvPr id="13" name="Text 10"/>
+          <p:cNvSpPr/>
+          <p:nvPr/>
+        </p:nvSpPr>
+        <p:spPr>
+          <a:xfrm>
+            <a:off x="1783080" y="1783080"/>
+            <a:ext cx="9692640" cy="384048"/>
+          </a:xfrm>
+          <a:prstGeom prst="rect">
+            <a:avLst/>
+          </a:prstGeom>
+          <a:noFill/>
+          <a:ln/>
+        </p:spPr>
+        <p:txBody>
+          <a:bodyPr wrap="square" lIns="0" tIns="0" rIns="0" bIns="0" rtlCol="0" anchor="ctr"/>
+          <a:lstStyle/>
+          <a:p>
+            <a:pPr indent="0" marL="0">
+              <a:buNone/>
+            </a:pPr>
+            <a:r>
+              <a:rPr lang="en-US" sz="1100" dirty="0">
+                <a:solidFill>
+                  <a:srgbClr val="9FB2C2"/>
+                </a:solidFill>
+                <a:latin typeface="Inter" pitchFamily="34" charset="0"/>
+                <a:ea typeface="Inter" pitchFamily="34" charset="-122"/>
+                <a:cs typeface="Inter" pitchFamily="34" charset="-120"/>
+              </a:rPr>
+              <a:t>AI chat tool (any of them) · Ms. Rivera, our running example teacher (a composite, not a real person)</a:t>
+            </a:r>
+            <a:endParaRPr lang="en-US" sz="1100" dirty="0"/>
+          </a:p>
+        </p:txBody>
+      </p:sp>
+      <p:sp>
+        <p:nvSpPr>
+          <p:cNvPr id="14" name="Shape 11"/>
+          <p:cNvSpPr/>
+          <p:nvPr/>
+        </p:nvSpPr>
+        <p:spPr>
+          <a:xfrm>
+            <a:off x="1554480" y="2377440"/>
+            <a:ext cx="9646920" cy="2697480"/>
+          </a:xfrm>
+          <a:prstGeom prst="roundRect">
+            <a:avLst>
+              <a:gd name="adj" fmla="val 4068"/>
+            </a:avLst>
+          </a:prstGeom>
+          <a:solidFill>
+            <a:srgbClr val="F7F5F0"/>
+          </a:solidFill>
+          <a:ln w="12700">
+            <a:solidFill>
+              <a:srgbClr val="F7F5F0"/>
+            </a:solidFill>
+            <a:prstDash val="solid"/>
+          </a:ln>
+        </p:spPr>
+      </p:sp>
+      <p:sp>
+        <p:nvSpPr>
+          <p:cNvPr id="15" name="Text 12"/>
+          <p:cNvSpPr/>
+          <p:nvPr/>
+        </p:nvSpPr>
+        <p:spPr>
+          <a:xfrm>
+            <a:off x="1783080" y="2514600"/>
+            <a:ext cx="9189720" cy="2468880"/>
+          </a:xfrm>
+          <a:prstGeom prst="rect">
+            <a:avLst/>
+          </a:prstGeom>
+          <a:noFill/>
+          <a:ln/>
+        </p:spPr>
+        <p:txBody>
+          <a:bodyPr wrap="square" lIns="0" tIns="0" rIns="0" bIns="0" rtlCol="0" anchor="t"/>
+          <a:lstStyle/>
+          <a:p>
+            <a:pPr indent="0" marL="0">
+              <a:lnSpc>
+                <a:spcPct val="110000"/>
+              </a:lnSpc>
+              <a:buNone/>
+            </a:pPr>
+            <a:r>
+              <a:rPr lang="en-US" sz="1600" b="1" dirty="0">
+                <a:solidFill>
+                  <a:srgbClr val="2A9D8F"/>
+                </a:solidFill>
+                <a:latin typeface="Inter" pitchFamily="34" charset="0"/>
+                <a:ea typeface="Inter" pitchFamily="34" charset="-122"/>
+                <a:cs typeface="Inter" pitchFamily="34" charset="-120"/>
+              </a:rPr>
+              <a:t>“You are a reading specialist. </a:t>
+            </a:r>
+            <a:pPr indent="0" marL="0">
+              <a:lnSpc>
+                <a:spcPct val="110000"/>
+              </a:lnSpc>
+              <a:buNone/>
+            </a:pPr>
+            <a:r>
+              <a:rPr lang="en-US" sz="1600" b="1" dirty="0">
+                <a:solidFill>
+                  <a:srgbClr val="13293D"/>
+                </a:solidFill>
+                <a:latin typeface="Inter" pitchFamily="34" charset="0"/>
+                <a:ea typeface="Inter" pitchFamily="34" charset="-122"/>
+                <a:cs typeface="Inter" pitchFamily="34" charset="-120"/>
+              </a:rPr>
+              <a:t>Rewrite the passage below at three levels: on-grade for 6th grade, about two years below, and about two years above. </a:t>
+            </a:r>
+            <a:pPr indent="0" marL="0">
+              <a:lnSpc>
+                <a:spcPct val="110000"/>
+              </a:lnSpc>
+              <a:buNone/>
+            </a:pPr>
+            <a:r>
+              <a:rPr lang="en-US" sz="1600" b="1" dirty="0">
+                <a:solidFill>
+                  <a:srgbClr val="B07914"/>
+                </a:solidFill>
+                <a:latin typeface="Inter" pitchFamily="34" charset="0"/>
+                <a:ea typeface="Inter" pitchFamily="34" charset="-122"/>
+                <a:cs typeface="Inter" pitchFamily="34" charset="-120"/>
+              </a:rPr>
+              <a:t>Keep every key idea, the section headings, and the same core vocabulary. </a:t>
+            </a:r>
+            <a:pPr indent="0" marL="0">
+              <a:lnSpc>
+                <a:spcPct val="110000"/>
+              </a:lnSpc>
+              <a:buNone/>
+            </a:pPr>
+            <a:r>
+              <a:rPr lang="en-US" sz="1600" b="1" dirty="0">
                 <a:solidFill>
                   <a:srgbClr val="2E7D5B"/>
                 </a:solidFill>
@@ -4788,7 +4958,73 @@
                 <a:ea typeface="Inter" pitchFamily="34" charset="-122"/>
                 <a:cs typeface="Inter" pitchFamily="34" charset="-120"/>
               </a:rPr>
-              <a:t>AFTER</a:t>
+              <a:t>Lower level: sentences under 12 words plus a 5-word vocabulary box. Higher level: raise the complexity of the reasoning, not just the vocabulary. Label each version.”  [paste passage]</a:t>
+            </a:r>
+            <a:endParaRPr lang="en-US" sz="1600" dirty="0"/>
+          </a:p>
+        </p:txBody>
+      </p:sp>
+      <p:sp>
+        <p:nvSpPr>
+          <p:cNvPr id="16" name="Shape 13"/>
+          <p:cNvSpPr/>
+          <p:nvPr/>
+        </p:nvSpPr>
+        <p:spPr>
+          <a:xfrm>
+            <a:off x="640080" y="5532120"/>
+            <a:ext cx="2606040" cy="457200"/>
+          </a:xfrm>
+          <a:prstGeom prst="roundRect">
+            <a:avLst>
+              <a:gd name="adj" fmla="val 50000"/>
+            </a:avLst>
+          </a:prstGeom>
+          <a:solidFill>
+            <a:srgbClr val="2A9D8F"/>
+          </a:solidFill>
+          <a:ln w="12700">
+            <a:solidFill>
+              <a:srgbClr val="2A9D8F"/>
+            </a:solidFill>
+            <a:prstDash val="solid"/>
+          </a:ln>
+        </p:spPr>
+      </p:sp>
+      <p:sp>
+        <p:nvSpPr>
+          <p:cNvPr id="17" name="Text 14"/>
+          <p:cNvSpPr/>
+          <p:nvPr/>
+        </p:nvSpPr>
+        <p:spPr>
+          <a:xfrm>
+            <a:off x="640080" y="5532120"/>
+            <a:ext cx="2606040" cy="457200"/>
+          </a:xfrm>
+          <a:prstGeom prst="rect">
+            <a:avLst/>
+          </a:prstGeom>
+          <a:noFill/>
+          <a:ln/>
+        </p:spPr>
+        <p:txBody>
+          <a:bodyPr wrap="square" lIns="0" tIns="0" rIns="0" bIns="0" rtlCol="0" anchor="ctr"/>
+          <a:lstStyle/>
+          <a:p>
+            <a:pPr algn="ctr" indent="0" marL="0">
+              <a:buNone/>
+            </a:pPr>
+            <a:r>
+              <a:rPr lang="en-US" sz="1400" b="1" spc="200" kern="0" dirty="0">
+                <a:solidFill>
+                  <a:srgbClr val="FFFFFF"/>
+                </a:solidFill>
+                <a:latin typeface="Inter" pitchFamily="34" charset="0"/>
+                <a:ea typeface="Inter" pitchFamily="34" charset="-122"/>
+                <a:cs typeface="Inter" pitchFamily="34" charset="-120"/>
+              </a:rPr>
+              <a:t>ROLE</a:t>
             </a:r>
             <a:endParaRPr lang="en-US" sz="1400" dirty="0"/>
           </a:p>
@@ -4796,40 +5032,199 @@
       </p:sp>
       <p:sp>
         <p:nvSpPr>
-          <p:cNvPr id="12" name="Text 9"/>
-          <p:cNvSpPr/>
-          <p:nvPr/>
-        </p:nvSpPr>
-        <p:spPr>
-          <a:xfrm>
-            <a:off x="914400" y="3474720"/>
-            <a:ext cx="10424160" cy="2103120"/>
-          </a:xfrm>
-          <a:prstGeom prst="rect">
-            <a:avLst/>
-          </a:prstGeom>
-          <a:noFill/>
-          <a:ln/>
-        </p:spPr>
-        <p:txBody>
-          <a:bodyPr wrap="square" lIns="0" tIns="0" rIns="0" bIns="0" rtlCol="0" anchor="t"/>
-          <a:lstStyle/>
-          <a:p>
-            <a:pPr indent="0" marL="0">
-              <a:buNone/>
-            </a:pPr>
-            <a:r>
-              <a:rPr lang="en-US" sz="1550" i="1" dirty="0">
-                <a:solidFill>
-                  <a:srgbClr val="1B1F24"/>
-                </a:solidFill>
-                <a:latin typeface="Inter" pitchFamily="34" charset="0"/>
-                <a:ea typeface="Inter" pitchFamily="34" charset="-122"/>
-                <a:cs typeface="Inter" pitchFamily="34" charset="-120"/>
-              </a:rPr>
-              <a:t>“You are a reading specialist. Rewrite the passage below at three levels: on-grade for 6th grade, about two years below, and about two years above. Keep every key idea, the section headings, and the same core vocabulary. Lower level: sentences under 12 words plus a 5-word vocabulary box. Higher level: raise the complexity of the reasoning, not just the vocabulary. Label each version.”  [paste passage]</a:t>
-            </a:r>
-            <a:endParaRPr lang="en-US" sz="1550" dirty="0"/>
+          <p:cNvPr id="18" name="Shape 15"/>
+          <p:cNvSpPr/>
+          <p:nvPr/>
+        </p:nvSpPr>
+        <p:spPr>
+          <a:xfrm>
+            <a:off x="3456432" y="5532120"/>
+            <a:ext cx="2606040" cy="457200"/>
+          </a:xfrm>
+          <a:prstGeom prst="roundRect">
+            <a:avLst>
+              <a:gd name="adj" fmla="val 50000"/>
+            </a:avLst>
+          </a:prstGeom>
+          <a:solidFill>
+            <a:srgbClr val="13293D"/>
+          </a:solidFill>
+          <a:ln w="12700">
+            <a:solidFill>
+              <a:srgbClr val="13293D"/>
+            </a:solidFill>
+            <a:prstDash val="solid"/>
+          </a:ln>
+        </p:spPr>
+      </p:sp>
+      <p:sp>
+        <p:nvSpPr>
+          <p:cNvPr id="19" name="Text 16"/>
+          <p:cNvSpPr/>
+          <p:nvPr/>
+        </p:nvSpPr>
+        <p:spPr>
+          <a:xfrm>
+            <a:off x="3456432" y="5532120"/>
+            <a:ext cx="2606040" cy="457200"/>
+          </a:xfrm>
+          <a:prstGeom prst="rect">
+            <a:avLst/>
+          </a:prstGeom>
+          <a:noFill/>
+          <a:ln/>
+        </p:spPr>
+        <p:txBody>
+          <a:bodyPr wrap="square" lIns="0" tIns="0" rIns="0" bIns="0" rtlCol="0" anchor="ctr"/>
+          <a:lstStyle/>
+          <a:p>
+            <a:pPr algn="ctr" indent="0" marL="0">
+              <a:buNone/>
+            </a:pPr>
+            <a:r>
+              <a:rPr lang="en-US" sz="1400" b="1" spc="200" kern="0" dirty="0">
+                <a:solidFill>
+                  <a:srgbClr val="FFFFFF"/>
+                </a:solidFill>
+                <a:latin typeface="Inter" pitchFamily="34" charset="0"/>
+                <a:ea typeface="Inter" pitchFamily="34" charset="-122"/>
+                <a:cs typeface="Inter" pitchFamily="34" charset="-120"/>
+              </a:rPr>
+              <a:t>TASK</a:t>
+            </a:r>
+            <a:endParaRPr lang="en-US" sz="1400" dirty="0"/>
+          </a:p>
+        </p:txBody>
+      </p:sp>
+      <p:sp>
+        <p:nvSpPr>
+          <p:cNvPr id="20" name="Shape 17"/>
+          <p:cNvSpPr/>
+          <p:nvPr/>
+        </p:nvSpPr>
+        <p:spPr>
+          <a:xfrm>
+            <a:off x="6272784" y="5532120"/>
+            <a:ext cx="2606040" cy="457200"/>
+          </a:xfrm>
+          <a:prstGeom prst="roundRect">
+            <a:avLst>
+              <a:gd name="adj" fmla="val 50000"/>
+            </a:avLst>
+          </a:prstGeom>
+          <a:solidFill>
+            <a:srgbClr val="B07914"/>
+          </a:solidFill>
+          <a:ln w="12700">
+            <a:solidFill>
+              <a:srgbClr val="B07914"/>
+            </a:solidFill>
+            <a:prstDash val="solid"/>
+          </a:ln>
+        </p:spPr>
+      </p:sp>
+      <p:sp>
+        <p:nvSpPr>
+          <p:cNvPr id="21" name="Text 18"/>
+          <p:cNvSpPr/>
+          <p:nvPr/>
+        </p:nvSpPr>
+        <p:spPr>
+          <a:xfrm>
+            <a:off x="6272784" y="5532120"/>
+            <a:ext cx="2606040" cy="457200"/>
+          </a:xfrm>
+          <a:prstGeom prst="rect">
+            <a:avLst/>
+          </a:prstGeom>
+          <a:noFill/>
+          <a:ln/>
+        </p:spPr>
+        <p:txBody>
+          <a:bodyPr wrap="square" lIns="0" tIns="0" rIns="0" bIns="0" rtlCol="0" anchor="ctr"/>
+          <a:lstStyle/>
+          <a:p>
+            <a:pPr algn="ctr" indent="0" marL="0">
+              <a:buNone/>
+            </a:pPr>
+            <a:r>
+              <a:rPr lang="en-US" sz="1400" b="1" spc="200" kern="0" dirty="0">
+                <a:solidFill>
+                  <a:srgbClr val="FFFFFF"/>
+                </a:solidFill>
+                <a:latin typeface="Inter" pitchFamily="34" charset="0"/>
+                <a:ea typeface="Inter" pitchFamily="34" charset="-122"/>
+                <a:cs typeface="Inter" pitchFamily="34" charset="-120"/>
+              </a:rPr>
+              <a:t>CONTEXT</a:t>
+            </a:r>
+            <a:endParaRPr lang="en-US" sz="1400" dirty="0"/>
+          </a:p>
+        </p:txBody>
+      </p:sp>
+      <p:sp>
+        <p:nvSpPr>
+          <p:cNvPr id="22" name="Shape 19"/>
+          <p:cNvSpPr/>
+          <p:nvPr/>
+        </p:nvSpPr>
+        <p:spPr>
+          <a:xfrm>
+            <a:off x="9089136" y="5532120"/>
+            <a:ext cx="2606040" cy="457200"/>
+          </a:xfrm>
+          <a:prstGeom prst="roundRect">
+            <a:avLst>
+              <a:gd name="adj" fmla="val 50000"/>
+            </a:avLst>
+          </a:prstGeom>
+          <a:solidFill>
+            <a:srgbClr val="2E7D5B"/>
+          </a:solidFill>
+          <a:ln w="12700">
+            <a:solidFill>
+              <a:srgbClr val="2E7D5B"/>
+            </a:solidFill>
+            <a:prstDash val="solid"/>
+          </a:ln>
+        </p:spPr>
+      </p:sp>
+      <p:sp>
+        <p:nvSpPr>
+          <p:cNvPr id="23" name="Text 20"/>
+          <p:cNvSpPr/>
+          <p:nvPr/>
+        </p:nvSpPr>
+        <p:spPr>
+          <a:xfrm>
+            <a:off x="9089136" y="5532120"/>
+            <a:ext cx="2606040" cy="457200"/>
+          </a:xfrm>
+          <a:prstGeom prst="rect">
+            <a:avLst/>
+          </a:prstGeom>
+          <a:noFill/>
+          <a:ln/>
+        </p:spPr>
+        <p:txBody>
+          <a:bodyPr wrap="square" lIns="0" tIns="0" rIns="0" bIns="0" rtlCol="0" anchor="ctr"/>
+          <a:lstStyle/>
+          <a:p>
+            <a:pPr algn="ctr" indent="0" marL="0">
+              <a:buNone/>
+            </a:pPr>
+            <a:r>
+              <a:rPr lang="en-US" sz="1400" b="1" spc="200" kern="0" dirty="0">
+                <a:solidFill>
+                  <a:srgbClr val="FFFFFF"/>
+                </a:solidFill>
+                <a:latin typeface="Inter" pitchFamily="34" charset="0"/>
+                <a:ea typeface="Inter" pitchFamily="34" charset="-122"/>
+                <a:cs typeface="Inter" pitchFamily="34" charset="-120"/>
+              </a:rPr>
+              <a:t>FORMAT</a:t>
+            </a:r>
+            <a:endParaRPr lang="en-US" sz="1400" dirty="0"/>
           </a:p>
         </p:txBody>
       </p:sp>

--- a/kits/kit03/Kit03_PresentationDeck.pptx
+++ b/kits/kit03/Kit03_PresentationDeck.pptx
@@ -3862,7 +3862,214 @@
       </p:sp>
       <p:sp>
         <p:nvSpPr>
-          <p:cNvPr id="5" name="Text 2"/>
+          <p:cNvPr id="5" name="Shape 2"/>
+          <p:cNvSpPr/>
+          <p:nvPr/>
+        </p:nvSpPr>
+        <p:spPr>
+          <a:xfrm>
+            <a:off x="8732520" y="109728"/>
+            <a:ext cx="2926080" cy="896112"/>
+          </a:xfrm>
+          <a:prstGeom prst="roundRect">
+            <a:avLst>
+              <a:gd name="adj" fmla="val 7143"/>
+            </a:avLst>
+          </a:prstGeom>
+          <a:solidFill>
+            <a:srgbClr val="F7F5F0"/>
+          </a:solidFill>
+          <a:ln w="12700">
+            <a:solidFill>
+              <a:srgbClr val="DCE3EA"/>
+            </a:solidFill>
+            <a:prstDash val="solid"/>
+          </a:ln>
+        </p:spPr>
+      </p:sp>
+      <p:sp>
+        <p:nvSpPr>
+          <p:cNvPr id="6" name="Shape 3"/>
+          <p:cNvSpPr/>
+          <p:nvPr/>
+        </p:nvSpPr>
+        <p:spPr>
+          <a:xfrm>
+            <a:off x="8732520" y="109728"/>
+            <a:ext cx="2926080" cy="237744"/>
+          </a:xfrm>
+          <a:prstGeom prst="roundRect">
+            <a:avLst>
+              <a:gd name="adj" fmla="val 26923"/>
+            </a:avLst>
+          </a:prstGeom>
+          <a:solidFill>
+            <a:srgbClr val="0D1E2E"/>
+          </a:solidFill>
+          <a:ln w="12700">
+            <a:solidFill>
+              <a:srgbClr val="0D1E2E"/>
+            </a:solidFill>
+            <a:prstDash val="solid"/>
+          </a:ln>
+        </p:spPr>
+      </p:sp>
+      <p:sp>
+        <p:nvSpPr>
+          <p:cNvPr id="7" name="Shape 4"/>
+          <p:cNvSpPr/>
+          <p:nvPr/>
+        </p:nvSpPr>
+        <p:spPr>
+          <a:xfrm>
+            <a:off x="8823960" y="182880"/>
+            <a:ext cx="91440" cy="91440"/>
+          </a:xfrm>
+          <a:prstGeom prst="ellipse">
+            <a:avLst/>
+          </a:prstGeom>
+          <a:solidFill>
+            <a:srgbClr val="E8837A"/>
+          </a:solidFill>
+          <a:ln w="12700">
+            <a:solidFill>
+              <a:srgbClr val="E8837A"/>
+            </a:solidFill>
+            <a:prstDash val="solid"/>
+          </a:ln>
+        </p:spPr>
+      </p:sp>
+      <p:sp>
+        <p:nvSpPr>
+          <p:cNvPr id="8" name="Shape 5"/>
+          <p:cNvSpPr/>
+          <p:nvPr/>
+        </p:nvSpPr>
+        <p:spPr>
+          <a:xfrm>
+            <a:off x="8970264" y="182880"/>
+            <a:ext cx="91440" cy="91440"/>
+          </a:xfrm>
+          <a:prstGeom prst="ellipse">
+            <a:avLst/>
+          </a:prstGeom>
+          <a:solidFill>
+            <a:srgbClr val="F4A825"/>
+          </a:solidFill>
+          <a:ln w="12700">
+            <a:solidFill>
+              <a:srgbClr val="F4A825"/>
+            </a:solidFill>
+            <a:prstDash val="solid"/>
+          </a:ln>
+        </p:spPr>
+      </p:sp>
+      <p:sp>
+        <p:nvSpPr>
+          <p:cNvPr id="9" name="Shape 6"/>
+          <p:cNvSpPr/>
+          <p:nvPr/>
+        </p:nvSpPr>
+        <p:spPr>
+          <a:xfrm>
+            <a:off x="9116568" y="182880"/>
+            <a:ext cx="91440" cy="91440"/>
+          </a:xfrm>
+          <a:prstGeom prst="ellipse">
+            <a:avLst/>
+          </a:prstGeom>
+          <a:solidFill>
+            <a:srgbClr val="2E7D5B"/>
+          </a:solidFill>
+          <a:ln w="12700">
+            <a:solidFill>
+              <a:srgbClr val="2E7D5B"/>
+            </a:solidFill>
+            <a:prstDash val="solid"/>
+          </a:ln>
+        </p:spPr>
+      </p:sp>
+      <p:sp>
+        <p:nvSpPr>
+          <p:cNvPr id="10" name="Text 7"/>
+          <p:cNvSpPr/>
+          <p:nvPr/>
+        </p:nvSpPr>
+        <p:spPr>
+          <a:xfrm>
+            <a:off x="9299448" y="109728"/>
+            <a:ext cx="2286000" cy="237744"/>
+          </a:xfrm>
+          <a:prstGeom prst="rect">
+            <a:avLst/>
+          </a:prstGeom>
+          <a:noFill/>
+          <a:ln/>
+        </p:spPr>
+        <p:txBody>
+          <a:bodyPr wrap="square" lIns="0" tIns="0" rIns="0" bIns="0" rtlCol="0" anchor="ctr"/>
+          <a:lstStyle/>
+          <a:p>
+            <a:pPr indent="0" marL="0">
+              <a:buNone/>
+            </a:pPr>
+            <a:r>
+              <a:rPr lang="en-US" sz="800" b="1" spc="100" kern="0" dirty="0">
+                <a:solidFill>
+                  <a:srgbClr val="9FB2C2"/>
+                </a:solidFill>
+                <a:latin typeface="Inter" pitchFamily="34" charset="0"/>
+                <a:ea typeface="Inter" pitchFamily="34" charset="-122"/>
+                <a:cs typeface="Inter" pitchFamily="34" charset="-120"/>
+              </a:rPr>
+              <a:t>MS. RIVERA'S SCREEN · SO FAR</a:t>
+            </a:r>
+            <a:endParaRPr lang="en-US" sz="800" dirty="0"/>
+          </a:p>
+        </p:txBody>
+      </p:sp>
+      <p:sp>
+        <p:nvSpPr>
+          <p:cNvPr id="11" name="Text 8"/>
+          <p:cNvSpPr/>
+          <p:nvPr/>
+        </p:nvSpPr>
+        <p:spPr>
+          <a:xfrm>
+            <a:off x="8860536" y="365760"/>
+            <a:ext cx="2670048" cy="566928"/>
+          </a:xfrm>
+          <a:prstGeom prst="rect">
+            <a:avLst/>
+          </a:prstGeom>
+          <a:noFill/>
+          <a:ln/>
+        </p:spPr>
+        <p:txBody>
+          <a:bodyPr wrap="square" lIns="0" tIns="0" rIns="0" bIns="0" rtlCol="0" anchor="ctr"/>
+          <a:lstStyle/>
+          <a:p>
+            <a:pPr indent="0" marL="0">
+              <a:buNone/>
+            </a:pPr>
+            <a:r>
+              <a:rPr lang="en-US" sz="1000" dirty="0">
+                <a:solidFill>
+                  <a:srgbClr val="1B1F24"/>
+                </a:solidFill>
+                <a:latin typeface="Inter" pitchFamily="34" charset="0"/>
+                <a:ea typeface="Inter" pitchFamily="34" charset="-122"/>
+                <a:cs typeface="Inter" pitchFamily="34" charset="-120"/>
+              </a:rPr>
+              <a:t>Her four moves: level it, scaffold it, stretch it, reformat it.</a:t>
+            </a:r>
+            <a:endParaRPr lang="en-US" sz="1000" dirty="0"/>
+          </a:p>
+        </p:txBody>
+      </p:sp>
+      <p:sp>
+        <p:nvSpPr>
+          <p:cNvPr id="12" name="Text 9"/>
           <p:cNvSpPr/>
           <p:nvPr/>
         </p:nvSpPr>
@@ -3901,7 +4108,7 @@
       </p:sp>
       <p:sp>
         <p:nvSpPr>
-          <p:cNvPr id="6" name="Text 3"/>
+          <p:cNvPr id="13" name="Text 10"/>
           <p:cNvSpPr/>
           <p:nvPr/>
         </p:nvSpPr>
@@ -3940,7 +4147,7 @@
       </p:sp>
       <p:sp>
         <p:nvSpPr>
-          <p:cNvPr id="7" name="Shape 4"/>
+          <p:cNvPr id="14" name="Shape 11"/>
           <p:cNvSpPr/>
           <p:nvPr/>
         </p:nvSpPr>
@@ -3967,7 +4174,7 @@
       </p:sp>
       <p:sp>
         <p:nvSpPr>
-          <p:cNvPr id="8" name="Text 5"/>
+          <p:cNvPr id="15" name="Text 12"/>
           <p:cNvSpPr/>
           <p:nvPr/>
         </p:nvSpPr>
@@ -4006,7 +4213,7 @@
       </p:sp>
       <p:sp>
         <p:nvSpPr>
-          <p:cNvPr id="9" name="Text 6"/>
+          <p:cNvPr id="16" name="Text 13"/>
           <p:cNvSpPr/>
           <p:nvPr/>
         </p:nvSpPr>
@@ -4045,7 +4252,7 @@
       </p:sp>
       <p:sp>
         <p:nvSpPr>
-          <p:cNvPr id="10" name="Shape 7"/>
+          <p:cNvPr id="17" name="Shape 14"/>
           <p:cNvSpPr/>
           <p:nvPr/>
         </p:nvSpPr>
@@ -4072,7 +4279,7 @@
       </p:sp>
       <p:sp>
         <p:nvSpPr>
-          <p:cNvPr id="11" name="Text 8"/>
+          <p:cNvPr id="18" name="Text 15"/>
           <p:cNvSpPr/>
           <p:nvPr/>
         </p:nvSpPr>
@@ -4111,7 +4318,7 @@
       </p:sp>
       <p:sp>
         <p:nvSpPr>
-          <p:cNvPr id="12" name="Text 9"/>
+          <p:cNvPr id="19" name="Text 16"/>
           <p:cNvSpPr/>
           <p:nvPr/>
         </p:nvSpPr>
@@ -4150,7 +4357,7 @@
       </p:sp>
       <p:sp>
         <p:nvSpPr>
-          <p:cNvPr id="13" name="Shape 10"/>
+          <p:cNvPr id="20" name="Shape 17"/>
           <p:cNvSpPr/>
           <p:nvPr/>
         </p:nvSpPr>
@@ -4177,7 +4384,7 @@
       </p:sp>
       <p:sp>
         <p:nvSpPr>
-          <p:cNvPr id="14" name="Text 11"/>
+          <p:cNvPr id="21" name="Text 18"/>
           <p:cNvSpPr/>
           <p:nvPr/>
         </p:nvSpPr>
@@ -4216,7 +4423,7 @@
       </p:sp>
       <p:sp>
         <p:nvSpPr>
-          <p:cNvPr id="15" name="Text 12"/>
+          <p:cNvPr id="22" name="Text 19"/>
           <p:cNvSpPr/>
           <p:nvPr/>
         </p:nvSpPr>
@@ -4255,7 +4462,7 @@
       </p:sp>
       <p:sp>
         <p:nvSpPr>
-          <p:cNvPr id="16" name="Shape 13"/>
+          <p:cNvPr id="23" name="Shape 20"/>
           <p:cNvSpPr/>
           <p:nvPr/>
         </p:nvSpPr>
@@ -4282,7 +4489,7 @@
       </p:sp>
       <p:sp>
         <p:nvSpPr>
-          <p:cNvPr id="17" name="Text 14"/>
+          <p:cNvPr id="24" name="Text 21"/>
           <p:cNvSpPr/>
           <p:nvPr/>
         </p:nvSpPr>
@@ -4321,7 +4528,7 @@
       </p:sp>
       <p:sp>
         <p:nvSpPr>
-          <p:cNvPr id="18" name="Text 15"/>
+          <p:cNvPr id="25" name="Text 22"/>
           <p:cNvSpPr/>
           <p:nvPr/>
         </p:nvSpPr>
@@ -4360,7 +4567,7 @@
       </p:sp>
       <p:sp>
         <p:nvSpPr>
-          <p:cNvPr id="19" name="Text 16"/>
+          <p:cNvPr id="26" name="Text 23"/>
           <p:cNvSpPr/>
           <p:nvPr/>
         </p:nvSpPr>
@@ -5378,7 +5585,214 @@
       </p:sp>
       <p:sp>
         <p:nvSpPr>
-          <p:cNvPr id="5" name="Text 2"/>
+          <p:cNvPr id="5" name="Shape 2"/>
+          <p:cNvSpPr/>
+          <p:nvPr/>
+        </p:nvSpPr>
+        <p:spPr>
+          <a:xfrm>
+            <a:off x="8732520" y="109728"/>
+            <a:ext cx="2926080" cy="896112"/>
+          </a:xfrm>
+          <a:prstGeom prst="roundRect">
+            <a:avLst>
+              <a:gd name="adj" fmla="val 7143"/>
+            </a:avLst>
+          </a:prstGeom>
+          <a:solidFill>
+            <a:srgbClr val="F7F5F0"/>
+          </a:solidFill>
+          <a:ln w="12700">
+            <a:solidFill>
+              <a:srgbClr val="DCE3EA"/>
+            </a:solidFill>
+            <a:prstDash val="solid"/>
+          </a:ln>
+        </p:spPr>
+      </p:sp>
+      <p:sp>
+        <p:nvSpPr>
+          <p:cNvPr id="6" name="Shape 3"/>
+          <p:cNvSpPr/>
+          <p:nvPr/>
+        </p:nvSpPr>
+        <p:spPr>
+          <a:xfrm>
+            <a:off x="8732520" y="109728"/>
+            <a:ext cx="2926080" cy="237744"/>
+          </a:xfrm>
+          <a:prstGeom prst="roundRect">
+            <a:avLst>
+              <a:gd name="adj" fmla="val 26923"/>
+            </a:avLst>
+          </a:prstGeom>
+          <a:solidFill>
+            <a:srgbClr val="0D1E2E"/>
+          </a:solidFill>
+          <a:ln w="12700">
+            <a:solidFill>
+              <a:srgbClr val="0D1E2E"/>
+            </a:solidFill>
+            <a:prstDash val="solid"/>
+          </a:ln>
+        </p:spPr>
+      </p:sp>
+      <p:sp>
+        <p:nvSpPr>
+          <p:cNvPr id="7" name="Shape 4"/>
+          <p:cNvSpPr/>
+          <p:nvPr/>
+        </p:nvSpPr>
+        <p:spPr>
+          <a:xfrm>
+            <a:off x="8823960" y="182880"/>
+            <a:ext cx="91440" cy="91440"/>
+          </a:xfrm>
+          <a:prstGeom prst="ellipse">
+            <a:avLst/>
+          </a:prstGeom>
+          <a:solidFill>
+            <a:srgbClr val="E8837A"/>
+          </a:solidFill>
+          <a:ln w="12700">
+            <a:solidFill>
+              <a:srgbClr val="E8837A"/>
+            </a:solidFill>
+            <a:prstDash val="solid"/>
+          </a:ln>
+        </p:spPr>
+      </p:sp>
+      <p:sp>
+        <p:nvSpPr>
+          <p:cNvPr id="8" name="Shape 5"/>
+          <p:cNvSpPr/>
+          <p:nvPr/>
+        </p:nvSpPr>
+        <p:spPr>
+          <a:xfrm>
+            <a:off x="8970264" y="182880"/>
+            <a:ext cx="91440" cy="91440"/>
+          </a:xfrm>
+          <a:prstGeom prst="ellipse">
+            <a:avLst/>
+          </a:prstGeom>
+          <a:solidFill>
+            <a:srgbClr val="F4A825"/>
+          </a:solidFill>
+          <a:ln w="12700">
+            <a:solidFill>
+              <a:srgbClr val="F4A825"/>
+            </a:solidFill>
+            <a:prstDash val="solid"/>
+          </a:ln>
+        </p:spPr>
+      </p:sp>
+      <p:sp>
+        <p:nvSpPr>
+          <p:cNvPr id="9" name="Shape 6"/>
+          <p:cNvSpPr/>
+          <p:nvPr/>
+        </p:nvSpPr>
+        <p:spPr>
+          <a:xfrm>
+            <a:off x="9116568" y="182880"/>
+            <a:ext cx="91440" cy="91440"/>
+          </a:xfrm>
+          <a:prstGeom prst="ellipse">
+            <a:avLst/>
+          </a:prstGeom>
+          <a:solidFill>
+            <a:srgbClr val="2E7D5B"/>
+          </a:solidFill>
+          <a:ln w="12700">
+            <a:solidFill>
+              <a:srgbClr val="2E7D5B"/>
+            </a:solidFill>
+            <a:prstDash val="solid"/>
+          </a:ln>
+        </p:spPr>
+      </p:sp>
+      <p:sp>
+        <p:nvSpPr>
+          <p:cNvPr id="10" name="Text 7"/>
+          <p:cNvSpPr/>
+          <p:nvPr/>
+        </p:nvSpPr>
+        <p:spPr>
+          <a:xfrm>
+            <a:off x="9299448" y="109728"/>
+            <a:ext cx="2286000" cy="237744"/>
+          </a:xfrm>
+          <a:prstGeom prst="rect">
+            <a:avLst/>
+          </a:prstGeom>
+          <a:noFill/>
+          <a:ln/>
+        </p:spPr>
+        <p:txBody>
+          <a:bodyPr wrap="square" lIns="0" tIns="0" rIns="0" bIns="0" rtlCol="0" anchor="ctr"/>
+          <a:lstStyle/>
+          <a:p>
+            <a:pPr indent="0" marL="0">
+              <a:buNone/>
+            </a:pPr>
+            <a:r>
+              <a:rPr lang="en-US" sz="800" b="1" spc="100" kern="0" dirty="0">
+                <a:solidFill>
+                  <a:srgbClr val="9FB2C2"/>
+                </a:solidFill>
+                <a:latin typeface="Inter" pitchFamily="34" charset="0"/>
+                <a:ea typeface="Inter" pitchFamily="34" charset="-122"/>
+                <a:cs typeface="Inter" pitchFamily="34" charset="-120"/>
+              </a:rPr>
+              <a:t>MS. RIVERA'S SCREEN · SO FAR</a:t>
+            </a:r>
+            <a:endParaRPr lang="en-US" sz="800" dirty="0"/>
+          </a:p>
+        </p:txBody>
+      </p:sp>
+      <p:sp>
+        <p:nvSpPr>
+          <p:cNvPr id="11" name="Text 8"/>
+          <p:cNvSpPr/>
+          <p:nvPr/>
+        </p:nvSpPr>
+        <p:spPr>
+          <a:xfrm>
+            <a:off x="8860536" y="365760"/>
+            <a:ext cx="2670048" cy="566928"/>
+          </a:xfrm>
+          <a:prstGeom prst="rect">
+            <a:avLst/>
+          </a:prstGeom>
+          <a:noFill/>
+          <a:ln/>
+        </p:spPr>
+        <p:txBody>
+          <a:bodyPr wrap="square" lIns="0" tIns="0" rIns="0" bIns="0" rtlCol="0" anchor="ctr"/>
+          <a:lstStyle/>
+          <a:p>
+            <a:pPr indent="0" marL="0">
+              <a:buNone/>
+            </a:pPr>
+            <a:r>
+              <a:rPr lang="en-US" sz="1000" dirty="0">
+                <a:solidFill>
+                  <a:srgbClr val="1B1F24"/>
+                </a:solidFill>
+                <a:latin typeface="Inter" pitchFamily="34" charset="0"/>
+                <a:ea typeface="Inter" pitchFamily="34" charset="-122"/>
+                <a:cs typeface="Inter" pitchFamily="34" charset="-120"/>
+              </a:rPr>
+              <a:t>Her level check: read aloud, eyeball sentence length, try on one student.</a:t>
+            </a:r>
+            <a:endParaRPr lang="en-US" sz="1000" dirty="0"/>
+          </a:p>
+        </p:txBody>
+      </p:sp>
+      <p:sp>
+        <p:nvSpPr>
+          <p:cNvPr id="12" name="Text 9"/>
           <p:cNvSpPr/>
           <p:nvPr/>
         </p:nvSpPr>
@@ -5417,7 +5831,7 @@
       </p:sp>
       <p:sp>
         <p:nvSpPr>
-          <p:cNvPr id="6" name="Text 3"/>
+          <p:cNvPr id="13" name="Text 10"/>
           <p:cNvSpPr/>
           <p:nvPr/>
         </p:nvSpPr>
@@ -5456,7 +5870,7 @@
       </p:sp>
       <p:sp>
         <p:nvSpPr>
-          <p:cNvPr id="7" name="Shape 4"/>
+          <p:cNvPr id="14" name="Shape 11"/>
           <p:cNvSpPr/>
           <p:nvPr/>
         </p:nvSpPr>
@@ -5481,7 +5895,7 @@
       </p:sp>
       <p:sp>
         <p:nvSpPr>
-          <p:cNvPr id="8" name="Text 5"/>
+          <p:cNvPr id="15" name="Text 12"/>
           <p:cNvSpPr/>
           <p:nvPr/>
         </p:nvSpPr>
@@ -5520,7 +5934,7 @@
       </p:sp>
       <p:sp>
         <p:nvSpPr>
-          <p:cNvPr id="9" name="Text 6"/>
+          <p:cNvPr id="16" name="Text 13"/>
           <p:cNvSpPr/>
           <p:nvPr/>
         </p:nvSpPr>
@@ -5559,7 +5973,7 @@
       </p:sp>
       <p:sp>
         <p:nvSpPr>
-          <p:cNvPr id="10" name="Shape 7"/>
+          <p:cNvPr id="17" name="Shape 14"/>
           <p:cNvSpPr/>
           <p:nvPr/>
         </p:nvSpPr>
@@ -5584,7 +5998,7 @@
       </p:sp>
       <p:sp>
         <p:nvSpPr>
-          <p:cNvPr id="11" name="Text 8"/>
+          <p:cNvPr id="18" name="Text 15"/>
           <p:cNvSpPr/>
           <p:nvPr/>
         </p:nvSpPr>
@@ -5623,7 +6037,7 @@
       </p:sp>
       <p:sp>
         <p:nvSpPr>
-          <p:cNvPr id="12" name="Text 9"/>
+          <p:cNvPr id="19" name="Text 16"/>
           <p:cNvSpPr/>
           <p:nvPr/>
         </p:nvSpPr>
@@ -5662,7 +6076,7 @@
       </p:sp>
       <p:sp>
         <p:nvSpPr>
-          <p:cNvPr id="13" name="Shape 10"/>
+          <p:cNvPr id="20" name="Shape 17"/>
           <p:cNvSpPr/>
           <p:nvPr/>
         </p:nvSpPr>
@@ -5687,7 +6101,7 @@
       </p:sp>
       <p:sp>
         <p:nvSpPr>
-          <p:cNvPr id="14" name="Text 11"/>
+          <p:cNvPr id="21" name="Text 18"/>
           <p:cNvSpPr/>
           <p:nvPr/>
         </p:nvSpPr>
@@ -5726,7 +6140,7 @@
       </p:sp>
       <p:sp>
         <p:nvSpPr>
-          <p:cNvPr id="15" name="Text 12"/>
+          <p:cNvPr id="22" name="Text 19"/>
           <p:cNvSpPr/>
           <p:nvPr/>
         </p:nvSpPr>
@@ -5765,7 +6179,7 @@
       </p:sp>
       <p:sp>
         <p:nvSpPr>
-          <p:cNvPr id="16" name="Shape 13"/>
+          <p:cNvPr id="23" name="Shape 20"/>
           <p:cNvSpPr/>
           <p:nvPr/>
         </p:nvSpPr>
@@ -5792,7 +6206,7 @@
       </p:sp>
       <p:sp>
         <p:nvSpPr>
-          <p:cNvPr id="17" name="Text 14"/>
+          <p:cNvPr id="24" name="Text 21"/>
           <p:cNvSpPr/>
           <p:nvPr/>
         </p:nvSpPr>
@@ -5979,7 +6393,214 @@
       </p:sp>
       <p:sp>
         <p:nvSpPr>
-          <p:cNvPr id="5" name="Text 2"/>
+          <p:cNvPr id="5" name="Shape 2"/>
+          <p:cNvSpPr/>
+          <p:nvPr/>
+        </p:nvSpPr>
+        <p:spPr>
+          <a:xfrm>
+            <a:off x="8732520" y="109728"/>
+            <a:ext cx="2926080" cy="896112"/>
+          </a:xfrm>
+          <a:prstGeom prst="roundRect">
+            <a:avLst>
+              <a:gd name="adj" fmla="val 7143"/>
+            </a:avLst>
+          </a:prstGeom>
+          <a:solidFill>
+            <a:srgbClr val="F7F5F0"/>
+          </a:solidFill>
+          <a:ln w="12700">
+            <a:solidFill>
+              <a:srgbClr val="DCE3EA"/>
+            </a:solidFill>
+            <a:prstDash val="solid"/>
+          </a:ln>
+        </p:spPr>
+      </p:sp>
+      <p:sp>
+        <p:nvSpPr>
+          <p:cNvPr id="6" name="Shape 3"/>
+          <p:cNvSpPr/>
+          <p:nvPr/>
+        </p:nvSpPr>
+        <p:spPr>
+          <a:xfrm>
+            <a:off x="8732520" y="109728"/>
+            <a:ext cx="2926080" cy="237744"/>
+          </a:xfrm>
+          <a:prstGeom prst="roundRect">
+            <a:avLst>
+              <a:gd name="adj" fmla="val 26923"/>
+            </a:avLst>
+          </a:prstGeom>
+          <a:solidFill>
+            <a:srgbClr val="0D1E2E"/>
+          </a:solidFill>
+          <a:ln w="12700">
+            <a:solidFill>
+              <a:srgbClr val="0D1E2E"/>
+            </a:solidFill>
+            <a:prstDash val="solid"/>
+          </a:ln>
+        </p:spPr>
+      </p:sp>
+      <p:sp>
+        <p:nvSpPr>
+          <p:cNvPr id="7" name="Shape 4"/>
+          <p:cNvSpPr/>
+          <p:nvPr/>
+        </p:nvSpPr>
+        <p:spPr>
+          <a:xfrm>
+            <a:off x="8823960" y="182880"/>
+            <a:ext cx="91440" cy="91440"/>
+          </a:xfrm>
+          <a:prstGeom prst="ellipse">
+            <a:avLst/>
+          </a:prstGeom>
+          <a:solidFill>
+            <a:srgbClr val="E8837A"/>
+          </a:solidFill>
+          <a:ln w="12700">
+            <a:solidFill>
+              <a:srgbClr val="E8837A"/>
+            </a:solidFill>
+            <a:prstDash val="solid"/>
+          </a:ln>
+        </p:spPr>
+      </p:sp>
+      <p:sp>
+        <p:nvSpPr>
+          <p:cNvPr id="8" name="Shape 5"/>
+          <p:cNvSpPr/>
+          <p:nvPr/>
+        </p:nvSpPr>
+        <p:spPr>
+          <a:xfrm>
+            <a:off x="8970264" y="182880"/>
+            <a:ext cx="91440" cy="91440"/>
+          </a:xfrm>
+          <a:prstGeom prst="ellipse">
+            <a:avLst/>
+          </a:prstGeom>
+          <a:solidFill>
+            <a:srgbClr val="F4A825"/>
+          </a:solidFill>
+          <a:ln w="12700">
+            <a:solidFill>
+              <a:srgbClr val="F4A825"/>
+            </a:solidFill>
+            <a:prstDash val="solid"/>
+          </a:ln>
+        </p:spPr>
+      </p:sp>
+      <p:sp>
+        <p:nvSpPr>
+          <p:cNvPr id="9" name="Shape 6"/>
+          <p:cNvSpPr/>
+          <p:nvPr/>
+        </p:nvSpPr>
+        <p:spPr>
+          <a:xfrm>
+            <a:off x="9116568" y="182880"/>
+            <a:ext cx="91440" cy="91440"/>
+          </a:xfrm>
+          <a:prstGeom prst="ellipse">
+            <a:avLst/>
+          </a:prstGeom>
+          <a:solidFill>
+            <a:srgbClr val="2E7D5B"/>
+          </a:solidFill>
+          <a:ln w="12700">
+            <a:solidFill>
+              <a:srgbClr val="2E7D5B"/>
+            </a:solidFill>
+            <a:prstDash val="solid"/>
+          </a:ln>
+        </p:spPr>
+      </p:sp>
+      <p:sp>
+        <p:nvSpPr>
+          <p:cNvPr id="10" name="Text 7"/>
+          <p:cNvSpPr/>
+          <p:nvPr/>
+        </p:nvSpPr>
+        <p:spPr>
+          <a:xfrm>
+            <a:off x="9299448" y="109728"/>
+            <a:ext cx="2286000" cy="237744"/>
+          </a:xfrm>
+          <a:prstGeom prst="rect">
+            <a:avLst/>
+          </a:prstGeom>
+          <a:noFill/>
+          <a:ln/>
+        </p:spPr>
+        <p:txBody>
+          <a:bodyPr wrap="square" lIns="0" tIns="0" rIns="0" bIns="0" rtlCol="0" anchor="ctr"/>
+          <a:lstStyle/>
+          <a:p>
+            <a:pPr indent="0" marL="0">
+              <a:buNone/>
+            </a:pPr>
+            <a:r>
+              <a:rPr lang="en-US" sz="800" b="1" spc="100" kern="0" dirty="0">
+                <a:solidFill>
+                  <a:srgbClr val="9FB2C2"/>
+                </a:solidFill>
+                <a:latin typeface="Inter" pitchFamily="34" charset="0"/>
+                <a:ea typeface="Inter" pitchFamily="34" charset="-122"/>
+                <a:cs typeface="Inter" pitchFamily="34" charset="-120"/>
+              </a:rPr>
+              <a:t>MS. RIVERA'S SCREEN · SO FAR</a:t>
+            </a:r>
+            <a:endParaRPr lang="en-US" sz="800" dirty="0"/>
+          </a:p>
+        </p:txBody>
+      </p:sp>
+      <p:sp>
+        <p:nvSpPr>
+          <p:cNvPr id="11" name="Text 8"/>
+          <p:cNvSpPr/>
+          <p:nvPr/>
+        </p:nvSpPr>
+        <p:spPr>
+          <a:xfrm>
+            <a:off x="8860536" y="365760"/>
+            <a:ext cx="2670048" cy="566928"/>
+          </a:xfrm>
+          <a:prstGeom prst="rect">
+            <a:avLst/>
+          </a:prstGeom>
+          <a:noFill/>
+          <a:ln/>
+        </p:spPr>
+        <p:txBody>
+          <a:bodyPr wrap="square" lIns="0" tIns="0" rIns="0" bIns="0" rtlCol="0" anchor="ctr"/>
+          <a:lstStyle/>
+          <a:p>
+            <a:pPr indent="0" marL="0">
+              <a:buNone/>
+            </a:pPr>
+            <a:r>
+              <a:rPr lang="en-US" sz="1000" dirty="0">
+                <a:solidFill>
+                  <a:srgbClr val="1B1F24"/>
+                </a:solidFill>
+                <a:latin typeface="Inter" pitchFamily="34" charset="0"/>
+                <a:ea typeface="Inter" pitchFamily="34" charset="-122"/>
+                <a:cs typeface="Inter" pitchFamily="34" charset="-120"/>
+              </a:rPr>
+              <a:t>Her scaffold set: starters, word bank, worked example on a different topic.</a:t>
+            </a:r>
+            <a:endParaRPr lang="en-US" sz="1000" dirty="0"/>
+          </a:p>
+        </p:txBody>
+      </p:sp>
+      <p:sp>
+        <p:nvSpPr>
+          <p:cNvPr id="12" name="Text 9"/>
           <p:cNvSpPr/>
           <p:nvPr/>
         </p:nvSpPr>
@@ -6018,7 +6639,7 @@
       </p:sp>
       <p:sp>
         <p:nvSpPr>
-          <p:cNvPr id="6" name="Text 3"/>
+          <p:cNvPr id="13" name="Text 10"/>
           <p:cNvSpPr/>
           <p:nvPr/>
         </p:nvSpPr>
@@ -6057,7 +6678,7 @@
       </p:sp>
       <p:sp>
         <p:nvSpPr>
-          <p:cNvPr id="7" name="Shape 4"/>
+          <p:cNvPr id="14" name="Shape 11"/>
           <p:cNvSpPr/>
           <p:nvPr/>
         </p:nvSpPr>
@@ -6084,7 +6705,7 @@
       </p:sp>
       <p:sp>
         <p:nvSpPr>
-          <p:cNvPr id="8" name="Text 5"/>
+          <p:cNvPr id="15" name="Text 12"/>
           <p:cNvSpPr/>
           <p:nvPr/>
         </p:nvSpPr>
@@ -6123,7 +6744,7 @@
       </p:sp>
       <p:sp>
         <p:nvSpPr>
-          <p:cNvPr id="9" name="Text 6"/>
+          <p:cNvPr id="16" name="Text 13"/>
           <p:cNvSpPr/>
           <p:nvPr/>
         </p:nvSpPr>
@@ -6162,7 +6783,7 @@
       </p:sp>
       <p:sp>
         <p:nvSpPr>
-          <p:cNvPr id="10" name="Shape 7"/>
+          <p:cNvPr id="17" name="Shape 14"/>
           <p:cNvSpPr/>
           <p:nvPr/>
         </p:nvSpPr>
@@ -6189,7 +6810,7 @@
       </p:sp>
       <p:sp>
         <p:nvSpPr>
-          <p:cNvPr id="11" name="Text 8"/>
+          <p:cNvPr id="18" name="Text 15"/>
           <p:cNvSpPr/>
           <p:nvPr/>
         </p:nvSpPr>
@@ -6228,7 +6849,7 @@
       </p:sp>
       <p:sp>
         <p:nvSpPr>
-          <p:cNvPr id="12" name="Text 9"/>
+          <p:cNvPr id="19" name="Text 16"/>
           <p:cNvSpPr/>
           <p:nvPr/>
         </p:nvSpPr>
@@ -6267,7 +6888,7 @@
       </p:sp>
       <p:sp>
         <p:nvSpPr>
-          <p:cNvPr id="13" name="Shape 10"/>
+          <p:cNvPr id="20" name="Shape 17"/>
           <p:cNvSpPr/>
           <p:nvPr/>
         </p:nvSpPr>
@@ -6294,7 +6915,7 @@
       </p:sp>
       <p:sp>
         <p:nvSpPr>
-          <p:cNvPr id="14" name="Text 11"/>
+          <p:cNvPr id="21" name="Text 18"/>
           <p:cNvSpPr/>
           <p:nvPr/>
         </p:nvSpPr>
@@ -6333,7 +6954,7 @@
       </p:sp>
       <p:sp>
         <p:nvSpPr>
-          <p:cNvPr id="15" name="Text 12"/>
+          <p:cNvPr id="22" name="Text 19"/>
           <p:cNvSpPr/>
           <p:nvPr/>
         </p:nvSpPr>
@@ -6372,7 +6993,7 @@
       </p:sp>
       <p:sp>
         <p:nvSpPr>
-          <p:cNvPr id="16" name="Shape 13"/>
+          <p:cNvPr id="23" name="Shape 20"/>
           <p:cNvSpPr/>
           <p:nvPr/>
         </p:nvSpPr>
@@ -6399,7 +7020,7 @@
       </p:sp>
       <p:sp>
         <p:nvSpPr>
-          <p:cNvPr id="17" name="Text 14"/>
+          <p:cNvPr id="24" name="Text 21"/>
           <p:cNvSpPr/>
           <p:nvPr/>
         </p:nvSpPr>
@@ -6438,7 +7059,7 @@
       </p:sp>
       <p:sp>
         <p:nvSpPr>
-          <p:cNvPr id="18" name="Text 15"/>
+          <p:cNvPr id="25" name="Text 22"/>
           <p:cNvSpPr/>
           <p:nvPr/>
         </p:nvSpPr>
@@ -6625,7 +7246,214 @@
       </p:sp>
       <p:sp>
         <p:nvSpPr>
-          <p:cNvPr id="5" name="Text 2"/>
+          <p:cNvPr id="5" name="Shape 2"/>
+          <p:cNvSpPr/>
+          <p:nvPr/>
+        </p:nvSpPr>
+        <p:spPr>
+          <a:xfrm>
+            <a:off x="8732520" y="109728"/>
+            <a:ext cx="2926080" cy="896112"/>
+          </a:xfrm>
+          <a:prstGeom prst="roundRect">
+            <a:avLst>
+              <a:gd name="adj" fmla="val 7143"/>
+            </a:avLst>
+          </a:prstGeom>
+          <a:solidFill>
+            <a:srgbClr val="F7F5F0"/>
+          </a:solidFill>
+          <a:ln w="12700">
+            <a:solidFill>
+              <a:srgbClr val="DCE3EA"/>
+            </a:solidFill>
+            <a:prstDash val="solid"/>
+          </a:ln>
+        </p:spPr>
+      </p:sp>
+      <p:sp>
+        <p:nvSpPr>
+          <p:cNvPr id="6" name="Shape 3"/>
+          <p:cNvSpPr/>
+          <p:nvPr/>
+        </p:nvSpPr>
+        <p:spPr>
+          <a:xfrm>
+            <a:off x="8732520" y="109728"/>
+            <a:ext cx="2926080" cy="237744"/>
+          </a:xfrm>
+          <a:prstGeom prst="roundRect">
+            <a:avLst>
+              <a:gd name="adj" fmla="val 26923"/>
+            </a:avLst>
+          </a:prstGeom>
+          <a:solidFill>
+            <a:srgbClr val="0D1E2E"/>
+          </a:solidFill>
+          <a:ln w="12700">
+            <a:solidFill>
+              <a:srgbClr val="0D1E2E"/>
+            </a:solidFill>
+            <a:prstDash val="solid"/>
+          </a:ln>
+        </p:spPr>
+      </p:sp>
+      <p:sp>
+        <p:nvSpPr>
+          <p:cNvPr id="7" name="Shape 4"/>
+          <p:cNvSpPr/>
+          <p:nvPr/>
+        </p:nvSpPr>
+        <p:spPr>
+          <a:xfrm>
+            <a:off x="8823960" y="182880"/>
+            <a:ext cx="91440" cy="91440"/>
+          </a:xfrm>
+          <a:prstGeom prst="ellipse">
+            <a:avLst/>
+          </a:prstGeom>
+          <a:solidFill>
+            <a:srgbClr val="E8837A"/>
+          </a:solidFill>
+          <a:ln w="12700">
+            <a:solidFill>
+              <a:srgbClr val="E8837A"/>
+            </a:solidFill>
+            <a:prstDash val="solid"/>
+          </a:ln>
+        </p:spPr>
+      </p:sp>
+      <p:sp>
+        <p:nvSpPr>
+          <p:cNvPr id="8" name="Shape 5"/>
+          <p:cNvSpPr/>
+          <p:nvPr/>
+        </p:nvSpPr>
+        <p:spPr>
+          <a:xfrm>
+            <a:off x="8970264" y="182880"/>
+            <a:ext cx="91440" cy="91440"/>
+          </a:xfrm>
+          <a:prstGeom prst="ellipse">
+            <a:avLst/>
+          </a:prstGeom>
+          <a:solidFill>
+            <a:srgbClr val="F4A825"/>
+          </a:solidFill>
+          <a:ln w="12700">
+            <a:solidFill>
+              <a:srgbClr val="F4A825"/>
+            </a:solidFill>
+            <a:prstDash val="solid"/>
+          </a:ln>
+        </p:spPr>
+      </p:sp>
+      <p:sp>
+        <p:nvSpPr>
+          <p:cNvPr id="9" name="Shape 6"/>
+          <p:cNvSpPr/>
+          <p:nvPr/>
+        </p:nvSpPr>
+        <p:spPr>
+          <a:xfrm>
+            <a:off x="9116568" y="182880"/>
+            <a:ext cx="91440" cy="91440"/>
+          </a:xfrm>
+          <a:prstGeom prst="ellipse">
+            <a:avLst/>
+          </a:prstGeom>
+          <a:solidFill>
+            <a:srgbClr val="2E7D5B"/>
+          </a:solidFill>
+          <a:ln w="12700">
+            <a:solidFill>
+              <a:srgbClr val="2E7D5B"/>
+            </a:solidFill>
+            <a:prstDash val="solid"/>
+          </a:ln>
+        </p:spPr>
+      </p:sp>
+      <p:sp>
+        <p:nvSpPr>
+          <p:cNvPr id="10" name="Text 7"/>
+          <p:cNvSpPr/>
+          <p:nvPr/>
+        </p:nvSpPr>
+        <p:spPr>
+          <a:xfrm>
+            <a:off x="9299448" y="109728"/>
+            <a:ext cx="2286000" cy="237744"/>
+          </a:xfrm>
+          <a:prstGeom prst="rect">
+            <a:avLst/>
+          </a:prstGeom>
+          <a:noFill/>
+          <a:ln/>
+        </p:spPr>
+        <p:txBody>
+          <a:bodyPr wrap="square" lIns="0" tIns="0" rIns="0" bIns="0" rtlCol="0" anchor="ctr"/>
+          <a:lstStyle/>
+          <a:p>
+            <a:pPr indent="0" marL="0">
+              <a:buNone/>
+            </a:pPr>
+            <a:r>
+              <a:rPr lang="en-US" sz="800" b="1" spc="100" kern="0" dirty="0">
+                <a:solidFill>
+                  <a:srgbClr val="9FB2C2"/>
+                </a:solidFill>
+                <a:latin typeface="Inter" pitchFamily="34" charset="0"/>
+                <a:ea typeface="Inter" pitchFamily="34" charset="-122"/>
+                <a:cs typeface="Inter" pitchFamily="34" charset="-120"/>
+              </a:rPr>
+              <a:t>MS. RIVERA'S SCREEN · SO FAR</a:t>
+            </a:r>
+            <a:endParaRPr lang="en-US" sz="800" dirty="0"/>
+          </a:p>
+        </p:txBody>
+      </p:sp>
+      <p:sp>
+        <p:nvSpPr>
+          <p:cNvPr id="11" name="Text 8"/>
+          <p:cNvSpPr/>
+          <p:nvPr/>
+        </p:nvSpPr>
+        <p:spPr>
+          <a:xfrm>
+            <a:off x="8860536" y="365760"/>
+            <a:ext cx="2670048" cy="566928"/>
+          </a:xfrm>
+          <a:prstGeom prst="rect">
+            <a:avLst/>
+          </a:prstGeom>
+          <a:noFill/>
+          <a:ln/>
+        </p:spPr>
+        <p:txBody>
+          <a:bodyPr wrap="square" lIns="0" tIns="0" rIns="0" bIns="0" rtlCol="0" anchor="ctr"/>
+          <a:lstStyle/>
+          <a:p>
+            <a:pPr indent="0" marL="0">
+              <a:buNone/>
+            </a:pPr>
+            <a:r>
+              <a:rPr lang="en-US" sz="1000" dirty="0">
+                <a:solidFill>
+                  <a:srgbClr val="1B1F24"/>
+                </a:solidFill>
+                <a:latin typeface="Inter" pitchFamily="34" charset="0"/>
+                <a:ea typeface="Inter" pitchFamily="34" charset="-122"/>
+                <a:cs typeface="Inter" pitchFamily="34" charset="-120"/>
+              </a:rPr>
+              <a:t>Her stretch rule: depth, not more worksheets. Apply, critique, teach.</a:t>
+            </a:r>
+            <a:endParaRPr lang="en-US" sz="1000" dirty="0"/>
+          </a:p>
+        </p:txBody>
+      </p:sp>
+      <p:sp>
+        <p:nvSpPr>
+          <p:cNvPr id="12" name="Text 9"/>
           <p:cNvSpPr/>
           <p:nvPr/>
         </p:nvSpPr>
@@ -6664,7 +7492,7 @@
       </p:sp>
       <p:sp>
         <p:nvSpPr>
-          <p:cNvPr id="6" name="Text 3"/>
+          <p:cNvPr id="13" name="Text 10"/>
           <p:cNvSpPr/>
           <p:nvPr/>
         </p:nvSpPr>
@@ -6703,7 +7531,7 @@
       </p:sp>
       <p:sp>
         <p:nvSpPr>
-          <p:cNvPr id="7" name="Shape 4"/>
+          <p:cNvPr id="14" name="Shape 11"/>
           <p:cNvSpPr/>
           <p:nvPr/>
         </p:nvSpPr>
@@ -6730,7 +7558,7 @@
       </p:sp>
       <p:sp>
         <p:nvSpPr>
-          <p:cNvPr id="8" name="Shape 5"/>
+          <p:cNvPr id="15" name="Shape 12"/>
           <p:cNvSpPr/>
           <p:nvPr/>
         </p:nvSpPr>
@@ -6755,7 +7583,7 @@
       </p:sp>
       <p:sp>
         <p:nvSpPr>
-          <p:cNvPr id="9" name="Text 6"/>
+          <p:cNvPr id="16" name="Text 13"/>
           <p:cNvSpPr/>
           <p:nvPr/>
         </p:nvSpPr>
@@ -6794,7 +7622,7 @@
       </p:sp>
       <p:sp>
         <p:nvSpPr>
-          <p:cNvPr id="10" name="Text 7"/>
+          <p:cNvPr id="17" name="Text 14"/>
           <p:cNvSpPr/>
           <p:nvPr/>
         </p:nvSpPr>
@@ -6833,7 +7661,7 @@
       </p:sp>
       <p:sp>
         <p:nvSpPr>
-          <p:cNvPr id="11" name="Text 8"/>
+          <p:cNvPr id="18" name="Text 15"/>
           <p:cNvSpPr/>
           <p:nvPr/>
         </p:nvSpPr>
@@ -6872,7 +7700,7 @@
       </p:sp>
       <p:sp>
         <p:nvSpPr>
-          <p:cNvPr id="12" name="Shape 9"/>
+          <p:cNvPr id="19" name="Shape 16"/>
           <p:cNvSpPr/>
           <p:nvPr/>
         </p:nvSpPr>
@@ -6899,7 +7727,7 @@
       </p:sp>
       <p:sp>
         <p:nvSpPr>
-          <p:cNvPr id="13" name="Shape 10"/>
+          <p:cNvPr id="20" name="Shape 17"/>
           <p:cNvSpPr/>
           <p:nvPr/>
         </p:nvSpPr>
@@ -6924,7 +7752,7 @@
       </p:sp>
       <p:sp>
         <p:nvSpPr>
-          <p:cNvPr id="14" name="Text 11"/>
+          <p:cNvPr id="21" name="Text 18"/>
           <p:cNvSpPr/>
           <p:nvPr/>
         </p:nvSpPr>
@@ -6963,7 +7791,7 @@
       </p:sp>
       <p:sp>
         <p:nvSpPr>
-          <p:cNvPr id="15" name="Text 12"/>
+          <p:cNvPr id="22" name="Text 19"/>
           <p:cNvSpPr/>
           <p:nvPr/>
         </p:nvSpPr>
@@ -7002,7 +7830,7 @@
       </p:sp>
       <p:sp>
         <p:nvSpPr>
-          <p:cNvPr id="16" name="Text 13"/>
+          <p:cNvPr id="23" name="Text 20"/>
           <p:cNvSpPr/>
           <p:nvPr/>
         </p:nvSpPr>
@@ -7041,7 +7869,7 @@
       </p:sp>
       <p:sp>
         <p:nvSpPr>
-          <p:cNvPr id="17" name="Shape 14"/>
+          <p:cNvPr id="24" name="Shape 21"/>
           <p:cNvSpPr/>
           <p:nvPr/>
         </p:nvSpPr>
@@ -7068,7 +7896,7 @@
       </p:sp>
       <p:sp>
         <p:nvSpPr>
-          <p:cNvPr id="18" name="Shape 15"/>
+          <p:cNvPr id="25" name="Shape 22"/>
           <p:cNvSpPr/>
           <p:nvPr/>
         </p:nvSpPr>
@@ -7093,7 +7921,7 @@
       </p:sp>
       <p:sp>
         <p:nvSpPr>
-          <p:cNvPr id="19" name="Text 16"/>
+          <p:cNvPr id="26" name="Text 23"/>
           <p:cNvSpPr/>
           <p:nvPr/>
         </p:nvSpPr>
@@ -7132,7 +7960,7 @@
       </p:sp>
       <p:sp>
         <p:nvSpPr>
-          <p:cNvPr id="20" name="Text 17"/>
+          <p:cNvPr id="27" name="Text 24"/>
           <p:cNvSpPr/>
           <p:nvPr/>
         </p:nvSpPr>
@@ -7171,7 +7999,7 @@
       </p:sp>
       <p:sp>
         <p:nvSpPr>
-          <p:cNvPr id="21" name="Text 18"/>
+          <p:cNvPr id="28" name="Text 25"/>
           <p:cNvSpPr/>
           <p:nvPr/>
         </p:nvSpPr>
@@ -7210,7 +8038,7 @@
       </p:sp>
       <p:sp>
         <p:nvSpPr>
-          <p:cNvPr id="22" name="Text 19"/>
+          <p:cNvPr id="29" name="Text 26"/>
           <p:cNvSpPr/>
           <p:nvPr/>
         </p:nvSpPr>
@@ -7397,7 +8225,214 @@
       </p:sp>
       <p:sp>
         <p:nvSpPr>
-          <p:cNvPr id="5" name="Text 2"/>
+          <p:cNvPr id="5" name="Shape 2"/>
+          <p:cNvSpPr/>
+          <p:nvPr/>
+        </p:nvSpPr>
+        <p:spPr>
+          <a:xfrm>
+            <a:off x="8732520" y="109728"/>
+            <a:ext cx="2926080" cy="896112"/>
+          </a:xfrm>
+          <a:prstGeom prst="roundRect">
+            <a:avLst>
+              <a:gd name="adj" fmla="val 7143"/>
+            </a:avLst>
+          </a:prstGeom>
+          <a:solidFill>
+            <a:srgbClr val="F7F5F0"/>
+          </a:solidFill>
+          <a:ln w="12700">
+            <a:solidFill>
+              <a:srgbClr val="DCE3EA"/>
+            </a:solidFill>
+            <a:prstDash val="solid"/>
+          </a:ln>
+        </p:spPr>
+      </p:sp>
+      <p:sp>
+        <p:nvSpPr>
+          <p:cNvPr id="6" name="Shape 3"/>
+          <p:cNvSpPr/>
+          <p:nvPr/>
+        </p:nvSpPr>
+        <p:spPr>
+          <a:xfrm>
+            <a:off x="8732520" y="109728"/>
+            <a:ext cx="2926080" cy="237744"/>
+          </a:xfrm>
+          <a:prstGeom prst="roundRect">
+            <a:avLst>
+              <a:gd name="adj" fmla="val 26923"/>
+            </a:avLst>
+          </a:prstGeom>
+          <a:solidFill>
+            <a:srgbClr val="0D1E2E"/>
+          </a:solidFill>
+          <a:ln w="12700">
+            <a:solidFill>
+              <a:srgbClr val="0D1E2E"/>
+            </a:solidFill>
+            <a:prstDash val="solid"/>
+          </a:ln>
+        </p:spPr>
+      </p:sp>
+      <p:sp>
+        <p:nvSpPr>
+          <p:cNvPr id="7" name="Shape 4"/>
+          <p:cNvSpPr/>
+          <p:nvPr/>
+        </p:nvSpPr>
+        <p:spPr>
+          <a:xfrm>
+            <a:off x="8823960" y="182880"/>
+            <a:ext cx="91440" cy="91440"/>
+          </a:xfrm>
+          <a:prstGeom prst="ellipse">
+            <a:avLst/>
+          </a:prstGeom>
+          <a:solidFill>
+            <a:srgbClr val="E8837A"/>
+          </a:solidFill>
+          <a:ln w="12700">
+            <a:solidFill>
+              <a:srgbClr val="E8837A"/>
+            </a:solidFill>
+            <a:prstDash val="solid"/>
+          </a:ln>
+        </p:spPr>
+      </p:sp>
+      <p:sp>
+        <p:nvSpPr>
+          <p:cNvPr id="8" name="Shape 5"/>
+          <p:cNvSpPr/>
+          <p:nvPr/>
+        </p:nvSpPr>
+        <p:spPr>
+          <a:xfrm>
+            <a:off x="8970264" y="182880"/>
+            <a:ext cx="91440" cy="91440"/>
+          </a:xfrm>
+          <a:prstGeom prst="ellipse">
+            <a:avLst/>
+          </a:prstGeom>
+          <a:solidFill>
+            <a:srgbClr val="F4A825"/>
+          </a:solidFill>
+          <a:ln w="12700">
+            <a:solidFill>
+              <a:srgbClr val="F4A825"/>
+            </a:solidFill>
+            <a:prstDash val="solid"/>
+          </a:ln>
+        </p:spPr>
+      </p:sp>
+      <p:sp>
+        <p:nvSpPr>
+          <p:cNvPr id="9" name="Shape 6"/>
+          <p:cNvSpPr/>
+          <p:nvPr/>
+        </p:nvSpPr>
+        <p:spPr>
+          <a:xfrm>
+            <a:off x="9116568" y="182880"/>
+            <a:ext cx="91440" cy="91440"/>
+          </a:xfrm>
+          <a:prstGeom prst="ellipse">
+            <a:avLst/>
+          </a:prstGeom>
+          <a:solidFill>
+            <a:srgbClr val="2E7D5B"/>
+          </a:solidFill>
+          <a:ln w="12700">
+            <a:solidFill>
+              <a:srgbClr val="2E7D5B"/>
+            </a:solidFill>
+            <a:prstDash val="solid"/>
+          </a:ln>
+        </p:spPr>
+      </p:sp>
+      <p:sp>
+        <p:nvSpPr>
+          <p:cNvPr id="10" name="Text 7"/>
+          <p:cNvSpPr/>
+          <p:nvPr/>
+        </p:nvSpPr>
+        <p:spPr>
+          <a:xfrm>
+            <a:off x="9299448" y="109728"/>
+            <a:ext cx="2286000" cy="237744"/>
+          </a:xfrm>
+          <a:prstGeom prst="rect">
+            <a:avLst/>
+          </a:prstGeom>
+          <a:noFill/>
+          <a:ln/>
+        </p:spPr>
+        <p:txBody>
+          <a:bodyPr wrap="square" lIns="0" tIns="0" rIns="0" bIns="0" rtlCol="0" anchor="ctr"/>
+          <a:lstStyle/>
+          <a:p>
+            <a:pPr indent="0" marL="0">
+              <a:buNone/>
+            </a:pPr>
+            <a:r>
+              <a:rPr lang="en-US" sz="800" b="1" spc="100" kern="0" dirty="0">
+                <a:solidFill>
+                  <a:srgbClr val="9FB2C2"/>
+                </a:solidFill>
+                <a:latin typeface="Inter" pitchFamily="34" charset="0"/>
+                <a:ea typeface="Inter" pitchFamily="34" charset="-122"/>
+                <a:cs typeface="Inter" pitchFamily="34" charset="-120"/>
+              </a:rPr>
+              <a:t>MS. RIVERA'S SCREEN · SO FAR</a:t>
+            </a:r>
+            <a:endParaRPr lang="en-US" sz="800" dirty="0"/>
+          </a:p>
+        </p:txBody>
+      </p:sp>
+      <p:sp>
+        <p:nvSpPr>
+          <p:cNvPr id="11" name="Text 8"/>
+          <p:cNvSpPr/>
+          <p:nvPr/>
+        </p:nvSpPr>
+        <p:spPr>
+          <a:xfrm>
+            <a:off x="8860536" y="365760"/>
+            <a:ext cx="2670048" cy="566928"/>
+          </a:xfrm>
+          <a:prstGeom prst="rect">
+            <a:avLst/>
+          </a:prstGeom>
+          <a:noFill/>
+          <a:ln/>
+        </p:spPr>
+        <p:txBody>
+          <a:bodyPr wrap="square" lIns="0" tIns="0" rIns="0" bIns="0" rtlCol="0" anchor="ctr"/>
+          <a:lstStyle/>
+          <a:p>
+            <a:pPr indent="0" marL="0">
+              <a:buNone/>
+            </a:pPr>
+            <a:r>
+              <a:rPr lang="en-US" sz="1000" dirty="0">
+                <a:solidFill>
+                  <a:srgbClr val="1B1F24"/>
+                </a:solidFill>
+                <a:latin typeface="Inter" pitchFamily="34" charset="0"/>
+                <a:ea typeface="Inter" pitchFamily="34" charset="-122"/>
+                <a:cs typeface="Inter" pitchFamily="34" charset="-120"/>
+              </a:rPr>
+              <a:t>Her reformat: same lesson as stations, cards, and a ramped practice set.</a:t>
+            </a:r>
+            <a:endParaRPr lang="en-US" sz="1000" dirty="0"/>
+          </a:p>
+        </p:txBody>
+      </p:sp>
+      <p:sp>
+        <p:nvSpPr>
+          <p:cNvPr id="12" name="Text 9"/>
           <p:cNvSpPr/>
           <p:nvPr/>
         </p:nvSpPr>
@@ -7436,7 +8471,7 @@
       </p:sp>
       <p:sp>
         <p:nvSpPr>
-          <p:cNvPr id="6" name="Text 3"/>
+          <p:cNvPr id="13" name="Text 10"/>
           <p:cNvSpPr/>
           <p:nvPr/>
         </p:nvSpPr>
@@ -7475,7 +8510,7 @@
       </p:sp>
       <p:sp>
         <p:nvSpPr>
-          <p:cNvPr id="7" name="Shape 4"/>
+          <p:cNvPr id="14" name="Shape 11"/>
           <p:cNvSpPr/>
           <p:nvPr/>
         </p:nvSpPr>
@@ -7502,7 +8537,7 @@
       </p:sp>
       <p:sp>
         <p:nvSpPr>
-          <p:cNvPr id="8" name="Text 5"/>
+          <p:cNvPr id="15" name="Text 12"/>
           <p:cNvSpPr/>
           <p:nvPr/>
         </p:nvSpPr>
@@ -7541,7 +8576,7 @@
       </p:sp>
       <p:sp>
         <p:nvSpPr>
-          <p:cNvPr id="9" name="Text 6"/>
+          <p:cNvPr id="16" name="Text 13"/>
           <p:cNvSpPr/>
           <p:nvPr/>
         </p:nvSpPr>
@@ -7580,7 +8615,7 @@
       </p:sp>
       <p:sp>
         <p:nvSpPr>
-          <p:cNvPr id="10" name="Shape 7"/>
+          <p:cNvPr id="17" name="Shape 14"/>
           <p:cNvSpPr/>
           <p:nvPr/>
         </p:nvSpPr>
@@ -7607,7 +8642,7 @@
       </p:sp>
       <p:sp>
         <p:nvSpPr>
-          <p:cNvPr id="11" name="Text 8"/>
+          <p:cNvPr id="18" name="Text 15"/>
           <p:cNvSpPr/>
           <p:nvPr/>
         </p:nvSpPr>
@@ -7646,7 +8681,7 @@
       </p:sp>
       <p:sp>
         <p:nvSpPr>
-          <p:cNvPr id="12" name="Text 9"/>
+          <p:cNvPr id="19" name="Text 16"/>
           <p:cNvSpPr/>
           <p:nvPr/>
         </p:nvSpPr>
@@ -7685,7 +8720,7 @@
       </p:sp>
       <p:sp>
         <p:nvSpPr>
-          <p:cNvPr id="13" name="Shape 10"/>
+          <p:cNvPr id="20" name="Shape 17"/>
           <p:cNvSpPr/>
           <p:nvPr/>
         </p:nvSpPr>
@@ -7712,7 +8747,7 @@
       </p:sp>
       <p:sp>
         <p:nvSpPr>
-          <p:cNvPr id="14" name="Text 11"/>
+          <p:cNvPr id="21" name="Text 18"/>
           <p:cNvSpPr/>
           <p:nvPr/>
         </p:nvSpPr>
@@ -7751,7 +8786,7 @@
       </p:sp>
       <p:sp>
         <p:nvSpPr>
-          <p:cNvPr id="15" name="Text 12"/>
+          <p:cNvPr id="22" name="Text 19"/>
           <p:cNvSpPr/>
           <p:nvPr/>
         </p:nvSpPr>
@@ -7790,7 +8825,7 @@
       </p:sp>
       <p:sp>
         <p:nvSpPr>
-          <p:cNvPr id="16" name="Shape 13"/>
+          <p:cNvPr id="23" name="Shape 20"/>
           <p:cNvSpPr/>
           <p:nvPr/>
         </p:nvSpPr>
@@ -7817,7 +8852,7 @@
       </p:sp>
       <p:sp>
         <p:nvSpPr>
-          <p:cNvPr id="17" name="Text 14"/>
+          <p:cNvPr id="24" name="Text 21"/>
           <p:cNvSpPr/>
           <p:nvPr/>
         </p:nvSpPr>
@@ -8004,7 +9039,214 @@
       </p:sp>
       <p:sp>
         <p:nvSpPr>
-          <p:cNvPr id="5" name="Text 2"/>
+          <p:cNvPr id="5" name="Shape 2"/>
+          <p:cNvSpPr/>
+          <p:nvPr/>
+        </p:nvSpPr>
+        <p:spPr>
+          <a:xfrm>
+            <a:off x="8732520" y="109728"/>
+            <a:ext cx="2926080" cy="896112"/>
+          </a:xfrm>
+          <a:prstGeom prst="roundRect">
+            <a:avLst>
+              <a:gd name="adj" fmla="val 7143"/>
+            </a:avLst>
+          </a:prstGeom>
+          <a:solidFill>
+            <a:srgbClr val="F7F5F0"/>
+          </a:solidFill>
+          <a:ln w="12700">
+            <a:solidFill>
+              <a:srgbClr val="DCE3EA"/>
+            </a:solidFill>
+            <a:prstDash val="solid"/>
+          </a:ln>
+        </p:spPr>
+      </p:sp>
+      <p:sp>
+        <p:nvSpPr>
+          <p:cNvPr id="6" name="Shape 3"/>
+          <p:cNvSpPr/>
+          <p:nvPr/>
+        </p:nvSpPr>
+        <p:spPr>
+          <a:xfrm>
+            <a:off x="8732520" y="109728"/>
+            <a:ext cx="2926080" cy="237744"/>
+          </a:xfrm>
+          <a:prstGeom prst="roundRect">
+            <a:avLst>
+              <a:gd name="adj" fmla="val 26923"/>
+            </a:avLst>
+          </a:prstGeom>
+          <a:solidFill>
+            <a:srgbClr val="0D1E2E"/>
+          </a:solidFill>
+          <a:ln w="12700">
+            <a:solidFill>
+              <a:srgbClr val="0D1E2E"/>
+            </a:solidFill>
+            <a:prstDash val="solid"/>
+          </a:ln>
+        </p:spPr>
+      </p:sp>
+      <p:sp>
+        <p:nvSpPr>
+          <p:cNvPr id="7" name="Shape 4"/>
+          <p:cNvSpPr/>
+          <p:nvPr/>
+        </p:nvSpPr>
+        <p:spPr>
+          <a:xfrm>
+            <a:off x="8823960" y="182880"/>
+            <a:ext cx="91440" cy="91440"/>
+          </a:xfrm>
+          <a:prstGeom prst="ellipse">
+            <a:avLst/>
+          </a:prstGeom>
+          <a:solidFill>
+            <a:srgbClr val="E8837A"/>
+          </a:solidFill>
+          <a:ln w="12700">
+            <a:solidFill>
+              <a:srgbClr val="E8837A"/>
+            </a:solidFill>
+            <a:prstDash val="solid"/>
+          </a:ln>
+        </p:spPr>
+      </p:sp>
+      <p:sp>
+        <p:nvSpPr>
+          <p:cNvPr id="8" name="Shape 5"/>
+          <p:cNvSpPr/>
+          <p:nvPr/>
+        </p:nvSpPr>
+        <p:spPr>
+          <a:xfrm>
+            <a:off x="8970264" y="182880"/>
+            <a:ext cx="91440" cy="91440"/>
+          </a:xfrm>
+          <a:prstGeom prst="ellipse">
+            <a:avLst/>
+          </a:prstGeom>
+          <a:solidFill>
+            <a:srgbClr val="F4A825"/>
+          </a:solidFill>
+          <a:ln w="12700">
+            <a:solidFill>
+              <a:srgbClr val="F4A825"/>
+            </a:solidFill>
+            <a:prstDash val="solid"/>
+          </a:ln>
+        </p:spPr>
+      </p:sp>
+      <p:sp>
+        <p:nvSpPr>
+          <p:cNvPr id="9" name="Shape 6"/>
+          <p:cNvSpPr/>
+          <p:nvPr/>
+        </p:nvSpPr>
+        <p:spPr>
+          <a:xfrm>
+            <a:off x="9116568" y="182880"/>
+            <a:ext cx="91440" cy="91440"/>
+          </a:xfrm>
+          <a:prstGeom prst="ellipse">
+            <a:avLst/>
+          </a:prstGeom>
+          <a:solidFill>
+            <a:srgbClr val="2E7D5B"/>
+          </a:solidFill>
+          <a:ln w="12700">
+            <a:solidFill>
+              <a:srgbClr val="2E7D5B"/>
+            </a:solidFill>
+            <a:prstDash val="solid"/>
+          </a:ln>
+        </p:spPr>
+      </p:sp>
+      <p:sp>
+        <p:nvSpPr>
+          <p:cNvPr id="10" name="Text 7"/>
+          <p:cNvSpPr/>
+          <p:nvPr/>
+        </p:nvSpPr>
+        <p:spPr>
+          <a:xfrm>
+            <a:off x="9299448" y="109728"/>
+            <a:ext cx="2286000" cy="237744"/>
+          </a:xfrm>
+          <a:prstGeom prst="rect">
+            <a:avLst/>
+          </a:prstGeom>
+          <a:noFill/>
+          <a:ln/>
+        </p:spPr>
+        <p:txBody>
+          <a:bodyPr wrap="square" lIns="0" tIns="0" rIns="0" bIns="0" rtlCol="0" anchor="ctr"/>
+          <a:lstStyle/>
+          <a:p>
+            <a:pPr indent="0" marL="0">
+              <a:buNone/>
+            </a:pPr>
+            <a:r>
+              <a:rPr lang="en-US" sz="800" b="1" spc="100" kern="0" dirty="0">
+                <a:solidFill>
+                  <a:srgbClr val="9FB2C2"/>
+                </a:solidFill>
+                <a:latin typeface="Inter" pitchFamily="34" charset="0"/>
+                <a:ea typeface="Inter" pitchFamily="34" charset="-122"/>
+                <a:cs typeface="Inter" pitchFamily="34" charset="-120"/>
+              </a:rPr>
+              <a:t>MS. RIVERA'S SCREEN · SO FAR</a:t>
+            </a:r>
+            <a:endParaRPr lang="en-US" sz="800" dirty="0"/>
+          </a:p>
+        </p:txBody>
+      </p:sp>
+      <p:sp>
+        <p:nvSpPr>
+          <p:cNvPr id="11" name="Text 8"/>
+          <p:cNvSpPr/>
+          <p:nvPr/>
+        </p:nvSpPr>
+        <p:spPr>
+          <a:xfrm>
+            <a:off x="8860536" y="365760"/>
+            <a:ext cx="2670048" cy="566928"/>
+          </a:xfrm>
+          <a:prstGeom prst="rect">
+            <a:avLst/>
+          </a:prstGeom>
+          <a:noFill/>
+          <a:ln/>
+        </p:spPr>
+        <p:txBody>
+          <a:bodyPr wrap="square" lIns="0" tIns="0" rIns="0" bIns="0" rtlCol="0" anchor="ctr"/>
+          <a:lstStyle/>
+          <a:p>
+            <a:pPr indent="0" marL="0">
+              <a:buNone/>
+            </a:pPr>
+            <a:r>
+              <a:rPr lang="en-US" sz="1000" dirty="0">
+                <a:solidFill>
+                  <a:srgbClr val="1B1F24"/>
+                </a:solidFill>
+                <a:latin typeface="Inter" pitchFamily="34" charset="0"/>
+                <a:ea typeface="Inter" pitchFamily="34" charset="-122"/>
+                <a:cs typeface="Inter" pitchFamily="34" charset="-120"/>
+              </a:rPr>
+              <a:t>Her 4-point review: accurate, at level, fits her kids, sounds like her.</a:t>
+            </a:r>
+            <a:endParaRPr lang="en-US" sz="1000" dirty="0"/>
+          </a:p>
+        </p:txBody>
+      </p:sp>
+      <p:sp>
+        <p:nvSpPr>
+          <p:cNvPr id="12" name="Text 9"/>
           <p:cNvSpPr/>
           <p:nvPr/>
         </p:nvSpPr>
@@ -8043,7 +9285,7 @@
       </p:sp>
       <p:sp>
         <p:nvSpPr>
-          <p:cNvPr id="6" name="Text 3"/>
+          <p:cNvPr id="13" name="Text 10"/>
           <p:cNvSpPr/>
           <p:nvPr/>
         </p:nvSpPr>
@@ -8082,7 +9324,7 @@
       </p:sp>
       <p:sp>
         <p:nvSpPr>
-          <p:cNvPr id="7" name="Shape 4"/>
+          <p:cNvPr id="14" name="Shape 11"/>
           <p:cNvSpPr/>
           <p:nvPr/>
         </p:nvSpPr>
@@ -8109,7 +9351,7 @@
       </p:sp>
       <p:sp>
         <p:nvSpPr>
-          <p:cNvPr id="8" name="Text 5"/>
+          <p:cNvPr id="15" name="Text 12"/>
           <p:cNvSpPr/>
           <p:nvPr/>
         </p:nvSpPr>
@@ -8148,7 +9390,7 @@
       </p:sp>
       <p:sp>
         <p:nvSpPr>
-          <p:cNvPr id="9" name="Text 6"/>
+          <p:cNvPr id="16" name="Text 13"/>
           <p:cNvSpPr/>
           <p:nvPr/>
         </p:nvSpPr>
@@ -8187,7 +9429,7 @@
       </p:sp>
       <p:sp>
         <p:nvSpPr>
-          <p:cNvPr id="10" name="Shape 7"/>
+          <p:cNvPr id="17" name="Shape 14"/>
           <p:cNvSpPr/>
           <p:nvPr/>
         </p:nvSpPr>
@@ -8214,7 +9456,7 @@
       </p:sp>
       <p:sp>
         <p:nvSpPr>
-          <p:cNvPr id="11" name="Text 8"/>
+          <p:cNvPr id="18" name="Text 15"/>
           <p:cNvSpPr/>
           <p:nvPr/>
         </p:nvSpPr>
@@ -8253,7 +9495,7 @@
       </p:sp>
       <p:sp>
         <p:nvSpPr>
-          <p:cNvPr id="12" name="Text 9"/>
+          <p:cNvPr id="19" name="Text 16"/>
           <p:cNvSpPr/>
           <p:nvPr/>
         </p:nvSpPr>
@@ -8292,7 +9534,7 @@
       </p:sp>
       <p:sp>
         <p:nvSpPr>
-          <p:cNvPr id="13" name="Shape 10"/>
+          <p:cNvPr id="20" name="Shape 17"/>
           <p:cNvSpPr/>
           <p:nvPr/>
         </p:nvSpPr>
@@ -8319,7 +9561,7 @@
       </p:sp>
       <p:sp>
         <p:nvSpPr>
-          <p:cNvPr id="14" name="Text 11"/>
+          <p:cNvPr id="21" name="Text 18"/>
           <p:cNvSpPr/>
           <p:nvPr/>
         </p:nvSpPr>
@@ -8358,7 +9600,7 @@
       </p:sp>
       <p:sp>
         <p:nvSpPr>
-          <p:cNvPr id="15" name="Text 12"/>
+          <p:cNvPr id="22" name="Text 19"/>
           <p:cNvSpPr/>
           <p:nvPr/>
         </p:nvSpPr>
@@ -8397,7 +9639,7 @@
       </p:sp>
       <p:sp>
         <p:nvSpPr>
-          <p:cNvPr id="16" name="Shape 13"/>
+          <p:cNvPr id="23" name="Shape 20"/>
           <p:cNvSpPr/>
           <p:nvPr/>
         </p:nvSpPr>
@@ -8424,7 +9666,7 @@
       </p:sp>
       <p:sp>
         <p:nvSpPr>
-          <p:cNvPr id="17" name="Text 14"/>
+          <p:cNvPr id="24" name="Text 21"/>
           <p:cNvSpPr/>
           <p:nvPr/>
         </p:nvSpPr>
@@ -8463,7 +9705,7 @@
       </p:sp>
       <p:sp>
         <p:nvSpPr>
-          <p:cNvPr id="18" name="Text 15"/>
+          <p:cNvPr id="25" name="Text 22"/>
           <p:cNvSpPr/>
           <p:nvPr/>
         </p:nvSpPr>
@@ -8502,7 +9744,7 @@
       </p:sp>
       <p:sp>
         <p:nvSpPr>
-          <p:cNvPr id="19" name="Text 16"/>
+          <p:cNvPr id="26" name="Text 23"/>
           <p:cNvSpPr/>
           <p:nvPr/>
         </p:nvSpPr>
@@ -8689,7 +9931,214 @@
       </p:sp>
       <p:sp>
         <p:nvSpPr>
-          <p:cNvPr id="5" name="Text 2"/>
+          <p:cNvPr id="5" name="Shape 2"/>
+          <p:cNvSpPr/>
+          <p:nvPr/>
+        </p:nvSpPr>
+        <p:spPr>
+          <a:xfrm>
+            <a:off x="8732520" y="109728"/>
+            <a:ext cx="2926080" cy="896112"/>
+          </a:xfrm>
+          <a:prstGeom prst="roundRect">
+            <a:avLst>
+              <a:gd name="adj" fmla="val 7143"/>
+            </a:avLst>
+          </a:prstGeom>
+          <a:solidFill>
+            <a:srgbClr val="F7F5F0"/>
+          </a:solidFill>
+          <a:ln w="12700">
+            <a:solidFill>
+              <a:srgbClr val="DCE3EA"/>
+            </a:solidFill>
+            <a:prstDash val="solid"/>
+          </a:ln>
+        </p:spPr>
+      </p:sp>
+      <p:sp>
+        <p:nvSpPr>
+          <p:cNvPr id="6" name="Shape 3"/>
+          <p:cNvSpPr/>
+          <p:nvPr/>
+        </p:nvSpPr>
+        <p:spPr>
+          <a:xfrm>
+            <a:off x="8732520" y="109728"/>
+            <a:ext cx="2926080" cy="237744"/>
+          </a:xfrm>
+          <a:prstGeom prst="roundRect">
+            <a:avLst>
+              <a:gd name="adj" fmla="val 26923"/>
+            </a:avLst>
+          </a:prstGeom>
+          <a:solidFill>
+            <a:srgbClr val="0D1E2E"/>
+          </a:solidFill>
+          <a:ln w="12700">
+            <a:solidFill>
+              <a:srgbClr val="0D1E2E"/>
+            </a:solidFill>
+            <a:prstDash val="solid"/>
+          </a:ln>
+        </p:spPr>
+      </p:sp>
+      <p:sp>
+        <p:nvSpPr>
+          <p:cNvPr id="7" name="Shape 4"/>
+          <p:cNvSpPr/>
+          <p:nvPr/>
+        </p:nvSpPr>
+        <p:spPr>
+          <a:xfrm>
+            <a:off x="8823960" y="182880"/>
+            <a:ext cx="91440" cy="91440"/>
+          </a:xfrm>
+          <a:prstGeom prst="ellipse">
+            <a:avLst/>
+          </a:prstGeom>
+          <a:solidFill>
+            <a:srgbClr val="E8837A"/>
+          </a:solidFill>
+          <a:ln w="12700">
+            <a:solidFill>
+              <a:srgbClr val="E8837A"/>
+            </a:solidFill>
+            <a:prstDash val="solid"/>
+          </a:ln>
+        </p:spPr>
+      </p:sp>
+      <p:sp>
+        <p:nvSpPr>
+          <p:cNvPr id="8" name="Shape 5"/>
+          <p:cNvSpPr/>
+          <p:nvPr/>
+        </p:nvSpPr>
+        <p:spPr>
+          <a:xfrm>
+            <a:off x="8970264" y="182880"/>
+            <a:ext cx="91440" cy="91440"/>
+          </a:xfrm>
+          <a:prstGeom prst="ellipse">
+            <a:avLst/>
+          </a:prstGeom>
+          <a:solidFill>
+            <a:srgbClr val="F4A825"/>
+          </a:solidFill>
+          <a:ln w="12700">
+            <a:solidFill>
+              <a:srgbClr val="F4A825"/>
+            </a:solidFill>
+            <a:prstDash val="solid"/>
+          </a:ln>
+        </p:spPr>
+      </p:sp>
+      <p:sp>
+        <p:nvSpPr>
+          <p:cNvPr id="9" name="Shape 6"/>
+          <p:cNvSpPr/>
+          <p:nvPr/>
+        </p:nvSpPr>
+        <p:spPr>
+          <a:xfrm>
+            <a:off x="9116568" y="182880"/>
+            <a:ext cx="91440" cy="91440"/>
+          </a:xfrm>
+          <a:prstGeom prst="ellipse">
+            <a:avLst/>
+          </a:prstGeom>
+          <a:solidFill>
+            <a:srgbClr val="2E7D5B"/>
+          </a:solidFill>
+          <a:ln w="12700">
+            <a:solidFill>
+              <a:srgbClr val="2E7D5B"/>
+            </a:solidFill>
+            <a:prstDash val="solid"/>
+          </a:ln>
+        </p:spPr>
+      </p:sp>
+      <p:sp>
+        <p:nvSpPr>
+          <p:cNvPr id="10" name="Text 7"/>
+          <p:cNvSpPr/>
+          <p:nvPr/>
+        </p:nvSpPr>
+        <p:spPr>
+          <a:xfrm>
+            <a:off x="9299448" y="109728"/>
+            <a:ext cx="2286000" cy="237744"/>
+          </a:xfrm>
+          <a:prstGeom prst="rect">
+            <a:avLst/>
+          </a:prstGeom>
+          <a:noFill/>
+          <a:ln/>
+        </p:spPr>
+        <p:txBody>
+          <a:bodyPr wrap="square" lIns="0" tIns="0" rIns="0" bIns="0" rtlCol="0" anchor="ctr"/>
+          <a:lstStyle/>
+          <a:p>
+            <a:pPr indent="0" marL="0">
+              <a:buNone/>
+            </a:pPr>
+            <a:r>
+              <a:rPr lang="en-US" sz="800" b="1" spc="100" kern="0" dirty="0">
+                <a:solidFill>
+                  <a:srgbClr val="9FB2C2"/>
+                </a:solidFill>
+                <a:latin typeface="Inter" pitchFamily="34" charset="0"/>
+                <a:ea typeface="Inter" pitchFamily="34" charset="-122"/>
+                <a:cs typeface="Inter" pitchFamily="34" charset="-120"/>
+              </a:rPr>
+              <a:t>MS. RIVERA'S SCREEN · SO FAR</a:t>
+            </a:r>
+            <a:endParaRPr lang="en-US" sz="800" dirty="0"/>
+          </a:p>
+        </p:txBody>
+      </p:sp>
+      <p:sp>
+        <p:nvSpPr>
+          <p:cNvPr id="11" name="Text 8"/>
+          <p:cNvSpPr/>
+          <p:nvPr/>
+        </p:nvSpPr>
+        <p:spPr>
+          <a:xfrm>
+            <a:off x="8860536" y="365760"/>
+            <a:ext cx="2670048" cy="566928"/>
+          </a:xfrm>
+          <a:prstGeom prst="rect">
+            <a:avLst/>
+          </a:prstGeom>
+          <a:noFill/>
+          <a:ln/>
+        </p:spPr>
+        <p:txBody>
+          <a:bodyPr wrap="square" lIns="0" tIns="0" rIns="0" bIns="0" rtlCol="0" anchor="ctr"/>
+          <a:lstStyle/>
+          <a:p>
+            <a:pPr indent="0" marL="0">
+              <a:buNone/>
+            </a:pPr>
+            <a:r>
+              <a:rPr lang="en-US" sz="1000" dirty="0">
+                <a:solidFill>
+                  <a:srgbClr val="1B1F24"/>
+                </a:solidFill>
+                <a:latin typeface="Inter" pitchFamily="34" charset="0"/>
+                <a:ea typeface="Inter" pitchFamily="34" charset="-122"/>
+                <a:cs typeface="Inter" pitchFamily="34" charset="-120"/>
+              </a:rPr>
+              <a:t>Her honesty: the level label is a guess until she checks it.</a:t>
+            </a:r>
+            <a:endParaRPr lang="en-US" sz="1000" dirty="0"/>
+          </a:p>
+        </p:txBody>
+      </p:sp>
+      <p:sp>
+        <p:nvSpPr>
+          <p:cNvPr id="12" name="Text 9"/>
           <p:cNvSpPr/>
           <p:nvPr/>
         </p:nvSpPr>
@@ -8728,7 +10177,7 @@
       </p:sp>
       <p:sp>
         <p:nvSpPr>
-          <p:cNvPr id="6" name="Text 3"/>
+          <p:cNvPr id="13" name="Text 10"/>
           <p:cNvSpPr/>
           <p:nvPr/>
         </p:nvSpPr>
@@ -8767,7 +10216,7 @@
       </p:sp>
       <p:sp>
         <p:nvSpPr>
-          <p:cNvPr id="7" name="Shape 4"/>
+          <p:cNvPr id="14" name="Shape 11"/>
           <p:cNvSpPr/>
           <p:nvPr/>
         </p:nvSpPr>
@@ -8794,7 +10243,7 @@
       </p:sp>
       <p:sp>
         <p:nvSpPr>
-          <p:cNvPr id="8" name="Text 5"/>
+          <p:cNvPr id="15" name="Text 12"/>
           <p:cNvSpPr/>
           <p:nvPr/>
         </p:nvSpPr>
@@ -8833,7 +10282,7 @@
       </p:sp>
       <p:sp>
         <p:nvSpPr>
-          <p:cNvPr id="9" name="Text 6"/>
+          <p:cNvPr id="16" name="Text 13"/>
           <p:cNvSpPr/>
           <p:nvPr/>
         </p:nvSpPr>
@@ -8872,7 +10321,7 @@
       </p:sp>
       <p:sp>
         <p:nvSpPr>
-          <p:cNvPr id="10" name="Shape 7"/>
+          <p:cNvPr id="17" name="Shape 14"/>
           <p:cNvSpPr/>
           <p:nvPr/>
         </p:nvSpPr>
@@ -8899,7 +10348,7 @@
       </p:sp>
       <p:sp>
         <p:nvSpPr>
-          <p:cNvPr id="11" name="Text 8"/>
+          <p:cNvPr id="18" name="Text 15"/>
           <p:cNvSpPr/>
           <p:nvPr/>
         </p:nvSpPr>
@@ -8938,7 +10387,7 @@
       </p:sp>
       <p:sp>
         <p:nvSpPr>
-          <p:cNvPr id="12" name="Text 9"/>
+          <p:cNvPr id="19" name="Text 16"/>
           <p:cNvSpPr/>
           <p:nvPr/>
         </p:nvSpPr>
@@ -8977,7 +10426,7 @@
       </p:sp>
       <p:sp>
         <p:nvSpPr>
-          <p:cNvPr id="13" name="Shape 10"/>
+          <p:cNvPr id="20" name="Shape 17"/>
           <p:cNvSpPr/>
           <p:nvPr/>
         </p:nvSpPr>
@@ -9004,7 +10453,7 @@
       </p:sp>
       <p:sp>
         <p:nvSpPr>
-          <p:cNvPr id="14" name="Text 11"/>
+          <p:cNvPr id="21" name="Text 18"/>
           <p:cNvSpPr/>
           <p:nvPr/>
         </p:nvSpPr>
@@ -9043,7 +10492,7 @@
       </p:sp>
       <p:sp>
         <p:nvSpPr>
-          <p:cNvPr id="15" name="Text 12"/>
+          <p:cNvPr id="22" name="Text 19"/>
           <p:cNvSpPr/>
           <p:nvPr/>
         </p:nvSpPr>
@@ -9082,7 +10531,7 @@
       </p:sp>
       <p:sp>
         <p:nvSpPr>
-          <p:cNvPr id="16" name="Text 13"/>
+          <p:cNvPr id="23" name="Text 20"/>
           <p:cNvSpPr/>
           <p:nvPr/>
         </p:nvSpPr>
@@ -9269,7 +10718,214 @@
       </p:sp>
       <p:sp>
         <p:nvSpPr>
-          <p:cNvPr id="5" name="Text 2"/>
+          <p:cNvPr id="5" name="Shape 2"/>
+          <p:cNvSpPr/>
+          <p:nvPr/>
+        </p:nvSpPr>
+        <p:spPr>
+          <a:xfrm>
+            <a:off x="8732520" y="109728"/>
+            <a:ext cx="2926080" cy="896112"/>
+          </a:xfrm>
+          <a:prstGeom prst="roundRect">
+            <a:avLst>
+              <a:gd name="adj" fmla="val 7143"/>
+            </a:avLst>
+          </a:prstGeom>
+          <a:solidFill>
+            <a:srgbClr val="F7F5F0"/>
+          </a:solidFill>
+          <a:ln w="12700">
+            <a:solidFill>
+              <a:srgbClr val="DCE3EA"/>
+            </a:solidFill>
+            <a:prstDash val="solid"/>
+          </a:ln>
+        </p:spPr>
+      </p:sp>
+      <p:sp>
+        <p:nvSpPr>
+          <p:cNvPr id="6" name="Shape 3"/>
+          <p:cNvSpPr/>
+          <p:nvPr/>
+        </p:nvSpPr>
+        <p:spPr>
+          <a:xfrm>
+            <a:off x="8732520" y="109728"/>
+            <a:ext cx="2926080" cy="237744"/>
+          </a:xfrm>
+          <a:prstGeom prst="roundRect">
+            <a:avLst>
+              <a:gd name="adj" fmla="val 26923"/>
+            </a:avLst>
+          </a:prstGeom>
+          <a:solidFill>
+            <a:srgbClr val="0D1E2E"/>
+          </a:solidFill>
+          <a:ln w="12700">
+            <a:solidFill>
+              <a:srgbClr val="0D1E2E"/>
+            </a:solidFill>
+            <a:prstDash val="solid"/>
+          </a:ln>
+        </p:spPr>
+      </p:sp>
+      <p:sp>
+        <p:nvSpPr>
+          <p:cNvPr id="7" name="Shape 4"/>
+          <p:cNvSpPr/>
+          <p:nvPr/>
+        </p:nvSpPr>
+        <p:spPr>
+          <a:xfrm>
+            <a:off x="8823960" y="182880"/>
+            <a:ext cx="91440" cy="91440"/>
+          </a:xfrm>
+          <a:prstGeom prst="ellipse">
+            <a:avLst/>
+          </a:prstGeom>
+          <a:solidFill>
+            <a:srgbClr val="E8837A"/>
+          </a:solidFill>
+          <a:ln w="12700">
+            <a:solidFill>
+              <a:srgbClr val="E8837A"/>
+            </a:solidFill>
+            <a:prstDash val="solid"/>
+          </a:ln>
+        </p:spPr>
+      </p:sp>
+      <p:sp>
+        <p:nvSpPr>
+          <p:cNvPr id="8" name="Shape 5"/>
+          <p:cNvSpPr/>
+          <p:nvPr/>
+        </p:nvSpPr>
+        <p:spPr>
+          <a:xfrm>
+            <a:off x="8970264" y="182880"/>
+            <a:ext cx="91440" cy="91440"/>
+          </a:xfrm>
+          <a:prstGeom prst="ellipse">
+            <a:avLst/>
+          </a:prstGeom>
+          <a:solidFill>
+            <a:srgbClr val="F4A825"/>
+          </a:solidFill>
+          <a:ln w="12700">
+            <a:solidFill>
+              <a:srgbClr val="F4A825"/>
+            </a:solidFill>
+            <a:prstDash val="solid"/>
+          </a:ln>
+        </p:spPr>
+      </p:sp>
+      <p:sp>
+        <p:nvSpPr>
+          <p:cNvPr id="9" name="Shape 6"/>
+          <p:cNvSpPr/>
+          <p:nvPr/>
+        </p:nvSpPr>
+        <p:spPr>
+          <a:xfrm>
+            <a:off x="9116568" y="182880"/>
+            <a:ext cx="91440" cy="91440"/>
+          </a:xfrm>
+          <a:prstGeom prst="ellipse">
+            <a:avLst/>
+          </a:prstGeom>
+          <a:solidFill>
+            <a:srgbClr val="2E7D5B"/>
+          </a:solidFill>
+          <a:ln w="12700">
+            <a:solidFill>
+              <a:srgbClr val="2E7D5B"/>
+            </a:solidFill>
+            <a:prstDash val="solid"/>
+          </a:ln>
+        </p:spPr>
+      </p:sp>
+      <p:sp>
+        <p:nvSpPr>
+          <p:cNvPr id="10" name="Text 7"/>
+          <p:cNvSpPr/>
+          <p:nvPr/>
+        </p:nvSpPr>
+        <p:spPr>
+          <a:xfrm>
+            <a:off x="9299448" y="109728"/>
+            <a:ext cx="2286000" cy="237744"/>
+          </a:xfrm>
+          <a:prstGeom prst="rect">
+            <a:avLst/>
+          </a:prstGeom>
+          <a:noFill/>
+          <a:ln/>
+        </p:spPr>
+        <p:txBody>
+          <a:bodyPr wrap="square" lIns="0" tIns="0" rIns="0" bIns="0" rtlCol="0" anchor="ctr"/>
+          <a:lstStyle/>
+          <a:p>
+            <a:pPr indent="0" marL="0">
+              <a:buNone/>
+            </a:pPr>
+            <a:r>
+              <a:rPr lang="en-US" sz="800" b="1" spc="100" kern="0" dirty="0">
+                <a:solidFill>
+                  <a:srgbClr val="9FB2C2"/>
+                </a:solidFill>
+                <a:latin typeface="Inter" pitchFamily="34" charset="0"/>
+                <a:ea typeface="Inter" pitchFamily="34" charset="-122"/>
+                <a:cs typeface="Inter" pitchFamily="34" charset="-120"/>
+              </a:rPr>
+              <a:t>MS. RIVERA'S SCREEN · SO FAR</a:t>
+            </a:r>
+            <a:endParaRPr lang="en-US" sz="800" dirty="0"/>
+          </a:p>
+        </p:txBody>
+      </p:sp>
+      <p:sp>
+        <p:nvSpPr>
+          <p:cNvPr id="11" name="Text 8"/>
+          <p:cNvSpPr/>
+          <p:nvPr/>
+        </p:nvSpPr>
+        <p:spPr>
+          <a:xfrm>
+            <a:off x="8860536" y="365760"/>
+            <a:ext cx="2670048" cy="566928"/>
+          </a:xfrm>
+          <a:prstGeom prst="rect">
+            <a:avLst/>
+          </a:prstGeom>
+          <a:noFill/>
+          <a:ln/>
+        </p:spPr>
+        <p:txBody>
+          <a:bodyPr wrap="square" lIns="0" tIns="0" rIns="0" bIns="0" rtlCol="0" anchor="ctr"/>
+          <a:lstStyle/>
+          <a:p>
+            <a:pPr indent="0" marL="0">
+              <a:buNone/>
+            </a:pPr>
+            <a:r>
+              <a:rPr lang="en-US" sz="1000" dirty="0">
+                <a:solidFill>
+                  <a:srgbClr val="1B1F24"/>
+                </a:solidFill>
+                <a:latin typeface="Inter" pitchFamily="34" charset="0"/>
+                <a:ea typeface="Inter" pitchFamily="34" charset="-122"/>
+                <a:cs typeface="Inter" pitchFamily="34" charset="-120"/>
+              </a:rPr>
+              <a:t>Her equity move: build the stretch on purpose, not just the support.</a:t>
+            </a:r>
+            <a:endParaRPr lang="en-US" sz="1000" dirty="0"/>
+          </a:p>
+        </p:txBody>
+      </p:sp>
+      <p:sp>
+        <p:nvSpPr>
+          <p:cNvPr id="12" name="Text 9"/>
           <p:cNvSpPr/>
           <p:nvPr/>
         </p:nvSpPr>
@@ -9308,7 +10964,7 @@
       </p:sp>
       <p:sp>
         <p:nvSpPr>
-          <p:cNvPr id="6" name="Text 3"/>
+          <p:cNvPr id="13" name="Text 10"/>
           <p:cNvSpPr/>
           <p:nvPr/>
         </p:nvSpPr>
@@ -9347,7 +11003,7 @@
       </p:sp>
       <p:sp>
         <p:nvSpPr>
-          <p:cNvPr id="7" name="Shape 4"/>
+          <p:cNvPr id="14" name="Shape 11"/>
           <p:cNvSpPr/>
           <p:nvPr/>
         </p:nvSpPr>
@@ -9374,7 +11030,7 @@
       </p:sp>
       <p:sp>
         <p:nvSpPr>
-          <p:cNvPr id="8" name="Text 5"/>
+          <p:cNvPr id="15" name="Text 12"/>
           <p:cNvSpPr/>
           <p:nvPr/>
         </p:nvSpPr>
@@ -9413,7 +11069,7 @@
       </p:sp>
       <p:sp>
         <p:nvSpPr>
-          <p:cNvPr id="9" name="Text 6"/>
+          <p:cNvPr id="16" name="Text 13"/>
           <p:cNvSpPr/>
           <p:nvPr/>
         </p:nvSpPr>
@@ -9452,7 +11108,7 @@
       </p:sp>
       <p:sp>
         <p:nvSpPr>
-          <p:cNvPr id="10" name="Text 7"/>
+          <p:cNvPr id="17" name="Text 14"/>
           <p:cNvSpPr/>
           <p:nvPr/>
         </p:nvSpPr>
@@ -9639,7 +11295,214 @@
       </p:sp>
       <p:sp>
         <p:nvSpPr>
-          <p:cNvPr id="5" name="Text 2"/>
+          <p:cNvPr id="5" name="Shape 2"/>
+          <p:cNvSpPr/>
+          <p:nvPr/>
+        </p:nvSpPr>
+        <p:spPr>
+          <a:xfrm>
+            <a:off x="8732520" y="109728"/>
+            <a:ext cx="2926080" cy="896112"/>
+          </a:xfrm>
+          <a:prstGeom prst="roundRect">
+            <a:avLst>
+              <a:gd name="adj" fmla="val 7143"/>
+            </a:avLst>
+          </a:prstGeom>
+          <a:solidFill>
+            <a:srgbClr val="1E3A50"/>
+          </a:solidFill>
+          <a:ln w="12700">
+            <a:solidFill>
+              <a:srgbClr val="2A4A63"/>
+            </a:solidFill>
+            <a:prstDash val="solid"/>
+          </a:ln>
+        </p:spPr>
+      </p:sp>
+      <p:sp>
+        <p:nvSpPr>
+          <p:cNvPr id="6" name="Shape 3"/>
+          <p:cNvSpPr/>
+          <p:nvPr/>
+        </p:nvSpPr>
+        <p:spPr>
+          <a:xfrm>
+            <a:off x="8732520" y="109728"/>
+            <a:ext cx="2926080" cy="237744"/>
+          </a:xfrm>
+          <a:prstGeom prst="roundRect">
+            <a:avLst>
+              <a:gd name="adj" fmla="val 26923"/>
+            </a:avLst>
+          </a:prstGeom>
+          <a:solidFill>
+            <a:srgbClr val="0D1E2E"/>
+          </a:solidFill>
+          <a:ln w="12700">
+            <a:solidFill>
+              <a:srgbClr val="0D1E2E"/>
+            </a:solidFill>
+            <a:prstDash val="solid"/>
+          </a:ln>
+        </p:spPr>
+      </p:sp>
+      <p:sp>
+        <p:nvSpPr>
+          <p:cNvPr id="7" name="Shape 4"/>
+          <p:cNvSpPr/>
+          <p:nvPr/>
+        </p:nvSpPr>
+        <p:spPr>
+          <a:xfrm>
+            <a:off x="8823960" y="182880"/>
+            <a:ext cx="91440" cy="91440"/>
+          </a:xfrm>
+          <a:prstGeom prst="ellipse">
+            <a:avLst/>
+          </a:prstGeom>
+          <a:solidFill>
+            <a:srgbClr val="E8837A"/>
+          </a:solidFill>
+          <a:ln w="12700">
+            <a:solidFill>
+              <a:srgbClr val="E8837A"/>
+            </a:solidFill>
+            <a:prstDash val="solid"/>
+          </a:ln>
+        </p:spPr>
+      </p:sp>
+      <p:sp>
+        <p:nvSpPr>
+          <p:cNvPr id="8" name="Shape 5"/>
+          <p:cNvSpPr/>
+          <p:nvPr/>
+        </p:nvSpPr>
+        <p:spPr>
+          <a:xfrm>
+            <a:off x="8970264" y="182880"/>
+            <a:ext cx="91440" cy="91440"/>
+          </a:xfrm>
+          <a:prstGeom prst="ellipse">
+            <a:avLst/>
+          </a:prstGeom>
+          <a:solidFill>
+            <a:srgbClr val="F4A825"/>
+          </a:solidFill>
+          <a:ln w="12700">
+            <a:solidFill>
+              <a:srgbClr val="F4A825"/>
+            </a:solidFill>
+            <a:prstDash val="solid"/>
+          </a:ln>
+        </p:spPr>
+      </p:sp>
+      <p:sp>
+        <p:nvSpPr>
+          <p:cNvPr id="9" name="Shape 6"/>
+          <p:cNvSpPr/>
+          <p:nvPr/>
+        </p:nvSpPr>
+        <p:spPr>
+          <a:xfrm>
+            <a:off x="9116568" y="182880"/>
+            <a:ext cx="91440" cy="91440"/>
+          </a:xfrm>
+          <a:prstGeom prst="ellipse">
+            <a:avLst/>
+          </a:prstGeom>
+          <a:solidFill>
+            <a:srgbClr val="2E7D5B"/>
+          </a:solidFill>
+          <a:ln w="12700">
+            <a:solidFill>
+              <a:srgbClr val="2E7D5B"/>
+            </a:solidFill>
+            <a:prstDash val="solid"/>
+          </a:ln>
+        </p:spPr>
+      </p:sp>
+      <p:sp>
+        <p:nvSpPr>
+          <p:cNvPr id="10" name="Text 7"/>
+          <p:cNvSpPr/>
+          <p:nvPr/>
+        </p:nvSpPr>
+        <p:spPr>
+          <a:xfrm>
+            <a:off x="9299448" y="109728"/>
+            <a:ext cx="2286000" cy="237744"/>
+          </a:xfrm>
+          <a:prstGeom prst="rect">
+            <a:avLst/>
+          </a:prstGeom>
+          <a:noFill/>
+          <a:ln/>
+        </p:spPr>
+        <p:txBody>
+          <a:bodyPr wrap="square" lIns="0" tIns="0" rIns="0" bIns="0" rtlCol="0" anchor="ctr"/>
+          <a:lstStyle/>
+          <a:p>
+            <a:pPr indent="0" marL="0">
+              <a:buNone/>
+            </a:pPr>
+            <a:r>
+              <a:rPr lang="en-US" sz="800" b="1" spc="100" kern="0" dirty="0">
+                <a:solidFill>
+                  <a:srgbClr val="9FB2C2"/>
+                </a:solidFill>
+                <a:latin typeface="Inter" pitchFamily="34" charset="0"/>
+                <a:ea typeface="Inter" pitchFamily="34" charset="-122"/>
+                <a:cs typeface="Inter" pitchFamily="34" charset="-120"/>
+              </a:rPr>
+              <a:t>MS. RIVERA'S SCREEN · SO FAR</a:t>
+            </a:r>
+            <a:endParaRPr lang="en-US" sz="800" dirty="0"/>
+          </a:p>
+        </p:txBody>
+      </p:sp>
+      <p:sp>
+        <p:nvSpPr>
+          <p:cNvPr id="11" name="Text 8"/>
+          <p:cNvSpPr/>
+          <p:nvPr/>
+        </p:nvSpPr>
+        <p:spPr>
+          <a:xfrm>
+            <a:off x="8860536" y="365760"/>
+            <a:ext cx="2670048" cy="566928"/>
+          </a:xfrm>
+          <a:prstGeom prst="rect">
+            <a:avLst/>
+          </a:prstGeom>
+          <a:noFill/>
+          <a:ln/>
+        </p:spPr>
+        <p:txBody>
+          <a:bodyPr wrap="square" lIns="0" tIns="0" rIns="0" bIns="0" rtlCol="0" anchor="ctr"/>
+          <a:lstStyle/>
+          <a:p>
+            <a:pPr indent="0" marL="0">
+              <a:buNone/>
+            </a:pPr>
+            <a:r>
+              <a:rPr lang="en-US" sz="1000" dirty="0">
+                <a:solidFill>
+                  <a:srgbClr val="C9D4DE"/>
+                </a:solidFill>
+                <a:latin typeface="Inter" pitchFamily="34" charset="0"/>
+                <a:ea typeface="Inter" pitchFamily="34" charset="-122"/>
+                <a:cs typeface="Inter" pitchFamily="34" charset="-120"/>
+              </a:rPr>
+              <a:t>Her lab: the lesson she brought, differentiated two directions.</a:t>
+            </a:r>
+            <a:endParaRPr lang="en-US" sz="1000" dirty="0"/>
+          </a:p>
+        </p:txBody>
+      </p:sp>
+      <p:sp>
+        <p:nvSpPr>
+          <p:cNvPr id="12" name="Text 9"/>
           <p:cNvSpPr/>
           <p:nvPr/>
         </p:nvSpPr>
@@ -9678,7 +11541,7 @@
       </p:sp>
       <p:sp>
         <p:nvSpPr>
-          <p:cNvPr id="6" name="Text 3"/>
+          <p:cNvPr id="13" name="Text 10"/>
           <p:cNvSpPr/>
           <p:nvPr/>
         </p:nvSpPr>
@@ -9717,7 +11580,7 @@
       </p:sp>
       <p:sp>
         <p:nvSpPr>
-          <p:cNvPr id="7" name="Text 4"/>
+          <p:cNvPr id="14" name="Text 11"/>
           <p:cNvSpPr/>
           <p:nvPr/>
         </p:nvSpPr>
@@ -9756,7 +11619,7 @@
       </p:sp>
       <p:sp>
         <p:nvSpPr>
-          <p:cNvPr id="8" name="Shape 5"/>
+          <p:cNvPr id="15" name="Shape 12"/>
           <p:cNvSpPr/>
           <p:nvPr/>
         </p:nvSpPr>
@@ -9781,7 +11644,7 @@
       </p:sp>
       <p:sp>
         <p:nvSpPr>
-          <p:cNvPr id="9" name="Text 6"/>
+          <p:cNvPr id="16" name="Text 13"/>
           <p:cNvSpPr/>
           <p:nvPr/>
         </p:nvSpPr>
@@ -9820,7 +11683,7 @@
       </p:sp>
       <p:sp>
         <p:nvSpPr>
-          <p:cNvPr id="10" name="Text 7"/>
+          <p:cNvPr id="17" name="Text 14"/>
           <p:cNvSpPr/>
           <p:nvPr/>
         </p:nvSpPr>
@@ -9859,7 +11722,7 @@
       </p:sp>
       <p:sp>
         <p:nvSpPr>
-          <p:cNvPr id="11" name="Shape 8"/>
+          <p:cNvPr id="18" name="Shape 15"/>
           <p:cNvSpPr/>
           <p:nvPr/>
         </p:nvSpPr>
@@ -9884,7 +11747,7 @@
       </p:sp>
       <p:sp>
         <p:nvSpPr>
-          <p:cNvPr id="12" name="Text 9"/>
+          <p:cNvPr id="19" name="Text 16"/>
           <p:cNvSpPr/>
           <p:nvPr/>
         </p:nvSpPr>
@@ -9923,7 +11786,7 @@
       </p:sp>
       <p:sp>
         <p:nvSpPr>
-          <p:cNvPr id="13" name="Text 10"/>
+          <p:cNvPr id="20" name="Text 17"/>
           <p:cNvSpPr/>
           <p:nvPr/>
         </p:nvSpPr>
@@ -9962,7 +11825,7 @@
       </p:sp>
       <p:sp>
         <p:nvSpPr>
-          <p:cNvPr id="14" name="Shape 11"/>
+          <p:cNvPr id="21" name="Shape 18"/>
           <p:cNvSpPr/>
           <p:nvPr/>
         </p:nvSpPr>
@@ -9987,7 +11850,7 @@
       </p:sp>
       <p:sp>
         <p:nvSpPr>
-          <p:cNvPr id="15" name="Text 12"/>
+          <p:cNvPr id="22" name="Text 19"/>
           <p:cNvSpPr/>
           <p:nvPr/>
         </p:nvSpPr>
@@ -10026,7 +11889,7 @@
       </p:sp>
       <p:sp>
         <p:nvSpPr>
-          <p:cNvPr id="16" name="Text 13"/>
+          <p:cNvPr id="23" name="Text 20"/>
           <p:cNvSpPr/>
           <p:nvPr/>
         </p:nvSpPr>
@@ -10213,7 +12076,214 @@
       </p:sp>
       <p:sp>
         <p:nvSpPr>
-          <p:cNvPr id="5" name="Text 2"/>
+          <p:cNvPr id="5" name="Shape 2"/>
+          <p:cNvSpPr/>
+          <p:nvPr/>
+        </p:nvSpPr>
+        <p:spPr>
+          <a:xfrm>
+            <a:off x="8732520" y="109728"/>
+            <a:ext cx="2926080" cy="896112"/>
+          </a:xfrm>
+          <a:prstGeom prst="roundRect">
+            <a:avLst>
+              <a:gd name="adj" fmla="val 7143"/>
+            </a:avLst>
+          </a:prstGeom>
+          <a:solidFill>
+            <a:srgbClr val="F7F5F0"/>
+          </a:solidFill>
+          <a:ln w="12700">
+            <a:solidFill>
+              <a:srgbClr val="DCE3EA"/>
+            </a:solidFill>
+            <a:prstDash val="solid"/>
+          </a:ln>
+        </p:spPr>
+      </p:sp>
+      <p:sp>
+        <p:nvSpPr>
+          <p:cNvPr id="6" name="Shape 3"/>
+          <p:cNvSpPr/>
+          <p:nvPr/>
+        </p:nvSpPr>
+        <p:spPr>
+          <a:xfrm>
+            <a:off x="8732520" y="109728"/>
+            <a:ext cx="2926080" cy="237744"/>
+          </a:xfrm>
+          <a:prstGeom prst="roundRect">
+            <a:avLst>
+              <a:gd name="adj" fmla="val 26923"/>
+            </a:avLst>
+          </a:prstGeom>
+          <a:solidFill>
+            <a:srgbClr val="0D1E2E"/>
+          </a:solidFill>
+          <a:ln w="12700">
+            <a:solidFill>
+              <a:srgbClr val="0D1E2E"/>
+            </a:solidFill>
+            <a:prstDash val="solid"/>
+          </a:ln>
+        </p:spPr>
+      </p:sp>
+      <p:sp>
+        <p:nvSpPr>
+          <p:cNvPr id="7" name="Shape 4"/>
+          <p:cNvSpPr/>
+          <p:nvPr/>
+        </p:nvSpPr>
+        <p:spPr>
+          <a:xfrm>
+            <a:off x="8823960" y="182880"/>
+            <a:ext cx="91440" cy="91440"/>
+          </a:xfrm>
+          <a:prstGeom prst="ellipse">
+            <a:avLst/>
+          </a:prstGeom>
+          <a:solidFill>
+            <a:srgbClr val="E8837A"/>
+          </a:solidFill>
+          <a:ln w="12700">
+            <a:solidFill>
+              <a:srgbClr val="E8837A"/>
+            </a:solidFill>
+            <a:prstDash val="solid"/>
+          </a:ln>
+        </p:spPr>
+      </p:sp>
+      <p:sp>
+        <p:nvSpPr>
+          <p:cNvPr id="8" name="Shape 5"/>
+          <p:cNvSpPr/>
+          <p:nvPr/>
+        </p:nvSpPr>
+        <p:spPr>
+          <a:xfrm>
+            <a:off x="8970264" y="182880"/>
+            <a:ext cx="91440" cy="91440"/>
+          </a:xfrm>
+          <a:prstGeom prst="ellipse">
+            <a:avLst/>
+          </a:prstGeom>
+          <a:solidFill>
+            <a:srgbClr val="F4A825"/>
+          </a:solidFill>
+          <a:ln w="12700">
+            <a:solidFill>
+              <a:srgbClr val="F4A825"/>
+            </a:solidFill>
+            <a:prstDash val="solid"/>
+          </a:ln>
+        </p:spPr>
+      </p:sp>
+      <p:sp>
+        <p:nvSpPr>
+          <p:cNvPr id="9" name="Shape 6"/>
+          <p:cNvSpPr/>
+          <p:nvPr/>
+        </p:nvSpPr>
+        <p:spPr>
+          <a:xfrm>
+            <a:off x="9116568" y="182880"/>
+            <a:ext cx="91440" cy="91440"/>
+          </a:xfrm>
+          <a:prstGeom prst="ellipse">
+            <a:avLst/>
+          </a:prstGeom>
+          <a:solidFill>
+            <a:srgbClr val="2E7D5B"/>
+          </a:solidFill>
+          <a:ln w="12700">
+            <a:solidFill>
+              <a:srgbClr val="2E7D5B"/>
+            </a:solidFill>
+            <a:prstDash val="solid"/>
+          </a:ln>
+        </p:spPr>
+      </p:sp>
+      <p:sp>
+        <p:nvSpPr>
+          <p:cNvPr id="10" name="Text 7"/>
+          <p:cNvSpPr/>
+          <p:nvPr/>
+        </p:nvSpPr>
+        <p:spPr>
+          <a:xfrm>
+            <a:off x="9299448" y="109728"/>
+            <a:ext cx="2286000" cy="237744"/>
+          </a:xfrm>
+          <a:prstGeom prst="rect">
+            <a:avLst/>
+          </a:prstGeom>
+          <a:noFill/>
+          <a:ln/>
+        </p:spPr>
+        <p:txBody>
+          <a:bodyPr wrap="square" lIns="0" tIns="0" rIns="0" bIns="0" rtlCol="0" anchor="ctr"/>
+          <a:lstStyle/>
+          <a:p>
+            <a:pPr indent="0" marL="0">
+              <a:buNone/>
+            </a:pPr>
+            <a:r>
+              <a:rPr lang="en-US" sz="800" b="1" spc="100" kern="0" dirty="0">
+                <a:solidFill>
+                  <a:srgbClr val="9FB2C2"/>
+                </a:solidFill>
+                <a:latin typeface="Inter" pitchFamily="34" charset="0"/>
+                <a:ea typeface="Inter" pitchFamily="34" charset="-122"/>
+                <a:cs typeface="Inter" pitchFamily="34" charset="-120"/>
+              </a:rPr>
+              <a:t>MS. RIVERA'S SCREEN · SO FAR</a:t>
+            </a:r>
+            <a:endParaRPr lang="en-US" sz="800" dirty="0"/>
+          </a:p>
+        </p:txBody>
+      </p:sp>
+      <p:sp>
+        <p:nvSpPr>
+          <p:cNvPr id="11" name="Text 8"/>
+          <p:cNvSpPr/>
+          <p:nvPr/>
+        </p:nvSpPr>
+        <p:spPr>
+          <a:xfrm>
+            <a:off x="8860536" y="365760"/>
+            <a:ext cx="2670048" cy="566928"/>
+          </a:xfrm>
+          <a:prstGeom prst="rect">
+            <a:avLst/>
+          </a:prstGeom>
+          <a:noFill/>
+          <a:ln/>
+        </p:spPr>
+        <p:txBody>
+          <a:bodyPr wrap="square" lIns="0" tIns="0" rIns="0" bIns="0" rtlCol="0" anchor="ctr"/>
+          <a:lstStyle/>
+          <a:p>
+            <a:pPr indent="0" marL="0">
+              <a:buNone/>
+            </a:pPr>
+            <a:r>
+              <a:rPr lang="en-US" sz="1000" dirty="0">
+                <a:solidFill>
+                  <a:srgbClr val="1B1F24"/>
+                </a:solidFill>
+                <a:latin typeface="Inter" pitchFamily="34" charset="0"/>
+                <a:ea typeface="Inter" pitchFamily="34" charset="-122"/>
+                <a:cs typeface="Inter" pitchFamily="34" charset="-120"/>
+              </a:rPr>
+              <a:t>Her dilemma: differentiation worked when she managed it; the hours didn't exist.</a:t>
+            </a:r>
+            <a:endParaRPr lang="en-US" sz="1000" dirty="0"/>
+          </a:p>
+        </p:txBody>
+      </p:sp>
+      <p:sp>
+        <p:nvSpPr>
+          <p:cNvPr id="12" name="Text 9"/>
           <p:cNvSpPr/>
           <p:nvPr/>
         </p:nvSpPr>
@@ -10252,7 +12322,7 @@
       </p:sp>
       <p:sp>
         <p:nvSpPr>
-          <p:cNvPr id="6" name="Text 3"/>
+          <p:cNvPr id="13" name="Text 10"/>
           <p:cNvSpPr/>
           <p:nvPr/>
         </p:nvSpPr>
@@ -10291,7 +12361,7 @@
       </p:sp>
       <p:sp>
         <p:nvSpPr>
-          <p:cNvPr id="7" name="Shape 4"/>
+          <p:cNvPr id="14" name="Shape 11"/>
           <p:cNvSpPr/>
           <p:nvPr/>
         </p:nvSpPr>
@@ -10318,7 +12388,7 @@
       </p:sp>
       <p:sp>
         <p:nvSpPr>
-          <p:cNvPr id="8" name="Text 5"/>
+          <p:cNvPr id="15" name="Text 12"/>
           <p:cNvSpPr/>
           <p:nvPr/>
         </p:nvSpPr>
@@ -10357,7 +12427,7 @@
       </p:sp>
       <p:sp>
         <p:nvSpPr>
-          <p:cNvPr id="9" name="Text 6"/>
+          <p:cNvPr id="16" name="Text 13"/>
           <p:cNvSpPr/>
           <p:nvPr/>
         </p:nvSpPr>
@@ -10413,7 +12483,7 @@
       </p:sp>
       <p:sp>
         <p:nvSpPr>
-          <p:cNvPr id="10" name="Shape 7"/>
+          <p:cNvPr id="17" name="Shape 14"/>
           <p:cNvSpPr/>
           <p:nvPr/>
         </p:nvSpPr>
@@ -10440,7 +12510,7 @@
       </p:sp>
       <p:sp>
         <p:nvSpPr>
-          <p:cNvPr id="11" name="Text 8"/>
+          <p:cNvPr id="18" name="Text 15"/>
           <p:cNvSpPr/>
           <p:nvPr/>
         </p:nvSpPr>
@@ -10479,7 +12549,7 @@
       </p:sp>
       <p:sp>
         <p:nvSpPr>
-          <p:cNvPr id="12" name="Text 9"/>
+          <p:cNvPr id="19" name="Text 16"/>
           <p:cNvSpPr/>
           <p:nvPr/>
         </p:nvSpPr>
@@ -10535,7 +12605,7 @@
       </p:sp>
       <p:sp>
         <p:nvSpPr>
-          <p:cNvPr id="13" name="Text 10"/>
+          <p:cNvPr id="20" name="Text 17"/>
           <p:cNvSpPr/>
           <p:nvPr/>
         </p:nvSpPr>
@@ -10722,7 +12792,214 @@
       </p:sp>
       <p:sp>
         <p:nvSpPr>
-          <p:cNvPr id="5" name="Text 2"/>
+          <p:cNvPr id="5" name="Shape 2"/>
+          <p:cNvSpPr/>
+          <p:nvPr/>
+        </p:nvSpPr>
+        <p:spPr>
+          <a:xfrm>
+            <a:off x="8732520" y="109728"/>
+            <a:ext cx="2926080" cy="896112"/>
+          </a:xfrm>
+          <a:prstGeom prst="roundRect">
+            <a:avLst>
+              <a:gd name="adj" fmla="val 7143"/>
+            </a:avLst>
+          </a:prstGeom>
+          <a:solidFill>
+            <a:srgbClr val="F7F5F0"/>
+          </a:solidFill>
+          <a:ln w="12700">
+            <a:solidFill>
+              <a:srgbClr val="DCE3EA"/>
+            </a:solidFill>
+            <a:prstDash val="solid"/>
+          </a:ln>
+        </p:spPr>
+      </p:sp>
+      <p:sp>
+        <p:nvSpPr>
+          <p:cNvPr id="6" name="Shape 3"/>
+          <p:cNvSpPr/>
+          <p:nvPr/>
+        </p:nvSpPr>
+        <p:spPr>
+          <a:xfrm>
+            <a:off x="8732520" y="109728"/>
+            <a:ext cx="2926080" cy="237744"/>
+          </a:xfrm>
+          <a:prstGeom prst="roundRect">
+            <a:avLst>
+              <a:gd name="adj" fmla="val 26923"/>
+            </a:avLst>
+          </a:prstGeom>
+          <a:solidFill>
+            <a:srgbClr val="0D1E2E"/>
+          </a:solidFill>
+          <a:ln w="12700">
+            <a:solidFill>
+              <a:srgbClr val="0D1E2E"/>
+            </a:solidFill>
+            <a:prstDash val="solid"/>
+          </a:ln>
+        </p:spPr>
+      </p:sp>
+      <p:sp>
+        <p:nvSpPr>
+          <p:cNvPr id="7" name="Shape 4"/>
+          <p:cNvSpPr/>
+          <p:nvPr/>
+        </p:nvSpPr>
+        <p:spPr>
+          <a:xfrm>
+            <a:off x="8823960" y="182880"/>
+            <a:ext cx="91440" cy="91440"/>
+          </a:xfrm>
+          <a:prstGeom prst="ellipse">
+            <a:avLst/>
+          </a:prstGeom>
+          <a:solidFill>
+            <a:srgbClr val="E8837A"/>
+          </a:solidFill>
+          <a:ln w="12700">
+            <a:solidFill>
+              <a:srgbClr val="E8837A"/>
+            </a:solidFill>
+            <a:prstDash val="solid"/>
+          </a:ln>
+        </p:spPr>
+      </p:sp>
+      <p:sp>
+        <p:nvSpPr>
+          <p:cNvPr id="8" name="Shape 5"/>
+          <p:cNvSpPr/>
+          <p:nvPr/>
+        </p:nvSpPr>
+        <p:spPr>
+          <a:xfrm>
+            <a:off x="8970264" y="182880"/>
+            <a:ext cx="91440" cy="91440"/>
+          </a:xfrm>
+          <a:prstGeom prst="ellipse">
+            <a:avLst/>
+          </a:prstGeom>
+          <a:solidFill>
+            <a:srgbClr val="F4A825"/>
+          </a:solidFill>
+          <a:ln w="12700">
+            <a:solidFill>
+              <a:srgbClr val="F4A825"/>
+            </a:solidFill>
+            <a:prstDash val="solid"/>
+          </a:ln>
+        </p:spPr>
+      </p:sp>
+      <p:sp>
+        <p:nvSpPr>
+          <p:cNvPr id="9" name="Shape 6"/>
+          <p:cNvSpPr/>
+          <p:nvPr/>
+        </p:nvSpPr>
+        <p:spPr>
+          <a:xfrm>
+            <a:off x="9116568" y="182880"/>
+            <a:ext cx="91440" cy="91440"/>
+          </a:xfrm>
+          <a:prstGeom prst="ellipse">
+            <a:avLst/>
+          </a:prstGeom>
+          <a:solidFill>
+            <a:srgbClr val="2E7D5B"/>
+          </a:solidFill>
+          <a:ln w="12700">
+            <a:solidFill>
+              <a:srgbClr val="2E7D5B"/>
+            </a:solidFill>
+            <a:prstDash val="solid"/>
+          </a:ln>
+        </p:spPr>
+      </p:sp>
+      <p:sp>
+        <p:nvSpPr>
+          <p:cNvPr id="10" name="Text 7"/>
+          <p:cNvSpPr/>
+          <p:nvPr/>
+        </p:nvSpPr>
+        <p:spPr>
+          <a:xfrm>
+            <a:off x="9299448" y="109728"/>
+            <a:ext cx="2286000" cy="237744"/>
+          </a:xfrm>
+          <a:prstGeom prst="rect">
+            <a:avLst/>
+          </a:prstGeom>
+          <a:noFill/>
+          <a:ln/>
+        </p:spPr>
+        <p:txBody>
+          <a:bodyPr wrap="square" lIns="0" tIns="0" rIns="0" bIns="0" rtlCol="0" anchor="ctr"/>
+          <a:lstStyle/>
+          <a:p>
+            <a:pPr indent="0" marL="0">
+              <a:buNone/>
+            </a:pPr>
+            <a:r>
+              <a:rPr lang="en-US" sz="800" b="1" spc="100" kern="0" dirty="0">
+                <a:solidFill>
+                  <a:srgbClr val="9FB2C2"/>
+                </a:solidFill>
+                <a:latin typeface="Inter" pitchFamily="34" charset="0"/>
+                <a:ea typeface="Inter" pitchFamily="34" charset="-122"/>
+                <a:cs typeface="Inter" pitchFamily="34" charset="-120"/>
+              </a:rPr>
+              <a:t>MS. RIVERA'S SCREEN · SO FAR</a:t>
+            </a:r>
+            <a:endParaRPr lang="en-US" sz="800" dirty="0"/>
+          </a:p>
+        </p:txBody>
+      </p:sp>
+      <p:sp>
+        <p:nvSpPr>
+          <p:cNvPr id="11" name="Text 8"/>
+          <p:cNvSpPr/>
+          <p:nvPr/>
+        </p:nvSpPr>
+        <p:spPr>
+          <a:xfrm>
+            <a:off x="8860536" y="365760"/>
+            <a:ext cx="2670048" cy="566928"/>
+          </a:xfrm>
+          <a:prstGeom prst="rect">
+            <a:avLst/>
+          </a:prstGeom>
+          <a:noFill/>
+          <a:ln/>
+        </p:spPr>
+        <p:txBody>
+          <a:bodyPr wrap="square" lIns="0" tIns="0" rIns="0" bIns="0" rtlCol="0" anchor="ctr"/>
+          <a:lstStyle/>
+          <a:p>
+            <a:pPr indent="0" marL="0">
+              <a:buNone/>
+            </a:pPr>
+            <a:r>
+              <a:rPr lang="en-US" sz="1000" dirty="0">
+                <a:solidFill>
+                  <a:srgbClr val="1B1F24"/>
+                </a:solidFill>
+                <a:latin typeface="Inter" pitchFamily="34" charset="0"/>
+                <a:ea typeface="Inter" pitchFamily="34" charset="-122"/>
+                <a:cs typeface="Inter" pitchFamily="34" charset="-120"/>
+              </a:rPr>
+              <a:t>On her screen: the core artifact, drafted to 80%, not polished.</a:t>
+            </a:r>
+            <a:endParaRPr lang="en-US" sz="1000" dirty="0"/>
+          </a:p>
+        </p:txBody>
+      </p:sp>
+      <p:sp>
+        <p:nvSpPr>
+          <p:cNvPr id="12" name="Text 9"/>
           <p:cNvSpPr/>
           <p:nvPr/>
         </p:nvSpPr>
@@ -10761,7 +13038,7 @@
       </p:sp>
       <p:sp>
         <p:nvSpPr>
-          <p:cNvPr id="6" name="Text 3"/>
+          <p:cNvPr id="13" name="Text 10"/>
           <p:cNvSpPr/>
           <p:nvPr/>
         </p:nvSpPr>
@@ -10800,7 +13077,7 @@
       </p:sp>
       <p:sp>
         <p:nvSpPr>
-          <p:cNvPr id="7" name="Shape 4"/>
+          <p:cNvPr id="14" name="Shape 11"/>
           <p:cNvSpPr/>
           <p:nvPr/>
         </p:nvSpPr>
@@ -10827,7 +13104,7 @@
       </p:sp>
       <p:sp>
         <p:nvSpPr>
-          <p:cNvPr id="8" name="Text 5"/>
+          <p:cNvPr id="15" name="Text 12"/>
           <p:cNvSpPr/>
           <p:nvPr/>
         </p:nvSpPr>
@@ -10866,7 +13143,7 @@
       </p:sp>
       <p:sp>
         <p:nvSpPr>
-          <p:cNvPr id="9" name="Shape 6"/>
+          <p:cNvPr id="16" name="Shape 13"/>
           <p:cNvSpPr/>
           <p:nvPr/>
         </p:nvSpPr>
@@ -10893,7 +13170,7 @@
       </p:sp>
       <p:sp>
         <p:nvSpPr>
-          <p:cNvPr id="10" name="Text 7"/>
+          <p:cNvPr id="17" name="Text 14"/>
           <p:cNvSpPr/>
           <p:nvPr/>
         </p:nvSpPr>
@@ -10932,7 +13209,7 @@
       </p:sp>
       <p:sp>
         <p:nvSpPr>
-          <p:cNvPr id="11" name="Shape 8"/>
+          <p:cNvPr id="18" name="Shape 15"/>
           <p:cNvSpPr/>
           <p:nvPr/>
         </p:nvSpPr>
@@ -10959,7 +13236,7 @@
       </p:sp>
       <p:sp>
         <p:nvSpPr>
-          <p:cNvPr id="12" name="Text 9"/>
+          <p:cNvPr id="19" name="Text 16"/>
           <p:cNvSpPr/>
           <p:nvPr/>
         </p:nvSpPr>
@@ -10998,7 +13275,7 @@
       </p:sp>
       <p:sp>
         <p:nvSpPr>
-          <p:cNvPr id="13" name="Shape 10"/>
+          <p:cNvPr id="20" name="Shape 17"/>
           <p:cNvSpPr/>
           <p:nvPr/>
         </p:nvSpPr>
@@ -11025,7 +13302,7 @@
       </p:sp>
       <p:sp>
         <p:nvSpPr>
-          <p:cNvPr id="14" name="Text 11"/>
+          <p:cNvPr id="21" name="Text 18"/>
           <p:cNvSpPr/>
           <p:nvPr/>
         </p:nvSpPr>
@@ -11064,7 +13341,7 @@
       </p:sp>
       <p:sp>
         <p:nvSpPr>
-          <p:cNvPr id="15" name="Text 12"/>
+          <p:cNvPr id="22" name="Text 19"/>
           <p:cNvSpPr/>
           <p:nvPr/>
         </p:nvSpPr>
@@ -11251,7 +13528,214 @@
       </p:sp>
       <p:sp>
         <p:nvSpPr>
-          <p:cNvPr id="5" name="Text 2"/>
+          <p:cNvPr id="5" name="Shape 2"/>
+          <p:cNvSpPr/>
+          <p:nvPr/>
+        </p:nvSpPr>
+        <p:spPr>
+          <a:xfrm>
+            <a:off x="8732520" y="109728"/>
+            <a:ext cx="2926080" cy="896112"/>
+          </a:xfrm>
+          <a:prstGeom prst="roundRect">
+            <a:avLst>
+              <a:gd name="adj" fmla="val 7143"/>
+            </a:avLst>
+          </a:prstGeom>
+          <a:solidFill>
+            <a:srgbClr val="F7F5F0"/>
+          </a:solidFill>
+          <a:ln w="12700">
+            <a:solidFill>
+              <a:srgbClr val="DCE3EA"/>
+            </a:solidFill>
+            <a:prstDash val="solid"/>
+          </a:ln>
+        </p:spPr>
+      </p:sp>
+      <p:sp>
+        <p:nvSpPr>
+          <p:cNvPr id="6" name="Shape 3"/>
+          <p:cNvSpPr/>
+          <p:nvPr/>
+        </p:nvSpPr>
+        <p:spPr>
+          <a:xfrm>
+            <a:off x="8732520" y="109728"/>
+            <a:ext cx="2926080" cy="237744"/>
+          </a:xfrm>
+          <a:prstGeom prst="roundRect">
+            <a:avLst>
+              <a:gd name="adj" fmla="val 26923"/>
+            </a:avLst>
+          </a:prstGeom>
+          <a:solidFill>
+            <a:srgbClr val="0D1E2E"/>
+          </a:solidFill>
+          <a:ln w="12700">
+            <a:solidFill>
+              <a:srgbClr val="0D1E2E"/>
+            </a:solidFill>
+            <a:prstDash val="solid"/>
+          </a:ln>
+        </p:spPr>
+      </p:sp>
+      <p:sp>
+        <p:nvSpPr>
+          <p:cNvPr id="7" name="Shape 4"/>
+          <p:cNvSpPr/>
+          <p:nvPr/>
+        </p:nvSpPr>
+        <p:spPr>
+          <a:xfrm>
+            <a:off x="8823960" y="182880"/>
+            <a:ext cx="91440" cy="91440"/>
+          </a:xfrm>
+          <a:prstGeom prst="ellipse">
+            <a:avLst/>
+          </a:prstGeom>
+          <a:solidFill>
+            <a:srgbClr val="E8837A"/>
+          </a:solidFill>
+          <a:ln w="12700">
+            <a:solidFill>
+              <a:srgbClr val="E8837A"/>
+            </a:solidFill>
+            <a:prstDash val="solid"/>
+          </a:ln>
+        </p:spPr>
+      </p:sp>
+      <p:sp>
+        <p:nvSpPr>
+          <p:cNvPr id="8" name="Shape 5"/>
+          <p:cNvSpPr/>
+          <p:nvPr/>
+        </p:nvSpPr>
+        <p:spPr>
+          <a:xfrm>
+            <a:off x="8970264" y="182880"/>
+            <a:ext cx="91440" cy="91440"/>
+          </a:xfrm>
+          <a:prstGeom prst="ellipse">
+            <a:avLst/>
+          </a:prstGeom>
+          <a:solidFill>
+            <a:srgbClr val="F4A825"/>
+          </a:solidFill>
+          <a:ln w="12700">
+            <a:solidFill>
+              <a:srgbClr val="F4A825"/>
+            </a:solidFill>
+            <a:prstDash val="solid"/>
+          </a:ln>
+        </p:spPr>
+      </p:sp>
+      <p:sp>
+        <p:nvSpPr>
+          <p:cNvPr id="9" name="Shape 6"/>
+          <p:cNvSpPr/>
+          <p:nvPr/>
+        </p:nvSpPr>
+        <p:spPr>
+          <a:xfrm>
+            <a:off x="9116568" y="182880"/>
+            <a:ext cx="91440" cy="91440"/>
+          </a:xfrm>
+          <a:prstGeom prst="ellipse">
+            <a:avLst/>
+          </a:prstGeom>
+          <a:solidFill>
+            <a:srgbClr val="2E7D5B"/>
+          </a:solidFill>
+          <a:ln w="12700">
+            <a:solidFill>
+              <a:srgbClr val="2E7D5B"/>
+            </a:solidFill>
+            <a:prstDash val="solid"/>
+          </a:ln>
+        </p:spPr>
+      </p:sp>
+      <p:sp>
+        <p:nvSpPr>
+          <p:cNvPr id="10" name="Text 7"/>
+          <p:cNvSpPr/>
+          <p:nvPr/>
+        </p:nvSpPr>
+        <p:spPr>
+          <a:xfrm>
+            <a:off x="9299448" y="109728"/>
+            <a:ext cx="2286000" cy="237744"/>
+          </a:xfrm>
+          <a:prstGeom prst="rect">
+            <a:avLst/>
+          </a:prstGeom>
+          <a:noFill/>
+          <a:ln/>
+        </p:spPr>
+        <p:txBody>
+          <a:bodyPr wrap="square" lIns="0" tIns="0" rIns="0" bIns="0" rtlCol="0" anchor="ctr"/>
+          <a:lstStyle/>
+          <a:p>
+            <a:pPr indent="0" marL="0">
+              <a:buNone/>
+            </a:pPr>
+            <a:r>
+              <a:rPr lang="en-US" sz="800" b="1" spc="100" kern="0" dirty="0">
+                <a:solidFill>
+                  <a:srgbClr val="9FB2C2"/>
+                </a:solidFill>
+                <a:latin typeface="Inter" pitchFamily="34" charset="0"/>
+                <a:ea typeface="Inter" pitchFamily="34" charset="-122"/>
+                <a:cs typeface="Inter" pitchFamily="34" charset="-120"/>
+              </a:rPr>
+              <a:t>MS. RIVERA'S SCREEN · SO FAR</a:t>
+            </a:r>
+            <a:endParaRPr lang="en-US" sz="800" dirty="0"/>
+          </a:p>
+        </p:txBody>
+      </p:sp>
+      <p:sp>
+        <p:nvSpPr>
+          <p:cNvPr id="11" name="Text 8"/>
+          <p:cNvSpPr/>
+          <p:nvPr/>
+        </p:nvSpPr>
+        <p:spPr>
+          <a:xfrm>
+            <a:off x="8860536" y="365760"/>
+            <a:ext cx="2670048" cy="566928"/>
+          </a:xfrm>
+          <a:prstGeom prst="rect">
+            <a:avLst/>
+          </a:prstGeom>
+          <a:noFill/>
+          <a:ln/>
+        </p:spPr>
+        <p:txBody>
+          <a:bodyPr wrap="square" lIns="0" tIns="0" rIns="0" bIns="0" rtlCol="0" anchor="ctr"/>
+          <a:lstStyle/>
+          <a:p>
+            <a:pPr indent="0" marL="0">
+              <a:buNone/>
+            </a:pPr>
+            <a:r>
+              <a:rPr lang="en-US" sz="1000" dirty="0">
+                <a:solidFill>
+                  <a:srgbClr val="1B1F24"/>
+                </a:solidFill>
+                <a:latin typeface="Inter" pitchFamily="34" charset="0"/>
+                <a:ea typeface="Inter" pitchFamily="34" charset="-122"/>
+                <a:cs typeface="Inter" pitchFamily="34" charset="-120"/>
+              </a:rPr>
+              <a:t>Her two follow-ups in the same chat: support version, then stretch.</a:t>
+            </a:r>
+            <a:endParaRPr lang="en-US" sz="1000" dirty="0"/>
+          </a:p>
+        </p:txBody>
+      </p:sp>
+      <p:sp>
+        <p:nvSpPr>
+          <p:cNvPr id="12" name="Text 9"/>
           <p:cNvSpPr/>
           <p:nvPr/>
         </p:nvSpPr>
@@ -11290,7 +13774,7 @@
       </p:sp>
       <p:sp>
         <p:nvSpPr>
-          <p:cNvPr id="6" name="Text 3"/>
+          <p:cNvPr id="13" name="Text 10"/>
           <p:cNvSpPr/>
           <p:nvPr/>
         </p:nvSpPr>
@@ -11329,7 +13813,7 @@
       </p:sp>
       <p:sp>
         <p:nvSpPr>
-          <p:cNvPr id="7" name="Shape 4"/>
+          <p:cNvPr id="14" name="Shape 11"/>
           <p:cNvSpPr/>
           <p:nvPr/>
         </p:nvSpPr>
@@ -11356,7 +13840,7 @@
       </p:sp>
       <p:sp>
         <p:nvSpPr>
-          <p:cNvPr id="8" name="Text 5"/>
+          <p:cNvPr id="15" name="Text 12"/>
           <p:cNvSpPr/>
           <p:nvPr/>
         </p:nvSpPr>
@@ -11395,7 +13879,7 @@
       </p:sp>
       <p:sp>
         <p:nvSpPr>
-          <p:cNvPr id="9" name="Text 6"/>
+          <p:cNvPr id="16" name="Text 13"/>
           <p:cNvSpPr/>
           <p:nvPr/>
         </p:nvSpPr>
@@ -11434,7 +13918,7 @@
       </p:sp>
       <p:sp>
         <p:nvSpPr>
-          <p:cNvPr id="10" name="Shape 7"/>
+          <p:cNvPr id="17" name="Shape 14"/>
           <p:cNvSpPr/>
           <p:nvPr/>
         </p:nvSpPr>
@@ -11461,7 +13945,7 @@
       </p:sp>
       <p:sp>
         <p:nvSpPr>
-          <p:cNvPr id="11" name="Text 8"/>
+          <p:cNvPr id="18" name="Text 15"/>
           <p:cNvSpPr/>
           <p:nvPr/>
         </p:nvSpPr>
@@ -11500,7 +13984,7 @@
       </p:sp>
       <p:sp>
         <p:nvSpPr>
-          <p:cNvPr id="12" name="Text 9"/>
+          <p:cNvPr id="19" name="Text 16"/>
           <p:cNvSpPr/>
           <p:nvPr/>
         </p:nvSpPr>
@@ -11539,7 +14023,7 @@
       </p:sp>
       <p:sp>
         <p:nvSpPr>
-          <p:cNvPr id="13" name="Text 10"/>
+          <p:cNvPr id="20" name="Text 17"/>
           <p:cNvSpPr/>
           <p:nvPr/>
         </p:nvSpPr>
@@ -11726,7 +14210,214 @@
       </p:sp>
       <p:sp>
         <p:nvSpPr>
-          <p:cNvPr id="5" name="Text 2"/>
+          <p:cNvPr id="5" name="Shape 2"/>
+          <p:cNvSpPr/>
+          <p:nvPr/>
+        </p:nvSpPr>
+        <p:spPr>
+          <a:xfrm>
+            <a:off x="8732520" y="109728"/>
+            <a:ext cx="2926080" cy="896112"/>
+          </a:xfrm>
+          <a:prstGeom prst="roundRect">
+            <a:avLst>
+              <a:gd name="adj" fmla="val 7143"/>
+            </a:avLst>
+          </a:prstGeom>
+          <a:solidFill>
+            <a:srgbClr val="F7F5F0"/>
+          </a:solidFill>
+          <a:ln w="12700">
+            <a:solidFill>
+              <a:srgbClr val="DCE3EA"/>
+            </a:solidFill>
+            <a:prstDash val="solid"/>
+          </a:ln>
+        </p:spPr>
+      </p:sp>
+      <p:sp>
+        <p:nvSpPr>
+          <p:cNvPr id="6" name="Shape 3"/>
+          <p:cNvSpPr/>
+          <p:nvPr/>
+        </p:nvSpPr>
+        <p:spPr>
+          <a:xfrm>
+            <a:off x="8732520" y="109728"/>
+            <a:ext cx="2926080" cy="237744"/>
+          </a:xfrm>
+          <a:prstGeom prst="roundRect">
+            <a:avLst>
+              <a:gd name="adj" fmla="val 26923"/>
+            </a:avLst>
+          </a:prstGeom>
+          <a:solidFill>
+            <a:srgbClr val="0D1E2E"/>
+          </a:solidFill>
+          <a:ln w="12700">
+            <a:solidFill>
+              <a:srgbClr val="0D1E2E"/>
+            </a:solidFill>
+            <a:prstDash val="solid"/>
+          </a:ln>
+        </p:spPr>
+      </p:sp>
+      <p:sp>
+        <p:nvSpPr>
+          <p:cNvPr id="7" name="Shape 4"/>
+          <p:cNvSpPr/>
+          <p:nvPr/>
+        </p:nvSpPr>
+        <p:spPr>
+          <a:xfrm>
+            <a:off x="8823960" y="182880"/>
+            <a:ext cx="91440" cy="91440"/>
+          </a:xfrm>
+          <a:prstGeom prst="ellipse">
+            <a:avLst/>
+          </a:prstGeom>
+          <a:solidFill>
+            <a:srgbClr val="E8837A"/>
+          </a:solidFill>
+          <a:ln w="12700">
+            <a:solidFill>
+              <a:srgbClr val="E8837A"/>
+            </a:solidFill>
+            <a:prstDash val="solid"/>
+          </a:ln>
+        </p:spPr>
+      </p:sp>
+      <p:sp>
+        <p:nvSpPr>
+          <p:cNvPr id="8" name="Shape 5"/>
+          <p:cNvSpPr/>
+          <p:nvPr/>
+        </p:nvSpPr>
+        <p:spPr>
+          <a:xfrm>
+            <a:off x="8970264" y="182880"/>
+            <a:ext cx="91440" cy="91440"/>
+          </a:xfrm>
+          <a:prstGeom prst="ellipse">
+            <a:avLst/>
+          </a:prstGeom>
+          <a:solidFill>
+            <a:srgbClr val="F4A825"/>
+          </a:solidFill>
+          <a:ln w="12700">
+            <a:solidFill>
+              <a:srgbClr val="F4A825"/>
+            </a:solidFill>
+            <a:prstDash val="solid"/>
+          </a:ln>
+        </p:spPr>
+      </p:sp>
+      <p:sp>
+        <p:nvSpPr>
+          <p:cNvPr id="9" name="Shape 6"/>
+          <p:cNvSpPr/>
+          <p:nvPr/>
+        </p:nvSpPr>
+        <p:spPr>
+          <a:xfrm>
+            <a:off x="9116568" y="182880"/>
+            <a:ext cx="91440" cy="91440"/>
+          </a:xfrm>
+          <a:prstGeom prst="ellipse">
+            <a:avLst/>
+          </a:prstGeom>
+          <a:solidFill>
+            <a:srgbClr val="2E7D5B"/>
+          </a:solidFill>
+          <a:ln w="12700">
+            <a:solidFill>
+              <a:srgbClr val="2E7D5B"/>
+            </a:solidFill>
+            <a:prstDash val="solid"/>
+          </a:ln>
+        </p:spPr>
+      </p:sp>
+      <p:sp>
+        <p:nvSpPr>
+          <p:cNvPr id="10" name="Text 7"/>
+          <p:cNvSpPr/>
+          <p:nvPr/>
+        </p:nvSpPr>
+        <p:spPr>
+          <a:xfrm>
+            <a:off x="9299448" y="109728"/>
+            <a:ext cx="2286000" cy="237744"/>
+          </a:xfrm>
+          <a:prstGeom prst="rect">
+            <a:avLst/>
+          </a:prstGeom>
+          <a:noFill/>
+          <a:ln/>
+        </p:spPr>
+        <p:txBody>
+          <a:bodyPr wrap="square" lIns="0" tIns="0" rIns="0" bIns="0" rtlCol="0" anchor="ctr"/>
+          <a:lstStyle/>
+          <a:p>
+            <a:pPr indent="0" marL="0">
+              <a:buNone/>
+            </a:pPr>
+            <a:r>
+              <a:rPr lang="en-US" sz="800" b="1" spc="100" kern="0" dirty="0">
+                <a:solidFill>
+                  <a:srgbClr val="9FB2C2"/>
+                </a:solidFill>
+                <a:latin typeface="Inter" pitchFamily="34" charset="0"/>
+                <a:ea typeface="Inter" pitchFamily="34" charset="-122"/>
+                <a:cs typeface="Inter" pitchFamily="34" charset="-120"/>
+              </a:rPr>
+              <a:t>MS. RIVERA'S SCREEN · SO FAR</a:t>
+            </a:r>
+            <a:endParaRPr lang="en-US" sz="800" dirty="0"/>
+          </a:p>
+        </p:txBody>
+      </p:sp>
+      <p:sp>
+        <p:nvSpPr>
+          <p:cNvPr id="11" name="Text 8"/>
+          <p:cNvSpPr/>
+          <p:nvPr/>
+        </p:nvSpPr>
+        <p:spPr>
+          <a:xfrm>
+            <a:off x="8860536" y="365760"/>
+            <a:ext cx="2670048" cy="566928"/>
+          </a:xfrm>
+          <a:prstGeom prst="rect">
+            <a:avLst/>
+          </a:prstGeom>
+          <a:noFill/>
+          <a:ln/>
+        </p:spPr>
+        <p:txBody>
+          <a:bodyPr wrap="square" lIns="0" tIns="0" rIns="0" bIns="0" rtlCol="0" anchor="ctr"/>
+          <a:lstStyle/>
+          <a:p>
+            <a:pPr indent="0" marL="0">
+              <a:buNone/>
+            </a:pPr>
+            <a:r>
+              <a:rPr lang="en-US" sz="1000" dirty="0">
+                <a:solidFill>
+                  <a:srgbClr val="1B1F24"/>
+                </a:solidFill>
+                <a:latin typeface="Inter" pitchFamily="34" charset="0"/>
+                <a:ea typeface="Inter" pitchFamily="34" charset="-122"/>
+                <a:cs typeface="Inter" pitchFamily="34" charset="-120"/>
+              </a:rPr>
+              <a:t>Her review, run live: caught one off-level sentence, fixed the examples.</a:t>
+            </a:r>
+            <a:endParaRPr lang="en-US" sz="1000" dirty="0"/>
+          </a:p>
+        </p:txBody>
+      </p:sp>
+      <p:sp>
+        <p:nvSpPr>
+          <p:cNvPr id="12" name="Text 9"/>
           <p:cNvSpPr/>
           <p:nvPr/>
         </p:nvSpPr>
@@ -11765,7 +14456,7 @@
       </p:sp>
       <p:sp>
         <p:nvSpPr>
-          <p:cNvPr id="6" name="Text 3"/>
+          <p:cNvPr id="13" name="Text 10"/>
           <p:cNvSpPr/>
           <p:nvPr/>
         </p:nvSpPr>
@@ -11804,7 +14495,7 @@
       </p:sp>
       <p:sp>
         <p:nvSpPr>
-          <p:cNvPr id="7" name="Shape 4"/>
+          <p:cNvPr id="14" name="Shape 11"/>
           <p:cNvSpPr/>
           <p:nvPr/>
         </p:nvSpPr>
@@ -11831,7 +14522,7 @@
       </p:sp>
       <p:sp>
         <p:nvSpPr>
-          <p:cNvPr id="8" name="Text 5"/>
+          <p:cNvPr id="15" name="Text 12"/>
           <p:cNvSpPr/>
           <p:nvPr/>
         </p:nvSpPr>
@@ -11870,7 +14561,7 @@
       </p:sp>
       <p:sp>
         <p:nvSpPr>
-          <p:cNvPr id="9" name="Shape 6"/>
+          <p:cNvPr id="16" name="Shape 13"/>
           <p:cNvSpPr/>
           <p:nvPr/>
         </p:nvSpPr>
@@ -11897,7 +14588,7 @@
       </p:sp>
       <p:sp>
         <p:nvSpPr>
-          <p:cNvPr id="10" name="Text 7"/>
+          <p:cNvPr id="17" name="Text 14"/>
           <p:cNvSpPr/>
           <p:nvPr/>
         </p:nvSpPr>
@@ -11936,7 +14627,7 @@
       </p:sp>
       <p:sp>
         <p:nvSpPr>
-          <p:cNvPr id="11" name="Shape 8"/>
+          <p:cNvPr id="18" name="Shape 15"/>
           <p:cNvSpPr/>
           <p:nvPr/>
         </p:nvSpPr>
@@ -11963,7 +14654,7 @@
       </p:sp>
       <p:sp>
         <p:nvSpPr>
-          <p:cNvPr id="12" name="Text 9"/>
+          <p:cNvPr id="19" name="Text 16"/>
           <p:cNvSpPr/>
           <p:nvPr/>
         </p:nvSpPr>
@@ -12002,7 +14693,7 @@
       </p:sp>
       <p:sp>
         <p:nvSpPr>
-          <p:cNvPr id="13" name="Shape 10"/>
+          <p:cNvPr id="20" name="Shape 17"/>
           <p:cNvSpPr/>
           <p:nvPr/>
         </p:nvSpPr>
@@ -12029,7 +14720,7 @@
       </p:sp>
       <p:sp>
         <p:nvSpPr>
-          <p:cNvPr id="14" name="Text 11"/>
+          <p:cNvPr id="21" name="Text 18"/>
           <p:cNvSpPr/>
           <p:nvPr/>
         </p:nvSpPr>
@@ -12068,7 +14759,7 @@
       </p:sp>
       <p:sp>
         <p:nvSpPr>
-          <p:cNvPr id="15" name="Text 12"/>
+          <p:cNvPr id="22" name="Text 19"/>
           <p:cNvSpPr/>
           <p:nvPr/>
         </p:nvSpPr>
@@ -12255,7 +14946,214 @@
       </p:sp>
       <p:sp>
         <p:nvSpPr>
-          <p:cNvPr id="5" name="Text 2"/>
+          <p:cNvPr id="5" name="Shape 2"/>
+          <p:cNvSpPr/>
+          <p:nvPr/>
+        </p:nvSpPr>
+        <p:spPr>
+          <a:xfrm>
+            <a:off x="8732520" y="109728"/>
+            <a:ext cx="2926080" cy="896112"/>
+          </a:xfrm>
+          <a:prstGeom prst="roundRect">
+            <a:avLst>
+              <a:gd name="adj" fmla="val 7143"/>
+            </a:avLst>
+          </a:prstGeom>
+          <a:solidFill>
+            <a:srgbClr val="F7F5F0"/>
+          </a:solidFill>
+          <a:ln w="12700">
+            <a:solidFill>
+              <a:srgbClr val="DCE3EA"/>
+            </a:solidFill>
+            <a:prstDash val="solid"/>
+          </a:ln>
+        </p:spPr>
+      </p:sp>
+      <p:sp>
+        <p:nvSpPr>
+          <p:cNvPr id="6" name="Shape 3"/>
+          <p:cNvSpPr/>
+          <p:nvPr/>
+        </p:nvSpPr>
+        <p:spPr>
+          <a:xfrm>
+            <a:off x="8732520" y="109728"/>
+            <a:ext cx="2926080" cy="237744"/>
+          </a:xfrm>
+          <a:prstGeom prst="roundRect">
+            <a:avLst>
+              <a:gd name="adj" fmla="val 26923"/>
+            </a:avLst>
+          </a:prstGeom>
+          <a:solidFill>
+            <a:srgbClr val="0D1E2E"/>
+          </a:solidFill>
+          <a:ln w="12700">
+            <a:solidFill>
+              <a:srgbClr val="0D1E2E"/>
+            </a:solidFill>
+            <a:prstDash val="solid"/>
+          </a:ln>
+        </p:spPr>
+      </p:sp>
+      <p:sp>
+        <p:nvSpPr>
+          <p:cNvPr id="7" name="Shape 4"/>
+          <p:cNvSpPr/>
+          <p:nvPr/>
+        </p:nvSpPr>
+        <p:spPr>
+          <a:xfrm>
+            <a:off x="8823960" y="182880"/>
+            <a:ext cx="91440" cy="91440"/>
+          </a:xfrm>
+          <a:prstGeom prst="ellipse">
+            <a:avLst/>
+          </a:prstGeom>
+          <a:solidFill>
+            <a:srgbClr val="E8837A"/>
+          </a:solidFill>
+          <a:ln w="12700">
+            <a:solidFill>
+              <a:srgbClr val="E8837A"/>
+            </a:solidFill>
+            <a:prstDash val="solid"/>
+          </a:ln>
+        </p:spPr>
+      </p:sp>
+      <p:sp>
+        <p:nvSpPr>
+          <p:cNvPr id="8" name="Shape 5"/>
+          <p:cNvSpPr/>
+          <p:nvPr/>
+        </p:nvSpPr>
+        <p:spPr>
+          <a:xfrm>
+            <a:off x="8970264" y="182880"/>
+            <a:ext cx="91440" cy="91440"/>
+          </a:xfrm>
+          <a:prstGeom prst="ellipse">
+            <a:avLst/>
+          </a:prstGeom>
+          <a:solidFill>
+            <a:srgbClr val="F4A825"/>
+          </a:solidFill>
+          <a:ln w="12700">
+            <a:solidFill>
+              <a:srgbClr val="F4A825"/>
+            </a:solidFill>
+            <a:prstDash val="solid"/>
+          </a:ln>
+        </p:spPr>
+      </p:sp>
+      <p:sp>
+        <p:nvSpPr>
+          <p:cNvPr id="9" name="Shape 6"/>
+          <p:cNvSpPr/>
+          <p:nvPr/>
+        </p:nvSpPr>
+        <p:spPr>
+          <a:xfrm>
+            <a:off x="9116568" y="182880"/>
+            <a:ext cx="91440" cy="91440"/>
+          </a:xfrm>
+          <a:prstGeom prst="ellipse">
+            <a:avLst/>
+          </a:prstGeom>
+          <a:solidFill>
+            <a:srgbClr val="2E7D5B"/>
+          </a:solidFill>
+          <a:ln w="12700">
+            <a:solidFill>
+              <a:srgbClr val="2E7D5B"/>
+            </a:solidFill>
+            <a:prstDash val="solid"/>
+          </a:ln>
+        </p:spPr>
+      </p:sp>
+      <p:sp>
+        <p:nvSpPr>
+          <p:cNvPr id="10" name="Text 7"/>
+          <p:cNvSpPr/>
+          <p:nvPr/>
+        </p:nvSpPr>
+        <p:spPr>
+          <a:xfrm>
+            <a:off x="9299448" y="109728"/>
+            <a:ext cx="2286000" cy="237744"/>
+          </a:xfrm>
+          <a:prstGeom prst="rect">
+            <a:avLst/>
+          </a:prstGeom>
+          <a:noFill/>
+          <a:ln/>
+        </p:spPr>
+        <p:txBody>
+          <a:bodyPr wrap="square" lIns="0" tIns="0" rIns="0" bIns="0" rtlCol="0" anchor="ctr"/>
+          <a:lstStyle/>
+          <a:p>
+            <a:pPr indent="0" marL="0">
+              <a:buNone/>
+            </a:pPr>
+            <a:r>
+              <a:rPr lang="en-US" sz="800" b="1" spc="100" kern="0" dirty="0">
+                <a:solidFill>
+                  <a:srgbClr val="9FB2C2"/>
+                </a:solidFill>
+                <a:latin typeface="Inter" pitchFamily="34" charset="0"/>
+                <a:ea typeface="Inter" pitchFamily="34" charset="-122"/>
+                <a:cs typeface="Inter" pitchFamily="34" charset="-120"/>
+              </a:rPr>
+              <a:t>MS. RIVERA'S SCREEN · SO FAR</a:t>
+            </a:r>
+            <a:endParaRPr lang="en-US" sz="800" dirty="0"/>
+          </a:p>
+        </p:txBody>
+      </p:sp>
+      <p:sp>
+        <p:nvSpPr>
+          <p:cNvPr id="11" name="Text 8"/>
+          <p:cNvSpPr/>
+          <p:nvPr/>
+        </p:nvSpPr>
+        <p:spPr>
+          <a:xfrm>
+            <a:off x="8860536" y="365760"/>
+            <a:ext cx="2670048" cy="566928"/>
+          </a:xfrm>
+          <a:prstGeom prst="rect">
+            <a:avLst/>
+          </a:prstGeom>
+          <a:noFill/>
+          <a:ln/>
+        </p:spPr>
+        <p:txBody>
+          <a:bodyPr wrap="square" lIns="0" tIns="0" rIns="0" bIns="0" rtlCol="0" anchor="ctr"/>
+          <a:lstStyle/>
+          <a:p>
+            <a:pPr indent="0" marL="0">
+              <a:buNone/>
+            </a:pPr>
+            <a:r>
+              <a:rPr lang="en-US" sz="1000" dirty="0">
+                <a:solidFill>
+                  <a:srgbClr val="1B1F24"/>
+                </a:solidFill>
+                <a:latin typeface="Inter" pitchFamily="34" charset="0"/>
+                <a:ea typeface="Inter" pitchFamily="34" charset="-122"/>
+                <a:cs typeface="Inter" pitchFamily="34" charset="-120"/>
+              </a:rPr>
+              <a:t>Her artifacts: core, support, stretch. An evening's work in twenty minutes.</a:t>
+            </a:r>
+            <a:endParaRPr lang="en-US" sz="1000" dirty="0"/>
+          </a:p>
+        </p:txBody>
+      </p:sp>
+      <p:sp>
+        <p:nvSpPr>
+          <p:cNvPr id="12" name="Text 9"/>
           <p:cNvSpPr/>
           <p:nvPr/>
         </p:nvSpPr>
@@ -12294,7 +15192,7 @@
       </p:sp>
       <p:sp>
         <p:nvSpPr>
-          <p:cNvPr id="6" name="Text 3"/>
+          <p:cNvPr id="13" name="Text 10"/>
           <p:cNvSpPr/>
           <p:nvPr/>
         </p:nvSpPr>
@@ -12333,7 +15231,7 @@
       </p:sp>
       <p:sp>
         <p:nvSpPr>
-          <p:cNvPr id="7" name="Text 4"/>
+          <p:cNvPr id="14" name="Text 11"/>
           <p:cNvSpPr/>
           <p:nvPr/>
         </p:nvSpPr>
@@ -12566,7 +15464,214 @@
       </p:sp>
       <p:sp>
         <p:nvSpPr>
-          <p:cNvPr id="5" name="Text 2"/>
+          <p:cNvPr id="5" name="Shape 2"/>
+          <p:cNvSpPr/>
+          <p:nvPr/>
+        </p:nvSpPr>
+        <p:spPr>
+          <a:xfrm>
+            <a:off x="8732520" y="109728"/>
+            <a:ext cx="2926080" cy="896112"/>
+          </a:xfrm>
+          <a:prstGeom prst="roundRect">
+            <a:avLst>
+              <a:gd name="adj" fmla="val 7143"/>
+            </a:avLst>
+          </a:prstGeom>
+          <a:solidFill>
+            <a:srgbClr val="F7F5F0"/>
+          </a:solidFill>
+          <a:ln w="12700">
+            <a:solidFill>
+              <a:srgbClr val="DCE3EA"/>
+            </a:solidFill>
+            <a:prstDash val="solid"/>
+          </a:ln>
+        </p:spPr>
+      </p:sp>
+      <p:sp>
+        <p:nvSpPr>
+          <p:cNvPr id="6" name="Shape 3"/>
+          <p:cNvSpPr/>
+          <p:nvPr/>
+        </p:nvSpPr>
+        <p:spPr>
+          <a:xfrm>
+            <a:off x="8732520" y="109728"/>
+            <a:ext cx="2926080" cy="237744"/>
+          </a:xfrm>
+          <a:prstGeom prst="roundRect">
+            <a:avLst>
+              <a:gd name="adj" fmla="val 26923"/>
+            </a:avLst>
+          </a:prstGeom>
+          <a:solidFill>
+            <a:srgbClr val="0D1E2E"/>
+          </a:solidFill>
+          <a:ln w="12700">
+            <a:solidFill>
+              <a:srgbClr val="0D1E2E"/>
+            </a:solidFill>
+            <a:prstDash val="solid"/>
+          </a:ln>
+        </p:spPr>
+      </p:sp>
+      <p:sp>
+        <p:nvSpPr>
+          <p:cNvPr id="7" name="Shape 4"/>
+          <p:cNvSpPr/>
+          <p:nvPr/>
+        </p:nvSpPr>
+        <p:spPr>
+          <a:xfrm>
+            <a:off x="8823960" y="182880"/>
+            <a:ext cx="91440" cy="91440"/>
+          </a:xfrm>
+          <a:prstGeom prst="ellipse">
+            <a:avLst/>
+          </a:prstGeom>
+          <a:solidFill>
+            <a:srgbClr val="E8837A"/>
+          </a:solidFill>
+          <a:ln w="12700">
+            <a:solidFill>
+              <a:srgbClr val="E8837A"/>
+            </a:solidFill>
+            <a:prstDash val="solid"/>
+          </a:ln>
+        </p:spPr>
+      </p:sp>
+      <p:sp>
+        <p:nvSpPr>
+          <p:cNvPr id="8" name="Shape 5"/>
+          <p:cNvSpPr/>
+          <p:nvPr/>
+        </p:nvSpPr>
+        <p:spPr>
+          <a:xfrm>
+            <a:off x="8970264" y="182880"/>
+            <a:ext cx="91440" cy="91440"/>
+          </a:xfrm>
+          <a:prstGeom prst="ellipse">
+            <a:avLst/>
+          </a:prstGeom>
+          <a:solidFill>
+            <a:srgbClr val="F4A825"/>
+          </a:solidFill>
+          <a:ln w="12700">
+            <a:solidFill>
+              <a:srgbClr val="F4A825"/>
+            </a:solidFill>
+            <a:prstDash val="solid"/>
+          </a:ln>
+        </p:spPr>
+      </p:sp>
+      <p:sp>
+        <p:nvSpPr>
+          <p:cNvPr id="9" name="Shape 6"/>
+          <p:cNvSpPr/>
+          <p:nvPr/>
+        </p:nvSpPr>
+        <p:spPr>
+          <a:xfrm>
+            <a:off x="9116568" y="182880"/>
+            <a:ext cx="91440" cy="91440"/>
+          </a:xfrm>
+          <a:prstGeom prst="ellipse">
+            <a:avLst/>
+          </a:prstGeom>
+          <a:solidFill>
+            <a:srgbClr val="2E7D5B"/>
+          </a:solidFill>
+          <a:ln w="12700">
+            <a:solidFill>
+              <a:srgbClr val="2E7D5B"/>
+            </a:solidFill>
+            <a:prstDash val="solid"/>
+          </a:ln>
+        </p:spPr>
+      </p:sp>
+      <p:sp>
+        <p:nvSpPr>
+          <p:cNvPr id="10" name="Text 7"/>
+          <p:cNvSpPr/>
+          <p:nvPr/>
+        </p:nvSpPr>
+        <p:spPr>
+          <a:xfrm>
+            <a:off x="9299448" y="109728"/>
+            <a:ext cx="2286000" cy="237744"/>
+          </a:xfrm>
+          <a:prstGeom prst="rect">
+            <a:avLst/>
+          </a:prstGeom>
+          <a:noFill/>
+          <a:ln/>
+        </p:spPr>
+        <p:txBody>
+          <a:bodyPr wrap="square" lIns="0" tIns="0" rIns="0" bIns="0" rtlCol="0" anchor="ctr"/>
+          <a:lstStyle/>
+          <a:p>
+            <a:pPr indent="0" marL="0">
+              <a:buNone/>
+            </a:pPr>
+            <a:r>
+              <a:rPr lang="en-US" sz="800" b="1" spc="100" kern="0" dirty="0">
+                <a:solidFill>
+                  <a:srgbClr val="9FB2C2"/>
+                </a:solidFill>
+                <a:latin typeface="Inter" pitchFamily="34" charset="0"/>
+                <a:ea typeface="Inter" pitchFamily="34" charset="-122"/>
+                <a:cs typeface="Inter" pitchFamily="34" charset="-120"/>
+              </a:rPr>
+              <a:t>MS. RIVERA'S SCREEN · SO FAR</a:t>
+            </a:r>
+            <a:endParaRPr lang="en-US" sz="800" dirty="0"/>
+          </a:p>
+        </p:txBody>
+      </p:sp>
+      <p:sp>
+        <p:nvSpPr>
+          <p:cNvPr id="11" name="Text 8"/>
+          <p:cNvSpPr/>
+          <p:nvPr/>
+        </p:nvSpPr>
+        <p:spPr>
+          <a:xfrm>
+            <a:off x="8860536" y="365760"/>
+            <a:ext cx="2670048" cy="566928"/>
+          </a:xfrm>
+          <a:prstGeom prst="rect">
+            <a:avLst/>
+          </a:prstGeom>
+          <a:noFill/>
+          <a:ln/>
+        </p:spPr>
+        <p:txBody>
+          <a:bodyPr wrap="square" lIns="0" tIns="0" rIns="0" bIns="0" rtlCol="0" anchor="ctr"/>
+          <a:lstStyle/>
+          <a:p>
+            <a:pPr indent="0" marL="0">
+              <a:buNone/>
+            </a:pPr>
+            <a:r>
+              <a:rPr lang="en-US" sz="1000" dirty="0">
+                <a:solidFill>
+                  <a:srgbClr val="1B1F24"/>
+                </a:solidFill>
+                <a:latin typeface="Inter" pitchFamily="34" charset="0"/>
+                <a:ea typeface="Inter" pitchFamily="34" charset="-122"/>
+                <a:cs typeface="Inter" pitchFamily="34" charset="-120"/>
+              </a:rPr>
+              <a:t>Her materials now match her intentions. That was the whole gap.</a:t>
+            </a:r>
+            <a:endParaRPr lang="en-US" sz="1000" dirty="0"/>
+          </a:p>
+        </p:txBody>
+      </p:sp>
+      <p:sp>
+        <p:nvSpPr>
+          <p:cNvPr id="12" name="Text 9"/>
           <p:cNvSpPr/>
           <p:nvPr/>
         </p:nvSpPr>
@@ -12605,7 +15710,7 @@
       </p:sp>
       <p:sp>
         <p:nvSpPr>
-          <p:cNvPr id="6" name="Text 3"/>
+          <p:cNvPr id="13" name="Text 10"/>
           <p:cNvSpPr/>
           <p:nvPr/>
         </p:nvSpPr>
@@ -12644,7 +15749,7 @@
       </p:sp>
       <p:sp>
         <p:nvSpPr>
-          <p:cNvPr id="7" name="Shape 4"/>
+          <p:cNvPr id="14" name="Shape 11"/>
           <p:cNvSpPr/>
           <p:nvPr/>
         </p:nvSpPr>
@@ -12671,7 +15776,7 @@
       </p:sp>
       <p:sp>
         <p:nvSpPr>
-          <p:cNvPr id="8" name="Text 5"/>
+          <p:cNvPr id="15" name="Text 12"/>
           <p:cNvSpPr/>
           <p:nvPr/>
         </p:nvSpPr>
@@ -12873,7 +15978,214 @@
       </p:sp>
       <p:sp>
         <p:nvSpPr>
-          <p:cNvPr id="5" name="Text 2"/>
+          <p:cNvPr id="5" name="Shape 2"/>
+          <p:cNvSpPr/>
+          <p:nvPr/>
+        </p:nvSpPr>
+        <p:spPr>
+          <a:xfrm>
+            <a:off x="8732520" y="109728"/>
+            <a:ext cx="2926080" cy="896112"/>
+          </a:xfrm>
+          <a:prstGeom prst="roundRect">
+            <a:avLst>
+              <a:gd name="adj" fmla="val 7143"/>
+            </a:avLst>
+          </a:prstGeom>
+          <a:solidFill>
+            <a:srgbClr val="F7F5F0"/>
+          </a:solidFill>
+          <a:ln w="12700">
+            <a:solidFill>
+              <a:srgbClr val="DCE3EA"/>
+            </a:solidFill>
+            <a:prstDash val="solid"/>
+          </a:ln>
+        </p:spPr>
+      </p:sp>
+      <p:sp>
+        <p:nvSpPr>
+          <p:cNvPr id="6" name="Shape 3"/>
+          <p:cNvSpPr/>
+          <p:nvPr/>
+        </p:nvSpPr>
+        <p:spPr>
+          <a:xfrm>
+            <a:off x="8732520" y="109728"/>
+            <a:ext cx="2926080" cy="237744"/>
+          </a:xfrm>
+          <a:prstGeom prst="roundRect">
+            <a:avLst>
+              <a:gd name="adj" fmla="val 26923"/>
+            </a:avLst>
+          </a:prstGeom>
+          <a:solidFill>
+            <a:srgbClr val="0D1E2E"/>
+          </a:solidFill>
+          <a:ln w="12700">
+            <a:solidFill>
+              <a:srgbClr val="0D1E2E"/>
+            </a:solidFill>
+            <a:prstDash val="solid"/>
+          </a:ln>
+        </p:spPr>
+      </p:sp>
+      <p:sp>
+        <p:nvSpPr>
+          <p:cNvPr id="7" name="Shape 4"/>
+          <p:cNvSpPr/>
+          <p:nvPr/>
+        </p:nvSpPr>
+        <p:spPr>
+          <a:xfrm>
+            <a:off x="8823960" y="182880"/>
+            <a:ext cx="91440" cy="91440"/>
+          </a:xfrm>
+          <a:prstGeom prst="ellipse">
+            <a:avLst/>
+          </a:prstGeom>
+          <a:solidFill>
+            <a:srgbClr val="E8837A"/>
+          </a:solidFill>
+          <a:ln w="12700">
+            <a:solidFill>
+              <a:srgbClr val="E8837A"/>
+            </a:solidFill>
+            <a:prstDash val="solid"/>
+          </a:ln>
+        </p:spPr>
+      </p:sp>
+      <p:sp>
+        <p:nvSpPr>
+          <p:cNvPr id="8" name="Shape 5"/>
+          <p:cNvSpPr/>
+          <p:nvPr/>
+        </p:nvSpPr>
+        <p:spPr>
+          <a:xfrm>
+            <a:off x="8970264" y="182880"/>
+            <a:ext cx="91440" cy="91440"/>
+          </a:xfrm>
+          <a:prstGeom prst="ellipse">
+            <a:avLst/>
+          </a:prstGeom>
+          <a:solidFill>
+            <a:srgbClr val="F4A825"/>
+          </a:solidFill>
+          <a:ln w="12700">
+            <a:solidFill>
+              <a:srgbClr val="F4A825"/>
+            </a:solidFill>
+            <a:prstDash val="solid"/>
+          </a:ln>
+        </p:spPr>
+      </p:sp>
+      <p:sp>
+        <p:nvSpPr>
+          <p:cNvPr id="9" name="Shape 6"/>
+          <p:cNvSpPr/>
+          <p:nvPr/>
+        </p:nvSpPr>
+        <p:spPr>
+          <a:xfrm>
+            <a:off x="9116568" y="182880"/>
+            <a:ext cx="91440" cy="91440"/>
+          </a:xfrm>
+          <a:prstGeom prst="ellipse">
+            <a:avLst/>
+          </a:prstGeom>
+          <a:solidFill>
+            <a:srgbClr val="2E7D5B"/>
+          </a:solidFill>
+          <a:ln w="12700">
+            <a:solidFill>
+              <a:srgbClr val="2E7D5B"/>
+            </a:solidFill>
+            <a:prstDash val="solid"/>
+          </a:ln>
+        </p:spPr>
+      </p:sp>
+      <p:sp>
+        <p:nvSpPr>
+          <p:cNvPr id="10" name="Text 7"/>
+          <p:cNvSpPr/>
+          <p:nvPr/>
+        </p:nvSpPr>
+        <p:spPr>
+          <a:xfrm>
+            <a:off x="9299448" y="109728"/>
+            <a:ext cx="2286000" cy="237744"/>
+          </a:xfrm>
+          <a:prstGeom prst="rect">
+            <a:avLst/>
+          </a:prstGeom>
+          <a:noFill/>
+          <a:ln/>
+        </p:spPr>
+        <p:txBody>
+          <a:bodyPr wrap="square" lIns="0" tIns="0" rIns="0" bIns="0" rtlCol="0" anchor="ctr"/>
+          <a:lstStyle/>
+          <a:p>
+            <a:pPr indent="0" marL="0">
+              <a:buNone/>
+            </a:pPr>
+            <a:r>
+              <a:rPr lang="en-US" sz="800" b="1" spc="100" kern="0" dirty="0">
+                <a:solidFill>
+                  <a:srgbClr val="9FB2C2"/>
+                </a:solidFill>
+                <a:latin typeface="Inter" pitchFamily="34" charset="0"/>
+                <a:ea typeface="Inter" pitchFamily="34" charset="-122"/>
+                <a:cs typeface="Inter" pitchFamily="34" charset="-120"/>
+              </a:rPr>
+              <a:t>MS. RIVERA'S SCREEN · SO FAR</a:t>
+            </a:r>
+            <a:endParaRPr lang="en-US" sz="800" dirty="0"/>
+          </a:p>
+        </p:txBody>
+      </p:sp>
+      <p:sp>
+        <p:nvSpPr>
+          <p:cNvPr id="11" name="Text 8"/>
+          <p:cNvSpPr/>
+          <p:nvPr/>
+        </p:nvSpPr>
+        <p:spPr>
+          <a:xfrm>
+            <a:off x="8860536" y="365760"/>
+            <a:ext cx="2670048" cy="566928"/>
+          </a:xfrm>
+          <a:prstGeom prst="rect">
+            <a:avLst/>
+          </a:prstGeom>
+          <a:noFill/>
+          <a:ln/>
+        </p:spPr>
+        <p:txBody>
+          <a:bodyPr wrap="square" lIns="0" tIns="0" rIns="0" bIns="0" rtlCol="0" anchor="ctr"/>
+          <a:lstStyle/>
+          <a:p>
+            <a:pPr indent="0" marL="0">
+              <a:buNone/>
+            </a:pPr>
+            <a:r>
+              <a:rPr lang="en-US" sz="1000" dirty="0">
+                <a:solidFill>
+                  <a:srgbClr val="1B1F24"/>
+                </a:solidFill>
+                <a:latin typeface="Inter" pitchFamily="34" charset="0"/>
+                <a:ea typeface="Inter" pitchFamily="34" charset="-122"/>
+                <a:cs typeface="Inter" pitchFamily="34" charset="-120"/>
+              </a:rPr>
+              <a:t>Her habit: one differentiated artifact a week. Small and steady.</a:t>
+            </a:r>
+            <a:endParaRPr lang="en-US" sz="1000" dirty="0"/>
+          </a:p>
+        </p:txBody>
+      </p:sp>
+      <p:sp>
+        <p:nvSpPr>
+          <p:cNvPr id="12" name="Text 9"/>
           <p:cNvSpPr/>
           <p:nvPr/>
         </p:nvSpPr>
@@ -12912,7 +16224,7 @@
       </p:sp>
       <p:sp>
         <p:nvSpPr>
-          <p:cNvPr id="6" name="Text 3"/>
+          <p:cNvPr id="13" name="Text 10"/>
           <p:cNvSpPr/>
           <p:nvPr/>
         </p:nvSpPr>
@@ -12951,7 +16263,7 @@
       </p:sp>
       <p:sp>
         <p:nvSpPr>
-          <p:cNvPr id="7" name="Text 4"/>
+          <p:cNvPr id="14" name="Text 11"/>
           <p:cNvSpPr/>
           <p:nvPr/>
         </p:nvSpPr>
@@ -13036,7 +16348,7 @@
       </p:sp>
       <p:sp>
         <p:nvSpPr>
-          <p:cNvPr id="8" name="Shape 5"/>
+          <p:cNvPr id="15" name="Shape 12"/>
           <p:cNvSpPr/>
           <p:nvPr/>
         </p:nvSpPr>
@@ -13063,7 +16375,7 @@
       </p:sp>
       <p:sp>
         <p:nvSpPr>
-          <p:cNvPr id="9" name="Text 6"/>
+          <p:cNvPr id="16" name="Text 13"/>
           <p:cNvSpPr/>
           <p:nvPr/>
         </p:nvSpPr>
@@ -13250,7 +16562,214 @@
       </p:sp>
       <p:sp>
         <p:nvSpPr>
-          <p:cNvPr id="5" name="Text 2"/>
+          <p:cNvPr id="5" name="Shape 2"/>
+          <p:cNvSpPr/>
+          <p:nvPr/>
+        </p:nvSpPr>
+        <p:spPr>
+          <a:xfrm>
+            <a:off x="8732520" y="109728"/>
+            <a:ext cx="2926080" cy="896112"/>
+          </a:xfrm>
+          <a:prstGeom prst="roundRect">
+            <a:avLst>
+              <a:gd name="adj" fmla="val 7143"/>
+            </a:avLst>
+          </a:prstGeom>
+          <a:solidFill>
+            <a:srgbClr val="1E3A50"/>
+          </a:solidFill>
+          <a:ln w="12700">
+            <a:solidFill>
+              <a:srgbClr val="2A4A63"/>
+            </a:solidFill>
+            <a:prstDash val="solid"/>
+          </a:ln>
+        </p:spPr>
+      </p:sp>
+      <p:sp>
+        <p:nvSpPr>
+          <p:cNvPr id="6" name="Shape 3"/>
+          <p:cNvSpPr/>
+          <p:nvPr/>
+        </p:nvSpPr>
+        <p:spPr>
+          <a:xfrm>
+            <a:off x="8732520" y="109728"/>
+            <a:ext cx="2926080" cy="237744"/>
+          </a:xfrm>
+          <a:prstGeom prst="roundRect">
+            <a:avLst>
+              <a:gd name="adj" fmla="val 26923"/>
+            </a:avLst>
+          </a:prstGeom>
+          <a:solidFill>
+            <a:srgbClr val="0D1E2E"/>
+          </a:solidFill>
+          <a:ln w="12700">
+            <a:solidFill>
+              <a:srgbClr val="0D1E2E"/>
+            </a:solidFill>
+            <a:prstDash val="solid"/>
+          </a:ln>
+        </p:spPr>
+      </p:sp>
+      <p:sp>
+        <p:nvSpPr>
+          <p:cNvPr id="7" name="Shape 4"/>
+          <p:cNvSpPr/>
+          <p:nvPr/>
+        </p:nvSpPr>
+        <p:spPr>
+          <a:xfrm>
+            <a:off x="8823960" y="182880"/>
+            <a:ext cx="91440" cy="91440"/>
+          </a:xfrm>
+          <a:prstGeom prst="ellipse">
+            <a:avLst/>
+          </a:prstGeom>
+          <a:solidFill>
+            <a:srgbClr val="E8837A"/>
+          </a:solidFill>
+          <a:ln w="12700">
+            <a:solidFill>
+              <a:srgbClr val="E8837A"/>
+            </a:solidFill>
+            <a:prstDash val="solid"/>
+          </a:ln>
+        </p:spPr>
+      </p:sp>
+      <p:sp>
+        <p:nvSpPr>
+          <p:cNvPr id="8" name="Shape 5"/>
+          <p:cNvSpPr/>
+          <p:nvPr/>
+        </p:nvSpPr>
+        <p:spPr>
+          <a:xfrm>
+            <a:off x="8970264" y="182880"/>
+            <a:ext cx="91440" cy="91440"/>
+          </a:xfrm>
+          <a:prstGeom prst="ellipse">
+            <a:avLst/>
+          </a:prstGeom>
+          <a:solidFill>
+            <a:srgbClr val="F4A825"/>
+          </a:solidFill>
+          <a:ln w="12700">
+            <a:solidFill>
+              <a:srgbClr val="F4A825"/>
+            </a:solidFill>
+            <a:prstDash val="solid"/>
+          </a:ln>
+        </p:spPr>
+      </p:sp>
+      <p:sp>
+        <p:nvSpPr>
+          <p:cNvPr id="9" name="Shape 6"/>
+          <p:cNvSpPr/>
+          <p:nvPr/>
+        </p:nvSpPr>
+        <p:spPr>
+          <a:xfrm>
+            <a:off x="9116568" y="182880"/>
+            <a:ext cx="91440" cy="91440"/>
+          </a:xfrm>
+          <a:prstGeom prst="ellipse">
+            <a:avLst/>
+          </a:prstGeom>
+          <a:solidFill>
+            <a:srgbClr val="2E7D5B"/>
+          </a:solidFill>
+          <a:ln w="12700">
+            <a:solidFill>
+              <a:srgbClr val="2E7D5B"/>
+            </a:solidFill>
+            <a:prstDash val="solid"/>
+          </a:ln>
+        </p:spPr>
+      </p:sp>
+      <p:sp>
+        <p:nvSpPr>
+          <p:cNvPr id="10" name="Text 7"/>
+          <p:cNvSpPr/>
+          <p:nvPr/>
+        </p:nvSpPr>
+        <p:spPr>
+          <a:xfrm>
+            <a:off x="9299448" y="109728"/>
+            <a:ext cx="2286000" cy="237744"/>
+          </a:xfrm>
+          <a:prstGeom prst="rect">
+            <a:avLst/>
+          </a:prstGeom>
+          <a:noFill/>
+          <a:ln/>
+        </p:spPr>
+        <p:txBody>
+          <a:bodyPr wrap="square" lIns="0" tIns="0" rIns="0" bIns="0" rtlCol="0" anchor="ctr"/>
+          <a:lstStyle/>
+          <a:p>
+            <a:pPr indent="0" marL="0">
+              <a:buNone/>
+            </a:pPr>
+            <a:r>
+              <a:rPr lang="en-US" sz="800" b="1" spc="100" kern="0" dirty="0">
+                <a:solidFill>
+                  <a:srgbClr val="9FB2C2"/>
+                </a:solidFill>
+                <a:latin typeface="Inter" pitchFamily="34" charset="0"/>
+                <a:ea typeface="Inter" pitchFamily="34" charset="-122"/>
+                <a:cs typeface="Inter" pitchFamily="34" charset="-120"/>
+              </a:rPr>
+              <a:t>MS. RIVERA'S SCREEN · SO FAR</a:t>
+            </a:r>
+            <a:endParaRPr lang="en-US" sz="800" dirty="0"/>
+          </a:p>
+        </p:txBody>
+      </p:sp>
+      <p:sp>
+        <p:nvSpPr>
+          <p:cNvPr id="11" name="Text 8"/>
+          <p:cNvSpPr/>
+          <p:nvPr/>
+        </p:nvSpPr>
+        <p:spPr>
+          <a:xfrm>
+            <a:off x="8860536" y="365760"/>
+            <a:ext cx="2670048" cy="566928"/>
+          </a:xfrm>
+          <a:prstGeom prst="rect">
+            <a:avLst/>
+          </a:prstGeom>
+          <a:noFill/>
+          <a:ln/>
+        </p:spPr>
+        <p:txBody>
+          <a:bodyPr wrap="square" lIns="0" tIns="0" rIns="0" bIns="0" rtlCol="0" anchor="ctr"/>
+          <a:lstStyle/>
+          <a:p>
+            <a:pPr indent="0" marL="0">
+              <a:buNone/>
+            </a:pPr>
+            <a:r>
+              <a:rPr lang="en-US" sz="1000" dirty="0">
+                <a:solidFill>
+                  <a:srgbClr val="C9D4DE"/>
+                </a:solidFill>
+                <a:latin typeface="Inter" pitchFamily="34" charset="0"/>
+                <a:ea typeface="Inter" pitchFamily="34" charset="-122"/>
+                <a:cs typeface="Inter" pitchFamily="34" charset="-120"/>
+              </a:rPr>
+              <a:t>Her commitment #5: nothing reaches a student until the review passes.</a:t>
+            </a:r>
+            <a:endParaRPr lang="en-US" sz="1000" dirty="0"/>
+          </a:p>
+        </p:txBody>
+      </p:sp>
+      <p:sp>
+        <p:nvSpPr>
+          <p:cNvPr id="12" name="Text 9"/>
           <p:cNvSpPr/>
           <p:nvPr/>
         </p:nvSpPr>
@@ -13289,7 +16808,7 @@
       </p:sp>
       <p:sp>
         <p:nvSpPr>
-          <p:cNvPr id="6" name="Text 3"/>
+          <p:cNvPr id="13" name="Text 10"/>
           <p:cNvSpPr/>
           <p:nvPr/>
         </p:nvSpPr>
@@ -13328,7 +16847,7 @@
       </p:sp>
       <p:sp>
         <p:nvSpPr>
-          <p:cNvPr id="7" name="Text 4"/>
+          <p:cNvPr id="14" name="Text 11"/>
           <p:cNvSpPr/>
           <p:nvPr/>
         </p:nvSpPr>
@@ -13390,7 +16909,7 @@
       </p:sp>
       <p:sp>
         <p:nvSpPr>
-          <p:cNvPr id="8" name="Text 5"/>
+          <p:cNvPr id="15" name="Text 12"/>
           <p:cNvSpPr/>
           <p:nvPr/>
         </p:nvSpPr>
@@ -13577,7 +17096,214 @@
       </p:sp>
       <p:sp>
         <p:nvSpPr>
-          <p:cNvPr id="5" name="Text 2"/>
+          <p:cNvPr id="5" name="Shape 2"/>
+          <p:cNvSpPr/>
+          <p:nvPr/>
+        </p:nvSpPr>
+        <p:spPr>
+          <a:xfrm>
+            <a:off x="8732520" y="109728"/>
+            <a:ext cx="2926080" cy="896112"/>
+          </a:xfrm>
+          <a:prstGeom prst="roundRect">
+            <a:avLst>
+              <a:gd name="adj" fmla="val 7143"/>
+            </a:avLst>
+          </a:prstGeom>
+          <a:solidFill>
+            <a:srgbClr val="F7F5F0"/>
+          </a:solidFill>
+          <a:ln w="12700">
+            <a:solidFill>
+              <a:srgbClr val="DCE3EA"/>
+            </a:solidFill>
+            <a:prstDash val="solid"/>
+          </a:ln>
+        </p:spPr>
+      </p:sp>
+      <p:sp>
+        <p:nvSpPr>
+          <p:cNvPr id="6" name="Shape 3"/>
+          <p:cNvSpPr/>
+          <p:nvPr/>
+        </p:nvSpPr>
+        <p:spPr>
+          <a:xfrm>
+            <a:off x="8732520" y="109728"/>
+            <a:ext cx="2926080" cy="237744"/>
+          </a:xfrm>
+          <a:prstGeom prst="roundRect">
+            <a:avLst>
+              <a:gd name="adj" fmla="val 26923"/>
+            </a:avLst>
+          </a:prstGeom>
+          <a:solidFill>
+            <a:srgbClr val="0D1E2E"/>
+          </a:solidFill>
+          <a:ln w="12700">
+            <a:solidFill>
+              <a:srgbClr val="0D1E2E"/>
+            </a:solidFill>
+            <a:prstDash val="solid"/>
+          </a:ln>
+        </p:spPr>
+      </p:sp>
+      <p:sp>
+        <p:nvSpPr>
+          <p:cNvPr id="7" name="Shape 4"/>
+          <p:cNvSpPr/>
+          <p:nvPr/>
+        </p:nvSpPr>
+        <p:spPr>
+          <a:xfrm>
+            <a:off x="8823960" y="182880"/>
+            <a:ext cx="91440" cy="91440"/>
+          </a:xfrm>
+          <a:prstGeom prst="ellipse">
+            <a:avLst/>
+          </a:prstGeom>
+          <a:solidFill>
+            <a:srgbClr val="E8837A"/>
+          </a:solidFill>
+          <a:ln w="12700">
+            <a:solidFill>
+              <a:srgbClr val="E8837A"/>
+            </a:solidFill>
+            <a:prstDash val="solid"/>
+          </a:ln>
+        </p:spPr>
+      </p:sp>
+      <p:sp>
+        <p:nvSpPr>
+          <p:cNvPr id="8" name="Shape 5"/>
+          <p:cNvSpPr/>
+          <p:nvPr/>
+        </p:nvSpPr>
+        <p:spPr>
+          <a:xfrm>
+            <a:off x="8970264" y="182880"/>
+            <a:ext cx="91440" cy="91440"/>
+          </a:xfrm>
+          <a:prstGeom prst="ellipse">
+            <a:avLst/>
+          </a:prstGeom>
+          <a:solidFill>
+            <a:srgbClr val="F4A825"/>
+          </a:solidFill>
+          <a:ln w="12700">
+            <a:solidFill>
+              <a:srgbClr val="F4A825"/>
+            </a:solidFill>
+            <a:prstDash val="solid"/>
+          </a:ln>
+        </p:spPr>
+      </p:sp>
+      <p:sp>
+        <p:nvSpPr>
+          <p:cNvPr id="9" name="Shape 6"/>
+          <p:cNvSpPr/>
+          <p:nvPr/>
+        </p:nvSpPr>
+        <p:spPr>
+          <a:xfrm>
+            <a:off x="9116568" y="182880"/>
+            <a:ext cx="91440" cy="91440"/>
+          </a:xfrm>
+          <a:prstGeom prst="ellipse">
+            <a:avLst/>
+          </a:prstGeom>
+          <a:solidFill>
+            <a:srgbClr val="2E7D5B"/>
+          </a:solidFill>
+          <a:ln w="12700">
+            <a:solidFill>
+              <a:srgbClr val="2E7D5B"/>
+            </a:solidFill>
+            <a:prstDash val="solid"/>
+          </a:ln>
+        </p:spPr>
+      </p:sp>
+      <p:sp>
+        <p:nvSpPr>
+          <p:cNvPr id="10" name="Text 7"/>
+          <p:cNvSpPr/>
+          <p:nvPr/>
+        </p:nvSpPr>
+        <p:spPr>
+          <a:xfrm>
+            <a:off x="9299448" y="109728"/>
+            <a:ext cx="2286000" cy="237744"/>
+          </a:xfrm>
+          <a:prstGeom prst="rect">
+            <a:avLst/>
+          </a:prstGeom>
+          <a:noFill/>
+          <a:ln/>
+        </p:spPr>
+        <p:txBody>
+          <a:bodyPr wrap="square" lIns="0" tIns="0" rIns="0" bIns="0" rtlCol="0" anchor="ctr"/>
+          <a:lstStyle/>
+          <a:p>
+            <a:pPr indent="0" marL="0">
+              <a:buNone/>
+            </a:pPr>
+            <a:r>
+              <a:rPr lang="en-US" sz="800" b="1" spc="100" kern="0" dirty="0">
+                <a:solidFill>
+                  <a:srgbClr val="9FB2C2"/>
+                </a:solidFill>
+                <a:latin typeface="Inter" pitchFamily="34" charset="0"/>
+                <a:ea typeface="Inter" pitchFamily="34" charset="-122"/>
+                <a:cs typeface="Inter" pitchFamily="34" charset="-120"/>
+              </a:rPr>
+              <a:t>MS. RIVERA'S SCREEN · SO FAR</a:t>
+            </a:r>
+            <a:endParaRPr lang="en-US" sz="800" dirty="0"/>
+          </a:p>
+        </p:txBody>
+      </p:sp>
+      <p:sp>
+        <p:nvSpPr>
+          <p:cNvPr id="11" name="Text 8"/>
+          <p:cNvSpPr/>
+          <p:nvPr/>
+        </p:nvSpPr>
+        <p:spPr>
+          <a:xfrm>
+            <a:off x="8860536" y="365760"/>
+            <a:ext cx="2670048" cy="566928"/>
+          </a:xfrm>
+          <a:prstGeom prst="rect">
+            <a:avLst/>
+          </a:prstGeom>
+          <a:noFill/>
+          <a:ln/>
+        </p:spPr>
+        <p:txBody>
+          <a:bodyPr wrap="square" lIns="0" tIns="0" rIns="0" bIns="0" rtlCol="0" anchor="ctr"/>
+          <a:lstStyle/>
+          <a:p>
+            <a:pPr indent="0" marL="0">
+              <a:buNone/>
+            </a:pPr>
+            <a:r>
+              <a:rPr lang="en-US" sz="1000" dirty="0">
+                <a:solidFill>
+                  <a:srgbClr val="1B1F24"/>
+                </a:solidFill>
+                <a:latin typeface="Inter" pitchFamily="34" charset="0"/>
+                <a:ea typeface="Inter" pitchFamily="34" charset="-122"/>
+                <a:cs typeface="Inter" pitchFamily="34" charset="-120"/>
+              </a:rPr>
+              <a:t>Her next kit: assessment. Rubrics and question banks from her notes.</a:t>
+            </a:r>
+            <a:endParaRPr lang="en-US" sz="1000" dirty="0"/>
+          </a:p>
+        </p:txBody>
+      </p:sp>
+      <p:sp>
+        <p:nvSpPr>
+          <p:cNvPr id="12" name="Text 9"/>
           <p:cNvSpPr/>
           <p:nvPr/>
         </p:nvSpPr>
@@ -13616,7 +17342,7 @@
       </p:sp>
       <p:sp>
         <p:nvSpPr>
-          <p:cNvPr id="6" name="Text 3"/>
+          <p:cNvPr id="13" name="Text 10"/>
           <p:cNvSpPr/>
           <p:nvPr/>
         </p:nvSpPr>
@@ -13655,7 +17381,7 @@
       </p:sp>
       <p:sp>
         <p:nvSpPr>
-          <p:cNvPr id="7" name="Shape 4"/>
+          <p:cNvPr id="14" name="Shape 11"/>
           <p:cNvSpPr/>
           <p:nvPr/>
         </p:nvSpPr>
@@ -13682,7 +17408,7 @@
       </p:sp>
       <p:sp>
         <p:nvSpPr>
-          <p:cNvPr id="8" name="Text 5"/>
+          <p:cNvPr id="15" name="Text 12"/>
           <p:cNvSpPr/>
           <p:nvPr/>
         </p:nvSpPr>
@@ -13721,7 +17447,7 @@
       </p:sp>
       <p:sp>
         <p:nvSpPr>
-          <p:cNvPr id="9" name="Shape 6"/>
+          <p:cNvPr id="16" name="Shape 13"/>
           <p:cNvSpPr/>
           <p:nvPr/>
         </p:nvSpPr>
@@ -13748,7 +17474,7 @@
       </p:sp>
       <p:sp>
         <p:nvSpPr>
-          <p:cNvPr id="10" name="Text 7"/>
+          <p:cNvPr id="17" name="Text 14"/>
           <p:cNvSpPr/>
           <p:nvPr/>
         </p:nvSpPr>
@@ -13787,7 +17513,7 @@
       </p:sp>
       <p:sp>
         <p:nvSpPr>
-          <p:cNvPr id="11" name="Shape 8"/>
+          <p:cNvPr id="18" name="Shape 15"/>
           <p:cNvSpPr/>
           <p:nvPr/>
         </p:nvSpPr>
@@ -13814,7 +17540,7 @@
       </p:sp>
       <p:sp>
         <p:nvSpPr>
-          <p:cNvPr id="12" name="Text 9"/>
+          <p:cNvPr id="19" name="Text 16"/>
           <p:cNvSpPr/>
           <p:nvPr/>
         </p:nvSpPr>
@@ -13853,7 +17579,7 @@
       </p:sp>
       <p:sp>
         <p:nvSpPr>
-          <p:cNvPr id="13" name="Shape 10"/>
+          <p:cNvPr id="20" name="Shape 17"/>
           <p:cNvSpPr/>
           <p:nvPr/>
         </p:nvSpPr>
@@ -13880,7 +17606,7 @@
       </p:sp>
       <p:sp>
         <p:nvSpPr>
-          <p:cNvPr id="14" name="Text 11"/>
+          <p:cNvPr id="21" name="Text 18"/>
           <p:cNvSpPr/>
           <p:nvPr/>
         </p:nvSpPr>
@@ -13919,7 +17645,7 @@
       </p:sp>
       <p:sp>
         <p:nvSpPr>
-          <p:cNvPr id="15" name="Shape 12"/>
+          <p:cNvPr id="22" name="Shape 19"/>
           <p:cNvSpPr/>
           <p:nvPr/>
         </p:nvSpPr>
@@ -13946,7 +17672,7 @@
       </p:sp>
       <p:sp>
         <p:nvSpPr>
-          <p:cNvPr id="16" name="Text 13"/>
+          <p:cNvPr id="23" name="Text 20"/>
           <p:cNvSpPr/>
           <p:nvPr/>
         </p:nvSpPr>
@@ -13985,7 +17711,7 @@
       </p:sp>
       <p:sp>
         <p:nvSpPr>
-          <p:cNvPr id="17" name="Shape 14"/>
+          <p:cNvPr id="24" name="Shape 21"/>
           <p:cNvSpPr/>
           <p:nvPr/>
         </p:nvSpPr>
@@ -14012,7 +17738,7 @@
       </p:sp>
       <p:sp>
         <p:nvSpPr>
-          <p:cNvPr id="18" name="Text 15"/>
+          <p:cNvPr id="25" name="Text 22"/>
           <p:cNvSpPr/>
           <p:nvPr/>
         </p:nvSpPr>
@@ -14051,7 +17777,7 @@
       </p:sp>
       <p:sp>
         <p:nvSpPr>
-          <p:cNvPr id="19" name="Shape 16"/>
+          <p:cNvPr id="26" name="Shape 23"/>
           <p:cNvSpPr/>
           <p:nvPr/>
         </p:nvSpPr>
@@ -14078,7 +17804,7 @@
       </p:sp>
       <p:sp>
         <p:nvSpPr>
-          <p:cNvPr id="20" name="Text 17"/>
+          <p:cNvPr id="27" name="Text 24"/>
           <p:cNvSpPr/>
           <p:nvPr/>
         </p:nvSpPr>
@@ -14117,7 +17843,7 @@
       </p:sp>
       <p:sp>
         <p:nvSpPr>
-          <p:cNvPr id="21" name="Shape 18"/>
+          <p:cNvPr id="28" name="Shape 25"/>
           <p:cNvSpPr/>
           <p:nvPr/>
         </p:nvSpPr>
@@ -14144,7 +17870,7 @@
       </p:sp>
       <p:sp>
         <p:nvSpPr>
-          <p:cNvPr id="22" name="Text 19"/>
+          <p:cNvPr id="29" name="Text 26"/>
           <p:cNvSpPr/>
           <p:nvPr/>
         </p:nvSpPr>
@@ -14183,7 +17909,7 @@
       </p:sp>
       <p:sp>
         <p:nvSpPr>
-          <p:cNvPr id="23" name="Shape 20"/>
+          <p:cNvPr id="30" name="Shape 27"/>
           <p:cNvSpPr/>
           <p:nvPr/>
         </p:nvSpPr>
@@ -14210,7 +17936,7 @@
       </p:sp>
       <p:sp>
         <p:nvSpPr>
-          <p:cNvPr id="24" name="Text 21"/>
+          <p:cNvPr id="31" name="Text 28"/>
           <p:cNvSpPr/>
           <p:nvPr/>
         </p:nvSpPr>
@@ -14411,7 +18137,214 @@
       </p:sp>
       <p:sp>
         <p:nvSpPr>
-          <p:cNvPr id="5" name="Text 2"/>
+          <p:cNvPr id="5" name="Shape 2"/>
+          <p:cNvSpPr/>
+          <p:nvPr/>
+        </p:nvSpPr>
+        <p:spPr>
+          <a:xfrm>
+            <a:off x="8732520" y="109728"/>
+            <a:ext cx="2926080" cy="896112"/>
+          </a:xfrm>
+          <a:prstGeom prst="roundRect">
+            <a:avLst>
+              <a:gd name="adj" fmla="val 7143"/>
+            </a:avLst>
+          </a:prstGeom>
+          <a:solidFill>
+            <a:srgbClr val="F7F5F0"/>
+          </a:solidFill>
+          <a:ln w="12700">
+            <a:solidFill>
+              <a:srgbClr val="DCE3EA"/>
+            </a:solidFill>
+            <a:prstDash val="solid"/>
+          </a:ln>
+        </p:spPr>
+      </p:sp>
+      <p:sp>
+        <p:nvSpPr>
+          <p:cNvPr id="6" name="Shape 3"/>
+          <p:cNvSpPr/>
+          <p:nvPr/>
+        </p:nvSpPr>
+        <p:spPr>
+          <a:xfrm>
+            <a:off x="8732520" y="109728"/>
+            <a:ext cx="2926080" cy="237744"/>
+          </a:xfrm>
+          <a:prstGeom prst="roundRect">
+            <a:avLst>
+              <a:gd name="adj" fmla="val 26923"/>
+            </a:avLst>
+          </a:prstGeom>
+          <a:solidFill>
+            <a:srgbClr val="0D1E2E"/>
+          </a:solidFill>
+          <a:ln w="12700">
+            <a:solidFill>
+              <a:srgbClr val="0D1E2E"/>
+            </a:solidFill>
+            <a:prstDash val="solid"/>
+          </a:ln>
+        </p:spPr>
+      </p:sp>
+      <p:sp>
+        <p:nvSpPr>
+          <p:cNvPr id="7" name="Shape 4"/>
+          <p:cNvSpPr/>
+          <p:nvPr/>
+        </p:nvSpPr>
+        <p:spPr>
+          <a:xfrm>
+            <a:off x="8823960" y="182880"/>
+            <a:ext cx="91440" cy="91440"/>
+          </a:xfrm>
+          <a:prstGeom prst="ellipse">
+            <a:avLst/>
+          </a:prstGeom>
+          <a:solidFill>
+            <a:srgbClr val="E8837A"/>
+          </a:solidFill>
+          <a:ln w="12700">
+            <a:solidFill>
+              <a:srgbClr val="E8837A"/>
+            </a:solidFill>
+            <a:prstDash val="solid"/>
+          </a:ln>
+        </p:spPr>
+      </p:sp>
+      <p:sp>
+        <p:nvSpPr>
+          <p:cNvPr id="8" name="Shape 5"/>
+          <p:cNvSpPr/>
+          <p:nvPr/>
+        </p:nvSpPr>
+        <p:spPr>
+          <a:xfrm>
+            <a:off x="8970264" y="182880"/>
+            <a:ext cx="91440" cy="91440"/>
+          </a:xfrm>
+          <a:prstGeom prst="ellipse">
+            <a:avLst/>
+          </a:prstGeom>
+          <a:solidFill>
+            <a:srgbClr val="F4A825"/>
+          </a:solidFill>
+          <a:ln w="12700">
+            <a:solidFill>
+              <a:srgbClr val="F4A825"/>
+            </a:solidFill>
+            <a:prstDash val="solid"/>
+          </a:ln>
+        </p:spPr>
+      </p:sp>
+      <p:sp>
+        <p:nvSpPr>
+          <p:cNvPr id="9" name="Shape 6"/>
+          <p:cNvSpPr/>
+          <p:nvPr/>
+        </p:nvSpPr>
+        <p:spPr>
+          <a:xfrm>
+            <a:off x="9116568" y="182880"/>
+            <a:ext cx="91440" cy="91440"/>
+          </a:xfrm>
+          <a:prstGeom prst="ellipse">
+            <a:avLst/>
+          </a:prstGeom>
+          <a:solidFill>
+            <a:srgbClr val="2E7D5B"/>
+          </a:solidFill>
+          <a:ln w="12700">
+            <a:solidFill>
+              <a:srgbClr val="2E7D5B"/>
+            </a:solidFill>
+            <a:prstDash val="solid"/>
+          </a:ln>
+        </p:spPr>
+      </p:sp>
+      <p:sp>
+        <p:nvSpPr>
+          <p:cNvPr id="10" name="Text 7"/>
+          <p:cNvSpPr/>
+          <p:nvPr/>
+        </p:nvSpPr>
+        <p:spPr>
+          <a:xfrm>
+            <a:off x="9299448" y="109728"/>
+            <a:ext cx="2286000" cy="237744"/>
+          </a:xfrm>
+          <a:prstGeom prst="rect">
+            <a:avLst/>
+          </a:prstGeom>
+          <a:noFill/>
+          <a:ln/>
+        </p:spPr>
+        <p:txBody>
+          <a:bodyPr wrap="square" lIns="0" tIns="0" rIns="0" bIns="0" rtlCol="0" anchor="ctr"/>
+          <a:lstStyle/>
+          <a:p>
+            <a:pPr indent="0" marL="0">
+              <a:buNone/>
+            </a:pPr>
+            <a:r>
+              <a:rPr lang="en-US" sz="800" b="1" spc="100" kern="0" dirty="0">
+                <a:solidFill>
+                  <a:srgbClr val="9FB2C2"/>
+                </a:solidFill>
+                <a:latin typeface="Inter" pitchFamily="34" charset="0"/>
+                <a:ea typeface="Inter" pitchFamily="34" charset="-122"/>
+                <a:cs typeface="Inter" pitchFamily="34" charset="-120"/>
+              </a:rPr>
+              <a:t>MS. RIVERA'S SCREEN · SO FAR</a:t>
+            </a:r>
+            <a:endParaRPr lang="en-US" sz="800" dirty="0"/>
+          </a:p>
+        </p:txBody>
+      </p:sp>
+      <p:sp>
+        <p:nvSpPr>
+          <p:cNvPr id="11" name="Text 8"/>
+          <p:cNvSpPr/>
+          <p:nvPr/>
+        </p:nvSpPr>
+        <p:spPr>
+          <a:xfrm>
+            <a:off x="8860536" y="365760"/>
+            <a:ext cx="2670048" cy="566928"/>
+          </a:xfrm>
+          <a:prstGeom prst="rect">
+            <a:avLst/>
+          </a:prstGeom>
+          <a:noFill/>
+          <a:ln/>
+        </p:spPr>
+        <p:txBody>
+          <a:bodyPr wrap="square" lIns="0" tIns="0" rIns="0" bIns="0" rtlCol="0" anchor="ctr"/>
+          <a:lstStyle/>
+          <a:p>
+            <a:pPr indent="0" marL="0">
+              <a:buNone/>
+            </a:pPr>
+            <a:r>
+              <a:rPr lang="en-US" sz="1000" dirty="0">
+                <a:solidFill>
+                  <a:srgbClr val="1B1F24"/>
+                </a:solidFill>
+                <a:latin typeface="Inter" pitchFamily="34" charset="0"/>
+                <a:ea typeface="Inter" pitchFamily="34" charset="-122"/>
+                <a:cs typeface="Inter" pitchFamily="34" charset="-120"/>
+              </a:rPr>
+              <a:t>Her 48 hours: teach the support version, run one review, post one prompt.</a:t>
+            </a:r>
+            <a:endParaRPr lang="en-US" sz="1000" dirty="0"/>
+          </a:p>
+        </p:txBody>
+      </p:sp>
+      <p:sp>
+        <p:nvSpPr>
+          <p:cNvPr id="12" name="Text 9"/>
           <p:cNvSpPr/>
           <p:nvPr/>
         </p:nvSpPr>
@@ -14450,7 +18383,7 @@
       </p:sp>
       <p:sp>
         <p:nvSpPr>
-          <p:cNvPr id="6" name="Text 3"/>
+          <p:cNvPr id="13" name="Text 10"/>
           <p:cNvSpPr/>
           <p:nvPr/>
         </p:nvSpPr>
@@ -14489,7 +18422,7 @@
       </p:sp>
       <p:sp>
         <p:nvSpPr>
-          <p:cNvPr id="7" name="Shape 4"/>
+          <p:cNvPr id="14" name="Shape 11"/>
           <p:cNvSpPr/>
           <p:nvPr/>
         </p:nvSpPr>
@@ -14516,7 +18449,7 @@
       </p:sp>
       <p:sp>
         <p:nvSpPr>
-          <p:cNvPr id="8" name="Text 5"/>
+          <p:cNvPr id="15" name="Text 12"/>
           <p:cNvSpPr/>
           <p:nvPr/>
         </p:nvSpPr>
@@ -14555,7 +18488,7 @@
       </p:sp>
       <p:sp>
         <p:nvSpPr>
-          <p:cNvPr id="9" name="Text 6"/>
+          <p:cNvPr id="16" name="Text 13"/>
           <p:cNvSpPr/>
           <p:nvPr/>
         </p:nvSpPr>
@@ -14594,7 +18527,7 @@
       </p:sp>
       <p:sp>
         <p:nvSpPr>
-          <p:cNvPr id="10" name="Text 7"/>
+          <p:cNvPr id="17" name="Text 14"/>
           <p:cNvSpPr/>
           <p:nvPr/>
         </p:nvSpPr>
@@ -14633,7 +18566,7 @@
       </p:sp>
       <p:sp>
         <p:nvSpPr>
-          <p:cNvPr id="11" name="Shape 8"/>
+          <p:cNvPr id="18" name="Shape 15"/>
           <p:cNvSpPr/>
           <p:nvPr/>
         </p:nvSpPr>
@@ -14660,7 +18593,7 @@
       </p:sp>
       <p:sp>
         <p:nvSpPr>
-          <p:cNvPr id="12" name="Text 9"/>
+          <p:cNvPr id="19" name="Text 16"/>
           <p:cNvSpPr/>
           <p:nvPr/>
         </p:nvSpPr>
@@ -14699,7 +18632,7 @@
       </p:sp>
       <p:sp>
         <p:nvSpPr>
-          <p:cNvPr id="13" name="Text 10"/>
+          <p:cNvPr id="20" name="Text 17"/>
           <p:cNvSpPr/>
           <p:nvPr/>
         </p:nvSpPr>
@@ -14738,7 +18671,7 @@
       </p:sp>
       <p:sp>
         <p:nvSpPr>
-          <p:cNvPr id="14" name="Text 11"/>
+          <p:cNvPr id="21" name="Text 18"/>
           <p:cNvSpPr/>
           <p:nvPr/>
         </p:nvSpPr>
@@ -14777,7 +18710,7 @@
       </p:sp>
       <p:sp>
         <p:nvSpPr>
-          <p:cNvPr id="15" name="Shape 12"/>
+          <p:cNvPr id="22" name="Shape 19"/>
           <p:cNvSpPr/>
           <p:nvPr/>
         </p:nvSpPr>
@@ -14804,7 +18737,7 @@
       </p:sp>
       <p:sp>
         <p:nvSpPr>
-          <p:cNvPr id="16" name="Text 13"/>
+          <p:cNvPr id="23" name="Text 20"/>
           <p:cNvSpPr/>
           <p:nvPr/>
         </p:nvSpPr>
@@ -14843,7 +18776,7 @@
       </p:sp>
       <p:sp>
         <p:nvSpPr>
-          <p:cNvPr id="17" name="Text 14"/>
+          <p:cNvPr id="24" name="Text 21"/>
           <p:cNvSpPr/>
           <p:nvPr/>
         </p:nvSpPr>
@@ -14882,7 +18815,7 @@
       </p:sp>
       <p:sp>
         <p:nvSpPr>
-          <p:cNvPr id="18" name="Text 15"/>
+          <p:cNvPr id="25" name="Text 22"/>
           <p:cNvSpPr/>
           <p:nvPr/>
         </p:nvSpPr>
@@ -15069,7 +19002,214 @@
       </p:sp>
       <p:sp>
         <p:nvSpPr>
-          <p:cNvPr id="5" name="Text 2"/>
+          <p:cNvPr id="5" name="Shape 2"/>
+          <p:cNvSpPr/>
+          <p:nvPr/>
+        </p:nvSpPr>
+        <p:spPr>
+          <a:xfrm>
+            <a:off x="8732520" y="109728"/>
+            <a:ext cx="2926080" cy="896112"/>
+          </a:xfrm>
+          <a:prstGeom prst="roundRect">
+            <a:avLst>
+              <a:gd name="adj" fmla="val 7143"/>
+            </a:avLst>
+          </a:prstGeom>
+          <a:solidFill>
+            <a:srgbClr val="F7F5F0"/>
+          </a:solidFill>
+          <a:ln w="12700">
+            <a:solidFill>
+              <a:srgbClr val="DCE3EA"/>
+            </a:solidFill>
+            <a:prstDash val="solid"/>
+          </a:ln>
+        </p:spPr>
+      </p:sp>
+      <p:sp>
+        <p:nvSpPr>
+          <p:cNvPr id="6" name="Shape 3"/>
+          <p:cNvSpPr/>
+          <p:nvPr/>
+        </p:nvSpPr>
+        <p:spPr>
+          <a:xfrm>
+            <a:off x="8732520" y="109728"/>
+            <a:ext cx="2926080" cy="237744"/>
+          </a:xfrm>
+          <a:prstGeom prst="roundRect">
+            <a:avLst>
+              <a:gd name="adj" fmla="val 26923"/>
+            </a:avLst>
+          </a:prstGeom>
+          <a:solidFill>
+            <a:srgbClr val="0D1E2E"/>
+          </a:solidFill>
+          <a:ln w="12700">
+            <a:solidFill>
+              <a:srgbClr val="0D1E2E"/>
+            </a:solidFill>
+            <a:prstDash val="solid"/>
+          </a:ln>
+        </p:spPr>
+      </p:sp>
+      <p:sp>
+        <p:nvSpPr>
+          <p:cNvPr id="7" name="Shape 4"/>
+          <p:cNvSpPr/>
+          <p:nvPr/>
+        </p:nvSpPr>
+        <p:spPr>
+          <a:xfrm>
+            <a:off x="8823960" y="182880"/>
+            <a:ext cx="91440" cy="91440"/>
+          </a:xfrm>
+          <a:prstGeom prst="ellipse">
+            <a:avLst/>
+          </a:prstGeom>
+          <a:solidFill>
+            <a:srgbClr val="E8837A"/>
+          </a:solidFill>
+          <a:ln w="12700">
+            <a:solidFill>
+              <a:srgbClr val="E8837A"/>
+            </a:solidFill>
+            <a:prstDash val="solid"/>
+          </a:ln>
+        </p:spPr>
+      </p:sp>
+      <p:sp>
+        <p:nvSpPr>
+          <p:cNvPr id="8" name="Shape 5"/>
+          <p:cNvSpPr/>
+          <p:nvPr/>
+        </p:nvSpPr>
+        <p:spPr>
+          <a:xfrm>
+            <a:off x="8970264" y="182880"/>
+            <a:ext cx="91440" cy="91440"/>
+          </a:xfrm>
+          <a:prstGeom prst="ellipse">
+            <a:avLst/>
+          </a:prstGeom>
+          <a:solidFill>
+            <a:srgbClr val="F4A825"/>
+          </a:solidFill>
+          <a:ln w="12700">
+            <a:solidFill>
+              <a:srgbClr val="F4A825"/>
+            </a:solidFill>
+            <a:prstDash val="solid"/>
+          </a:ln>
+        </p:spPr>
+      </p:sp>
+      <p:sp>
+        <p:nvSpPr>
+          <p:cNvPr id="9" name="Shape 6"/>
+          <p:cNvSpPr/>
+          <p:nvPr/>
+        </p:nvSpPr>
+        <p:spPr>
+          <a:xfrm>
+            <a:off x="9116568" y="182880"/>
+            <a:ext cx="91440" cy="91440"/>
+          </a:xfrm>
+          <a:prstGeom prst="ellipse">
+            <a:avLst/>
+          </a:prstGeom>
+          <a:solidFill>
+            <a:srgbClr val="2E7D5B"/>
+          </a:solidFill>
+          <a:ln w="12700">
+            <a:solidFill>
+              <a:srgbClr val="2E7D5B"/>
+            </a:solidFill>
+            <a:prstDash val="solid"/>
+          </a:ln>
+        </p:spPr>
+      </p:sp>
+      <p:sp>
+        <p:nvSpPr>
+          <p:cNvPr id="10" name="Text 7"/>
+          <p:cNvSpPr/>
+          <p:nvPr/>
+        </p:nvSpPr>
+        <p:spPr>
+          <a:xfrm>
+            <a:off x="9299448" y="109728"/>
+            <a:ext cx="2286000" cy="237744"/>
+          </a:xfrm>
+          <a:prstGeom prst="rect">
+            <a:avLst/>
+          </a:prstGeom>
+          <a:noFill/>
+          <a:ln/>
+        </p:spPr>
+        <p:txBody>
+          <a:bodyPr wrap="square" lIns="0" tIns="0" rIns="0" bIns="0" rtlCol="0" anchor="ctr"/>
+          <a:lstStyle/>
+          <a:p>
+            <a:pPr indent="0" marL="0">
+              <a:buNone/>
+            </a:pPr>
+            <a:r>
+              <a:rPr lang="en-US" sz="800" b="1" spc="100" kern="0" dirty="0">
+                <a:solidFill>
+                  <a:srgbClr val="9FB2C2"/>
+                </a:solidFill>
+                <a:latin typeface="Inter" pitchFamily="34" charset="0"/>
+                <a:ea typeface="Inter" pitchFamily="34" charset="-122"/>
+                <a:cs typeface="Inter" pitchFamily="34" charset="-120"/>
+              </a:rPr>
+              <a:t>MS. RIVERA'S SCREEN · SO FAR</a:t>
+            </a:r>
+            <a:endParaRPr lang="en-US" sz="800" dirty="0"/>
+          </a:p>
+        </p:txBody>
+      </p:sp>
+      <p:sp>
+        <p:nvSpPr>
+          <p:cNvPr id="11" name="Text 8"/>
+          <p:cNvSpPr/>
+          <p:nvPr/>
+        </p:nvSpPr>
+        <p:spPr>
+          <a:xfrm>
+            <a:off x="8860536" y="365760"/>
+            <a:ext cx="2670048" cy="566928"/>
+          </a:xfrm>
+          <a:prstGeom prst="rect">
+            <a:avLst/>
+          </a:prstGeom>
+          <a:noFill/>
+          <a:ln/>
+        </p:spPr>
+        <p:txBody>
+          <a:bodyPr wrap="square" lIns="0" tIns="0" rIns="0" bIns="0" rtlCol="0" anchor="ctr"/>
+          <a:lstStyle/>
+          <a:p>
+            <a:pPr indent="0" marL="0">
+              <a:buNone/>
+            </a:pPr>
+            <a:r>
+              <a:rPr lang="en-US" sz="1000" dirty="0">
+                <a:solidFill>
+                  <a:srgbClr val="1B1F24"/>
+                </a:solidFill>
+                <a:latin typeface="Inter" pitchFamily="34" charset="0"/>
+                <a:ea typeface="Inter" pitchFamily="34" charset="-122"/>
+                <a:cs typeface="Inter" pitchFamily="34" charset="-120"/>
+              </a:rPr>
+              <a:t>Her exit ticket: the artifact built, the direction that surprised her.</a:t>
+            </a:r>
+            <a:endParaRPr lang="en-US" sz="1000" dirty="0"/>
+          </a:p>
+        </p:txBody>
+      </p:sp>
+      <p:sp>
+        <p:nvSpPr>
+          <p:cNvPr id="12" name="Text 9"/>
           <p:cNvSpPr/>
           <p:nvPr/>
         </p:nvSpPr>
@@ -15108,7 +19248,7 @@
       </p:sp>
       <p:sp>
         <p:nvSpPr>
-          <p:cNvPr id="6" name="Text 3"/>
+          <p:cNvPr id="13" name="Text 10"/>
           <p:cNvSpPr/>
           <p:nvPr/>
         </p:nvSpPr>
@@ -15147,7 +19287,7 @@
       </p:sp>
       <p:sp>
         <p:nvSpPr>
-          <p:cNvPr id="7" name="Text 4"/>
+          <p:cNvPr id="14" name="Text 11"/>
           <p:cNvSpPr/>
           <p:nvPr/>
         </p:nvSpPr>
@@ -15232,7 +19372,7 @@
       </p:sp>
       <p:sp>
         <p:nvSpPr>
-          <p:cNvPr id="8" name="Text 5"/>
+          <p:cNvPr id="15" name="Text 12"/>
           <p:cNvSpPr/>
           <p:nvPr/>
         </p:nvSpPr>
@@ -15419,7 +19559,214 @@
       </p:sp>
       <p:sp>
         <p:nvSpPr>
-          <p:cNvPr id="5" name="Text 2"/>
+          <p:cNvPr id="5" name="Shape 2"/>
+          <p:cNvSpPr/>
+          <p:nvPr/>
+        </p:nvSpPr>
+        <p:spPr>
+          <a:xfrm>
+            <a:off x="8732520" y="109728"/>
+            <a:ext cx="2926080" cy="896112"/>
+          </a:xfrm>
+          <a:prstGeom prst="roundRect">
+            <a:avLst>
+              <a:gd name="adj" fmla="val 7143"/>
+            </a:avLst>
+          </a:prstGeom>
+          <a:solidFill>
+            <a:srgbClr val="F7F5F0"/>
+          </a:solidFill>
+          <a:ln w="12700">
+            <a:solidFill>
+              <a:srgbClr val="DCE3EA"/>
+            </a:solidFill>
+            <a:prstDash val="solid"/>
+          </a:ln>
+        </p:spPr>
+      </p:sp>
+      <p:sp>
+        <p:nvSpPr>
+          <p:cNvPr id="6" name="Shape 3"/>
+          <p:cNvSpPr/>
+          <p:nvPr/>
+        </p:nvSpPr>
+        <p:spPr>
+          <a:xfrm>
+            <a:off x="8732520" y="109728"/>
+            <a:ext cx="2926080" cy="237744"/>
+          </a:xfrm>
+          <a:prstGeom prst="roundRect">
+            <a:avLst>
+              <a:gd name="adj" fmla="val 26923"/>
+            </a:avLst>
+          </a:prstGeom>
+          <a:solidFill>
+            <a:srgbClr val="0D1E2E"/>
+          </a:solidFill>
+          <a:ln w="12700">
+            <a:solidFill>
+              <a:srgbClr val="0D1E2E"/>
+            </a:solidFill>
+            <a:prstDash val="solid"/>
+          </a:ln>
+        </p:spPr>
+      </p:sp>
+      <p:sp>
+        <p:nvSpPr>
+          <p:cNvPr id="7" name="Shape 4"/>
+          <p:cNvSpPr/>
+          <p:nvPr/>
+        </p:nvSpPr>
+        <p:spPr>
+          <a:xfrm>
+            <a:off x="8823960" y="182880"/>
+            <a:ext cx="91440" cy="91440"/>
+          </a:xfrm>
+          <a:prstGeom prst="ellipse">
+            <a:avLst/>
+          </a:prstGeom>
+          <a:solidFill>
+            <a:srgbClr val="E8837A"/>
+          </a:solidFill>
+          <a:ln w="12700">
+            <a:solidFill>
+              <a:srgbClr val="E8837A"/>
+            </a:solidFill>
+            <a:prstDash val="solid"/>
+          </a:ln>
+        </p:spPr>
+      </p:sp>
+      <p:sp>
+        <p:nvSpPr>
+          <p:cNvPr id="8" name="Shape 5"/>
+          <p:cNvSpPr/>
+          <p:nvPr/>
+        </p:nvSpPr>
+        <p:spPr>
+          <a:xfrm>
+            <a:off x="8970264" y="182880"/>
+            <a:ext cx="91440" cy="91440"/>
+          </a:xfrm>
+          <a:prstGeom prst="ellipse">
+            <a:avLst/>
+          </a:prstGeom>
+          <a:solidFill>
+            <a:srgbClr val="F4A825"/>
+          </a:solidFill>
+          <a:ln w="12700">
+            <a:solidFill>
+              <a:srgbClr val="F4A825"/>
+            </a:solidFill>
+            <a:prstDash val="solid"/>
+          </a:ln>
+        </p:spPr>
+      </p:sp>
+      <p:sp>
+        <p:nvSpPr>
+          <p:cNvPr id="9" name="Shape 6"/>
+          <p:cNvSpPr/>
+          <p:nvPr/>
+        </p:nvSpPr>
+        <p:spPr>
+          <a:xfrm>
+            <a:off x="9116568" y="182880"/>
+            <a:ext cx="91440" cy="91440"/>
+          </a:xfrm>
+          <a:prstGeom prst="ellipse">
+            <a:avLst/>
+          </a:prstGeom>
+          <a:solidFill>
+            <a:srgbClr val="2E7D5B"/>
+          </a:solidFill>
+          <a:ln w="12700">
+            <a:solidFill>
+              <a:srgbClr val="2E7D5B"/>
+            </a:solidFill>
+            <a:prstDash val="solid"/>
+          </a:ln>
+        </p:spPr>
+      </p:sp>
+      <p:sp>
+        <p:nvSpPr>
+          <p:cNvPr id="10" name="Text 7"/>
+          <p:cNvSpPr/>
+          <p:nvPr/>
+        </p:nvSpPr>
+        <p:spPr>
+          <a:xfrm>
+            <a:off x="9299448" y="109728"/>
+            <a:ext cx="2286000" cy="237744"/>
+          </a:xfrm>
+          <a:prstGeom prst="rect">
+            <a:avLst/>
+          </a:prstGeom>
+          <a:noFill/>
+          <a:ln/>
+        </p:spPr>
+        <p:txBody>
+          <a:bodyPr wrap="square" lIns="0" tIns="0" rIns="0" bIns="0" rtlCol="0" anchor="ctr"/>
+          <a:lstStyle/>
+          <a:p>
+            <a:pPr indent="0" marL="0">
+              <a:buNone/>
+            </a:pPr>
+            <a:r>
+              <a:rPr lang="en-US" sz="800" b="1" spc="100" kern="0" dirty="0">
+                <a:solidFill>
+                  <a:srgbClr val="9FB2C2"/>
+                </a:solidFill>
+                <a:latin typeface="Inter" pitchFamily="34" charset="0"/>
+                <a:ea typeface="Inter" pitchFamily="34" charset="-122"/>
+                <a:cs typeface="Inter" pitchFamily="34" charset="-120"/>
+              </a:rPr>
+              <a:t>MS. RIVERA'S SCREEN · SO FAR</a:t>
+            </a:r>
+            <a:endParaRPr lang="en-US" sz="800" dirty="0"/>
+          </a:p>
+        </p:txBody>
+      </p:sp>
+      <p:sp>
+        <p:nvSpPr>
+          <p:cNvPr id="11" name="Text 8"/>
+          <p:cNvSpPr/>
+          <p:nvPr/>
+        </p:nvSpPr>
+        <p:spPr>
+          <a:xfrm>
+            <a:off x="8860536" y="365760"/>
+            <a:ext cx="2670048" cy="566928"/>
+          </a:xfrm>
+          <a:prstGeom prst="rect">
+            <a:avLst/>
+          </a:prstGeom>
+          <a:noFill/>
+          <a:ln/>
+        </p:spPr>
+        <p:txBody>
+          <a:bodyPr wrap="square" lIns="0" tIns="0" rIns="0" bIns="0" rtlCol="0" anchor="ctr"/>
+          <a:lstStyle/>
+          <a:p>
+            <a:pPr indent="0" marL="0">
+              <a:buNone/>
+            </a:pPr>
+            <a:r>
+              <a:rPr lang="en-US" sz="1000" dirty="0">
+                <a:solidFill>
+                  <a:srgbClr val="1B1F24"/>
+                </a:solidFill>
+                <a:latin typeface="Inter" pitchFamily="34" charset="0"/>
+                <a:ea typeface="Inter" pitchFamily="34" charset="-122"/>
+                <a:cs typeface="Inter" pitchFamily="34" charset="-120"/>
+              </a:rPr>
+              <a:t>Her time math changed: the drafting help finally arrived.</a:t>
+            </a:r>
+            <a:endParaRPr lang="en-US" sz="1000" dirty="0"/>
+          </a:p>
+        </p:txBody>
+      </p:sp>
+      <p:sp>
+        <p:nvSpPr>
+          <p:cNvPr id="12" name="Text 9"/>
           <p:cNvSpPr/>
           <p:nvPr/>
         </p:nvSpPr>
@@ -15458,7 +19805,7 @@
       </p:sp>
       <p:sp>
         <p:nvSpPr>
-          <p:cNvPr id="6" name="Text 3"/>
+          <p:cNvPr id="13" name="Text 10"/>
           <p:cNvSpPr/>
           <p:nvPr/>
         </p:nvSpPr>
@@ -15497,7 +19844,7 @@
       </p:sp>
       <p:sp>
         <p:nvSpPr>
-          <p:cNvPr id="7" name="Shape 4"/>
+          <p:cNvPr id="14" name="Shape 11"/>
           <p:cNvSpPr/>
           <p:nvPr/>
         </p:nvSpPr>
@@ -15524,7 +19871,7 @@
       </p:sp>
       <p:sp>
         <p:nvSpPr>
-          <p:cNvPr id="8" name="Text 5"/>
+          <p:cNvPr id="15" name="Text 12"/>
           <p:cNvSpPr/>
           <p:nvPr/>
         </p:nvSpPr>
@@ -15563,7 +19910,7 @@
       </p:sp>
       <p:sp>
         <p:nvSpPr>
-          <p:cNvPr id="9" name="Text 6"/>
+          <p:cNvPr id="16" name="Text 13"/>
           <p:cNvSpPr/>
           <p:nvPr/>
         </p:nvSpPr>
@@ -15619,7 +19966,7 @@
       </p:sp>
       <p:sp>
         <p:nvSpPr>
-          <p:cNvPr id="10" name="Shape 7"/>
+          <p:cNvPr id="17" name="Shape 14"/>
           <p:cNvSpPr/>
           <p:nvPr/>
         </p:nvSpPr>
@@ -15646,7 +19993,7 @@
       </p:sp>
       <p:sp>
         <p:nvSpPr>
-          <p:cNvPr id="11" name="Text 8"/>
+          <p:cNvPr id="18" name="Text 15"/>
           <p:cNvSpPr/>
           <p:nvPr/>
         </p:nvSpPr>
@@ -15685,7 +20032,7 @@
       </p:sp>
       <p:sp>
         <p:nvSpPr>
-          <p:cNvPr id="12" name="Text 9"/>
+          <p:cNvPr id="19" name="Text 16"/>
           <p:cNvSpPr/>
           <p:nvPr/>
         </p:nvSpPr>
@@ -15741,7 +20088,7 @@
       </p:sp>
       <p:sp>
         <p:nvSpPr>
-          <p:cNvPr id="13" name="Text 10"/>
+          <p:cNvPr id="20" name="Text 17"/>
           <p:cNvSpPr/>
           <p:nvPr/>
         </p:nvSpPr>
@@ -16259,7 +20606,214 @@
       </p:sp>
       <p:sp>
         <p:nvSpPr>
-          <p:cNvPr id="5" name="Text 2"/>
+          <p:cNvPr id="5" name="Shape 2"/>
+          <p:cNvSpPr/>
+          <p:nvPr/>
+        </p:nvSpPr>
+        <p:spPr>
+          <a:xfrm>
+            <a:off x="8732520" y="109728"/>
+            <a:ext cx="2926080" cy="896112"/>
+          </a:xfrm>
+          <a:prstGeom prst="roundRect">
+            <a:avLst>
+              <a:gd name="adj" fmla="val 7143"/>
+            </a:avLst>
+          </a:prstGeom>
+          <a:solidFill>
+            <a:srgbClr val="F7F5F0"/>
+          </a:solidFill>
+          <a:ln w="12700">
+            <a:solidFill>
+              <a:srgbClr val="DCE3EA"/>
+            </a:solidFill>
+            <a:prstDash val="solid"/>
+          </a:ln>
+        </p:spPr>
+      </p:sp>
+      <p:sp>
+        <p:nvSpPr>
+          <p:cNvPr id="6" name="Shape 3"/>
+          <p:cNvSpPr/>
+          <p:nvPr/>
+        </p:nvSpPr>
+        <p:spPr>
+          <a:xfrm>
+            <a:off x="8732520" y="109728"/>
+            <a:ext cx="2926080" cy="237744"/>
+          </a:xfrm>
+          <a:prstGeom prst="roundRect">
+            <a:avLst>
+              <a:gd name="adj" fmla="val 26923"/>
+            </a:avLst>
+          </a:prstGeom>
+          <a:solidFill>
+            <a:srgbClr val="0D1E2E"/>
+          </a:solidFill>
+          <a:ln w="12700">
+            <a:solidFill>
+              <a:srgbClr val="0D1E2E"/>
+            </a:solidFill>
+            <a:prstDash val="solid"/>
+          </a:ln>
+        </p:spPr>
+      </p:sp>
+      <p:sp>
+        <p:nvSpPr>
+          <p:cNvPr id="7" name="Shape 4"/>
+          <p:cNvSpPr/>
+          <p:nvPr/>
+        </p:nvSpPr>
+        <p:spPr>
+          <a:xfrm>
+            <a:off x="8823960" y="182880"/>
+            <a:ext cx="91440" cy="91440"/>
+          </a:xfrm>
+          <a:prstGeom prst="ellipse">
+            <a:avLst/>
+          </a:prstGeom>
+          <a:solidFill>
+            <a:srgbClr val="E8837A"/>
+          </a:solidFill>
+          <a:ln w="12700">
+            <a:solidFill>
+              <a:srgbClr val="E8837A"/>
+            </a:solidFill>
+            <a:prstDash val="solid"/>
+          </a:ln>
+        </p:spPr>
+      </p:sp>
+      <p:sp>
+        <p:nvSpPr>
+          <p:cNvPr id="8" name="Shape 5"/>
+          <p:cNvSpPr/>
+          <p:nvPr/>
+        </p:nvSpPr>
+        <p:spPr>
+          <a:xfrm>
+            <a:off x="8970264" y="182880"/>
+            <a:ext cx="91440" cy="91440"/>
+          </a:xfrm>
+          <a:prstGeom prst="ellipse">
+            <a:avLst/>
+          </a:prstGeom>
+          <a:solidFill>
+            <a:srgbClr val="F4A825"/>
+          </a:solidFill>
+          <a:ln w="12700">
+            <a:solidFill>
+              <a:srgbClr val="F4A825"/>
+            </a:solidFill>
+            <a:prstDash val="solid"/>
+          </a:ln>
+        </p:spPr>
+      </p:sp>
+      <p:sp>
+        <p:nvSpPr>
+          <p:cNvPr id="9" name="Shape 6"/>
+          <p:cNvSpPr/>
+          <p:nvPr/>
+        </p:nvSpPr>
+        <p:spPr>
+          <a:xfrm>
+            <a:off x="9116568" y="182880"/>
+            <a:ext cx="91440" cy="91440"/>
+          </a:xfrm>
+          <a:prstGeom prst="ellipse">
+            <a:avLst/>
+          </a:prstGeom>
+          <a:solidFill>
+            <a:srgbClr val="2E7D5B"/>
+          </a:solidFill>
+          <a:ln w="12700">
+            <a:solidFill>
+              <a:srgbClr val="2E7D5B"/>
+            </a:solidFill>
+            <a:prstDash val="solid"/>
+          </a:ln>
+        </p:spPr>
+      </p:sp>
+      <p:sp>
+        <p:nvSpPr>
+          <p:cNvPr id="10" name="Text 7"/>
+          <p:cNvSpPr/>
+          <p:nvPr/>
+        </p:nvSpPr>
+        <p:spPr>
+          <a:xfrm>
+            <a:off x="9299448" y="109728"/>
+            <a:ext cx="2286000" cy="237744"/>
+          </a:xfrm>
+          <a:prstGeom prst="rect">
+            <a:avLst/>
+          </a:prstGeom>
+          <a:noFill/>
+          <a:ln/>
+        </p:spPr>
+        <p:txBody>
+          <a:bodyPr wrap="square" lIns="0" tIns="0" rIns="0" bIns="0" rtlCol="0" anchor="ctr"/>
+          <a:lstStyle/>
+          <a:p>
+            <a:pPr indent="0" marL="0">
+              <a:buNone/>
+            </a:pPr>
+            <a:r>
+              <a:rPr lang="en-US" sz="800" b="1" spc="100" kern="0" dirty="0">
+                <a:solidFill>
+                  <a:srgbClr val="9FB2C2"/>
+                </a:solidFill>
+                <a:latin typeface="Inter" pitchFamily="34" charset="0"/>
+                <a:ea typeface="Inter" pitchFamily="34" charset="-122"/>
+                <a:cs typeface="Inter" pitchFamily="34" charset="-120"/>
+              </a:rPr>
+              <a:t>MS. RIVERA'S SCREEN · SO FAR</a:t>
+            </a:r>
+            <a:endParaRPr lang="en-US" sz="800" dirty="0"/>
+          </a:p>
+        </p:txBody>
+      </p:sp>
+      <p:sp>
+        <p:nvSpPr>
+          <p:cNvPr id="11" name="Text 8"/>
+          <p:cNvSpPr/>
+          <p:nvPr/>
+        </p:nvSpPr>
+        <p:spPr>
+          <a:xfrm>
+            <a:off x="8860536" y="365760"/>
+            <a:ext cx="2670048" cy="566928"/>
+          </a:xfrm>
+          <a:prstGeom prst="rect">
+            <a:avLst/>
+          </a:prstGeom>
+          <a:noFill/>
+          <a:ln/>
+        </p:spPr>
+        <p:txBody>
+          <a:bodyPr wrap="square" lIns="0" tIns="0" rIns="0" bIns="0" rtlCol="0" anchor="ctr"/>
+          <a:lstStyle/>
+          <a:p>
+            <a:pPr indent="0" marL="0">
+              <a:buNone/>
+            </a:pPr>
+            <a:r>
+              <a:rPr lang="en-US" sz="1000" dirty="0">
+                <a:solidFill>
+                  <a:srgbClr val="1B1F24"/>
+                </a:solidFill>
+                <a:latin typeface="Inter" pitchFamily="34" charset="0"/>
+                <a:ea typeface="Inter" pitchFamily="34" charset="-122"/>
+                <a:cs typeface="Inter" pitchFamily="34" charset="-120"/>
+              </a:rPr>
+              <a:t>Her goal: one artifact, three versions, reviewed, teachable this week.</a:t>
+            </a:r>
+            <a:endParaRPr lang="en-US" sz="1000" dirty="0"/>
+          </a:p>
+        </p:txBody>
+      </p:sp>
+      <p:sp>
+        <p:nvSpPr>
+          <p:cNvPr id="12" name="Text 9"/>
           <p:cNvSpPr/>
           <p:nvPr/>
         </p:nvSpPr>
@@ -16298,7 +20852,7 @@
       </p:sp>
       <p:sp>
         <p:nvSpPr>
-          <p:cNvPr id="6" name="Text 3"/>
+          <p:cNvPr id="13" name="Text 10"/>
           <p:cNvSpPr/>
           <p:nvPr/>
         </p:nvSpPr>
@@ -16337,7 +20891,7 @@
       </p:sp>
       <p:sp>
         <p:nvSpPr>
-          <p:cNvPr id="7" name="Text 4"/>
+          <p:cNvPr id="14" name="Text 11"/>
           <p:cNvSpPr/>
           <p:nvPr/>
         </p:nvSpPr>
@@ -16376,7 +20930,7 @@
       </p:sp>
       <p:sp>
         <p:nvSpPr>
-          <p:cNvPr id="8" name="Text 5"/>
+          <p:cNvPr id="15" name="Text 12"/>
           <p:cNvSpPr/>
           <p:nvPr/>
         </p:nvSpPr>
@@ -16415,7 +20969,7 @@
       </p:sp>
       <p:sp>
         <p:nvSpPr>
-          <p:cNvPr id="9" name="Text 6"/>
+          <p:cNvPr id="16" name="Text 13"/>
           <p:cNvSpPr/>
           <p:nvPr/>
         </p:nvSpPr>
@@ -16454,7 +21008,7 @@
       </p:sp>
       <p:sp>
         <p:nvSpPr>
-          <p:cNvPr id="10" name="Text 7"/>
+          <p:cNvPr id="17" name="Text 14"/>
           <p:cNvSpPr/>
           <p:nvPr/>
         </p:nvSpPr>
@@ -16493,7 +21047,7 @@
       </p:sp>
       <p:sp>
         <p:nvSpPr>
-          <p:cNvPr id="11" name="Text 8"/>
+          <p:cNvPr id="18" name="Text 15"/>
           <p:cNvSpPr/>
           <p:nvPr/>
         </p:nvSpPr>
@@ -16532,7 +21086,7 @@
       </p:sp>
       <p:sp>
         <p:nvSpPr>
-          <p:cNvPr id="12" name="Text 9"/>
+          <p:cNvPr id="19" name="Text 16"/>
           <p:cNvSpPr/>
           <p:nvPr/>
         </p:nvSpPr>
@@ -16571,7 +21125,7 @@
       </p:sp>
       <p:sp>
         <p:nvSpPr>
-          <p:cNvPr id="13" name="Text 10"/>
+          <p:cNvPr id="20" name="Text 17"/>
           <p:cNvSpPr/>
           <p:nvPr/>
         </p:nvSpPr>
@@ -16610,7 +21164,7 @@
       </p:sp>
       <p:sp>
         <p:nvSpPr>
-          <p:cNvPr id="14" name="Text 11"/>
+          <p:cNvPr id="21" name="Text 18"/>
           <p:cNvSpPr/>
           <p:nvPr/>
         </p:nvSpPr>
@@ -16649,7 +21203,7 @@
       </p:sp>
       <p:sp>
         <p:nvSpPr>
-          <p:cNvPr id="15" name="Text 12"/>
+          <p:cNvPr id="22" name="Text 19"/>
           <p:cNvSpPr/>
           <p:nvPr/>
         </p:nvSpPr>
@@ -16688,7 +21242,7 @@
       </p:sp>
       <p:sp>
         <p:nvSpPr>
-          <p:cNvPr id="16" name="Text 13"/>
+          <p:cNvPr id="23" name="Text 20"/>
           <p:cNvSpPr/>
           <p:nvPr/>
         </p:nvSpPr>
@@ -16727,7 +21281,7 @@
       </p:sp>
       <p:sp>
         <p:nvSpPr>
-          <p:cNvPr id="17" name="Shape 14"/>
+          <p:cNvPr id="24" name="Shape 21"/>
           <p:cNvSpPr/>
           <p:nvPr/>
         </p:nvSpPr>
@@ -16754,7 +21308,7 @@
       </p:sp>
       <p:sp>
         <p:nvSpPr>
-          <p:cNvPr id="18" name="Text 15"/>
+          <p:cNvPr id="25" name="Text 22"/>
           <p:cNvSpPr/>
           <p:nvPr/>
         </p:nvSpPr>
@@ -16793,7 +21347,7 @@
       </p:sp>
       <p:sp>
         <p:nvSpPr>
-          <p:cNvPr id="19" name="Text 16"/>
+          <p:cNvPr id="26" name="Text 23"/>
           <p:cNvSpPr/>
           <p:nvPr/>
         </p:nvSpPr>
@@ -16980,7 +21534,214 @@
       </p:sp>
       <p:sp>
         <p:nvSpPr>
-          <p:cNvPr id="5" name="Text 2"/>
+          <p:cNvPr id="5" name="Shape 2"/>
+          <p:cNvSpPr/>
+          <p:nvPr/>
+        </p:nvSpPr>
+        <p:spPr>
+          <a:xfrm>
+            <a:off x="8732520" y="109728"/>
+            <a:ext cx="2926080" cy="896112"/>
+          </a:xfrm>
+          <a:prstGeom prst="roundRect">
+            <a:avLst>
+              <a:gd name="adj" fmla="val 7143"/>
+            </a:avLst>
+          </a:prstGeom>
+          <a:solidFill>
+            <a:srgbClr val="1E3A50"/>
+          </a:solidFill>
+          <a:ln w="12700">
+            <a:solidFill>
+              <a:srgbClr val="2A4A63"/>
+            </a:solidFill>
+            <a:prstDash val="solid"/>
+          </a:ln>
+        </p:spPr>
+      </p:sp>
+      <p:sp>
+        <p:nvSpPr>
+          <p:cNvPr id="6" name="Shape 3"/>
+          <p:cNvSpPr/>
+          <p:nvPr/>
+        </p:nvSpPr>
+        <p:spPr>
+          <a:xfrm>
+            <a:off x="8732520" y="109728"/>
+            <a:ext cx="2926080" cy="237744"/>
+          </a:xfrm>
+          <a:prstGeom prst="roundRect">
+            <a:avLst>
+              <a:gd name="adj" fmla="val 26923"/>
+            </a:avLst>
+          </a:prstGeom>
+          <a:solidFill>
+            <a:srgbClr val="0D1E2E"/>
+          </a:solidFill>
+          <a:ln w="12700">
+            <a:solidFill>
+              <a:srgbClr val="0D1E2E"/>
+            </a:solidFill>
+            <a:prstDash val="solid"/>
+          </a:ln>
+        </p:spPr>
+      </p:sp>
+      <p:sp>
+        <p:nvSpPr>
+          <p:cNvPr id="7" name="Shape 4"/>
+          <p:cNvSpPr/>
+          <p:nvPr/>
+        </p:nvSpPr>
+        <p:spPr>
+          <a:xfrm>
+            <a:off x="8823960" y="182880"/>
+            <a:ext cx="91440" cy="91440"/>
+          </a:xfrm>
+          <a:prstGeom prst="ellipse">
+            <a:avLst/>
+          </a:prstGeom>
+          <a:solidFill>
+            <a:srgbClr val="E8837A"/>
+          </a:solidFill>
+          <a:ln w="12700">
+            <a:solidFill>
+              <a:srgbClr val="E8837A"/>
+            </a:solidFill>
+            <a:prstDash val="solid"/>
+          </a:ln>
+        </p:spPr>
+      </p:sp>
+      <p:sp>
+        <p:nvSpPr>
+          <p:cNvPr id="8" name="Shape 5"/>
+          <p:cNvSpPr/>
+          <p:nvPr/>
+        </p:nvSpPr>
+        <p:spPr>
+          <a:xfrm>
+            <a:off x="8970264" y="182880"/>
+            <a:ext cx="91440" cy="91440"/>
+          </a:xfrm>
+          <a:prstGeom prst="ellipse">
+            <a:avLst/>
+          </a:prstGeom>
+          <a:solidFill>
+            <a:srgbClr val="F4A825"/>
+          </a:solidFill>
+          <a:ln w="12700">
+            <a:solidFill>
+              <a:srgbClr val="F4A825"/>
+            </a:solidFill>
+            <a:prstDash val="solid"/>
+          </a:ln>
+        </p:spPr>
+      </p:sp>
+      <p:sp>
+        <p:nvSpPr>
+          <p:cNvPr id="9" name="Shape 6"/>
+          <p:cNvSpPr/>
+          <p:nvPr/>
+        </p:nvSpPr>
+        <p:spPr>
+          <a:xfrm>
+            <a:off x="9116568" y="182880"/>
+            <a:ext cx="91440" cy="91440"/>
+          </a:xfrm>
+          <a:prstGeom prst="ellipse">
+            <a:avLst/>
+          </a:prstGeom>
+          <a:solidFill>
+            <a:srgbClr val="2E7D5B"/>
+          </a:solidFill>
+          <a:ln w="12700">
+            <a:solidFill>
+              <a:srgbClr val="2E7D5B"/>
+            </a:solidFill>
+            <a:prstDash val="solid"/>
+          </a:ln>
+        </p:spPr>
+      </p:sp>
+      <p:sp>
+        <p:nvSpPr>
+          <p:cNvPr id="10" name="Text 7"/>
+          <p:cNvSpPr/>
+          <p:nvPr/>
+        </p:nvSpPr>
+        <p:spPr>
+          <a:xfrm>
+            <a:off x="9299448" y="109728"/>
+            <a:ext cx="2286000" cy="237744"/>
+          </a:xfrm>
+          <a:prstGeom prst="rect">
+            <a:avLst/>
+          </a:prstGeom>
+          <a:noFill/>
+          <a:ln/>
+        </p:spPr>
+        <p:txBody>
+          <a:bodyPr wrap="square" lIns="0" tIns="0" rIns="0" bIns="0" rtlCol="0" anchor="ctr"/>
+          <a:lstStyle/>
+          <a:p>
+            <a:pPr indent="0" marL="0">
+              <a:buNone/>
+            </a:pPr>
+            <a:r>
+              <a:rPr lang="en-US" sz="800" b="1" spc="100" kern="0" dirty="0">
+                <a:solidFill>
+                  <a:srgbClr val="9FB2C2"/>
+                </a:solidFill>
+                <a:latin typeface="Inter" pitchFamily="34" charset="0"/>
+                <a:ea typeface="Inter" pitchFamily="34" charset="-122"/>
+                <a:cs typeface="Inter" pitchFamily="34" charset="-120"/>
+              </a:rPr>
+              <a:t>MS. RIVERA'S SCREEN · SO FAR</a:t>
+            </a:r>
+            <a:endParaRPr lang="en-US" sz="800" dirty="0"/>
+          </a:p>
+        </p:txBody>
+      </p:sp>
+      <p:sp>
+        <p:nvSpPr>
+          <p:cNvPr id="11" name="Text 8"/>
+          <p:cNvSpPr/>
+          <p:nvPr/>
+        </p:nvSpPr>
+        <p:spPr>
+          <a:xfrm>
+            <a:off x="8860536" y="365760"/>
+            <a:ext cx="2670048" cy="566928"/>
+          </a:xfrm>
+          <a:prstGeom prst="rect">
+            <a:avLst/>
+          </a:prstGeom>
+          <a:noFill/>
+          <a:ln/>
+        </p:spPr>
+        <p:txBody>
+          <a:bodyPr wrap="square" lIns="0" tIns="0" rIns="0" bIns="0" rtlCol="0" anchor="ctr"/>
+          <a:lstStyle/>
+          <a:p>
+            <a:pPr indent="0" marL="0">
+              <a:buNone/>
+            </a:pPr>
+            <a:r>
+              <a:rPr lang="en-US" sz="1000" dirty="0">
+                <a:solidFill>
+                  <a:srgbClr val="C9D4DE"/>
+                </a:solidFill>
+                <a:latin typeface="Inter" pitchFamily="34" charset="0"/>
+                <a:ea typeface="Inter" pitchFamily="34" charset="-122"/>
+                <a:cs typeface="Inter" pitchFamily="34" charset="-120"/>
+              </a:rPr>
+              <a:t>Her stance: never from a blank page again. Skeleton drafted, judgment hers.</a:t>
+            </a:r>
+            <a:endParaRPr lang="en-US" sz="1000" dirty="0"/>
+          </a:p>
+        </p:txBody>
+      </p:sp>
+      <p:sp>
+        <p:nvSpPr>
+          <p:cNvPr id="12" name="Text 9"/>
           <p:cNvSpPr/>
           <p:nvPr/>
         </p:nvSpPr>
@@ -17019,7 +21780,7 @@
       </p:sp>
       <p:sp>
         <p:nvSpPr>
-          <p:cNvPr id="6" name="Text 3"/>
+          <p:cNvPr id="13" name="Text 10"/>
           <p:cNvSpPr/>
           <p:nvPr/>
         </p:nvSpPr>
@@ -17058,7 +21819,7 @@
       </p:sp>
       <p:sp>
         <p:nvSpPr>
-          <p:cNvPr id="7" name="Text 4"/>
+          <p:cNvPr id="14" name="Text 11"/>
           <p:cNvSpPr/>
           <p:nvPr/>
         </p:nvSpPr>
@@ -17120,7 +21881,7 @@
       </p:sp>
       <p:sp>
         <p:nvSpPr>
-          <p:cNvPr id="8" name="Text 5"/>
+          <p:cNvPr id="15" name="Text 12"/>
           <p:cNvSpPr/>
           <p:nvPr/>
         </p:nvSpPr>
@@ -17307,7 +22068,214 @@
       </p:sp>
       <p:sp>
         <p:nvSpPr>
-          <p:cNvPr id="5" name="Text 2"/>
+          <p:cNvPr id="5" name="Shape 2"/>
+          <p:cNvSpPr/>
+          <p:nvPr/>
+        </p:nvSpPr>
+        <p:spPr>
+          <a:xfrm>
+            <a:off x="8732520" y="109728"/>
+            <a:ext cx="2926080" cy="896112"/>
+          </a:xfrm>
+          <a:prstGeom prst="roundRect">
+            <a:avLst>
+              <a:gd name="adj" fmla="val 7143"/>
+            </a:avLst>
+          </a:prstGeom>
+          <a:solidFill>
+            <a:srgbClr val="F7F5F0"/>
+          </a:solidFill>
+          <a:ln w="12700">
+            <a:solidFill>
+              <a:srgbClr val="DCE3EA"/>
+            </a:solidFill>
+            <a:prstDash val="solid"/>
+          </a:ln>
+        </p:spPr>
+      </p:sp>
+      <p:sp>
+        <p:nvSpPr>
+          <p:cNvPr id="6" name="Shape 3"/>
+          <p:cNvSpPr/>
+          <p:nvPr/>
+        </p:nvSpPr>
+        <p:spPr>
+          <a:xfrm>
+            <a:off x="8732520" y="109728"/>
+            <a:ext cx="2926080" cy="237744"/>
+          </a:xfrm>
+          <a:prstGeom prst="roundRect">
+            <a:avLst>
+              <a:gd name="adj" fmla="val 26923"/>
+            </a:avLst>
+          </a:prstGeom>
+          <a:solidFill>
+            <a:srgbClr val="0D1E2E"/>
+          </a:solidFill>
+          <a:ln w="12700">
+            <a:solidFill>
+              <a:srgbClr val="0D1E2E"/>
+            </a:solidFill>
+            <a:prstDash val="solid"/>
+          </a:ln>
+        </p:spPr>
+      </p:sp>
+      <p:sp>
+        <p:nvSpPr>
+          <p:cNvPr id="7" name="Shape 4"/>
+          <p:cNvSpPr/>
+          <p:nvPr/>
+        </p:nvSpPr>
+        <p:spPr>
+          <a:xfrm>
+            <a:off x="8823960" y="182880"/>
+            <a:ext cx="91440" cy="91440"/>
+          </a:xfrm>
+          <a:prstGeom prst="ellipse">
+            <a:avLst/>
+          </a:prstGeom>
+          <a:solidFill>
+            <a:srgbClr val="E8837A"/>
+          </a:solidFill>
+          <a:ln w="12700">
+            <a:solidFill>
+              <a:srgbClr val="E8837A"/>
+            </a:solidFill>
+            <a:prstDash val="solid"/>
+          </a:ln>
+        </p:spPr>
+      </p:sp>
+      <p:sp>
+        <p:nvSpPr>
+          <p:cNvPr id="8" name="Shape 5"/>
+          <p:cNvSpPr/>
+          <p:nvPr/>
+        </p:nvSpPr>
+        <p:spPr>
+          <a:xfrm>
+            <a:off x="8970264" y="182880"/>
+            <a:ext cx="91440" cy="91440"/>
+          </a:xfrm>
+          <a:prstGeom prst="ellipse">
+            <a:avLst/>
+          </a:prstGeom>
+          <a:solidFill>
+            <a:srgbClr val="F4A825"/>
+          </a:solidFill>
+          <a:ln w="12700">
+            <a:solidFill>
+              <a:srgbClr val="F4A825"/>
+            </a:solidFill>
+            <a:prstDash val="solid"/>
+          </a:ln>
+        </p:spPr>
+      </p:sp>
+      <p:sp>
+        <p:nvSpPr>
+          <p:cNvPr id="9" name="Shape 6"/>
+          <p:cNvSpPr/>
+          <p:nvPr/>
+        </p:nvSpPr>
+        <p:spPr>
+          <a:xfrm>
+            <a:off x="9116568" y="182880"/>
+            <a:ext cx="91440" cy="91440"/>
+          </a:xfrm>
+          <a:prstGeom prst="ellipse">
+            <a:avLst/>
+          </a:prstGeom>
+          <a:solidFill>
+            <a:srgbClr val="2E7D5B"/>
+          </a:solidFill>
+          <a:ln w="12700">
+            <a:solidFill>
+              <a:srgbClr val="2E7D5B"/>
+            </a:solidFill>
+            <a:prstDash val="solid"/>
+          </a:ln>
+        </p:spPr>
+      </p:sp>
+      <p:sp>
+        <p:nvSpPr>
+          <p:cNvPr id="10" name="Text 7"/>
+          <p:cNvSpPr/>
+          <p:nvPr/>
+        </p:nvSpPr>
+        <p:spPr>
+          <a:xfrm>
+            <a:off x="9299448" y="109728"/>
+            <a:ext cx="2286000" cy="237744"/>
+          </a:xfrm>
+          <a:prstGeom prst="rect">
+            <a:avLst/>
+          </a:prstGeom>
+          <a:noFill/>
+          <a:ln/>
+        </p:spPr>
+        <p:txBody>
+          <a:bodyPr wrap="square" lIns="0" tIns="0" rIns="0" bIns="0" rtlCol="0" anchor="ctr"/>
+          <a:lstStyle/>
+          <a:p>
+            <a:pPr indent="0" marL="0">
+              <a:buNone/>
+            </a:pPr>
+            <a:r>
+              <a:rPr lang="en-US" sz="800" b="1" spc="100" kern="0" dirty="0">
+                <a:solidFill>
+                  <a:srgbClr val="9FB2C2"/>
+                </a:solidFill>
+                <a:latin typeface="Inter" pitchFamily="34" charset="0"/>
+                <a:ea typeface="Inter" pitchFamily="34" charset="-122"/>
+                <a:cs typeface="Inter" pitchFamily="34" charset="-120"/>
+              </a:rPr>
+              <a:t>MS. RIVERA'S SCREEN · SO FAR</a:t>
+            </a:r>
+            <a:endParaRPr lang="en-US" sz="800" dirty="0"/>
+          </a:p>
+        </p:txBody>
+      </p:sp>
+      <p:sp>
+        <p:nvSpPr>
+          <p:cNvPr id="11" name="Text 8"/>
+          <p:cNvSpPr/>
+          <p:nvPr/>
+        </p:nvSpPr>
+        <p:spPr>
+          <a:xfrm>
+            <a:off x="8860536" y="365760"/>
+            <a:ext cx="2670048" cy="566928"/>
+          </a:xfrm>
+          <a:prstGeom prst="rect">
+            <a:avLst/>
+          </a:prstGeom>
+          <a:noFill/>
+          <a:ln/>
+        </p:spPr>
+        <p:txBody>
+          <a:bodyPr wrap="square" lIns="0" tIns="0" rIns="0" bIns="0" rtlCol="0" anchor="ctr"/>
+          <a:lstStyle/>
+          <a:p>
+            <a:pPr indent="0" marL="0">
+              <a:buNone/>
+            </a:pPr>
+            <a:r>
+              <a:rPr lang="en-US" sz="1000" dirty="0">
+                <a:solidFill>
+                  <a:srgbClr val="1B1F24"/>
+                </a:solidFill>
+                <a:latin typeface="Inter" pitchFamily="34" charset="0"/>
+                <a:ea typeface="Inter" pitchFamily="34" charset="-122"/>
+                <a:cs typeface="Inter" pitchFamily="34" charset="-120"/>
+              </a:rPr>
+              <a:t>Her expectation: a 30-minute draft, and at least one invented thing to catch.</a:t>
+            </a:r>
+            <a:endParaRPr lang="en-US" sz="1000" dirty="0"/>
+          </a:p>
+        </p:txBody>
+      </p:sp>
+      <p:sp>
+        <p:nvSpPr>
+          <p:cNvPr id="12" name="Text 9"/>
           <p:cNvSpPr/>
           <p:nvPr/>
         </p:nvSpPr>
@@ -17346,7 +22314,7 @@
       </p:sp>
       <p:sp>
         <p:nvSpPr>
-          <p:cNvPr id="6" name="Text 3"/>
+          <p:cNvPr id="13" name="Text 10"/>
           <p:cNvSpPr/>
           <p:nvPr/>
         </p:nvSpPr>
@@ -17385,7 +22353,7 @@
       </p:sp>
       <p:sp>
         <p:nvSpPr>
-          <p:cNvPr id="7" name="Shape 4"/>
+          <p:cNvPr id="14" name="Shape 11"/>
           <p:cNvSpPr/>
           <p:nvPr/>
         </p:nvSpPr>
@@ -17412,7 +22380,7 @@
       </p:sp>
       <p:sp>
         <p:nvSpPr>
-          <p:cNvPr id="8" name="Text 5"/>
+          <p:cNvPr id="15" name="Text 12"/>
           <p:cNvSpPr/>
           <p:nvPr/>
         </p:nvSpPr>
@@ -17451,7 +22419,7 @@
       </p:sp>
       <p:sp>
         <p:nvSpPr>
-          <p:cNvPr id="9" name="Text 6"/>
+          <p:cNvPr id="16" name="Text 13"/>
           <p:cNvSpPr/>
           <p:nvPr/>
         </p:nvSpPr>
@@ -17507,7 +22475,7 @@
       </p:sp>
       <p:sp>
         <p:nvSpPr>
-          <p:cNvPr id="10" name="Shape 7"/>
+          <p:cNvPr id="17" name="Shape 14"/>
           <p:cNvSpPr/>
           <p:nvPr/>
         </p:nvSpPr>
@@ -17534,7 +22502,7 @@
       </p:sp>
       <p:sp>
         <p:nvSpPr>
-          <p:cNvPr id="11" name="Text 8"/>
+          <p:cNvPr id="18" name="Text 15"/>
           <p:cNvSpPr/>
           <p:nvPr/>
         </p:nvSpPr>
@@ -17596,7 +22564,7 @@
       </p:sp>
       <p:sp>
         <p:nvSpPr>
-          <p:cNvPr id="12" name="Text 9"/>
+          <p:cNvPr id="19" name="Text 16"/>
           <p:cNvSpPr/>
           <p:nvPr/>
         </p:nvSpPr>
@@ -17800,7 +22768,214 @@
       </p:sp>
       <p:sp>
         <p:nvSpPr>
-          <p:cNvPr id="5" name="Text 2"/>
+          <p:cNvPr id="5" name="Shape 2"/>
+          <p:cNvSpPr/>
+          <p:nvPr/>
+        </p:nvSpPr>
+        <p:spPr>
+          <a:xfrm>
+            <a:off x="8732520" y="109728"/>
+            <a:ext cx="2926080" cy="896112"/>
+          </a:xfrm>
+          <a:prstGeom prst="roundRect">
+            <a:avLst>
+              <a:gd name="adj" fmla="val 7143"/>
+            </a:avLst>
+          </a:prstGeom>
+          <a:solidFill>
+            <a:srgbClr val="F7F5F0"/>
+          </a:solidFill>
+          <a:ln w="12700">
+            <a:solidFill>
+              <a:srgbClr val="DCE3EA"/>
+            </a:solidFill>
+            <a:prstDash val="solid"/>
+          </a:ln>
+        </p:spPr>
+      </p:sp>
+      <p:sp>
+        <p:nvSpPr>
+          <p:cNvPr id="6" name="Shape 3"/>
+          <p:cNvSpPr/>
+          <p:nvPr/>
+        </p:nvSpPr>
+        <p:spPr>
+          <a:xfrm>
+            <a:off x="8732520" y="109728"/>
+            <a:ext cx="2926080" cy="237744"/>
+          </a:xfrm>
+          <a:prstGeom prst="roundRect">
+            <a:avLst>
+              <a:gd name="adj" fmla="val 26923"/>
+            </a:avLst>
+          </a:prstGeom>
+          <a:solidFill>
+            <a:srgbClr val="0D1E2E"/>
+          </a:solidFill>
+          <a:ln w="12700">
+            <a:solidFill>
+              <a:srgbClr val="0D1E2E"/>
+            </a:solidFill>
+            <a:prstDash val="solid"/>
+          </a:ln>
+        </p:spPr>
+      </p:sp>
+      <p:sp>
+        <p:nvSpPr>
+          <p:cNvPr id="7" name="Shape 4"/>
+          <p:cNvSpPr/>
+          <p:nvPr/>
+        </p:nvSpPr>
+        <p:spPr>
+          <a:xfrm>
+            <a:off x="8823960" y="182880"/>
+            <a:ext cx="91440" cy="91440"/>
+          </a:xfrm>
+          <a:prstGeom prst="ellipse">
+            <a:avLst/>
+          </a:prstGeom>
+          <a:solidFill>
+            <a:srgbClr val="E8837A"/>
+          </a:solidFill>
+          <a:ln w="12700">
+            <a:solidFill>
+              <a:srgbClr val="E8837A"/>
+            </a:solidFill>
+            <a:prstDash val="solid"/>
+          </a:ln>
+        </p:spPr>
+      </p:sp>
+      <p:sp>
+        <p:nvSpPr>
+          <p:cNvPr id="8" name="Shape 5"/>
+          <p:cNvSpPr/>
+          <p:nvPr/>
+        </p:nvSpPr>
+        <p:spPr>
+          <a:xfrm>
+            <a:off x="8970264" y="182880"/>
+            <a:ext cx="91440" cy="91440"/>
+          </a:xfrm>
+          <a:prstGeom prst="ellipse">
+            <a:avLst/>
+          </a:prstGeom>
+          <a:solidFill>
+            <a:srgbClr val="F4A825"/>
+          </a:solidFill>
+          <a:ln w="12700">
+            <a:solidFill>
+              <a:srgbClr val="F4A825"/>
+            </a:solidFill>
+            <a:prstDash val="solid"/>
+          </a:ln>
+        </p:spPr>
+      </p:sp>
+      <p:sp>
+        <p:nvSpPr>
+          <p:cNvPr id="9" name="Shape 6"/>
+          <p:cNvSpPr/>
+          <p:nvPr/>
+        </p:nvSpPr>
+        <p:spPr>
+          <a:xfrm>
+            <a:off x="9116568" y="182880"/>
+            <a:ext cx="91440" cy="91440"/>
+          </a:xfrm>
+          <a:prstGeom prst="ellipse">
+            <a:avLst/>
+          </a:prstGeom>
+          <a:solidFill>
+            <a:srgbClr val="2E7D5B"/>
+          </a:solidFill>
+          <a:ln w="12700">
+            <a:solidFill>
+              <a:srgbClr val="2E7D5B"/>
+            </a:solidFill>
+            <a:prstDash val="solid"/>
+          </a:ln>
+        </p:spPr>
+      </p:sp>
+      <p:sp>
+        <p:nvSpPr>
+          <p:cNvPr id="10" name="Text 7"/>
+          <p:cNvSpPr/>
+          <p:nvPr/>
+        </p:nvSpPr>
+        <p:spPr>
+          <a:xfrm>
+            <a:off x="9299448" y="109728"/>
+            <a:ext cx="2286000" cy="237744"/>
+          </a:xfrm>
+          <a:prstGeom prst="rect">
+            <a:avLst/>
+          </a:prstGeom>
+          <a:noFill/>
+          <a:ln/>
+        </p:spPr>
+        <p:txBody>
+          <a:bodyPr wrap="square" lIns="0" tIns="0" rIns="0" bIns="0" rtlCol="0" anchor="ctr"/>
+          <a:lstStyle/>
+          <a:p>
+            <a:pPr indent="0" marL="0">
+              <a:buNone/>
+            </a:pPr>
+            <a:r>
+              <a:rPr lang="en-US" sz="800" b="1" spc="100" kern="0" dirty="0">
+                <a:solidFill>
+                  <a:srgbClr val="9FB2C2"/>
+                </a:solidFill>
+                <a:latin typeface="Inter" pitchFamily="34" charset="0"/>
+                <a:ea typeface="Inter" pitchFamily="34" charset="-122"/>
+                <a:cs typeface="Inter" pitchFamily="34" charset="-120"/>
+              </a:rPr>
+              <a:t>MS. RIVERA'S SCREEN · SO FAR</a:t>
+            </a:r>
+            <a:endParaRPr lang="en-US" sz="800" dirty="0"/>
+          </a:p>
+        </p:txBody>
+      </p:sp>
+      <p:sp>
+        <p:nvSpPr>
+          <p:cNvPr id="11" name="Text 8"/>
+          <p:cNvSpPr/>
+          <p:nvPr/>
+        </p:nvSpPr>
+        <p:spPr>
+          <a:xfrm>
+            <a:off x="8860536" y="365760"/>
+            <a:ext cx="2670048" cy="566928"/>
+          </a:xfrm>
+          <a:prstGeom prst="rect">
+            <a:avLst/>
+          </a:prstGeom>
+          <a:noFill/>
+          <a:ln/>
+        </p:spPr>
+        <p:txBody>
+          <a:bodyPr wrap="square" lIns="0" tIns="0" rIns="0" bIns="0" rtlCol="0" anchor="ctr"/>
+          <a:lstStyle/>
+          <a:p>
+            <a:pPr indent="0" marL="0">
+              <a:buNone/>
+            </a:pPr>
+            <a:r>
+              <a:rPr lang="en-US" sz="1000" dirty="0">
+                <a:solidFill>
+                  <a:srgbClr val="1B1F24"/>
+                </a:solidFill>
+                <a:latin typeface="Inter" pitchFamily="34" charset="0"/>
+                <a:ea typeface="Inter" pitchFamily="34" charset="-122"/>
+                <a:cs typeface="Inter" pitchFamily="34" charset="-120"/>
+              </a:rPr>
+              <a:t>Her review habit: that's where her expertise enters the document.</a:t>
+            </a:r>
+            <a:endParaRPr lang="en-US" sz="1000" dirty="0"/>
+          </a:p>
+        </p:txBody>
+      </p:sp>
+      <p:sp>
+        <p:nvSpPr>
+          <p:cNvPr id="12" name="Text 9"/>
           <p:cNvSpPr/>
           <p:nvPr/>
         </p:nvSpPr>
@@ -17839,7 +23014,7 @@
       </p:sp>
       <p:sp>
         <p:nvSpPr>
-          <p:cNvPr id="6" name="Text 3"/>
+          <p:cNvPr id="13" name="Text 10"/>
           <p:cNvSpPr/>
           <p:nvPr/>
         </p:nvSpPr>
@@ -17878,7 +23053,7 @@
       </p:sp>
       <p:sp>
         <p:nvSpPr>
-          <p:cNvPr id="7" name="Shape 4"/>
+          <p:cNvPr id="14" name="Shape 11"/>
           <p:cNvSpPr/>
           <p:nvPr/>
         </p:nvSpPr>
@@ -17905,7 +23080,7 @@
       </p:sp>
       <p:sp>
         <p:nvSpPr>
-          <p:cNvPr id="8" name="Text 5"/>
+          <p:cNvPr id="15" name="Text 12"/>
           <p:cNvSpPr/>
           <p:nvPr/>
         </p:nvSpPr>
@@ -17944,7 +23119,7 @@
       </p:sp>
       <p:sp>
         <p:nvSpPr>
-          <p:cNvPr id="9" name="Text 6"/>
+          <p:cNvPr id="16" name="Text 13"/>
           <p:cNvSpPr/>
           <p:nvPr/>
         </p:nvSpPr>
@@ -18156,7 +23331,214 @@
       </p:sp>
       <p:sp>
         <p:nvSpPr>
-          <p:cNvPr id="5" name="Text 2"/>
+          <p:cNvPr id="5" name="Shape 2"/>
+          <p:cNvSpPr/>
+          <p:nvPr/>
+        </p:nvSpPr>
+        <p:spPr>
+          <a:xfrm>
+            <a:off x="8732520" y="109728"/>
+            <a:ext cx="2926080" cy="896112"/>
+          </a:xfrm>
+          <a:prstGeom prst="roundRect">
+            <a:avLst>
+              <a:gd name="adj" fmla="val 7143"/>
+            </a:avLst>
+          </a:prstGeom>
+          <a:solidFill>
+            <a:srgbClr val="F7F5F0"/>
+          </a:solidFill>
+          <a:ln w="12700">
+            <a:solidFill>
+              <a:srgbClr val="DCE3EA"/>
+            </a:solidFill>
+            <a:prstDash val="solid"/>
+          </a:ln>
+        </p:spPr>
+      </p:sp>
+      <p:sp>
+        <p:nvSpPr>
+          <p:cNvPr id="6" name="Shape 3"/>
+          <p:cNvSpPr/>
+          <p:nvPr/>
+        </p:nvSpPr>
+        <p:spPr>
+          <a:xfrm>
+            <a:off x="8732520" y="109728"/>
+            <a:ext cx="2926080" cy="237744"/>
+          </a:xfrm>
+          <a:prstGeom prst="roundRect">
+            <a:avLst>
+              <a:gd name="adj" fmla="val 26923"/>
+            </a:avLst>
+          </a:prstGeom>
+          <a:solidFill>
+            <a:srgbClr val="0D1E2E"/>
+          </a:solidFill>
+          <a:ln w="12700">
+            <a:solidFill>
+              <a:srgbClr val="0D1E2E"/>
+            </a:solidFill>
+            <a:prstDash val="solid"/>
+          </a:ln>
+        </p:spPr>
+      </p:sp>
+      <p:sp>
+        <p:nvSpPr>
+          <p:cNvPr id="7" name="Shape 4"/>
+          <p:cNvSpPr/>
+          <p:nvPr/>
+        </p:nvSpPr>
+        <p:spPr>
+          <a:xfrm>
+            <a:off x="8823960" y="182880"/>
+            <a:ext cx="91440" cy="91440"/>
+          </a:xfrm>
+          <a:prstGeom prst="ellipse">
+            <a:avLst/>
+          </a:prstGeom>
+          <a:solidFill>
+            <a:srgbClr val="E8837A"/>
+          </a:solidFill>
+          <a:ln w="12700">
+            <a:solidFill>
+              <a:srgbClr val="E8837A"/>
+            </a:solidFill>
+            <a:prstDash val="solid"/>
+          </a:ln>
+        </p:spPr>
+      </p:sp>
+      <p:sp>
+        <p:nvSpPr>
+          <p:cNvPr id="8" name="Shape 5"/>
+          <p:cNvSpPr/>
+          <p:nvPr/>
+        </p:nvSpPr>
+        <p:spPr>
+          <a:xfrm>
+            <a:off x="8970264" y="182880"/>
+            <a:ext cx="91440" cy="91440"/>
+          </a:xfrm>
+          <a:prstGeom prst="ellipse">
+            <a:avLst/>
+          </a:prstGeom>
+          <a:solidFill>
+            <a:srgbClr val="F4A825"/>
+          </a:solidFill>
+          <a:ln w="12700">
+            <a:solidFill>
+              <a:srgbClr val="F4A825"/>
+            </a:solidFill>
+            <a:prstDash val="solid"/>
+          </a:ln>
+        </p:spPr>
+      </p:sp>
+      <p:sp>
+        <p:nvSpPr>
+          <p:cNvPr id="9" name="Shape 6"/>
+          <p:cNvSpPr/>
+          <p:nvPr/>
+        </p:nvSpPr>
+        <p:spPr>
+          <a:xfrm>
+            <a:off x="9116568" y="182880"/>
+            <a:ext cx="91440" cy="91440"/>
+          </a:xfrm>
+          <a:prstGeom prst="ellipse">
+            <a:avLst/>
+          </a:prstGeom>
+          <a:solidFill>
+            <a:srgbClr val="2E7D5B"/>
+          </a:solidFill>
+          <a:ln w="12700">
+            <a:solidFill>
+              <a:srgbClr val="2E7D5B"/>
+            </a:solidFill>
+            <a:prstDash val="solid"/>
+          </a:ln>
+        </p:spPr>
+      </p:sp>
+      <p:sp>
+        <p:nvSpPr>
+          <p:cNvPr id="10" name="Text 7"/>
+          <p:cNvSpPr/>
+          <p:nvPr/>
+        </p:nvSpPr>
+        <p:spPr>
+          <a:xfrm>
+            <a:off x="9299448" y="109728"/>
+            <a:ext cx="2286000" cy="237744"/>
+          </a:xfrm>
+          <a:prstGeom prst="rect">
+            <a:avLst/>
+          </a:prstGeom>
+          <a:noFill/>
+          <a:ln/>
+        </p:spPr>
+        <p:txBody>
+          <a:bodyPr wrap="square" lIns="0" tIns="0" rIns="0" bIns="0" rtlCol="0" anchor="ctr"/>
+          <a:lstStyle/>
+          <a:p>
+            <a:pPr indent="0" marL="0">
+              <a:buNone/>
+            </a:pPr>
+            <a:r>
+              <a:rPr lang="en-US" sz="800" b="1" spc="100" kern="0" dirty="0">
+                <a:solidFill>
+                  <a:srgbClr val="9FB2C2"/>
+                </a:solidFill>
+                <a:latin typeface="Inter" pitchFamily="34" charset="0"/>
+                <a:ea typeface="Inter" pitchFamily="34" charset="-122"/>
+                <a:cs typeface="Inter" pitchFamily="34" charset="-120"/>
+              </a:rPr>
+              <a:t>MS. RIVERA'S SCREEN · SO FAR</a:t>
+            </a:r>
+            <a:endParaRPr lang="en-US" sz="800" dirty="0"/>
+          </a:p>
+        </p:txBody>
+      </p:sp>
+      <p:sp>
+        <p:nvSpPr>
+          <p:cNvPr id="11" name="Text 8"/>
+          <p:cNvSpPr/>
+          <p:nvPr/>
+        </p:nvSpPr>
+        <p:spPr>
+          <a:xfrm>
+            <a:off x="8860536" y="365760"/>
+            <a:ext cx="2670048" cy="566928"/>
+          </a:xfrm>
+          <a:prstGeom prst="rect">
+            <a:avLst/>
+          </a:prstGeom>
+          <a:noFill/>
+          <a:ln/>
+        </p:spPr>
+        <p:txBody>
+          <a:bodyPr wrap="square" lIns="0" tIns="0" rIns="0" bIns="0" rtlCol="0" anchor="ctr"/>
+          <a:lstStyle/>
+          <a:p>
+            <a:pPr indent="0" marL="0">
+              <a:buNone/>
+            </a:pPr>
+            <a:r>
+              <a:rPr lang="en-US" sz="1000" dirty="0">
+                <a:solidFill>
+                  <a:srgbClr val="1B1F24"/>
+                </a:solidFill>
+                <a:latin typeface="Inter" pitchFamily="34" charset="0"/>
+                <a:ea typeface="Inter" pitchFamily="34" charset="-122"/>
+                <a:cs typeface="Inter" pitchFamily="34" charset="-120"/>
+              </a:rPr>
+              <a:t>Her UDL frame: AI generates the menu; she orders for her class.</a:t>
+            </a:r>
+            <a:endParaRPr lang="en-US" sz="1000" dirty="0"/>
+          </a:p>
+        </p:txBody>
+      </p:sp>
+      <p:sp>
+        <p:nvSpPr>
+          <p:cNvPr id="12" name="Text 9"/>
           <p:cNvSpPr/>
           <p:nvPr/>
         </p:nvSpPr>
@@ -18195,7 +23577,7 @@
       </p:sp>
       <p:sp>
         <p:nvSpPr>
-          <p:cNvPr id="6" name="Text 3"/>
+          <p:cNvPr id="13" name="Text 10"/>
           <p:cNvSpPr/>
           <p:nvPr/>
         </p:nvSpPr>
@@ -18234,7 +23616,7 @@
       </p:sp>
       <p:sp>
         <p:nvSpPr>
-          <p:cNvPr id="7" name="Shape 4"/>
+          <p:cNvPr id="14" name="Shape 11"/>
           <p:cNvSpPr/>
           <p:nvPr/>
         </p:nvSpPr>
@@ -18261,7 +23643,7 @@
       </p:sp>
       <p:sp>
         <p:nvSpPr>
-          <p:cNvPr id="8" name="Text 5"/>
+          <p:cNvPr id="15" name="Text 12"/>
           <p:cNvSpPr/>
           <p:nvPr/>
         </p:nvSpPr>
@@ -18300,7 +23682,7 @@
       </p:sp>
       <p:sp>
         <p:nvSpPr>
-          <p:cNvPr id="9" name="Text 6"/>
+          <p:cNvPr id="16" name="Text 13"/>
           <p:cNvSpPr/>
           <p:nvPr/>
         </p:nvSpPr>
@@ -18339,7 +23721,7 @@
       </p:sp>
       <p:sp>
         <p:nvSpPr>
-          <p:cNvPr id="10" name="Shape 7"/>
+          <p:cNvPr id="17" name="Shape 14"/>
           <p:cNvSpPr/>
           <p:nvPr/>
         </p:nvSpPr>
@@ -18366,7 +23748,7 @@
       </p:sp>
       <p:sp>
         <p:nvSpPr>
-          <p:cNvPr id="11" name="Text 8"/>
+          <p:cNvPr id="18" name="Text 15"/>
           <p:cNvSpPr/>
           <p:nvPr/>
         </p:nvSpPr>
@@ -18405,7 +23787,7 @@
       </p:sp>
       <p:sp>
         <p:nvSpPr>
-          <p:cNvPr id="12" name="Text 9"/>
+          <p:cNvPr id="19" name="Text 16"/>
           <p:cNvSpPr/>
           <p:nvPr/>
         </p:nvSpPr>
@@ -18444,7 +23826,7 @@
       </p:sp>
       <p:sp>
         <p:nvSpPr>
-          <p:cNvPr id="13" name="Shape 10"/>
+          <p:cNvPr id="20" name="Shape 17"/>
           <p:cNvSpPr/>
           <p:nvPr/>
         </p:nvSpPr>
@@ -18471,7 +23853,7 @@
       </p:sp>
       <p:sp>
         <p:nvSpPr>
-          <p:cNvPr id="14" name="Text 11"/>
+          <p:cNvPr id="21" name="Text 18"/>
           <p:cNvSpPr/>
           <p:nvPr/>
         </p:nvSpPr>
@@ -18510,7 +23892,7 @@
       </p:sp>
       <p:sp>
         <p:nvSpPr>
-          <p:cNvPr id="15" name="Text 12"/>
+          <p:cNvPr id="22" name="Text 19"/>
           <p:cNvSpPr/>
           <p:nvPr/>
         </p:nvSpPr>
@@ -18549,7 +23931,7 @@
       </p:sp>
       <p:sp>
         <p:nvSpPr>
-          <p:cNvPr id="16" name="Text 13"/>
+          <p:cNvPr id="23" name="Text 20"/>
           <p:cNvSpPr/>
           <p:nvPr/>
         </p:nvSpPr>
@@ -18759,7 +24141,214 @@
       </p:sp>
       <p:sp>
         <p:nvSpPr>
-          <p:cNvPr id="5" name="Text 2"/>
+          <p:cNvPr id="5" name="Shape 2"/>
+          <p:cNvSpPr/>
+          <p:nvPr/>
+        </p:nvSpPr>
+        <p:spPr>
+          <a:xfrm>
+            <a:off x="8732520" y="109728"/>
+            <a:ext cx="2926080" cy="896112"/>
+          </a:xfrm>
+          <a:prstGeom prst="roundRect">
+            <a:avLst>
+              <a:gd name="adj" fmla="val 7143"/>
+            </a:avLst>
+          </a:prstGeom>
+          <a:solidFill>
+            <a:srgbClr val="F7F5F0"/>
+          </a:solidFill>
+          <a:ln w="12700">
+            <a:solidFill>
+              <a:srgbClr val="DCE3EA"/>
+            </a:solidFill>
+            <a:prstDash val="solid"/>
+          </a:ln>
+        </p:spPr>
+      </p:sp>
+      <p:sp>
+        <p:nvSpPr>
+          <p:cNvPr id="6" name="Shape 3"/>
+          <p:cNvSpPr/>
+          <p:nvPr/>
+        </p:nvSpPr>
+        <p:spPr>
+          <a:xfrm>
+            <a:off x="8732520" y="109728"/>
+            <a:ext cx="2926080" cy="237744"/>
+          </a:xfrm>
+          <a:prstGeom prst="roundRect">
+            <a:avLst>
+              <a:gd name="adj" fmla="val 26923"/>
+            </a:avLst>
+          </a:prstGeom>
+          <a:solidFill>
+            <a:srgbClr val="0D1E2E"/>
+          </a:solidFill>
+          <a:ln w="12700">
+            <a:solidFill>
+              <a:srgbClr val="0D1E2E"/>
+            </a:solidFill>
+            <a:prstDash val="solid"/>
+          </a:ln>
+        </p:spPr>
+      </p:sp>
+      <p:sp>
+        <p:nvSpPr>
+          <p:cNvPr id="7" name="Shape 4"/>
+          <p:cNvSpPr/>
+          <p:nvPr/>
+        </p:nvSpPr>
+        <p:spPr>
+          <a:xfrm>
+            <a:off x="8823960" y="182880"/>
+            <a:ext cx="91440" cy="91440"/>
+          </a:xfrm>
+          <a:prstGeom prst="ellipse">
+            <a:avLst/>
+          </a:prstGeom>
+          <a:solidFill>
+            <a:srgbClr val="E8837A"/>
+          </a:solidFill>
+          <a:ln w="12700">
+            <a:solidFill>
+              <a:srgbClr val="E8837A"/>
+            </a:solidFill>
+            <a:prstDash val="solid"/>
+          </a:ln>
+        </p:spPr>
+      </p:sp>
+      <p:sp>
+        <p:nvSpPr>
+          <p:cNvPr id="8" name="Shape 5"/>
+          <p:cNvSpPr/>
+          <p:nvPr/>
+        </p:nvSpPr>
+        <p:spPr>
+          <a:xfrm>
+            <a:off x="8970264" y="182880"/>
+            <a:ext cx="91440" cy="91440"/>
+          </a:xfrm>
+          <a:prstGeom prst="ellipse">
+            <a:avLst/>
+          </a:prstGeom>
+          <a:solidFill>
+            <a:srgbClr val="F4A825"/>
+          </a:solidFill>
+          <a:ln w="12700">
+            <a:solidFill>
+              <a:srgbClr val="F4A825"/>
+            </a:solidFill>
+            <a:prstDash val="solid"/>
+          </a:ln>
+        </p:spPr>
+      </p:sp>
+      <p:sp>
+        <p:nvSpPr>
+          <p:cNvPr id="9" name="Shape 6"/>
+          <p:cNvSpPr/>
+          <p:nvPr/>
+        </p:nvSpPr>
+        <p:spPr>
+          <a:xfrm>
+            <a:off x="9116568" y="182880"/>
+            <a:ext cx="91440" cy="91440"/>
+          </a:xfrm>
+          <a:prstGeom prst="ellipse">
+            <a:avLst/>
+          </a:prstGeom>
+          <a:solidFill>
+            <a:srgbClr val="2E7D5B"/>
+          </a:solidFill>
+          <a:ln w="12700">
+            <a:solidFill>
+              <a:srgbClr val="2E7D5B"/>
+            </a:solidFill>
+            <a:prstDash val="solid"/>
+          </a:ln>
+        </p:spPr>
+      </p:sp>
+      <p:sp>
+        <p:nvSpPr>
+          <p:cNvPr id="10" name="Text 7"/>
+          <p:cNvSpPr/>
+          <p:nvPr/>
+        </p:nvSpPr>
+        <p:spPr>
+          <a:xfrm>
+            <a:off x="9299448" y="109728"/>
+            <a:ext cx="2286000" cy="237744"/>
+          </a:xfrm>
+          <a:prstGeom prst="rect">
+            <a:avLst/>
+          </a:prstGeom>
+          <a:noFill/>
+          <a:ln/>
+        </p:spPr>
+        <p:txBody>
+          <a:bodyPr wrap="square" lIns="0" tIns="0" rIns="0" bIns="0" rtlCol="0" anchor="ctr"/>
+          <a:lstStyle/>
+          <a:p>
+            <a:pPr indent="0" marL="0">
+              <a:buNone/>
+            </a:pPr>
+            <a:r>
+              <a:rPr lang="en-US" sz="800" b="1" spc="100" kern="0" dirty="0">
+                <a:solidFill>
+                  <a:srgbClr val="9FB2C2"/>
+                </a:solidFill>
+                <a:latin typeface="Inter" pitchFamily="34" charset="0"/>
+                <a:ea typeface="Inter" pitchFamily="34" charset="-122"/>
+                <a:cs typeface="Inter" pitchFamily="34" charset="-120"/>
+              </a:rPr>
+              <a:t>MS. RIVERA'S SCREEN · SO FAR</a:t>
+            </a:r>
+            <a:endParaRPr lang="en-US" sz="800" dirty="0"/>
+          </a:p>
+        </p:txBody>
+      </p:sp>
+      <p:sp>
+        <p:nvSpPr>
+          <p:cNvPr id="11" name="Text 8"/>
+          <p:cNvSpPr/>
+          <p:nvPr/>
+        </p:nvSpPr>
+        <p:spPr>
+          <a:xfrm>
+            <a:off x="8860536" y="365760"/>
+            <a:ext cx="2670048" cy="566928"/>
+          </a:xfrm>
+          <a:prstGeom prst="rect">
+            <a:avLst/>
+          </a:prstGeom>
+          <a:noFill/>
+          <a:ln/>
+        </p:spPr>
+        <p:txBody>
+          <a:bodyPr wrap="square" lIns="0" tIns="0" rIns="0" bIns="0" rtlCol="0" anchor="ctr"/>
+          <a:lstStyle/>
+          <a:p>
+            <a:pPr indent="0" marL="0">
+              <a:buNone/>
+            </a:pPr>
+            <a:r>
+              <a:rPr lang="en-US" sz="1000" dirty="0">
+                <a:solidFill>
+                  <a:srgbClr val="1B1F24"/>
+                </a:solidFill>
+                <a:latin typeface="Inter" pitchFamily="34" charset="0"/>
+                <a:ea typeface="Inter" pitchFamily="34" charset="-122"/>
+                <a:cs typeface="Inter" pitchFamily="34" charset="-120"/>
+              </a:rPr>
+              <a:t>Her workflow: draft, then options, then pick and adapt, then review.</a:t>
+            </a:r>
+            <a:endParaRPr lang="en-US" sz="1000" dirty="0"/>
+          </a:p>
+        </p:txBody>
+      </p:sp>
+      <p:sp>
+        <p:nvSpPr>
+          <p:cNvPr id="12" name="Text 9"/>
           <p:cNvSpPr/>
           <p:nvPr/>
         </p:nvSpPr>
@@ -18798,7 +24387,7 @@
       </p:sp>
       <p:sp>
         <p:nvSpPr>
-          <p:cNvPr id="6" name="Text 3"/>
+          <p:cNvPr id="13" name="Text 10"/>
           <p:cNvSpPr/>
           <p:nvPr/>
         </p:nvSpPr>
@@ -18837,7 +24426,7 @@
       </p:sp>
       <p:sp>
         <p:nvSpPr>
-          <p:cNvPr id="7" name="Shape 4"/>
+          <p:cNvPr id="14" name="Shape 11"/>
           <p:cNvSpPr/>
           <p:nvPr/>
         </p:nvSpPr>
@@ -18862,7 +24451,7 @@
       </p:sp>
       <p:sp>
         <p:nvSpPr>
-          <p:cNvPr id="8" name="Text 5"/>
+          <p:cNvPr id="15" name="Text 12"/>
           <p:cNvSpPr/>
           <p:nvPr/>
         </p:nvSpPr>
@@ -18901,7 +24490,7 @@
       </p:sp>
       <p:sp>
         <p:nvSpPr>
-          <p:cNvPr id="9" name="Shape 6"/>
+          <p:cNvPr id="16" name="Shape 13"/>
           <p:cNvSpPr/>
           <p:nvPr/>
         </p:nvSpPr>
@@ -18928,7 +24517,7 @@
       </p:sp>
       <p:sp>
         <p:nvSpPr>
-          <p:cNvPr id="10" name="Text 7"/>
+          <p:cNvPr id="17" name="Text 14"/>
           <p:cNvSpPr/>
           <p:nvPr/>
         </p:nvSpPr>
@@ -18981,7 +24570,7 @@
       </p:sp>
       <p:sp>
         <p:nvSpPr>
-          <p:cNvPr id="11" name="Shape 8"/>
+          <p:cNvPr id="18" name="Shape 15"/>
           <p:cNvSpPr/>
           <p:nvPr/>
         </p:nvSpPr>
@@ -19006,7 +24595,7 @@
       </p:sp>
       <p:sp>
         <p:nvSpPr>
-          <p:cNvPr id="12" name="Text 9"/>
+          <p:cNvPr id="19" name="Text 16"/>
           <p:cNvSpPr/>
           <p:nvPr/>
         </p:nvSpPr>
@@ -19045,7 +24634,7 @@
       </p:sp>
       <p:sp>
         <p:nvSpPr>
-          <p:cNvPr id="13" name="Shape 10"/>
+          <p:cNvPr id="20" name="Shape 17"/>
           <p:cNvSpPr/>
           <p:nvPr/>
         </p:nvSpPr>
@@ -19072,7 +24661,7 @@
       </p:sp>
       <p:sp>
         <p:nvSpPr>
-          <p:cNvPr id="14" name="Text 11"/>
+          <p:cNvPr id="21" name="Text 18"/>
           <p:cNvSpPr/>
           <p:nvPr/>
         </p:nvSpPr>
@@ -19125,7 +24714,7 @@
       </p:sp>
       <p:sp>
         <p:nvSpPr>
-          <p:cNvPr id="15" name="Shape 12"/>
+          <p:cNvPr id="22" name="Shape 19"/>
           <p:cNvSpPr/>
           <p:nvPr/>
         </p:nvSpPr>
@@ -19150,7 +24739,7 @@
       </p:sp>
       <p:sp>
         <p:nvSpPr>
-          <p:cNvPr id="16" name="Text 13"/>
+          <p:cNvPr id="23" name="Text 20"/>
           <p:cNvSpPr/>
           <p:nvPr/>
         </p:nvSpPr>
@@ -19189,7 +24778,7 @@
       </p:sp>
       <p:sp>
         <p:nvSpPr>
-          <p:cNvPr id="17" name="Shape 14"/>
+          <p:cNvPr id="24" name="Shape 21"/>
           <p:cNvSpPr/>
           <p:nvPr/>
         </p:nvSpPr>
@@ -19216,7 +24805,7 @@
       </p:sp>
       <p:sp>
         <p:nvSpPr>
-          <p:cNvPr id="18" name="Text 15"/>
+          <p:cNvPr id="25" name="Text 22"/>
           <p:cNvSpPr/>
           <p:nvPr/>
         </p:nvSpPr>
@@ -19269,7 +24858,7 @@
       </p:sp>
       <p:sp>
         <p:nvSpPr>
-          <p:cNvPr id="19" name="Shape 16"/>
+          <p:cNvPr id="26" name="Shape 23"/>
           <p:cNvSpPr/>
           <p:nvPr/>
         </p:nvSpPr>
@@ -19294,7 +24883,7 @@
       </p:sp>
       <p:sp>
         <p:nvSpPr>
-          <p:cNvPr id="20" name="Text 17"/>
+          <p:cNvPr id="27" name="Text 24"/>
           <p:cNvSpPr/>
           <p:nvPr/>
         </p:nvSpPr>
@@ -19333,7 +24922,7 @@
       </p:sp>
       <p:sp>
         <p:nvSpPr>
-          <p:cNvPr id="21" name="Shape 18"/>
+          <p:cNvPr id="28" name="Shape 25"/>
           <p:cNvSpPr/>
           <p:nvPr/>
         </p:nvSpPr>
@@ -19360,7 +24949,7 @@
       </p:sp>
       <p:sp>
         <p:nvSpPr>
-          <p:cNvPr id="22" name="Text 19"/>
+          <p:cNvPr id="29" name="Text 26"/>
           <p:cNvSpPr/>
           <p:nvPr/>
         </p:nvSpPr>

--- a/kits/kit03/Kit03_PresentationDeck.pptx
+++ b/kits/kit03/Kit03_PresentationDeck.pptx
@@ -1411,7 +1411,7 @@
           <a:p>
             <a:r>
               <a:rPr lang="en-US" dirty="0"/>
-              <a:t>Pairs, devices out inside two minutes, announce the tool. The standard to name here: differentiate until understanding is equal, and let AI do the drafting that used to make that impossible.</a:t>
+              <a:t>Pairs, devices out inside two minutes, announce the tool. The standard to name here: differentiate until understanding is equal, and let AI do the drafting that used to make that impossible. Ms. Rivera builds ONE artifact across all three steps, the reading passage for her 6th grade food webs lesson; her exemplar appears large on every step slide, so anyone lost can copy her structure.</a:t>
             </a:r>
             <a:endParaRPr lang="en-US" dirty="0"/>
           </a:p>
@@ -1587,7 +1587,7 @@
           <a:p>
             <a:r>
               <a:rPr lang="en-US" dirty="0"/>
-              <a:t>Circulate. Weak drafts usually lack context; nudge with “what would a substitute need to know about this lesson?”</a:t>
+              <a:t>Circulate. Weak drafts usually lack context; nudge with “what would a substitute need to know about this lesson?” The big card is Ms. Rivera’s step 1: one reading passage for her 6th grade food webs lesson, drafted to 80%. The same passage runs through all three steps; anyone stuck can copy her structure.</a:t>
             </a:r>
             <a:endParaRPr lang="en-US" dirty="0"/>
           </a:p>
@@ -1675,7 +1675,7 @@
           <a:p>
             <a:r>
               <a:rPr lang="en-US" dirty="0"/>
-              <a:t>Two follow-up prompts in the same chat. 45-min cut: one direction instead of two; each teacher picks support or stretch based on their roster.</a:t>
+              <a:t>Two follow-up prompts in the same chat. The big card is Ms. Rivera's step 2 on the same food webs passage: the leveled support version, then three depth prompts. Mimic her pair of follow-ups with your own artifact. 45-min cut: one direction instead of two; each teacher picks support or stretch based on their roster.</a:t>
             </a:r>
             <a:endParaRPr lang="en-US" dirty="0"/>
           </a:p>
@@ -1763,7 +1763,7 @@
           <a:p>
             <a:r>
               <a:rPr lang="en-US" dirty="0"/>
-              <a:t>Insist on this step; skipping review is the failure mode of the whole kit. Pairs swap and check each other’s level labels: a partner’s ear is the first check.</a:t>
+              <a:t>Insist on this step; skipping review is the failure mode of the whole kit. Pairs swap and check each other’s level labels: a partner’s ear is the first check. The big card is Ms. Rivera's review run on the same food webs passage: two points fail, two fixes happen live, and only then is it done.</a:t>
             </a:r>
             <a:endParaRPr lang="en-US" dirty="0"/>
           </a:p>
@@ -1851,7 +1851,7 @@
           <a:p>
             <a:r>
               <a:rPr lang="en-US" dirty="0"/>
-              <a:t>Prioritize anyone whose review caught a real problem; it’s the most useful minute in the room. 45-min cut: two voices. Keep each to a minute.</a:t>
+              <a:t>Prioritize anyone whose review caught a real problem; it’s the most useful minute in the room. Ms. Rivera's model story is on the chip: what the review caught in her food webs passage goes first. 45-min cut: two voices. Keep each to a minute.</a:t>
             </a:r>
             <a:endParaRPr lang="en-US" dirty="0"/>
           </a:p>
@@ -11494,7 +11494,7 @@
                 <a:ea typeface="Inter" pitchFamily="34" charset="-122"/>
                 <a:cs typeface="Inter" pitchFamily="34" charset="-120"/>
               </a:rPr>
-              <a:t>Her lab: the lesson she brought, differentiated two directions.</a:t>
+              <a:t>Her lab pick, one artifact all the way through: her 6th grade food webs passage.</a:t>
             </a:r>
             <a:endParaRPr lang="en-US" sz="1000" dirty="0"/>
           </a:p>
@@ -12991,7 +12991,7 @@
                 <a:ea typeface="Inter" pitchFamily="34" charset="-122"/>
                 <a:cs typeface="Inter" pitchFamily="34" charset="-120"/>
               </a:rPr>
-              <a:t>On her screen: the core artifact, drafted to 80%, not polished.</a:t>
+              <a:t>On her screen big: her food webs passage, drafted to 80%, not polished.</a:t>
             </a:r>
             <a:endParaRPr lang="en-US" sz="1000" dirty="0"/>
           </a:p>
@@ -13077,26 +13077,132 @@
       </p:sp>
       <p:sp>
         <p:nvSpPr>
-          <p:cNvPr id="14" name="Shape 11"/>
-          <p:cNvSpPr/>
-          <p:nvPr/>
-        </p:nvSpPr>
-        <p:spPr>
-          <a:xfrm>
-            <a:off x="640080" y="1508760"/>
-            <a:ext cx="10972800" cy="731520"/>
+          <p:cNvPr id="14" name="Text 11"/>
+          <p:cNvSpPr/>
+          <p:nvPr/>
+        </p:nvSpPr>
+        <p:spPr>
+          <a:xfrm>
+            <a:off x="640080" y="1554480"/>
+            <a:ext cx="5394960" cy="4023360"/>
+          </a:xfrm>
+          <a:prstGeom prst="rect">
+            <a:avLst/>
+          </a:prstGeom>
+          <a:noFill/>
+          <a:ln/>
+        </p:spPr>
+        <p:txBody>
+          <a:bodyPr wrap="square" rtlCol="0" anchor="t"/>
+          <a:lstStyle/>
+          <a:p>
+            <a:pPr marL="342900" indent="-342900">
+              <a:spcAft>
+                <a:spcPts val="1000"/>
+              </a:spcAft>
+              <a:buSzPct val="100000"/>
+              <a:buChar char="•"/>
+            </a:pPr>
+            <a:r>
+              <a:rPr lang="en-US" sz="1650" dirty="0">
+                <a:solidFill>
+                  <a:srgbClr val="1B1F24"/>
+                </a:solidFill>
+                <a:latin typeface="Inter" pitchFamily="34" charset="0"/>
+                <a:ea typeface="Inter" pitchFamily="34" charset="-122"/>
+                <a:cs typeface="Inter" pitchFamily="34" charset="-120"/>
+              </a:rPr>
+              <a:t>Pick the one artifact your lesson most needs: reading, practice set, directions, exit check</a:t>
+            </a:r>
+            <a:endParaRPr lang="en-US" sz="1650" dirty="0"/>
+          </a:p>
+          <a:p>
+            <a:pPr marL="342900" indent="-342900">
+              <a:spcAft>
+                <a:spcPts val="1000"/>
+              </a:spcAft>
+              <a:buSzPct val="100000"/>
+              <a:buChar char="•"/>
+            </a:pPr>
+            <a:r>
+              <a:rPr lang="en-US" sz="1650" dirty="0">
+                <a:solidFill>
+                  <a:srgbClr val="1B1F24"/>
+                </a:solidFill>
+                <a:latin typeface="Inter" pitchFamily="34" charset="0"/>
+                <a:ea typeface="Inter" pitchFamily="34" charset="-122"/>
+                <a:cs typeface="Inter" pitchFamily="34" charset="-120"/>
+              </a:rPr>
+              <a:t>Role · task · context · format, and be generous with context</a:t>
+            </a:r>
+            <a:endParaRPr lang="en-US" sz="1650" dirty="0"/>
+          </a:p>
+          <a:p>
+            <a:pPr marL="342900" indent="-342900">
+              <a:spcAft>
+                <a:spcPts val="1000"/>
+              </a:spcAft>
+              <a:buSzPct val="100000"/>
+              <a:buChar char="•"/>
+            </a:pPr>
+            <a:r>
+              <a:rPr lang="en-US" sz="1650" dirty="0">
+                <a:solidFill>
+                  <a:srgbClr val="1B1F24"/>
+                </a:solidFill>
+                <a:latin typeface="Inter" pitchFamily="34" charset="0"/>
+                <a:ea typeface="Inter" pitchFamily="34" charset="-122"/>
+                <a:cs typeface="Inter" pitchFamily="34" charset="-120"/>
+              </a:rPr>
+              <a:t>What did students just learn? What do they always trip on?</a:t>
+            </a:r>
+            <a:endParaRPr lang="en-US" sz="1650" dirty="0"/>
+          </a:p>
+          <a:p>
+            <a:pPr marL="342900" indent="-342900">
+              <a:spcAft>
+                <a:spcPts val="1000"/>
+              </a:spcAft>
+              <a:buSzPct val="100000"/>
+              <a:buChar char="•"/>
+            </a:pPr>
+            <a:r>
+              <a:rPr lang="en-US" sz="1650" dirty="0">
+                <a:solidFill>
+                  <a:srgbClr val="1B1F24"/>
+                </a:solidFill>
+                <a:latin typeface="Inter" pitchFamily="34" charset="0"/>
+                <a:ea typeface="Inter" pitchFamily="34" charset="-122"/>
+                <a:cs typeface="Inter" pitchFamily="34" charset="-120"/>
+              </a:rPr>
+              <a:t>Run it. Read like an editor. Get it to 80%, not perfect.</a:t>
+            </a:r>
+            <a:endParaRPr lang="en-US" sz="1650" dirty="0"/>
+          </a:p>
+        </p:txBody>
+      </p:sp>
+      <p:sp>
+        <p:nvSpPr>
+          <p:cNvPr id="15" name="Shape 12"/>
+          <p:cNvSpPr/>
+          <p:nvPr/>
+        </p:nvSpPr>
+        <p:spPr>
+          <a:xfrm>
+            <a:off x="6263640" y="1554480"/>
+            <a:ext cx="5394960" cy="4023360"/>
           </a:xfrm>
           <a:prstGeom prst="roundRect">
             <a:avLst>
-              <a:gd name="adj" fmla="val 11250"/>
+              <a:gd name="adj" fmla="val 2045"/>
             </a:avLst>
           </a:prstGeom>
           <a:solidFill>
-            <a:srgbClr val="F7F5F0"/>
+            <a:srgbClr val="EAF5F3"/>
           </a:solidFill>
           <a:ln w="12700">
             <a:solidFill>
-              <a:srgbClr val="F7F5F0"/>
+              <a:srgbClr val="EAF5F3"/>
             </a:solidFill>
             <a:prstDash val="solid"/>
           </a:ln>
@@ -13104,30 +13210,89 @@
       </p:sp>
       <p:sp>
         <p:nvSpPr>
-          <p:cNvPr id="15" name="Text 12"/>
-          <p:cNvSpPr/>
-          <p:nvPr/>
-        </p:nvSpPr>
-        <p:spPr>
-          <a:xfrm>
-            <a:off x="960120" y="1563624"/>
-            <a:ext cx="10332720" cy="621792"/>
-          </a:xfrm>
-          <a:prstGeom prst="rect">
-            <a:avLst/>
-          </a:prstGeom>
-          <a:noFill/>
-          <a:ln/>
-        </p:spPr>
-        <p:txBody>
-          <a:bodyPr wrap="square" lIns="0" tIns="0" rIns="0" bIns="0" rtlCol="0" anchor="ctr"/>
-          <a:lstStyle/>
-          <a:p>
-            <a:pPr indent="0" marL="0">
-              <a:buNone/>
-            </a:pPr>
-            <a:r>
-              <a:rPr lang="en-US" sz="1800" dirty="0">
+          <p:cNvPr id="16" name="Text 13"/>
+          <p:cNvSpPr/>
+          <p:nvPr/>
+        </p:nvSpPr>
+        <p:spPr>
+          <a:xfrm>
+            <a:off x="6537960" y="1737360"/>
+            <a:ext cx="4937760" cy="292608"/>
+          </a:xfrm>
+          <a:prstGeom prst="rect">
+            <a:avLst/>
+          </a:prstGeom>
+          <a:noFill/>
+          <a:ln/>
+        </p:spPr>
+        <p:txBody>
+          <a:bodyPr wrap="square" lIns="0" tIns="0" rIns="0" bIns="0" rtlCol="0" anchor="ctr"/>
+          <a:lstStyle/>
+          <a:p>
+            <a:pPr indent="0" marL="0">
+              <a:buNone/>
+            </a:pPr>
+            <a:r>
+              <a:rPr lang="en-US" sz="1250" b="1" spc="150" kern="0" dirty="0">
+                <a:solidFill>
+                  <a:srgbClr val="2A9D8F"/>
+                </a:solidFill>
+                <a:latin typeface="Inter" pitchFamily="34" charset="0"/>
+                <a:ea typeface="Inter" pitchFamily="34" charset="-122"/>
+                <a:cs typeface="Inter" pitchFamily="34" charset="-120"/>
+              </a:rPr>
+              <a:t>MS. RIVERA'S PASSAGE · STEP 1</a:t>
+            </a:r>
+            <a:endParaRPr lang="en-US" sz="1250" dirty="0"/>
+          </a:p>
+        </p:txBody>
+      </p:sp>
+      <p:sp>
+        <p:nvSpPr>
+          <p:cNvPr id="17" name="Text 14"/>
+          <p:cNvSpPr/>
+          <p:nvPr/>
+        </p:nvSpPr>
+        <p:spPr>
+          <a:xfrm>
+            <a:off x="6537960" y="2148840"/>
+            <a:ext cx="4892040" cy="3291840"/>
+          </a:xfrm>
+          <a:prstGeom prst="rect">
+            <a:avLst/>
+          </a:prstGeom>
+          <a:noFill/>
+          <a:ln/>
+        </p:spPr>
+        <p:txBody>
+          <a:bodyPr wrap="square" lIns="0" tIns="0" rIns="0" bIns="0" rtlCol="0" anchor="t"/>
+          <a:lstStyle/>
+          <a:p>
+            <a:pPr indent="0" marL="0">
+              <a:lnSpc>
+                <a:spcPct val="120000"/>
+              </a:lnSpc>
+              <a:buNone/>
+            </a:pPr>
+            <a:r>
+              <a:rPr lang="en-US" sz="1650" b="1" dirty="0">
+                <a:solidFill>
+                  <a:srgbClr val="13293D"/>
+                </a:solidFill>
+                <a:latin typeface="Inter" pitchFamily="34" charset="0"/>
+                <a:ea typeface="Inter" pitchFamily="34" charset="-122"/>
+                <a:cs typeface="Inter" pitchFamily="34" charset="-120"/>
+              </a:rPr>
+              <a:t>Her pick: </a:t>
+            </a:r>
+            <a:pPr indent="0" marL="0">
+              <a:lnSpc>
+                <a:spcPct val="120000"/>
+              </a:lnSpc>
+              <a:buNone/>
+            </a:pPr>
+            <a:r>
+              <a:rPr lang="en-US" sz="1650" dirty="0">
                 <a:solidFill>
                   <a:srgbClr val="1B1F24"/>
                 </a:solidFill>
@@ -13135,65 +13300,35 @@
                 <a:ea typeface="Inter" pitchFamily="34" charset="-122"/>
                 <a:cs typeface="Inter" pitchFamily="34" charset="-120"/>
               </a:rPr>
-              <a:t>Pick the one artifact your lesson most needs: reading, practice set, directions, exit check</a:t>
-            </a:r>
-            <a:endParaRPr lang="en-US" sz="1800" dirty="0"/>
-          </a:p>
-        </p:txBody>
-      </p:sp>
-      <p:sp>
-        <p:nvSpPr>
-          <p:cNvPr id="16" name="Shape 13"/>
-          <p:cNvSpPr/>
-          <p:nvPr/>
-        </p:nvSpPr>
-        <p:spPr>
-          <a:xfrm>
-            <a:off x="640080" y="2377440"/>
-            <a:ext cx="10972800" cy="731520"/>
-          </a:xfrm>
-          <a:prstGeom prst="roundRect">
-            <a:avLst>
-              <a:gd name="adj" fmla="val 11250"/>
-            </a:avLst>
-          </a:prstGeom>
-          <a:solidFill>
-            <a:srgbClr val="F7F5F0"/>
-          </a:solidFill>
-          <a:ln w="12700">
-            <a:solidFill>
-              <a:srgbClr val="F7F5F0"/>
-            </a:solidFill>
-            <a:prstDash val="solid"/>
-          </a:ln>
-        </p:spPr>
-      </p:sp>
-      <p:sp>
-        <p:nvSpPr>
-          <p:cNvPr id="17" name="Text 14"/>
-          <p:cNvSpPr/>
-          <p:nvPr/>
-        </p:nvSpPr>
-        <p:spPr>
-          <a:xfrm>
-            <a:off x="960120" y="2432304"/>
-            <a:ext cx="10332720" cy="621792"/>
-          </a:xfrm>
-          <a:prstGeom prst="rect">
-            <a:avLst/>
-          </a:prstGeom>
-          <a:noFill/>
-          <a:ln/>
-        </p:spPr>
-        <p:txBody>
-          <a:bodyPr wrap="square" lIns="0" tIns="0" rIns="0" bIns="0" rtlCol="0" anchor="ctr"/>
-          <a:lstStyle/>
-          <a:p>
-            <a:pPr indent="0" marL="0">
-              <a:buNone/>
-            </a:pPr>
-            <a:r>
-              <a:rPr lang="en-US" sz="1800" dirty="0">
+              <a:t>the reading passage for her 6th grade food webs lesson.
+</a:t>
+            </a:r>
+            <a:pPr indent="0" marL="0">
+              <a:lnSpc>
+                <a:spcPct val="120000"/>
+              </a:lnSpc>
+              <a:buNone/>
+            </a:pPr>
+            <a:r>
+              <a:rPr lang="en-US" sz="1650" b="1" dirty="0">
+                <a:solidFill>
+                  <a:srgbClr val="13293D"/>
+                </a:solidFill>
+                <a:latin typeface="Inter" pitchFamily="34" charset="0"/>
+                <a:ea typeface="Inter" pitchFamily="34" charset="-122"/>
+                <a:cs typeface="Inter" pitchFamily="34" charset="-120"/>
+              </a:rPr>
+              <a:t>“Food Webs: Energy on the Move”
+</a:t>
+            </a:r>
+            <a:pPr indent="0" marL="0">
+              <a:lnSpc>
+                <a:spcPct val="120000"/>
+              </a:lnSpc>
+              <a:buNone/>
+            </a:pPr>
+            <a:r>
+              <a:rPr lang="en-US" sz="1650" dirty="0">
                 <a:solidFill>
                   <a:srgbClr val="1B1F24"/>
                 </a:solidFill>
@@ -13201,153 +13336,39 @@
                 <a:ea typeface="Inter" pitchFamily="34" charset="-122"/>
                 <a:cs typeface="Inter" pitchFamily="34" charset="-120"/>
               </a:rPr>
-              <a:t>Role · task · context · format, and be generous with context</a:t>
-            </a:r>
-            <a:endParaRPr lang="en-US" sz="1800" dirty="0"/>
-          </a:p>
-        </p:txBody>
-      </p:sp>
-      <p:sp>
-        <p:nvSpPr>
-          <p:cNvPr id="18" name="Shape 15"/>
-          <p:cNvSpPr/>
-          <p:nvPr/>
-        </p:nvSpPr>
-        <p:spPr>
-          <a:xfrm>
-            <a:off x="640080" y="3246120"/>
-            <a:ext cx="10972800" cy="731520"/>
-          </a:xfrm>
-          <a:prstGeom prst="roundRect">
-            <a:avLst>
-              <a:gd name="adj" fmla="val 11250"/>
-            </a:avLst>
-          </a:prstGeom>
-          <a:solidFill>
-            <a:srgbClr val="F7F5F0"/>
-          </a:solidFill>
-          <a:ln w="12700">
-            <a:solidFill>
-              <a:srgbClr val="F7F5F0"/>
-            </a:solidFill>
-            <a:prstDash val="solid"/>
-          </a:ln>
-        </p:spPr>
-      </p:sp>
-      <p:sp>
-        <p:nvSpPr>
-          <p:cNvPr id="19" name="Text 16"/>
-          <p:cNvSpPr/>
-          <p:nvPr/>
-        </p:nvSpPr>
-        <p:spPr>
-          <a:xfrm>
-            <a:off x="960120" y="3300984"/>
-            <a:ext cx="10332720" cy="621792"/>
-          </a:xfrm>
-          <a:prstGeom prst="rect">
-            <a:avLst/>
-          </a:prstGeom>
-          <a:noFill/>
-          <a:ln/>
-        </p:spPr>
-        <p:txBody>
-          <a:bodyPr wrap="square" lIns="0" tIns="0" rIns="0" bIns="0" rtlCol="0" anchor="ctr"/>
-          <a:lstStyle/>
-          <a:p>
-            <a:pPr indent="0" marL="0">
-              <a:buNone/>
-            </a:pPr>
-            <a:r>
-              <a:rPr lang="en-US" sz="1800" dirty="0">
-                <a:solidFill>
-                  <a:srgbClr val="1B1F24"/>
-                </a:solidFill>
-                <a:latin typeface="Inter" pitchFamily="34" charset="0"/>
-                <a:ea typeface="Inter" pitchFamily="34" charset="-122"/>
-                <a:cs typeface="Inter" pitchFamily="34" charset="-120"/>
-              </a:rPr>
-              <a:t>What did students just learn? What do they always trip on?</a:t>
-            </a:r>
-            <a:endParaRPr lang="en-US" sz="1800" dirty="0"/>
-          </a:p>
-        </p:txBody>
-      </p:sp>
-      <p:sp>
-        <p:nvSpPr>
-          <p:cNvPr id="20" name="Shape 17"/>
-          <p:cNvSpPr/>
-          <p:nvPr/>
-        </p:nvSpPr>
-        <p:spPr>
-          <a:xfrm>
-            <a:off x="640080" y="4114800"/>
-            <a:ext cx="10972800" cy="731520"/>
-          </a:xfrm>
-          <a:prstGeom prst="roundRect">
-            <a:avLst>
-              <a:gd name="adj" fmla="val 11250"/>
-            </a:avLst>
-          </a:prstGeom>
-          <a:solidFill>
-            <a:srgbClr val="F7F5F0"/>
-          </a:solidFill>
-          <a:ln w="12700">
-            <a:solidFill>
-              <a:srgbClr val="F7F5F0"/>
-            </a:solidFill>
-            <a:prstDash val="solid"/>
-          </a:ln>
-        </p:spPr>
-      </p:sp>
-      <p:sp>
-        <p:nvSpPr>
-          <p:cNvPr id="21" name="Text 18"/>
-          <p:cNvSpPr/>
-          <p:nvPr/>
-        </p:nvSpPr>
-        <p:spPr>
-          <a:xfrm>
-            <a:off x="960120" y="4169664"/>
-            <a:ext cx="10332720" cy="621792"/>
-          </a:xfrm>
-          <a:prstGeom prst="rect">
-            <a:avLst/>
-          </a:prstGeom>
-          <a:noFill/>
-          <a:ln/>
-        </p:spPr>
-        <p:txBody>
-          <a:bodyPr wrap="square" lIns="0" tIns="0" rIns="0" bIns="0" rtlCol="0" anchor="ctr"/>
-          <a:lstStyle/>
-          <a:p>
-            <a:pPr indent="0" marL="0">
-              <a:buNone/>
-            </a:pPr>
-            <a:r>
-              <a:rPr lang="en-US" sz="1800" dirty="0">
-                <a:solidFill>
-                  <a:srgbClr val="1B1F24"/>
-                </a:solidFill>
-                <a:latin typeface="Inter" pitchFamily="34" charset="0"/>
-                <a:ea typeface="Inter" pitchFamily="34" charset="-122"/>
-                <a:cs typeface="Inter" pitchFamily="34" charset="-120"/>
-              </a:rPr>
-              <a:t>Run it. Read like an editor. Get it to 80%, not perfect.</a:t>
-            </a:r>
-            <a:endParaRPr lang="en-US" sz="1800" dirty="0"/>
-          </a:p>
-        </p:txBody>
-      </p:sp>
-      <p:sp>
-        <p:nvSpPr>
-          <p:cNvPr id="22" name="Text 19"/>
-          <p:cNvSpPr/>
-          <p:nvPr/>
-        </p:nvSpPr>
-        <p:spPr>
-          <a:xfrm>
-            <a:off x="640080" y="5212080"/>
+              <a:t>Four sections, drafted with the formula: what a food web shows · producers and consumers · decomposers · when one link breaks.
+</a:t>
+            </a:r>
+            <a:pPr indent="0" marL="0">
+              <a:lnSpc>
+                <a:spcPct val="120000"/>
+              </a:lnSpc>
+              <a:buNone/>
+            </a:pPr>
+            <a:r>
+              <a:rPr lang="en-US" sz="1650" i="1" dirty="0">
+                <a:solidFill>
+                  <a:srgbClr val="5B6B7A"/>
+                </a:solidFill>
+                <a:latin typeface="Inter" pitchFamily="34" charset="0"/>
+                <a:ea typeface="Inter" pitchFamily="34" charset="-122"/>
+                <a:cs typeface="Inter" pitchFamily="34" charset="-120"/>
+              </a:rPr>
+              <a:t>“Eighty percent is enough. The polish waits for the review.”</a:t>
+            </a:r>
+            <a:endParaRPr lang="en-US" sz="1650" dirty="0"/>
+          </a:p>
+        </p:txBody>
+      </p:sp>
+      <p:sp>
+        <p:nvSpPr>
+          <p:cNvPr id="18" name="Text 15"/>
+          <p:cNvSpPr/>
+          <p:nvPr/>
+        </p:nvSpPr>
+        <p:spPr>
+          <a:xfrm>
+            <a:off x="640080" y="5715000"/>
             <a:ext cx="10972800" cy="457200"/>
           </a:xfrm>
           <a:prstGeom prst="rect">
@@ -13727,7 +13748,7 @@
                 <a:ea typeface="Inter" pitchFamily="34" charset="-122"/>
                 <a:cs typeface="Inter" pitchFamily="34" charset="-120"/>
               </a:rPr>
-              <a:t>Her two follow-ups in the same chat: support version, then stretch.</a:t>
+              <a:t>Her passage's two follow-ups, same chat: the support version, then the stretch.</a:t>
             </a:r>
             <a:endParaRPr lang="en-US" sz="1000" dirty="0"/>
           </a:p>
@@ -13820,11 +13841,221 @@
         <p:spPr>
           <a:xfrm>
             <a:off x="640080" y="1554480"/>
-            <a:ext cx="5394960" cy="3840480"/>
+            <a:ext cx="5394960" cy="1874520"/>
           </a:xfrm>
           <a:prstGeom prst="roundRect">
             <a:avLst>
-              <a:gd name="adj" fmla="val 2143"/>
+              <a:gd name="adj" fmla="val 4390"/>
+            </a:avLst>
+          </a:prstGeom>
+          <a:solidFill>
+            <a:srgbClr val="F7F5F0"/>
+          </a:solidFill>
+          <a:ln w="12700">
+            <a:solidFill>
+              <a:srgbClr val="F7F5F0"/>
+            </a:solidFill>
+            <a:prstDash val="solid"/>
+          </a:ln>
+        </p:spPr>
+      </p:sp>
+      <p:sp>
+        <p:nvSpPr>
+          <p:cNvPr id="15" name="Text 12"/>
+          <p:cNvSpPr/>
+          <p:nvPr/>
+        </p:nvSpPr>
+        <p:spPr>
+          <a:xfrm>
+            <a:off x="914400" y="1719072"/>
+            <a:ext cx="4846320" cy="384048"/>
+          </a:xfrm>
+          <a:prstGeom prst="rect">
+            <a:avLst/>
+          </a:prstGeom>
+          <a:noFill/>
+          <a:ln/>
+        </p:spPr>
+        <p:txBody>
+          <a:bodyPr wrap="square" lIns="0" tIns="0" rIns="0" bIns="0" rtlCol="0" anchor="ctr"/>
+          <a:lstStyle/>
+          <a:p>
+            <a:pPr indent="0" marL="0">
+              <a:buNone/>
+            </a:pPr>
+            <a:r>
+              <a:rPr lang="en-US" sz="1900" b="1" dirty="0">
+                <a:solidFill>
+                  <a:srgbClr val="2E7D5B"/>
+                </a:solidFill>
+                <a:latin typeface="Inter" pitchFamily="34" charset="0"/>
+                <a:ea typeface="Inter" pitchFamily="34" charset="-122"/>
+                <a:cs typeface="Inter" pitchFamily="34" charset="-120"/>
+              </a:rPr>
+              <a:t>Support</a:t>
+            </a:r>
+            <a:endParaRPr lang="en-US" sz="1900" dirty="0"/>
+          </a:p>
+        </p:txBody>
+      </p:sp>
+      <p:sp>
+        <p:nvSpPr>
+          <p:cNvPr id="16" name="Text 13"/>
+          <p:cNvSpPr/>
+          <p:nvPr/>
+        </p:nvSpPr>
+        <p:spPr>
+          <a:xfrm>
+            <a:off x="914400" y="2139696"/>
+            <a:ext cx="4846320" cy="1188720"/>
+          </a:xfrm>
+          <a:prstGeom prst="rect">
+            <a:avLst/>
+          </a:prstGeom>
+          <a:noFill/>
+          <a:ln/>
+        </p:spPr>
+        <p:txBody>
+          <a:bodyPr wrap="square" lIns="0" tIns="0" rIns="0" bIns="0" rtlCol="0" anchor="t"/>
+          <a:lstStyle/>
+          <a:p>
+            <a:pPr indent="0" marL="0">
+              <a:buNone/>
+            </a:pPr>
+            <a:r>
+              <a:rPr lang="en-US" sz="1450" dirty="0">
+                <a:solidFill>
+                  <a:srgbClr val="1B1F24"/>
+                </a:solidFill>
+                <a:latin typeface="Inter" pitchFamily="34" charset="0"/>
+                <a:ea typeface="Inter" pitchFamily="34" charset="-122"/>
+                <a:cs typeface="Inter" pitchFamily="34" charset="-120"/>
+              </a:rPr>
+              <a:t>Level it down or scaffold it, your choice. Use the handout prompt as-is; the AI already has your artifact in the chat.</a:t>
+            </a:r>
+            <a:endParaRPr lang="en-US" sz="1450" dirty="0"/>
+          </a:p>
+        </p:txBody>
+      </p:sp>
+      <p:sp>
+        <p:nvSpPr>
+          <p:cNvPr id="17" name="Shape 14"/>
+          <p:cNvSpPr/>
+          <p:nvPr/>
+        </p:nvSpPr>
+        <p:spPr>
+          <a:xfrm>
+            <a:off x="640080" y="3611880"/>
+            <a:ext cx="5394960" cy="1874520"/>
+          </a:xfrm>
+          <a:prstGeom prst="roundRect">
+            <a:avLst>
+              <a:gd name="adj" fmla="val 4390"/>
+            </a:avLst>
+          </a:prstGeom>
+          <a:solidFill>
+            <a:srgbClr val="F7F5F0"/>
+          </a:solidFill>
+          <a:ln w="12700">
+            <a:solidFill>
+              <a:srgbClr val="F7F5F0"/>
+            </a:solidFill>
+            <a:prstDash val="solid"/>
+          </a:ln>
+        </p:spPr>
+      </p:sp>
+      <p:sp>
+        <p:nvSpPr>
+          <p:cNvPr id="18" name="Text 15"/>
+          <p:cNvSpPr/>
+          <p:nvPr/>
+        </p:nvSpPr>
+        <p:spPr>
+          <a:xfrm>
+            <a:off x="914400" y="3776472"/>
+            <a:ext cx="4846320" cy="384048"/>
+          </a:xfrm>
+          <a:prstGeom prst="rect">
+            <a:avLst/>
+          </a:prstGeom>
+          <a:noFill/>
+          <a:ln/>
+        </p:spPr>
+        <p:txBody>
+          <a:bodyPr wrap="square" lIns="0" tIns="0" rIns="0" bIns="0" rtlCol="0" anchor="ctr"/>
+          <a:lstStyle/>
+          <a:p>
+            <a:pPr indent="0" marL="0">
+              <a:buNone/>
+            </a:pPr>
+            <a:r>
+              <a:rPr lang="en-US" sz="1900" b="1" dirty="0">
+                <a:solidFill>
+                  <a:srgbClr val="2A9D8F"/>
+                </a:solidFill>
+                <a:latin typeface="Inter" pitchFamily="34" charset="0"/>
+                <a:ea typeface="Inter" pitchFamily="34" charset="-122"/>
+                <a:cs typeface="Inter" pitchFamily="34" charset="-120"/>
+              </a:rPr>
+              <a:t>Stretch</a:t>
+            </a:r>
+            <a:endParaRPr lang="en-US" sz="1900" dirty="0"/>
+          </a:p>
+        </p:txBody>
+      </p:sp>
+      <p:sp>
+        <p:nvSpPr>
+          <p:cNvPr id="19" name="Text 16"/>
+          <p:cNvSpPr/>
+          <p:nvPr/>
+        </p:nvSpPr>
+        <p:spPr>
+          <a:xfrm>
+            <a:off x="914400" y="4197096"/>
+            <a:ext cx="4846320" cy="1188720"/>
+          </a:xfrm>
+          <a:prstGeom prst="rect">
+            <a:avLst/>
+          </a:prstGeom>
+          <a:noFill/>
+          <a:ln/>
+        </p:spPr>
+        <p:txBody>
+          <a:bodyPr wrap="square" lIns="0" tIns="0" rIns="0" bIns="0" rtlCol="0" anchor="t"/>
+          <a:lstStyle/>
+          <a:p>
+            <a:pPr indent="0" marL="0">
+              <a:buNone/>
+            </a:pPr>
+            <a:r>
+              <a:rPr lang="en-US" sz="1450" dirty="0">
+                <a:solidFill>
+                  <a:srgbClr val="1B1F24"/>
+                </a:solidFill>
+                <a:latin typeface="Inter" pitchFamily="34" charset="0"/>
+                <a:ea typeface="Inter" pitchFamily="34" charset="-122"/>
+                <a:cs typeface="Inter" pitchFamily="34" charset="-120"/>
+              </a:rPr>
+              <a:t>Extension prompts: apply, critique, teach back. Depth, not length. Say “no additional practice problems.”</a:t>
+            </a:r>
+            <a:endParaRPr lang="en-US" sz="1450" dirty="0"/>
+          </a:p>
+        </p:txBody>
+      </p:sp>
+      <p:sp>
+        <p:nvSpPr>
+          <p:cNvPr id="20" name="Shape 17"/>
+          <p:cNvSpPr/>
+          <p:nvPr/>
+        </p:nvSpPr>
+        <p:spPr>
+          <a:xfrm>
+            <a:off x="6263640" y="1554480"/>
+            <a:ext cx="5394960" cy="3931920"/>
+          </a:xfrm>
+          <a:prstGeom prst="roundRect">
+            <a:avLst>
+              <a:gd name="adj" fmla="val 2093"/>
             </a:avLst>
           </a:prstGeom>
           <a:solidFill>
@@ -13840,30 +14071,72 @@
       </p:sp>
       <p:sp>
         <p:nvSpPr>
-          <p:cNvPr id="15" name="Text 12"/>
-          <p:cNvSpPr/>
-          <p:nvPr/>
-        </p:nvSpPr>
-        <p:spPr>
-          <a:xfrm>
-            <a:off x="960120" y="1828800"/>
-            <a:ext cx="4754880" cy="457200"/>
-          </a:xfrm>
-          <a:prstGeom prst="rect">
-            <a:avLst/>
-          </a:prstGeom>
-          <a:noFill/>
-          <a:ln/>
-        </p:spPr>
-        <p:txBody>
-          <a:bodyPr wrap="square" lIns="0" tIns="0" rIns="0" bIns="0" rtlCol="0" anchor="ctr"/>
-          <a:lstStyle/>
-          <a:p>
-            <a:pPr indent="0" marL="0">
-              <a:buNone/>
-            </a:pPr>
-            <a:r>
-              <a:rPr lang="en-US" sz="2200" b="1" dirty="0">
+          <p:cNvPr id="21" name="Text 18"/>
+          <p:cNvSpPr/>
+          <p:nvPr/>
+        </p:nvSpPr>
+        <p:spPr>
+          <a:xfrm>
+            <a:off x="6537960" y="1737360"/>
+            <a:ext cx="4937760" cy="292608"/>
+          </a:xfrm>
+          <a:prstGeom prst="rect">
+            <a:avLst/>
+          </a:prstGeom>
+          <a:noFill/>
+          <a:ln/>
+        </p:spPr>
+        <p:txBody>
+          <a:bodyPr wrap="square" lIns="0" tIns="0" rIns="0" bIns="0" rtlCol="0" anchor="ctr"/>
+          <a:lstStyle/>
+          <a:p>
+            <a:pPr indent="0" marL="0">
+              <a:buNone/>
+            </a:pPr>
+            <a:r>
+              <a:rPr lang="en-US" sz="1250" b="1" spc="150" kern="0" dirty="0">
+                <a:solidFill>
+                  <a:srgbClr val="2A9D8F"/>
+                </a:solidFill>
+                <a:latin typeface="Inter" pitchFamily="34" charset="0"/>
+                <a:ea typeface="Inter" pitchFamily="34" charset="-122"/>
+                <a:cs typeface="Inter" pitchFamily="34" charset="-120"/>
+              </a:rPr>
+              <a:t>MS. RIVERA'S PASSAGE · STEP 2</a:t>
+            </a:r>
+            <a:endParaRPr lang="en-US" sz="1250" dirty="0"/>
+          </a:p>
+        </p:txBody>
+      </p:sp>
+      <p:sp>
+        <p:nvSpPr>
+          <p:cNvPr id="22" name="Text 19"/>
+          <p:cNvSpPr/>
+          <p:nvPr/>
+        </p:nvSpPr>
+        <p:spPr>
+          <a:xfrm>
+            <a:off x="6537960" y="2148840"/>
+            <a:ext cx="4892040" cy="3200400"/>
+          </a:xfrm>
+          <a:prstGeom prst="rect">
+            <a:avLst/>
+          </a:prstGeom>
+          <a:noFill/>
+          <a:ln/>
+        </p:spPr>
+        <p:txBody>
+          <a:bodyPr wrap="square" lIns="0" tIns="0" rIns="0" bIns="0" rtlCol="0" anchor="t"/>
+          <a:lstStyle/>
+          <a:p>
+            <a:pPr indent="0" marL="0">
+              <a:lnSpc>
+                <a:spcPct val="120000"/>
+              </a:lnSpc>
+              <a:buNone/>
+            </a:pPr>
+            <a:r>
+              <a:rPr lang="en-US" sz="1600" b="1" dirty="0">
                 <a:solidFill>
                   <a:srgbClr val="2E7D5B"/>
                 </a:solidFill>
@@ -13871,38 +14144,16 @@
                 <a:ea typeface="Inter" pitchFamily="34" charset="-122"/>
                 <a:cs typeface="Inter" pitchFamily="34" charset="-120"/>
               </a:rPr>
-              <a:t>Support</a:t>
-            </a:r>
-            <a:endParaRPr lang="en-US" sz="2200" dirty="0"/>
-          </a:p>
-        </p:txBody>
-      </p:sp>
-      <p:sp>
-        <p:nvSpPr>
-          <p:cNvPr id="16" name="Text 13"/>
-          <p:cNvSpPr/>
-          <p:nvPr/>
-        </p:nvSpPr>
-        <p:spPr>
-          <a:xfrm>
-            <a:off x="960120" y="2377440"/>
-            <a:ext cx="4754880" cy="2651760"/>
-          </a:xfrm>
-          <a:prstGeom prst="rect">
-            <a:avLst/>
-          </a:prstGeom>
-          <a:noFill/>
-          <a:ln/>
-        </p:spPr>
-        <p:txBody>
-          <a:bodyPr wrap="square" lIns="0" tIns="0" rIns="0" bIns="0" rtlCol="0" anchor="t"/>
-          <a:lstStyle/>
-          <a:p>
-            <a:pPr indent="0" marL="0">
-              <a:buNone/>
-            </a:pPr>
-            <a:r>
-              <a:rPr lang="en-US" sz="1800" dirty="0">
+              <a:t>Support: </a:t>
+            </a:r>
+            <a:pPr indent="0" marL="0">
+              <a:lnSpc>
+                <a:spcPct val="120000"/>
+              </a:lnSpc>
+              <a:buNone/>
+            </a:pPr>
+            <a:r>
+              <a:rPr lang="en-US" sz="1600" dirty="0">
                 <a:solidFill>
                   <a:srgbClr val="1B1F24"/>
                 </a:solidFill>
@@ -13910,65 +14161,17 @@
                 <a:ea typeface="Inter" pitchFamily="34" charset="-122"/>
                 <a:cs typeface="Inter" pitchFamily="34" charset="-120"/>
               </a:rPr>
-              <a:t>Level it down or scaffold it, your choice. Use the handout prompt as-is; the AI already has your artifact in the chat.</a:t>
-            </a:r>
-            <a:endParaRPr lang="en-US" sz="1800" dirty="0"/>
-          </a:p>
-        </p:txBody>
-      </p:sp>
-      <p:sp>
-        <p:nvSpPr>
-          <p:cNvPr id="17" name="Shape 14"/>
-          <p:cNvSpPr/>
-          <p:nvPr/>
-        </p:nvSpPr>
-        <p:spPr>
-          <a:xfrm>
-            <a:off x="6263640" y="1554480"/>
-            <a:ext cx="5394960" cy="3840480"/>
-          </a:xfrm>
-          <a:prstGeom prst="roundRect">
-            <a:avLst>
-              <a:gd name="adj" fmla="val 2143"/>
-            </a:avLst>
-          </a:prstGeom>
-          <a:solidFill>
-            <a:srgbClr val="F7F5F0"/>
-          </a:solidFill>
-          <a:ln w="12700">
-            <a:solidFill>
-              <a:srgbClr val="F7F5F0"/>
-            </a:solidFill>
-            <a:prstDash val="solid"/>
-          </a:ln>
-        </p:spPr>
-      </p:sp>
-      <p:sp>
-        <p:nvSpPr>
-          <p:cNvPr id="18" name="Text 15"/>
-          <p:cNvSpPr/>
-          <p:nvPr/>
-        </p:nvSpPr>
-        <p:spPr>
-          <a:xfrm>
-            <a:off x="6583680" y="1828800"/>
-            <a:ext cx="4754880" cy="457200"/>
-          </a:xfrm>
-          <a:prstGeom prst="rect">
-            <a:avLst/>
-          </a:prstGeom>
-          <a:noFill/>
-          <a:ln/>
-        </p:spPr>
-        <p:txBody>
-          <a:bodyPr wrap="square" lIns="0" tIns="0" rIns="0" bIns="0" rtlCol="0" anchor="ctr"/>
-          <a:lstStyle/>
-          <a:p>
-            <a:pPr indent="0" marL="0">
-              <a:buNone/>
-            </a:pPr>
-            <a:r>
-              <a:rPr lang="en-US" sz="2200" b="1" dirty="0">
+              <a:t>her passage leveled down. Sentences under 12 words, plus a 5-word vocabulary box.
+</a:t>
+            </a:r>
+            <a:pPr indent="0" marL="0">
+              <a:lnSpc>
+                <a:spcPct val="120000"/>
+              </a:lnSpc>
+              <a:buNone/>
+            </a:pPr>
+            <a:r>
+              <a:rPr lang="en-US" sz="1600" b="1" dirty="0">
                 <a:solidFill>
                   <a:srgbClr val="2A9D8F"/>
                 </a:solidFill>
@@ -13976,38 +14179,16 @@
                 <a:ea typeface="Inter" pitchFamily="34" charset="-122"/>
                 <a:cs typeface="Inter" pitchFamily="34" charset="-120"/>
               </a:rPr>
-              <a:t>Stretch</a:t>
-            </a:r>
-            <a:endParaRPr lang="en-US" sz="2200" dirty="0"/>
-          </a:p>
-        </p:txBody>
-      </p:sp>
-      <p:sp>
-        <p:nvSpPr>
-          <p:cNvPr id="19" name="Text 16"/>
-          <p:cNvSpPr/>
-          <p:nvPr/>
-        </p:nvSpPr>
-        <p:spPr>
-          <a:xfrm>
-            <a:off x="6583680" y="2377440"/>
-            <a:ext cx="4754880" cy="2651760"/>
-          </a:xfrm>
-          <a:prstGeom prst="rect">
-            <a:avLst/>
-          </a:prstGeom>
-          <a:noFill/>
-          <a:ln/>
-        </p:spPr>
-        <p:txBody>
-          <a:bodyPr wrap="square" lIns="0" tIns="0" rIns="0" bIns="0" rtlCol="0" anchor="t"/>
-          <a:lstStyle/>
-          <a:p>
-            <a:pPr indent="0" marL="0">
-              <a:buNone/>
-            </a:pPr>
-            <a:r>
-              <a:rPr lang="en-US" sz="1800" dirty="0">
+              <a:t>Stretch: </a:t>
+            </a:r>
+            <a:pPr indent="0" marL="0">
+              <a:lnSpc>
+                <a:spcPct val="120000"/>
+              </a:lnSpc>
+              <a:buNone/>
+            </a:pPr>
+            <a:r>
+              <a:rPr lang="en-US" sz="1600" dirty="0">
                 <a:solidFill>
                   <a:srgbClr val="1B1F24"/>
                 </a:solidFill>
@@ -14015,21 +14196,39 @@
                 <a:ea typeface="Inter" pitchFamily="34" charset="-122"/>
                 <a:cs typeface="Inter" pitchFamily="34" charset="-120"/>
               </a:rPr>
-              <a:t>Extension prompts: apply, critique, teach back. Depth, not length. Say “no additional practice problems.”</a:t>
-            </a:r>
-            <a:endParaRPr lang="en-US" sz="1800" dirty="0"/>
-          </a:p>
-        </p:txBody>
-      </p:sp>
-      <p:sp>
-        <p:nvSpPr>
-          <p:cNvPr id="20" name="Text 17"/>
-          <p:cNvSpPr/>
-          <p:nvPr/>
-        </p:nvSpPr>
-        <p:spPr>
-          <a:xfrm>
-            <a:off x="640080" y="5623560"/>
+              <a:t>three depth prompts: apply it to a desert food web, find the flaw in a broken one, teach it to a 3rd grader.
+</a:t>
+            </a:r>
+            <a:pPr indent="0" marL="0">
+              <a:lnSpc>
+                <a:spcPct val="120000"/>
+              </a:lnSpc>
+              <a:buNone/>
+            </a:pPr>
+            <a:r>
+              <a:rPr lang="en-US" sz="1600" i="1" dirty="0">
+                <a:solidFill>
+                  <a:srgbClr val="5B6B7A"/>
+                </a:solidFill>
+                <a:latin typeface="Inter" pitchFamily="34" charset="0"/>
+                <a:ea typeface="Inter" pitchFamily="34" charset="-122"/>
+                <a:cs typeface="Inter" pitchFamily="34" charset="-120"/>
+              </a:rPr>
+              <a:t>"Two follow-ups in the same chat. It already has my passage."</a:t>
+            </a:r>
+            <a:endParaRPr lang="en-US" sz="1600" dirty="0"/>
+          </a:p>
+        </p:txBody>
+      </p:sp>
+      <p:sp>
+        <p:nvSpPr>
+          <p:cNvPr id="23" name="Text 20"/>
+          <p:cNvSpPr/>
+          <p:nvPr/>
+        </p:nvSpPr>
+        <p:spPr>
+          <a:xfrm>
+            <a:off x="640080" y="5715000"/>
             <a:ext cx="10972800" cy="457200"/>
           </a:xfrm>
           <a:prstGeom prst="rect">
@@ -14409,7 +14608,7 @@
                 <a:ea typeface="Inter" pitchFamily="34" charset="-122"/>
                 <a:cs typeface="Inter" pitchFamily="34" charset="-120"/>
               </a:rPr>
-              <a:t>Her review, run live: caught one off-level sentence, fixed the examples.</a:t>
+              <a:t>Her passage's review, run live: one long sentence split, one example swapped.</a:t>
             </a:r>
             <a:endParaRPr lang="en-US" sz="1000" dirty="0"/>
           </a:p>
@@ -14463,23 +14662,23 @@
         <p:spPr>
           <a:xfrm>
             <a:off x="548640" y="384048"/>
-            <a:ext cx="11091672" cy="777240"/>
-          </a:xfrm>
-          <a:prstGeom prst="rect">
-            <a:avLst/>
-          </a:prstGeom>
-          <a:noFill/>
-          <a:ln/>
-        </p:spPr>
-        <p:txBody>
-          <a:bodyPr wrap="square" lIns="0" tIns="0" rIns="0" bIns="0" rtlCol="0" anchor="ctr"/>
-          <a:lstStyle/>
-          <a:p>
-            <a:pPr indent="0" marL="0">
-              <a:buNone/>
-            </a:pPr>
-            <a:r>
-              <a:rPr lang="en-US" sz="3200" b="1" dirty="0">
+            <a:ext cx="7955280" cy="777240"/>
+          </a:xfrm>
+          <a:prstGeom prst="rect">
+            <a:avLst/>
+          </a:prstGeom>
+          <a:noFill/>
+          <a:ln/>
+        </p:spPr>
+        <p:txBody>
+          <a:bodyPr wrap="square" lIns="0" tIns="0" rIns="0" bIns="0" rtlCol="0" anchor="ctr"/>
+          <a:lstStyle/>
+          <a:p>
+            <a:pPr indent="0" marL="0">
+              <a:buNone/>
+            </a:pPr>
+            <a:r>
+              <a:rPr lang="en-US" sz="2800" b="1" dirty="0">
                 <a:solidFill>
                   <a:srgbClr val="13293D"/>
                 </a:solidFill>
@@ -14489,32 +14688,138 @@
               </a:rPr>
               <a:t>Run the 4-point review. Fix what fails.</a:t>
             </a:r>
-            <a:endParaRPr lang="en-US" sz="3200" dirty="0"/>
-          </a:p>
-        </p:txBody>
-      </p:sp>
-      <p:sp>
-        <p:nvSpPr>
-          <p:cNvPr id="14" name="Shape 11"/>
-          <p:cNvSpPr/>
-          <p:nvPr/>
-        </p:nvSpPr>
-        <p:spPr>
-          <a:xfrm>
-            <a:off x="640080" y="1508760"/>
-            <a:ext cx="10972800" cy="731520"/>
+            <a:endParaRPr lang="en-US" sz="2800" dirty="0"/>
+          </a:p>
+        </p:txBody>
+      </p:sp>
+      <p:sp>
+        <p:nvSpPr>
+          <p:cNvPr id="14" name="Text 11"/>
+          <p:cNvSpPr/>
+          <p:nvPr/>
+        </p:nvSpPr>
+        <p:spPr>
+          <a:xfrm>
+            <a:off x="640080" y="1554480"/>
+            <a:ext cx="5394960" cy="4023360"/>
+          </a:xfrm>
+          <a:prstGeom prst="rect">
+            <a:avLst/>
+          </a:prstGeom>
+          <a:noFill/>
+          <a:ln/>
+        </p:spPr>
+        <p:txBody>
+          <a:bodyPr wrap="square" rtlCol="0" anchor="t"/>
+          <a:lstStyle/>
+          <a:p>
+            <a:pPr marL="342900" indent="-342900">
+              <a:spcAft>
+                <a:spcPts val="1000"/>
+              </a:spcAft>
+              <a:buSzPct val="100000"/>
+              <a:buChar char="•"/>
+            </a:pPr>
+            <a:r>
+              <a:rPr lang="en-US" sz="1650" dirty="0">
+                <a:solidFill>
+                  <a:srgbClr val="1B1F24"/>
+                </a:solidFill>
+                <a:latin typeface="Inter" pitchFamily="34" charset="0"/>
+                <a:ea typeface="Inter" pitchFamily="34" charset="-122"/>
+                <a:cs typeface="Inter" pitchFamily="34" charset="-120"/>
+              </a:rPr>
+              <a:t>Accurate? Check facts and any named resources</a:t>
+            </a:r>
+            <a:endParaRPr lang="en-US" sz="1650" dirty="0"/>
+          </a:p>
+          <a:p>
+            <a:pPr marL="342900" indent="-342900">
+              <a:spcAft>
+                <a:spcPts val="1000"/>
+              </a:spcAft>
+              <a:buSzPct val="100000"/>
+              <a:buChar char="•"/>
+            </a:pPr>
+            <a:r>
+              <a:rPr lang="en-US" sz="1650" dirty="0">
+                <a:solidFill>
+                  <a:srgbClr val="1B1F24"/>
+                </a:solidFill>
+                <a:latin typeface="Inter" pitchFamily="34" charset="0"/>
+                <a:ea typeface="Inter" pitchFamily="34" charset="-122"/>
+                <a:cs typeface="Inter" pitchFamily="34" charset="-120"/>
+              </a:rPr>
+              <a:t>At level, actually? Read the support version aloud to your partner</a:t>
+            </a:r>
+            <a:endParaRPr lang="en-US" sz="1650" dirty="0"/>
+          </a:p>
+          <a:p>
+            <a:pPr marL="342900" indent="-342900">
+              <a:spcAft>
+                <a:spcPts val="1000"/>
+              </a:spcAft>
+              <a:buSzPct val="100000"/>
+              <a:buChar char="•"/>
+            </a:pPr>
+            <a:r>
+              <a:rPr lang="en-US" sz="1650" dirty="0">
+                <a:solidFill>
+                  <a:srgbClr val="1B1F24"/>
+                </a:solidFill>
+                <a:latin typeface="Inter" pitchFamily="34" charset="0"/>
+                <a:ea typeface="Inter" pitchFamily="34" charset="-122"/>
+                <a:cs typeface="Inter" pitchFamily="34" charset="-120"/>
+              </a:rPr>
+              <a:t>Fits your students? Swap the examples that won’t land</a:t>
+            </a:r>
+            <a:endParaRPr lang="en-US" sz="1650" dirty="0"/>
+          </a:p>
+          <a:p>
+            <a:pPr marL="342900" indent="-342900">
+              <a:spcAft>
+                <a:spcPts val="1000"/>
+              </a:spcAft>
+              <a:buSzPct val="100000"/>
+              <a:buChar char="•"/>
+            </a:pPr>
+            <a:r>
+              <a:rPr lang="en-US" sz="1650" dirty="0">
+                <a:solidFill>
+                  <a:srgbClr val="1B1F24"/>
+                </a:solidFill>
+                <a:latin typeface="Inter" pitchFamily="34" charset="0"/>
+                <a:ea typeface="Inter" pitchFamily="34" charset="-122"/>
+                <a:cs typeface="Inter" pitchFamily="34" charset="-120"/>
+              </a:rPr>
+              <a:t>Sounds like you? If not: “warmer,” “plainer,” “shorter”</a:t>
+            </a:r>
+            <a:endParaRPr lang="en-US" sz="1650" dirty="0"/>
+          </a:p>
+        </p:txBody>
+      </p:sp>
+      <p:sp>
+        <p:nvSpPr>
+          <p:cNvPr id="15" name="Shape 12"/>
+          <p:cNvSpPr/>
+          <p:nvPr/>
+        </p:nvSpPr>
+        <p:spPr>
+          <a:xfrm>
+            <a:off x="6263640" y="1554480"/>
+            <a:ext cx="5394960" cy="4023360"/>
           </a:xfrm>
           <a:prstGeom prst="roundRect">
             <a:avLst>
-              <a:gd name="adj" fmla="val 11250"/>
+              <a:gd name="adj" fmla="val 2045"/>
             </a:avLst>
           </a:prstGeom>
           <a:solidFill>
-            <a:srgbClr val="F7F5F0"/>
+            <a:srgbClr val="EAF5F3"/>
           </a:solidFill>
           <a:ln w="12700">
             <a:solidFill>
-              <a:srgbClr val="F7F5F0"/>
+              <a:srgbClr val="EAF5F3"/>
             </a:solidFill>
             <a:prstDash val="solid"/>
           </a:ln>
@@ -14522,30 +14827,89 @@
       </p:sp>
       <p:sp>
         <p:nvSpPr>
-          <p:cNvPr id="15" name="Text 12"/>
-          <p:cNvSpPr/>
-          <p:nvPr/>
-        </p:nvSpPr>
-        <p:spPr>
-          <a:xfrm>
-            <a:off x="960120" y="1563624"/>
-            <a:ext cx="10332720" cy="621792"/>
-          </a:xfrm>
-          <a:prstGeom prst="rect">
-            <a:avLst/>
-          </a:prstGeom>
-          <a:noFill/>
-          <a:ln/>
-        </p:spPr>
-        <p:txBody>
-          <a:bodyPr wrap="square" lIns="0" tIns="0" rIns="0" bIns="0" rtlCol="0" anchor="ctr"/>
-          <a:lstStyle/>
-          <a:p>
-            <a:pPr indent="0" marL="0">
-              <a:buNone/>
-            </a:pPr>
-            <a:r>
-              <a:rPr lang="en-US" sz="1800" dirty="0">
+          <p:cNvPr id="16" name="Text 13"/>
+          <p:cNvSpPr/>
+          <p:nvPr/>
+        </p:nvSpPr>
+        <p:spPr>
+          <a:xfrm>
+            <a:off x="6537960" y="1737360"/>
+            <a:ext cx="4937760" cy="292608"/>
+          </a:xfrm>
+          <a:prstGeom prst="rect">
+            <a:avLst/>
+          </a:prstGeom>
+          <a:noFill/>
+          <a:ln/>
+        </p:spPr>
+        <p:txBody>
+          <a:bodyPr wrap="square" lIns="0" tIns="0" rIns="0" bIns="0" rtlCol="0" anchor="ctr"/>
+          <a:lstStyle/>
+          <a:p>
+            <a:pPr indent="0" marL="0">
+              <a:buNone/>
+            </a:pPr>
+            <a:r>
+              <a:rPr lang="en-US" sz="1250" b="1" spc="150" kern="0" dirty="0">
+                <a:solidFill>
+                  <a:srgbClr val="2A9D8F"/>
+                </a:solidFill>
+                <a:latin typeface="Inter" pitchFamily="34" charset="0"/>
+                <a:ea typeface="Inter" pitchFamily="34" charset="-122"/>
+                <a:cs typeface="Inter" pitchFamily="34" charset="-120"/>
+              </a:rPr>
+              <a:t>MS. RIVERA'S PASSAGE · STEP 3</a:t>
+            </a:r>
+            <a:endParaRPr lang="en-US" sz="1250" dirty="0"/>
+          </a:p>
+        </p:txBody>
+      </p:sp>
+      <p:sp>
+        <p:nvSpPr>
+          <p:cNvPr id="17" name="Text 14"/>
+          <p:cNvSpPr/>
+          <p:nvPr/>
+        </p:nvSpPr>
+        <p:spPr>
+          <a:xfrm>
+            <a:off x="6537960" y="2148840"/>
+            <a:ext cx="4892040" cy="3291840"/>
+          </a:xfrm>
+          <a:prstGeom prst="rect">
+            <a:avLst/>
+          </a:prstGeom>
+          <a:noFill/>
+          <a:ln/>
+        </p:spPr>
+        <p:txBody>
+          <a:bodyPr wrap="square" lIns="0" tIns="0" rIns="0" bIns="0" rtlCol="0" anchor="t"/>
+          <a:lstStyle/>
+          <a:p>
+            <a:pPr indent="0" marL="0">
+              <a:lnSpc>
+                <a:spcPct val="120000"/>
+              </a:lnSpc>
+              <a:buNone/>
+            </a:pPr>
+            <a:r>
+              <a:rPr lang="en-US" sz="1550" b="1" dirty="0">
+                <a:solidFill>
+                  <a:srgbClr val="2E7D5B"/>
+                </a:solidFill>
+                <a:latin typeface="Inter" pitchFamily="34" charset="0"/>
+                <a:ea typeface="Inter" pitchFamily="34" charset="-122"/>
+                <a:cs typeface="Inter" pitchFamily="34" charset="-120"/>
+              </a:rPr>
+              <a:t>Accurate: </a:t>
+            </a:r>
+            <a:pPr indent="0" marL="0">
+              <a:lnSpc>
+                <a:spcPct val="120000"/>
+              </a:lnSpc>
+              <a:buNone/>
+            </a:pPr>
+            <a:r>
+              <a:rPr lang="en-US" sz="1550" dirty="0">
                 <a:solidFill>
                   <a:srgbClr val="1B1F24"/>
                 </a:solidFill>
@@ -14553,65 +14917,34 @@
                 <a:ea typeface="Inter" pitchFamily="34" charset="-122"/>
                 <a:cs typeface="Inter" pitchFamily="34" charset="-120"/>
               </a:rPr>
-              <a:t>Accurate? Check facts and any named resources</a:t>
-            </a:r>
-            <a:endParaRPr lang="en-US" sz="1800" dirty="0"/>
-          </a:p>
-        </p:txBody>
-      </p:sp>
-      <p:sp>
-        <p:nvSpPr>
-          <p:cNvPr id="16" name="Shape 13"/>
-          <p:cNvSpPr/>
-          <p:nvPr/>
-        </p:nvSpPr>
-        <p:spPr>
-          <a:xfrm>
-            <a:off x="640080" y="2377440"/>
-            <a:ext cx="10972800" cy="731520"/>
-          </a:xfrm>
-          <a:prstGeom prst="roundRect">
-            <a:avLst>
-              <a:gd name="adj" fmla="val 11250"/>
-            </a:avLst>
-          </a:prstGeom>
-          <a:solidFill>
-            <a:srgbClr val="F7F5F0"/>
-          </a:solidFill>
-          <a:ln w="12700">
-            <a:solidFill>
-              <a:srgbClr val="F7F5F0"/>
-            </a:solidFill>
-            <a:prstDash val="solid"/>
-          </a:ln>
-        </p:spPr>
-      </p:sp>
-      <p:sp>
-        <p:nvSpPr>
-          <p:cNvPr id="17" name="Text 14"/>
-          <p:cNvSpPr/>
-          <p:nvPr/>
-        </p:nvSpPr>
-        <p:spPr>
-          <a:xfrm>
-            <a:off x="960120" y="2432304"/>
-            <a:ext cx="10332720" cy="621792"/>
-          </a:xfrm>
-          <a:prstGeom prst="rect">
-            <a:avLst/>
-          </a:prstGeom>
-          <a:noFill/>
-          <a:ln/>
-        </p:spPr>
-        <p:txBody>
-          <a:bodyPr wrap="square" lIns="0" tIns="0" rIns="0" bIns="0" rtlCol="0" anchor="ctr"/>
-          <a:lstStyle/>
-          <a:p>
-            <a:pPr indent="0" marL="0">
-              <a:buNone/>
-            </a:pPr>
-            <a:r>
-              <a:rPr lang="en-US" sz="1800" dirty="0">
+              <a:t>passes. Every fact and resource checks out.
+</a:t>
+            </a:r>
+            <a:pPr indent="0" marL="0">
+              <a:lnSpc>
+                <a:spcPct val="120000"/>
+              </a:lnSpc>
+              <a:buNone/>
+            </a:pPr>
+            <a:r>
+              <a:rPr lang="en-US" sz="1550" b="1" dirty="0">
+                <a:solidFill>
+                  <a:srgbClr val="B4453A"/>
+                </a:solidFill>
+                <a:latin typeface="Inter" pitchFamily="34" charset="0"/>
+                <a:ea typeface="Inter" pitchFamily="34" charset="-122"/>
+                <a:cs typeface="Inter" pitchFamily="34" charset="-120"/>
+              </a:rPr>
+              <a:t>At level: </a:t>
+            </a:r>
+            <a:pPr indent="0" marL="0">
+              <a:lnSpc>
+                <a:spcPct val="120000"/>
+              </a:lnSpc>
+              <a:buNone/>
+            </a:pPr>
+            <a:r>
+              <a:rPr lang="en-US" sz="1550" dirty="0">
                 <a:solidFill>
                   <a:srgbClr val="1B1F24"/>
                 </a:solidFill>
@@ -14619,65 +14952,34 @@
                 <a:ea typeface="Inter" pitchFamily="34" charset="-122"/>
                 <a:cs typeface="Inter" pitchFamily="34" charset="-120"/>
               </a:rPr>
-              <a:t>At level, actually? Read the support version aloud to your partner</a:t>
-            </a:r>
-            <a:endParaRPr lang="en-US" sz="1800" dirty="0"/>
-          </a:p>
-        </p:txBody>
-      </p:sp>
-      <p:sp>
-        <p:nvSpPr>
-          <p:cNvPr id="18" name="Shape 15"/>
-          <p:cNvSpPr/>
-          <p:nvPr/>
-        </p:nvSpPr>
-        <p:spPr>
-          <a:xfrm>
-            <a:off x="640080" y="3246120"/>
-            <a:ext cx="10972800" cy="731520"/>
-          </a:xfrm>
-          <a:prstGeom prst="roundRect">
-            <a:avLst>
-              <a:gd name="adj" fmla="val 11250"/>
-            </a:avLst>
-          </a:prstGeom>
-          <a:solidFill>
-            <a:srgbClr val="F7F5F0"/>
-          </a:solidFill>
-          <a:ln w="12700">
-            <a:solidFill>
-              <a:srgbClr val="F7F5F0"/>
-            </a:solidFill>
-            <a:prstDash val="solid"/>
-          </a:ln>
-        </p:spPr>
-      </p:sp>
-      <p:sp>
-        <p:nvSpPr>
-          <p:cNvPr id="19" name="Text 16"/>
-          <p:cNvSpPr/>
-          <p:nvPr/>
-        </p:nvSpPr>
-        <p:spPr>
-          <a:xfrm>
-            <a:off x="960120" y="3300984"/>
-            <a:ext cx="10332720" cy="621792"/>
-          </a:xfrm>
-          <a:prstGeom prst="rect">
-            <a:avLst/>
-          </a:prstGeom>
-          <a:noFill/>
-          <a:ln/>
-        </p:spPr>
-        <p:txBody>
-          <a:bodyPr wrap="square" lIns="0" tIns="0" rIns="0" bIns="0" rtlCol="0" anchor="ctr"/>
-          <a:lstStyle/>
-          <a:p>
-            <a:pPr indent="0" marL="0">
-              <a:buNone/>
-            </a:pPr>
-            <a:r>
-              <a:rPr lang="en-US" sz="1800" dirty="0">
+              <a:t>one 24-word sentence in the support version. Split it in the chat.
+</a:t>
+            </a:r>
+            <a:pPr indent="0" marL="0">
+              <a:lnSpc>
+                <a:spcPct val="120000"/>
+              </a:lnSpc>
+              <a:buNone/>
+            </a:pPr>
+            <a:r>
+              <a:rPr lang="en-US" sz="1550" b="1" dirty="0">
+                <a:solidFill>
+                  <a:srgbClr val="B4453A"/>
+                </a:solidFill>
+                <a:latin typeface="Inter" pitchFamily="34" charset="0"/>
+                <a:ea typeface="Inter" pitchFamily="34" charset="-122"/>
+                <a:cs typeface="Inter" pitchFamily="34" charset="-120"/>
+              </a:rPr>
+              <a:t>Fits her kids: </a:t>
+            </a:r>
+            <a:pPr indent="0" marL="0">
+              <a:lnSpc>
+                <a:spcPct val="120000"/>
+              </a:lnSpc>
+              <a:buNone/>
+            </a:pPr>
+            <a:r>
+              <a:rPr lang="en-US" sz="1550" dirty="0">
                 <a:solidFill>
                   <a:srgbClr val="1B1F24"/>
                 </a:solidFill>
@@ -14685,65 +14987,34 @@
                 <a:ea typeface="Inter" pitchFamily="34" charset="-122"/>
                 <a:cs typeface="Inter" pitchFamily="34" charset="-120"/>
               </a:rPr>
-              <a:t>Fits your students? Swap the examples that won’t land</a:t>
-            </a:r>
-            <a:endParaRPr lang="en-US" sz="1800" dirty="0"/>
-          </a:p>
-        </p:txBody>
-      </p:sp>
-      <p:sp>
-        <p:nvSpPr>
-          <p:cNvPr id="20" name="Shape 17"/>
-          <p:cNvSpPr/>
-          <p:nvPr/>
-        </p:nvSpPr>
-        <p:spPr>
-          <a:xfrm>
-            <a:off x="640080" y="4114800"/>
-            <a:ext cx="10972800" cy="731520"/>
-          </a:xfrm>
-          <a:prstGeom prst="roundRect">
-            <a:avLst>
-              <a:gd name="adj" fmla="val 11250"/>
-            </a:avLst>
-          </a:prstGeom>
-          <a:solidFill>
-            <a:srgbClr val="F7F5F0"/>
-          </a:solidFill>
-          <a:ln w="12700">
-            <a:solidFill>
-              <a:srgbClr val="F7F5F0"/>
-            </a:solidFill>
-            <a:prstDash val="solid"/>
-          </a:ln>
-        </p:spPr>
-      </p:sp>
-      <p:sp>
-        <p:nvSpPr>
-          <p:cNvPr id="21" name="Text 18"/>
-          <p:cNvSpPr/>
-          <p:nvPr/>
-        </p:nvSpPr>
-        <p:spPr>
-          <a:xfrm>
-            <a:off x="960120" y="4169664"/>
-            <a:ext cx="10332720" cy="621792"/>
-          </a:xfrm>
-          <a:prstGeom prst="rect">
-            <a:avLst/>
-          </a:prstGeom>
-          <a:noFill/>
-          <a:ln/>
-        </p:spPr>
-        <p:txBody>
-          <a:bodyPr wrap="square" lIns="0" tIns="0" rIns="0" bIns="0" rtlCol="0" anchor="ctr"/>
-          <a:lstStyle/>
-          <a:p>
-            <a:pPr indent="0" marL="0">
-              <a:buNone/>
-            </a:pPr>
-            <a:r>
-              <a:rPr lang="en-US" sz="1800" dirty="0">
+              <a:t>the ocean example swapped for the schoolyard one.
+</a:t>
+            </a:r>
+            <a:pPr indent="0" marL="0">
+              <a:lnSpc>
+                <a:spcPct val="120000"/>
+              </a:lnSpc>
+              <a:buNone/>
+            </a:pPr>
+            <a:r>
+              <a:rPr lang="en-US" sz="1550" b="1" dirty="0">
+                <a:solidFill>
+                  <a:srgbClr val="2E7D5B"/>
+                </a:solidFill>
+                <a:latin typeface="Inter" pitchFamily="34" charset="0"/>
+                <a:ea typeface="Inter" pitchFamily="34" charset="-122"/>
+                <a:cs typeface="Inter" pitchFamily="34" charset="-120"/>
+              </a:rPr>
+              <a:t>Sounds like her: </a:t>
+            </a:r>
+            <a:pPr indent="0" marL="0">
+              <a:lnSpc>
+                <a:spcPct val="120000"/>
+              </a:lnSpc>
+              <a:buNone/>
+            </a:pPr>
+            <a:r>
+              <a:rPr lang="en-US" sz="1550" dirty="0">
                 <a:solidFill>
                   <a:srgbClr val="1B1F24"/>
                 </a:solidFill>
@@ -14751,21 +15022,39 @@
                 <a:ea typeface="Inter" pitchFamily="34" charset="-122"/>
                 <a:cs typeface="Inter" pitchFamily="34" charset="-120"/>
               </a:rPr>
-              <a:t>Sounds like you? If not: “warmer,” “plainer,” “shorter”</a:t>
-            </a:r>
-            <a:endParaRPr lang="en-US" sz="1800" dirty="0"/>
-          </a:p>
-        </p:txBody>
-      </p:sp>
-      <p:sp>
-        <p:nvSpPr>
-          <p:cNvPr id="22" name="Text 19"/>
-          <p:cNvSpPr/>
-          <p:nvPr/>
-        </p:nvSpPr>
-        <p:spPr>
-          <a:xfrm>
-            <a:off x="640080" y="5212080"/>
+              <a:t>passes, after one follow-up: “plainer.”
+</a:t>
+            </a:r>
+            <a:pPr indent="0" marL="0">
+              <a:lnSpc>
+                <a:spcPct val="120000"/>
+              </a:lnSpc>
+              <a:buNone/>
+            </a:pPr>
+            <a:r>
+              <a:rPr lang="en-US" sz="1550" i="1" dirty="0">
+                <a:solidFill>
+                  <a:srgbClr val="5B6B7A"/>
+                </a:solidFill>
+                <a:latin typeface="Inter" pitchFamily="34" charset="0"/>
+                <a:ea typeface="Inter" pitchFamily="34" charset="-122"/>
+                <a:cs typeface="Inter" pitchFamily="34" charset="-120"/>
+              </a:rPr>
+              <a:t>"Two fixes, four passes, while the chat was open."</a:t>
+            </a:r>
+            <a:endParaRPr lang="en-US" sz="1550" dirty="0"/>
+          </a:p>
+        </p:txBody>
+      </p:sp>
+      <p:sp>
+        <p:nvSpPr>
+          <p:cNvPr id="18" name="Text 15"/>
+          <p:cNvSpPr/>
+          <p:nvPr/>
+        </p:nvSpPr>
+        <p:spPr>
+          <a:xfrm>
+            <a:off x="640080" y="5715000"/>
             <a:ext cx="10972800" cy="457200"/>
           </a:xfrm>
           <a:prstGeom prst="rect">
@@ -15145,7 +15434,7 @@
                 <a:ea typeface="Inter" pitchFamily="34" charset="-122"/>
                 <a:cs typeface="Inter" pitchFamily="34" charset="-120"/>
               </a:rPr>
-              <a:t>Her artifacts: core, support, stretch. An evening's work in twenty minutes.</a:t>
+              <a:t>Her share-out: what the review caught in her food webs passage, told first.</a:t>
             </a:r>
             <a:endParaRPr lang="en-US" sz="1000" dirty="0"/>
           </a:p>
@@ -15663,7 +15952,7 @@
                 <a:ea typeface="Inter" pitchFamily="34" charset="-122"/>
                 <a:cs typeface="Inter" pitchFamily="34" charset="-120"/>
               </a:rPr>
-              <a:t>Her materials now match her intentions. That was the whole gap.</a:t>
+              <a:t>Her inventory, one passage: core, support, stretch, all four points passed.</a:t>
             </a:r>
             <a:endParaRPr lang="en-US" sz="1000" dirty="0"/>
           </a:p>

--- a/kits/kit03/Kit03_PresentationDeck.pptx
+++ b/kits/kit03/Kit03_PresentationDeck.pptx
@@ -4076,7 +4076,7 @@
         <p:spPr>
           <a:xfrm>
             <a:off x="566928" y="128016"/>
-            <a:ext cx="11055096" cy="274320"/>
+            <a:ext cx="7955280" cy="274320"/>
           </a:xfrm>
           <a:prstGeom prst="rect">
             <a:avLst/>
@@ -4115,23 +4115,23 @@
         <p:spPr>
           <a:xfrm>
             <a:off x="548640" y="384048"/>
-            <a:ext cx="11091672" cy="777240"/>
-          </a:xfrm>
-          <a:prstGeom prst="rect">
-            <a:avLst/>
-          </a:prstGeom>
-          <a:noFill/>
-          <a:ln/>
-        </p:spPr>
-        <p:txBody>
-          <a:bodyPr wrap="square" lIns="0" tIns="0" rIns="0" bIns="0" rtlCol="0" anchor="ctr"/>
-          <a:lstStyle/>
-          <a:p>
-            <a:pPr indent="0" marL="0">
-              <a:buNone/>
-            </a:pPr>
-            <a:r>
-              <a:rPr lang="en-US" sz="3200" b="1" dirty="0">
+            <a:ext cx="7955280" cy="777240"/>
+          </a:xfrm>
+          <a:prstGeom prst="rect">
+            <a:avLst/>
+          </a:prstGeom>
+          <a:noFill/>
+          <a:ln/>
+        </p:spPr>
+        <p:txBody>
+          <a:bodyPr wrap="square" lIns="0" tIns="0" rIns="0" bIns="0" rtlCol="0" anchor="ctr"/>
+          <a:lstStyle/>
+          <a:p>
+            <a:pPr indent="0" marL="0">
+              <a:buNone/>
+            </a:pPr>
+            <a:r>
+              <a:rPr lang="en-US" sz="2800" b="1" dirty="0">
                 <a:solidFill>
                   <a:srgbClr val="13293D"/>
                 </a:solidFill>
@@ -4141,7 +4141,7 @@
               </a:rPr>
               <a:t>Four moves. New price, same pedagogy.</a:t>
             </a:r>
-            <a:endParaRPr lang="en-US" sz="3200" dirty="0"/>
+            <a:endParaRPr lang="en-US" sz="2800" dirty="0"/>
           </a:p>
         </p:txBody>
       </p:sp>
@@ -5799,7 +5799,7 @@
         <p:spPr>
           <a:xfrm>
             <a:off x="566928" y="128016"/>
-            <a:ext cx="11055096" cy="274320"/>
+            <a:ext cx="7955280" cy="274320"/>
           </a:xfrm>
           <a:prstGeom prst="rect">
             <a:avLst/>
@@ -5838,23 +5838,23 @@
         <p:spPr>
           <a:xfrm>
             <a:off x="548640" y="384048"/>
-            <a:ext cx="11091672" cy="777240"/>
-          </a:xfrm>
-          <a:prstGeom prst="rect">
-            <a:avLst/>
-          </a:prstGeom>
-          <a:noFill/>
-          <a:ln/>
-        </p:spPr>
-        <p:txBody>
-          <a:bodyPr wrap="square" lIns="0" tIns="0" rIns="0" bIns="0" rtlCol="0" anchor="ctr"/>
-          <a:lstStyle/>
-          <a:p>
-            <a:pPr indent="0" marL="0">
-              <a:buNone/>
-            </a:pPr>
-            <a:r>
-              <a:rPr lang="en-US" sz="3200" b="1" dirty="0">
+            <a:ext cx="7955280" cy="777240"/>
+          </a:xfrm>
+          <a:prstGeom prst="rect">
+            <a:avLst/>
+          </a:prstGeom>
+          <a:noFill/>
+          <a:ln/>
+        </p:spPr>
+        <p:txBody>
+          <a:bodyPr wrap="square" lIns="0" tIns="0" rIns="0" bIns="0" rtlCol="0" anchor="ctr"/>
+          <a:lstStyle/>
+          <a:p>
+            <a:pPr indent="0" marL="0">
+              <a:buNone/>
+            </a:pPr>
+            <a:r>
+              <a:rPr lang="en-US" sz="2800" b="1" dirty="0">
                 <a:solidFill>
                   <a:srgbClr val="13293D"/>
                 </a:solidFill>
@@ -5864,7 +5864,7 @@
               </a:rPr>
               <a:t>Check the level. Don’t trust the label.</a:t>
             </a:r>
-            <a:endParaRPr lang="en-US" sz="3200" dirty="0"/>
+            <a:endParaRPr lang="en-US" sz="2800" dirty="0"/>
           </a:p>
         </p:txBody>
       </p:sp>
@@ -6607,7 +6607,7 @@
         <p:spPr>
           <a:xfrm>
             <a:off x="566928" y="128016"/>
-            <a:ext cx="11055096" cy="274320"/>
+            <a:ext cx="7955280" cy="274320"/>
           </a:xfrm>
           <a:prstGeom prst="rect">
             <a:avLst/>
@@ -6646,7 +6646,7 @@
         <p:spPr>
           <a:xfrm>
             <a:off x="548640" y="384048"/>
-            <a:ext cx="11091672" cy="777240"/>
+            <a:ext cx="7955280" cy="777240"/>
           </a:xfrm>
           <a:prstGeom prst="rect">
             <a:avLst/>
@@ -7460,7 +7460,7 @@
         <p:spPr>
           <a:xfrm>
             <a:off x="566928" y="128016"/>
-            <a:ext cx="11055096" cy="274320"/>
+            <a:ext cx="7955280" cy="274320"/>
           </a:xfrm>
           <a:prstGeom prst="rect">
             <a:avLst/>
@@ -7499,23 +7499,23 @@
         <p:spPr>
           <a:xfrm>
             <a:off x="548640" y="384048"/>
-            <a:ext cx="11091672" cy="777240"/>
-          </a:xfrm>
-          <a:prstGeom prst="rect">
-            <a:avLst/>
-          </a:prstGeom>
-          <a:noFill/>
-          <a:ln/>
-        </p:spPr>
-        <p:txBody>
-          <a:bodyPr wrap="square" lIns="0" tIns="0" rIns="0" bIns="0" rtlCol="0" anchor="ctr"/>
-          <a:lstStyle/>
-          <a:p>
-            <a:pPr indent="0" marL="0">
-              <a:buNone/>
-            </a:pPr>
-            <a:r>
-              <a:rPr lang="en-US" sz="3200" b="1" dirty="0">
+            <a:ext cx="7955280" cy="777240"/>
+          </a:xfrm>
+          <a:prstGeom prst="rect">
+            <a:avLst/>
+          </a:prstGeom>
+          <a:noFill/>
+          <a:ln/>
+        </p:spPr>
+        <p:txBody>
+          <a:bodyPr wrap="square" lIns="0" tIns="0" rIns="0" bIns="0" rtlCol="0" anchor="ctr"/>
+          <a:lstStyle/>
+          <a:p>
+            <a:pPr indent="0" marL="0">
+              <a:buNone/>
+            </a:pPr>
+            <a:r>
+              <a:rPr lang="en-US" sz="2800" b="1" dirty="0">
                 <a:solidFill>
                   <a:srgbClr val="13293D"/>
                 </a:solidFill>
@@ -7525,7 +7525,7 @@
               </a:rPr>
               <a:t>Stretch it: depth, not more worksheets</a:t>
             </a:r>
-            <a:endParaRPr lang="en-US" sz="3200" dirty="0"/>
+            <a:endParaRPr lang="en-US" sz="2800" dirty="0"/>
           </a:p>
         </p:txBody>
       </p:sp>
@@ -8439,7 +8439,7 @@
         <p:spPr>
           <a:xfrm>
             <a:off x="566928" y="128016"/>
-            <a:ext cx="11055096" cy="274320"/>
+            <a:ext cx="7955280" cy="274320"/>
           </a:xfrm>
           <a:prstGeom prst="rect">
             <a:avLst/>
@@ -8478,23 +8478,23 @@
         <p:spPr>
           <a:xfrm>
             <a:off x="548640" y="384048"/>
-            <a:ext cx="11091672" cy="777240"/>
-          </a:xfrm>
-          <a:prstGeom prst="rect">
-            <a:avLst/>
-          </a:prstGeom>
-          <a:noFill/>
-          <a:ln/>
-        </p:spPr>
-        <p:txBody>
-          <a:bodyPr wrap="square" lIns="0" tIns="0" rIns="0" bIns="0" rtlCol="0" anchor="ctr"/>
-          <a:lstStyle/>
-          <a:p>
-            <a:pPr indent="0" marL="0">
-              <a:buNone/>
-            </a:pPr>
-            <a:r>
-              <a:rPr lang="en-US" sz="3200" b="1" dirty="0">
+            <a:ext cx="7955280" cy="777240"/>
+          </a:xfrm>
+          <a:prstGeom prst="rect">
+            <a:avLst/>
+          </a:prstGeom>
+          <a:noFill/>
+          <a:ln/>
+        </p:spPr>
+        <p:txBody>
+          <a:bodyPr wrap="square" lIns="0" tIns="0" rIns="0" bIns="0" rtlCol="0" anchor="ctr"/>
+          <a:lstStyle/>
+          <a:p>
+            <a:pPr indent="0" marL="0">
+              <a:buNone/>
+            </a:pPr>
+            <a:r>
+              <a:rPr lang="en-US" sz="2800" b="1" dirty="0">
                 <a:solidFill>
                   <a:srgbClr val="13293D"/>
                 </a:solidFill>
@@ -8504,7 +8504,7 @@
               </a:rPr>
               <a:t>Reformat it: same content, new shape</a:t>
             </a:r>
-            <a:endParaRPr lang="en-US" sz="3200" dirty="0"/>
+            <a:endParaRPr lang="en-US" sz="2800" dirty="0"/>
           </a:p>
         </p:txBody>
       </p:sp>
@@ -9253,7 +9253,7 @@
         <p:spPr>
           <a:xfrm>
             <a:off x="566928" y="128016"/>
-            <a:ext cx="11055096" cy="274320"/>
+            <a:ext cx="7955280" cy="274320"/>
           </a:xfrm>
           <a:prstGeom prst="rect">
             <a:avLst/>
@@ -9292,7 +9292,7 @@
         <p:spPr>
           <a:xfrm>
             <a:off x="548640" y="384048"/>
-            <a:ext cx="11091672" cy="777240"/>
+            <a:ext cx="7955280" cy="777240"/>
           </a:xfrm>
           <a:prstGeom prst="rect">
             <a:avLst/>
@@ -10145,7 +10145,7 @@
         <p:spPr>
           <a:xfrm>
             <a:off x="566928" y="128016"/>
-            <a:ext cx="11055096" cy="274320"/>
+            <a:ext cx="7955280" cy="274320"/>
           </a:xfrm>
           <a:prstGeom prst="rect">
             <a:avLst/>
@@ -10184,7 +10184,7 @@
         <p:spPr>
           <a:xfrm>
             <a:off x="548640" y="384048"/>
-            <a:ext cx="11091672" cy="777240"/>
+            <a:ext cx="7955280" cy="777240"/>
           </a:xfrm>
           <a:prstGeom prst="rect">
             <a:avLst/>
@@ -10932,7 +10932,7 @@
         <p:spPr>
           <a:xfrm>
             <a:off x="566928" y="128016"/>
-            <a:ext cx="11055096" cy="274320"/>
+            <a:ext cx="7955280" cy="274320"/>
           </a:xfrm>
           <a:prstGeom prst="rect">
             <a:avLst/>
@@ -10971,7 +10971,7 @@
         <p:spPr>
           <a:xfrm>
             <a:off x="548640" y="384048"/>
-            <a:ext cx="11091672" cy="777240"/>
+            <a:ext cx="7955280" cy="777240"/>
           </a:xfrm>
           <a:prstGeom prst="rect">
             <a:avLst/>
@@ -11509,7 +11509,7 @@
         <p:spPr>
           <a:xfrm>
             <a:off x="566928" y="128016"/>
-            <a:ext cx="11055096" cy="274320"/>
+            <a:ext cx="7955280" cy="274320"/>
           </a:xfrm>
           <a:prstGeom prst="rect">
             <a:avLst/>
@@ -12290,7 +12290,7 @@
         <p:spPr>
           <a:xfrm>
             <a:off x="566928" y="128016"/>
-            <a:ext cx="11055096" cy="274320"/>
+            <a:ext cx="7955280" cy="274320"/>
           </a:xfrm>
           <a:prstGeom prst="rect">
             <a:avLst/>
@@ -12329,7 +12329,7 @@
         <p:spPr>
           <a:xfrm>
             <a:off x="548640" y="384048"/>
-            <a:ext cx="11091672" cy="777240"/>
+            <a:ext cx="7955280" cy="777240"/>
           </a:xfrm>
           <a:prstGeom prst="rect">
             <a:avLst/>
@@ -13006,7 +13006,7 @@
         <p:spPr>
           <a:xfrm>
             <a:off x="566928" y="128016"/>
-            <a:ext cx="11055096" cy="274320"/>
+            <a:ext cx="7955280" cy="274320"/>
           </a:xfrm>
           <a:prstGeom prst="rect">
             <a:avLst/>
@@ -13045,7 +13045,7 @@
         <p:spPr>
           <a:xfrm>
             <a:off x="548640" y="384048"/>
-            <a:ext cx="11091672" cy="777240"/>
+            <a:ext cx="7955280" cy="777240"/>
           </a:xfrm>
           <a:prstGeom prst="rect">
             <a:avLst/>
@@ -13763,7 +13763,7 @@
         <p:spPr>
           <a:xfrm>
             <a:off x="566928" y="128016"/>
-            <a:ext cx="11055096" cy="274320"/>
+            <a:ext cx="7955280" cy="274320"/>
           </a:xfrm>
           <a:prstGeom prst="rect">
             <a:avLst/>
@@ -13802,7 +13802,7 @@
         <p:spPr>
           <a:xfrm>
             <a:off x="548640" y="384048"/>
-            <a:ext cx="11091672" cy="777240"/>
+            <a:ext cx="7955280" cy="777240"/>
           </a:xfrm>
           <a:prstGeom prst="rect">
             <a:avLst/>
@@ -14623,7 +14623,7 @@
         <p:spPr>
           <a:xfrm>
             <a:off x="566928" y="128016"/>
-            <a:ext cx="11055096" cy="274320"/>
+            <a:ext cx="7955280" cy="274320"/>
           </a:xfrm>
           <a:prstGeom prst="rect">
             <a:avLst/>
@@ -15449,7 +15449,7 @@
         <p:spPr>
           <a:xfrm>
             <a:off x="566928" y="128016"/>
-            <a:ext cx="11055096" cy="274320"/>
+            <a:ext cx="7955280" cy="274320"/>
           </a:xfrm>
           <a:prstGeom prst="rect">
             <a:avLst/>
@@ -15488,7 +15488,7 @@
         <p:spPr>
           <a:xfrm>
             <a:off x="548640" y="384048"/>
-            <a:ext cx="11091672" cy="777240"/>
+            <a:ext cx="7955280" cy="777240"/>
           </a:xfrm>
           <a:prstGeom prst="rect">
             <a:avLst/>
@@ -15967,7 +15967,7 @@
         <p:spPr>
           <a:xfrm>
             <a:off x="566928" y="128016"/>
-            <a:ext cx="11055096" cy="274320"/>
+            <a:ext cx="7955280" cy="274320"/>
           </a:xfrm>
           <a:prstGeom prst="rect">
             <a:avLst/>
@@ -16006,7 +16006,7 @@
         <p:spPr>
           <a:xfrm>
             <a:off x="548640" y="384048"/>
-            <a:ext cx="11091672" cy="777240"/>
+            <a:ext cx="7955280" cy="777240"/>
           </a:xfrm>
           <a:prstGeom prst="rect">
             <a:avLst/>
@@ -16481,7 +16481,7 @@
         <p:spPr>
           <a:xfrm>
             <a:off x="566928" y="128016"/>
-            <a:ext cx="11055096" cy="274320"/>
+            <a:ext cx="7955280" cy="274320"/>
           </a:xfrm>
           <a:prstGeom prst="rect">
             <a:avLst/>
@@ -16520,23 +16520,23 @@
         <p:spPr>
           <a:xfrm>
             <a:off x="548640" y="384048"/>
-            <a:ext cx="11091672" cy="777240"/>
-          </a:xfrm>
-          <a:prstGeom prst="rect">
-            <a:avLst/>
-          </a:prstGeom>
-          <a:noFill/>
-          <a:ln/>
-        </p:spPr>
-        <p:txBody>
-          <a:bodyPr wrap="square" lIns="0" tIns="0" rIns="0" bIns="0" rtlCol="0" anchor="ctr"/>
-          <a:lstStyle/>
-          <a:p>
-            <a:pPr indent="0" marL="0">
-              <a:buNone/>
-            </a:pPr>
-            <a:r>
-              <a:rPr lang="en-US" sz="3200" b="1" dirty="0">
+            <a:ext cx="7955280" cy="777240"/>
+          </a:xfrm>
+          <a:prstGeom prst="rect">
+            <a:avLst/>
+          </a:prstGeom>
+          <a:noFill/>
+          <a:ln/>
+        </p:spPr>
+        <p:txBody>
+          <a:bodyPr wrap="square" lIns="0" tIns="0" rIns="0" bIns="0" rtlCol="0" anchor="ctr"/>
+          <a:lstStyle/>
+          <a:p>
+            <a:pPr indent="0" marL="0">
+              <a:buNone/>
+            </a:pPr>
+            <a:r>
+              <a:rPr lang="en-US" sz="2800" b="1" dirty="0">
                 <a:solidFill>
                   <a:srgbClr val="13293D"/>
                 </a:solidFill>
@@ -16546,7 +16546,7 @@
               </a:rPr>
               <a:t>One differentiated artifact per week</a:t>
             </a:r>
-            <a:endParaRPr lang="en-US" sz="3200" dirty="0"/>
+            <a:endParaRPr lang="en-US" sz="2800" dirty="0"/>
           </a:p>
         </p:txBody>
       </p:sp>
@@ -17065,7 +17065,7 @@
         <p:spPr>
           <a:xfrm>
             <a:off x="566928" y="128016"/>
-            <a:ext cx="11055096" cy="274320"/>
+            <a:ext cx="7955280" cy="274320"/>
           </a:xfrm>
           <a:prstGeom prst="rect">
             <a:avLst/>
@@ -17599,7 +17599,7 @@
         <p:spPr>
           <a:xfrm>
             <a:off x="566928" y="128016"/>
-            <a:ext cx="11055096" cy="274320"/>
+            <a:ext cx="7955280" cy="274320"/>
           </a:xfrm>
           <a:prstGeom prst="rect">
             <a:avLst/>
@@ -17638,7 +17638,7 @@
         <p:spPr>
           <a:xfrm>
             <a:off x="548640" y="384048"/>
-            <a:ext cx="11091672" cy="777240"/>
+            <a:ext cx="7955280" cy="777240"/>
           </a:xfrm>
           <a:prstGeom prst="rect">
             <a:avLst/>
@@ -18640,7 +18640,7 @@
         <p:spPr>
           <a:xfrm>
             <a:off x="566928" y="128016"/>
-            <a:ext cx="11055096" cy="274320"/>
+            <a:ext cx="7955280" cy="274320"/>
           </a:xfrm>
           <a:prstGeom prst="rect">
             <a:avLst/>
@@ -18679,23 +18679,23 @@
         <p:spPr>
           <a:xfrm>
             <a:off x="548640" y="384048"/>
-            <a:ext cx="11091672" cy="777240"/>
-          </a:xfrm>
-          <a:prstGeom prst="rect">
-            <a:avLst/>
-          </a:prstGeom>
-          <a:noFill/>
-          <a:ln/>
-        </p:spPr>
-        <p:txBody>
-          <a:bodyPr wrap="square" lIns="0" tIns="0" rIns="0" bIns="0" rtlCol="0" anchor="ctr"/>
-          <a:lstStyle/>
-          <a:p>
-            <a:pPr indent="0" marL="0">
-              <a:buNone/>
-            </a:pPr>
-            <a:r>
-              <a:rPr lang="en-US" sz="3200" b="1" dirty="0">
+            <a:ext cx="7955280" cy="777240"/>
+          </a:xfrm>
+          <a:prstGeom prst="rect">
+            <a:avLst/>
+          </a:prstGeom>
+          <a:noFill/>
+          <a:ln/>
+        </p:spPr>
+        <p:txBody>
+          <a:bodyPr wrap="square" lIns="0" tIns="0" rIns="0" bIns="0" rtlCol="0" anchor="ctr"/>
+          <a:lstStyle/>
+          <a:p>
+            <a:pPr indent="0" marL="0">
+              <a:buNone/>
+            </a:pPr>
+            <a:r>
+              <a:rPr lang="en-US" sz="2800" b="1" dirty="0">
                 <a:solidFill>
                   <a:srgbClr val="13293D"/>
                 </a:solidFill>
@@ -18705,7 +18705,7 @@
               </a:rPr>
               <a:t>Your first 48 hours: three small things</a:t>
             </a:r>
-            <a:endParaRPr lang="en-US" sz="3200" dirty="0"/>
+            <a:endParaRPr lang="en-US" sz="2800" dirty="0"/>
           </a:p>
         </p:txBody>
       </p:sp>
@@ -19505,7 +19505,7 @@
         <p:spPr>
           <a:xfrm>
             <a:off x="566928" y="128016"/>
-            <a:ext cx="11055096" cy="274320"/>
+            <a:ext cx="7955280" cy="274320"/>
           </a:xfrm>
           <a:prstGeom prst="rect">
             <a:avLst/>
@@ -19544,7 +19544,7 @@
         <p:spPr>
           <a:xfrm>
             <a:off x="548640" y="384048"/>
-            <a:ext cx="11091672" cy="777240"/>
+            <a:ext cx="7955280" cy="777240"/>
           </a:xfrm>
           <a:prstGeom prst="rect">
             <a:avLst/>
@@ -20062,7 +20062,7 @@
         <p:spPr>
           <a:xfrm>
             <a:off x="566928" y="128016"/>
-            <a:ext cx="11055096" cy="274320"/>
+            <a:ext cx="7955280" cy="274320"/>
           </a:xfrm>
           <a:prstGeom prst="rect">
             <a:avLst/>
@@ -20101,23 +20101,23 @@
         <p:spPr>
           <a:xfrm>
             <a:off x="548640" y="384048"/>
-            <a:ext cx="11091672" cy="777240"/>
-          </a:xfrm>
-          <a:prstGeom prst="rect">
-            <a:avLst/>
-          </a:prstGeom>
-          <a:noFill/>
-          <a:ln/>
-        </p:spPr>
-        <p:txBody>
-          <a:bodyPr wrap="square" lIns="0" tIns="0" rIns="0" bIns="0" rtlCol="0" anchor="ctr"/>
-          <a:lstStyle/>
-          <a:p>
-            <a:pPr indent="0" marL="0">
-              <a:buNone/>
-            </a:pPr>
-            <a:r>
-              <a:rPr lang="en-US" sz="3200" b="1" dirty="0">
+            <a:ext cx="7955280" cy="777240"/>
+          </a:xfrm>
+          <a:prstGeom prst="rect">
+            <a:avLst/>
+          </a:prstGeom>
+          <a:noFill/>
+          <a:ln/>
+        </p:spPr>
+        <p:txBody>
+          <a:bodyPr wrap="square" lIns="0" tIns="0" rIns="0" bIns="0" rtlCol="0" anchor="ctr"/>
+          <a:lstStyle/>
+          <a:p>
+            <a:pPr indent="0" marL="0">
+              <a:buNone/>
+            </a:pPr>
+            <a:r>
+              <a:rPr lang="en-US" sz="2800" b="1" dirty="0">
                 <a:solidFill>
                   <a:srgbClr val="13293D"/>
                 </a:solidFill>
@@ -20127,7 +20127,7 @@
               </a:rPr>
               <a:t>The tool for the time problem arrived</a:t>
             </a:r>
-            <a:endParaRPr lang="en-US" sz="3200" dirty="0"/>
+            <a:endParaRPr lang="en-US" sz="2800" dirty="0"/>
           </a:p>
         </p:txBody>
       </p:sp>
@@ -21109,7 +21109,7 @@
         <p:spPr>
           <a:xfrm>
             <a:off x="566928" y="128016"/>
-            <a:ext cx="11055096" cy="274320"/>
+            <a:ext cx="7955280" cy="274320"/>
           </a:xfrm>
           <a:prstGeom prst="rect">
             <a:avLst/>
@@ -21148,7 +21148,7 @@
         <p:spPr>
           <a:xfrm>
             <a:off x="548640" y="384048"/>
-            <a:ext cx="11091672" cy="777240"/>
+            <a:ext cx="7955280" cy="777240"/>
           </a:xfrm>
           <a:prstGeom prst="rect">
             <a:avLst/>
@@ -22037,7 +22037,7 @@
         <p:spPr>
           <a:xfrm>
             <a:off x="566928" y="128016"/>
-            <a:ext cx="11055096" cy="274320"/>
+            <a:ext cx="7955280" cy="274320"/>
           </a:xfrm>
           <a:prstGeom prst="rect">
             <a:avLst/>
@@ -22571,7 +22571,7 @@
         <p:spPr>
           <a:xfrm>
             <a:off x="566928" y="128016"/>
-            <a:ext cx="11055096" cy="274320"/>
+            <a:ext cx="7955280" cy="274320"/>
           </a:xfrm>
           <a:prstGeom prst="rect">
             <a:avLst/>
@@ -22610,23 +22610,23 @@
         <p:spPr>
           <a:xfrm>
             <a:off x="548640" y="384048"/>
-            <a:ext cx="11091672" cy="777240"/>
-          </a:xfrm>
-          <a:prstGeom prst="rect">
-            <a:avLst/>
-          </a:prstGeom>
-          <a:noFill/>
-          <a:ln/>
-        </p:spPr>
-        <p:txBody>
-          <a:bodyPr wrap="square" lIns="0" tIns="0" rIns="0" bIns="0" rtlCol="0" anchor="ctr"/>
-          <a:lstStyle/>
-          <a:p>
-            <a:pPr indent="0" marL="0">
-              <a:buNone/>
-            </a:pPr>
-            <a:r>
-              <a:rPr lang="en-US" sz="3200" b="1" dirty="0">
+            <a:ext cx="7955280" cy="777240"/>
+          </a:xfrm>
+          <a:prstGeom prst="rect">
+            <a:avLst/>
+          </a:prstGeom>
+          <a:noFill/>
+          <a:ln/>
+        </p:spPr>
+        <p:txBody>
+          <a:bodyPr wrap="square" lIns="0" tIns="0" rIns="0" bIns="0" rtlCol="0" anchor="ctr"/>
+          <a:lstStyle/>
+          <a:p>
+            <a:pPr indent="0" marL="0">
+              <a:buNone/>
+            </a:pPr>
+            <a:r>
+              <a:rPr lang="en-US" sz="2800" b="1" dirty="0">
                 <a:solidFill>
                   <a:srgbClr val="13293D"/>
                 </a:solidFill>
@@ -22636,7 +22636,7 @@
               </a:rPr>
               <a:t>A lesson plan in 30 minutes. And one catch.</a:t>
             </a:r>
-            <a:endParaRPr lang="en-US" sz="3200" dirty="0"/>
+            <a:endParaRPr lang="en-US" sz="2800" dirty="0"/>
           </a:p>
         </p:txBody>
       </p:sp>
@@ -23271,7 +23271,7 @@
         <p:spPr>
           <a:xfrm>
             <a:off x="566928" y="128016"/>
-            <a:ext cx="11055096" cy="274320"/>
+            <a:ext cx="7955280" cy="274320"/>
           </a:xfrm>
           <a:prstGeom prst="rect">
             <a:avLst/>
@@ -23310,23 +23310,23 @@
         <p:spPr>
           <a:xfrm>
             <a:off x="548640" y="384048"/>
-            <a:ext cx="11091672" cy="777240"/>
-          </a:xfrm>
-          <a:prstGeom prst="rect">
-            <a:avLst/>
-          </a:prstGeom>
-          <a:noFill/>
-          <a:ln/>
-        </p:spPr>
-        <p:txBody>
-          <a:bodyPr wrap="square" lIns="0" tIns="0" rIns="0" bIns="0" rtlCol="0" anchor="ctr"/>
-          <a:lstStyle/>
-          <a:p>
-            <a:pPr indent="0" marL="0">
-              <a:buNone/>
-            </a:pPr>
-            <a:r>
-              <a:rPr lang="en-US" sz="3200" b="1" dirty="0">
+            <a:ext cx="7955280" cy="777240"/>
+          </a:xfrm>
+          <a:prstGeom prst="rect">
+            <a:avLst/>
+          </a:prstGeom>
+          <a:noFill/>
+          <a:ln/>
+        </p:spPr>
+        <p:txBody>
+          <a:bodyPr wrap="square" lIns="0" tIns="0" rIns="0" bIns="0" rtlCol="0" anchor="ctr"/>
+          <a:lstStyle/>
+          <a:p>
+            <a:pPr indent="0" marL="0">
+              <a:buNone/>
+            </a:pPr>
+            <a:r>
+              <a:rPr lang="en-US" sz="2800" b="1" dirty="0">
                 <a:solidFill>
                   <a:srgbClr val="13293D"/>
                 </a:solidFill>
@@ -23336,7 +23336,7 @@
               </a:rPr>
               <a:t>Review is where your expertise enters</a:t>
             </a:r>
-            <a:endParaRPr lang="en-US" sz="3200" dirty="0"/>
+            <a:endParaRPr lang="en-US" sz="2800" dirty="0"/>
           </a:p>
         </p:txBody>
       </p:sp>
@@ -23834,7 +23834,7 @@
         <p:spPr>
           <a:xfrm>
             <a:off x="566928" y="128016"/>
-            <a:ext cx="11055096" cy="274320"/>
+            <a:ext cx="7955280" cy="274320"/>
           </a:xfrm>
           <a:prstGeom prst="rect">
             <a:avLst/>
@@ -23873,7 +23873,7 @@
         <p:spPr>
           <a:xfrm>
             <a:off x="548640" y="384048"/>
-            <a:ext cx="11091672" cy="777240"/>
+            <a:ext cx="7955280" cy="777240"/>
           </a:xfrm>
           <a:prstGeom prst="rect">
             <a:avLst/>
@@ -24644,7 +24644,7 @@
         <p:spPr>
           <a:xfrm>
             <a:off x="566928" y="128016"/>
-            <a:ext cx="11055096" cy="274320"/>
+            <a:ext cx="7955280" cy="274320"/>
           </a:xfrm>
           <a:prstGeom prst="rect">
             <a:avLst/>
@@ -24683,7 +24683,7 @@
         <p:spPr>
           <a:xfrm>
             <a:off x="548640" y="384048"/>
-            <a:ext cx="11091672" cy="777240"/>
+            <a:ext cx="7955280" cy="777240"/>
           </a:xfrm>
           <a:prstGeom prst="rect">
             <a:avLst/>

--- a/kits/kit03/Kit03_PresentationDeck.pptx
+++ b/kits/kit03/Kit03_PresentationDeck.pptx
@@ -39,9 +39,10 @@
     <p:sldId id="287" r:id="rId33"/>
     <p:sldId id="288" r:id="rId34"/>
     <p:sldId id="289" r:id="rId35"/>
+    <p:sldId id="290" r:id="rId36"/>
   </p:sldIdLst>
   <p:notesMasterIdLst>
-    <p:notesMasterId r:id="rId36"/>
+    <p:notesMasterId r:id="rId37"/>
   </p:notesMasterIdLst>
   <p:sldSz cx="12188952" cy="6858000"/>
   <p:notesSz cx="6858000" cy="12188952"/>
@@ -2119,7 +2120,7 @@
           <a:p>
             <a:r>
               <a:rPr lang="en-US" dirty="0"/>
-              <a:t>Say: this is completion, not process. One passage went in and four teachable versions came out, and every one of them passed the 4-point review. Point at the support card and read the leveled line aloud, because that is the moment the room hears the difference. Then say the honest arithmetic: hand-built, this set was an evening; on her screen it was under twenty minutes, and it is what she teaches Tuesday. Hold this up while the last pairs finish.</a:t>
+              <a:t>Say: this is the thing itself, not a description of it. Read Section 1 aloud, then read the on-grade sentence at the bottom, and let the room hear the difference. Point out what did not change: the four sections, the science, and the five words that are the whole point of the unit. That is what "same content, different door" means. If anyone is still deciding whether this is worth twenty minutes, this slide is the argument.</a:t>
             </a:r>
             <a:endParaRPr lang="en-US" dirty="0"/>
           </a:p>
@@ -2207,7 +2208,7 @@
           <a:p>
             <a:r>
               <a:rPr lang="en-US" dirty="0"/>
-              <a:t>Prioritize anyone whose review caught a real problem; it’s the most useful minute in the room. Ms. Rivera's model story is on the chip: what the review caught in her food webs passage goes first. 45-min cut: two voices. Keep each to a minute.</a:t>
+              <a:t>Say: the stretch prompts are the equity half of the hour, and notice not one of them is another worksheet. The stations are the same content in a shape Tuesday can actually run. Read station 2 aloud; it is the whole unit in one line. Then the arithmetic: hand-built this was an evening, on her screen it was under twenty minutes, and all four versions passed her review.</a:t>
             </a:r>
             <a:endParaRPr lang="en-US" dirty="0"/>
           </a:p>
@@ -2295,7 +2296,7 @@
           <a:p>
             <a:r>
               <a:rPr lang="en-US" dirty="0"/>
-              <a:t>Say: an hour ago, differentiation was a good intention priced at three hand-built versions of everything. You just built core, support, and stretch for a real lesson in twenty minutes, and the research from slide 2 says materials that actually differ are what make it work. Land it plainly and move to the habit.</a:t>
+              <a:t>Prioritize anyone whose review caught a real problem; it’s the most useful minute in the room. Ms. Rivera's model story is on the chip: what the review caught in her food webs passage goes first. 45-min cut: two voices. Keep each to a minute.</a:t>
             </a:r>
             <a:endParaRPr lang="en-US" dirty="0"/>
           </a:p>
@@ -2383,7 +2384,7 @@
           <a:p>
             <a:r>
               <a:rPr lang="en-US" dirty="0"/>
-              <a:t>Built in the margins of time staff already have. The 30-day plan’s PLC follow-ups reinforce exactly this cadence.</a:t>
+              <a:t>Say: an hour ago, differentiation was a good intention priced at three hand-built versions of everything. You just built core, support, and stretch for a real lesson in twenty minutes, and the research from slide 2 says materials that actually differ are what make it work. Land it plainly and move to the habit.</a:t>
             </a:r>
             <a:endParaRPr lang="en-US" dirty="0"/>
           </a:p>
@@ -2559,7 +2560,7 @@
           <a:p>
             <a:r>
               <a:rPr lang="en-US" dirty="0"/>
-              <a:t>Kit 1 gave three commitments; Kit 2 added the staff doc. Ask for the visible nod; agreement out loud is what makes it a norm.</a:t>
+              <a:t>Built in the margins of time staff already have. The 30-day plan’s PLC follow-ups reinforce exactly this cadence.</a:t>
             </a:r>
             <a:endParaRPr lang="en-US" dirty="0"/>
           </a:p>
@@ -2647,7 +2648,7 @@
           <a:p>
             <a:r>
               <a:rPr lang="en-US" dirty="0"/>
-              <a:t>Your differentiated artifact from today comes with you; it’s about to need an exit ticket. Completing all eight kits earns the Certificate of Completion; check with your district or state about local credit.</a:t>
+              <a:t>Kit 1 gave three commitments; Kit 2 added the staff doc. Ask for the visible nod; agreement out loud is what makes it a norm.</a:t>
             </a:r>
             <a:endParaRPr lang="en-US" dirty="0"/>
           </a:p>
@@ -2735,7 +2736,7 @@
           <a:p>
             <a:r>
               <a:rPr lang="en-US" dirty="0"/>
-              <a:t>Hold up the First 48 Hours sheet. Tomorrow morning, coffee in hand, pick one.</a:t>
+              <a:t>Your differentiated artifact from today comes with you; it’s about to need an exit ticket. Completing all eight kits earns the Certificate of Completion; check with your district or state about local credit.</a:t>
             </a:r>
             <a:endParaRPr lang="en-US" dirty="0"/>
           </a:p>
@@ -2823,7 +2824,7 @@
           <a:p>
             <a:r>
               <a:rPr lang="en-US" dirty="0"/>
-              <a:t>Distribute tickets; collect at the door. They double as the school’s PD documentation.</a:t>
+              <a:t>Hold up the First 48 Hours sheet. Tomorrow morning, coffee in hand, pick one.</a:t>
             </a:r>
             <a:endParaRPr lang="en-US" dirty="0"/>
           </a:p>
@@ -2911,7 +2912,7 @@
           <a:p>
             <a:r>
               <a:rPr lang="en-US" dirty="0"/>
-              <a:t>Go teach the lesson you just planned. Thanks, everyone. Collect the exit tickets at the door.</a:t>
+              <a:t>Distribute tickets; collect at the door. They double as the school’s PD documentation.</a:t>
             </a:r>
             <a:endParaRPr lang="en-US" dirty="0"/>
           </a:p>
@@ -2935,6 +2936,94 @@
             <a:fld id="{F7021451-1387-4CA6-816F-3879F97B5CBC}" type="slidenum">
               <a:rPr lang="en-US"/>
               <a:t>34</a:t>
+            </a:fld>
+            <a:endParaRPr lang="en-US"/>
+          </a:p>
+        </p:txBody>
+      </p:sp>
+    </p:spTree>
+    <p:extLst>
+      <p:ext uri="{BB962C8B-B14F-4D97-AF65-F5344CB8AC3E}">
+        <p14:creationId xmlns:p14="http://schemas.microsoft.com/office/powerpoint/2010/main" val="1024086991"/>
+      </p:ext>
+    </p:extLst>
+  </p:cSld>
+  <p:clrMapOvr>
+    <a:masterClrMapping/>
+  </p:clrMapOvr>
+</p:notes>
+</file>
+
+<file path=ppt/notesSlides/notesSlide35.xml><?xml version="1.0" encoding="utf-8"?>
+<p:notes xmlns:a="http://schemas.openxmlformats.org/drawingml/2006/main" xmlns:r="http://schemas.openxmlformats.org/officeDocument/2006/relationships" xmlns:p="http://schemas.openxmlformats.org/presentationml/2006/main">
+  <p:cSld>
+    <p:spTree>
+      <p:nvGrpSpPr>
+        <p:cNvPr id="1" name=""/>
+        <p:cNvGrpSpPr/>
+        <p:nvPr/>
+      </p:nvGrpSpPr>
+      <p:grpSpPr>
+        <a:xfrm>
+          <a:off x="0" y="0"/>
+          <a:ext cx="0" cy="0"/>
+          <a:chOff x="0" y="0"/>
+          <a:chExt cx="0" cy="0"/>
+        </a:xfrm>
+      </p:grpSpPr>
+      <p:sp>
+        <p:nvSpPr>
+          <p:cNvPr id="2" name="Slide Image Placeholder 1"/>
+          <p:cNvSpPr>
+            <a:spLocks noGrp="1" noRot="1" noChangeAspect="1"/>
+          </p:cNvSpPr>
+          <p:nvPr>
+            <p:ph type="sldImg"/>
+          </p:nvPr>
+        </p:nvSpPr>
+        <p:spPr/>
+      </p:sp>
+      <p:sp>
+        <p:nvSpPr>
+          <p:cNvPr id="3" name="Notes Placeholder 2"/>
+          <p:cNvSpPr>
+            <a:spLocks noGrp="1"/>
+          </p:cNvSpPr>
+          <p:nvPr>
+            <p:ph type="body" idx="1"/>
+          </p:nvPr>
+        </p:nvSpPr>
+        <p:spPr/>
+        <p:txBody>
+          <a:bodyPr/>
+          <a:lstStyle/>
+          <a:p>
+            <a:r>
+              <a:rPr lang="en-US" dirty="0"/>
+              <a:t>Go teach the lesson you just planned. Thanks, everyone. Collect the exit tickets at the door.</a:t>
+            </a:r>
+            <a:endParaRPr lang="en-US" dirty="0"/>
+          </a:p>
+        </p:txBody>
+      </p:sp>
+      <p:sp>
+        <p:nvSpPr>
+          <p:cNvPr id="4" name="Slide Number Placeholder 3"/>
+          <p:cNvSpPr>
+            <a:spLocks noGrp="1"/>
+          </p:cNvSpPr>
+          <p:nvPr>
+            <p:ph type="sldNum" sz="quarter" idx="10"/>
+          </p:nvPr>
+        </p:nvSpPr>
+        <p:spPr/>
+        <p:txBody>
+          <a:bodyPr/>
+          <a:lstStyle/>
+          <a:p>
+            <a:fld id="{F7021451-1387-4CA6-816F-3879F97B5CBC}" type="slidenum">
+              <a:rPr lang="en-US"/>
+              <a:t>35</a:t>
             </a:fld>
             <a:endParaRPr lang="en-US"/>
           </a:p>
@@ -5416,7 +5505,7 @@
         <p:spPr>
           <a:xfrm>
             <a:off x="1554480" y="2377440"/>
-            <a:ext cx="9144000" cy="2697480"/>
+            <a:ext cx="9646920" cy="2697480"/>
           </a:xfrm>
           <a:prstGeom prst="roundRect">
             <a:avLst>
@@ -7406,7 +7495,7 @@
         <p:spPr>
           <a:xfrm>
             <a:off x="1554480" y="3063240"/>
-            <a:ext cx="9144000" cy="2240280"/>
+            <a:ext cx="9646920" cy="2240280"/>
           </a:xfrm>
           <a:prstGeom prst="roundRect">
             <a:avLst>
@@ -8571,7 +8660,7 @@
         <p:spPr>
           <a:xfrm>
             <a:off x="1554480" y="3063240"/>
-            <a:ext cx="9144000" cy="2240280"/>
+            <a:ext cx="9646920" cy="2240280"/>
           </a:xfrm>
           <a:prstGeom prst="roundRect">
             <a:avLst>
@@ -9736,7 +9825,7 @@
         <p:spPr>
           <a:xfrm>
             <a:off x="1554480" y="3063240"/>
-            <a:ext cx="9144000" cy="2240280"/>
+            <a:ext cx="9646920" cy="2240280"/>
           </a:xfrm>
           <a:prstGeom prst="roundRect">
             <a:avLst>
@@ -16637,7 +16726,7 @@
         <p:spPr>
           <a:xfrm>
             <a:off x="1554480" y="2377440"/>
-            <a:ext cx="9144000" cy="2697480"/>
+            <a:ext cx="9646920" cy="2697480"/>
           </a:xfrm>
           <a:prstGeom prst="roundRect">
             <a:avLst>
@@ -17415,7 +17504,7 @@
         <p:spPr>
           <a:xfrm>
             <a:off x="914400" y="1874520"/>
-            <a:ext cx="10424160" cy="3337560"/>
+            <a:ext cx="10287000" cy="3337560"/>
           </a:xfrm>
           <a:prstGeom prst="roundRect">
             <a:avLst>
@@ -19650,7 +19739,7 @@
                 <a:ea typeface="Inter" pitchFamily="34" charset="-122"/>
                 <a:cs typeface="Inter" pitchFamily="34" charset="-120"/>
               </a:rPr>
-              <a:t>Her finished set, on screen: core, support, stretch, stations, all reviewed.</a:t>
+              <a:t>Her support version, finished: the same science, sentences a struggling reader can hold.</a:t>
             </a:r>
             <a:endParaRPr lang="en-US" sz="1000" dirty="0"/>
           </a:p>
@@ -19689,7 +19778,7 @@
                 <a:ea typeface="Inter" pitchFamily="34" charset="-122"/>
                 <a:cs typeface="Inter" pitchFamily="34" charset="-120"/>
               </a:rPr>
-              <a:t>LAB · AFTER THE REVIEW · ONE PASSAGE, FINISHED</a:t>
+              <a:t>LAB · THE FINISHED PRODUCT · HER SUPPORT VERSION</a:t>
             </a:r>
             <a:endParaRPr lang="en-US" sz="1200" dirty="0"/>
           </a:p>
@@ -19728,7 +19817,7 @@
                 <a:ea typeface="Inter" pitchFamily="34" charset="-122"/>
                 <a:cs typeface="Inter" pitchFamily="34" charset="-120"/>
               </a:rPr>
-              <a:t>Her finished set, ready to teach</a:t>
+              <a:t>What actually came out</a:t>
             </a:r>
             <a:endParaRPr lang="en-US" sz="3200" dirty="0"/>
           </a:p>
@@ -19742,12 +19831,12 @@
         </p:nvSpPr>
         <p:spPr>
           <a:xfrm>
-            <a:off x="640080" y="1225296"/>
-            <a:ext cx="5349240" cy="1975104"/>
+            <a:off x="640080" y="1188720"/>
+            <a:ext cx="10972800" cy="4041648"/>
           </a:xfrm>
           <a:prstGeom prst="roundRect">
             <a:avLst>
-              <a:gd name="adj" fmla="val 4167"/>
+              <a:gd name="adj" fmla="val 2036"/>
             </a:avLst>
           </a:prstGeom>
           <a:solidFill>
@@ -19769,24 +19858,66 @@
         </p:nvSpPr>
         <p:spPr>
           <a:xfrm>
-            <a:off x="914400" y="1371600"/>
-            <a:ext cx="4800600" cy="274320"/>
-          </a:xfrm>
-          <a:prstGeom prst="rect">
-            <a:avLst/>
-          </a:prstGeom>
-          <a:noFill/>
-          <a:ln/>
-        </p:spPr>
-        <p:txBody>
-          <a:bodyPr wrap="square" lIns="0" tIns="0" rIns="0" bIns="0" rtlCol="0" anchor="ctr"/>
-          <a:lstStyle/>
-          <a:p>
-            <a:pPr indent="0" marL="0">
-              <a:buNone/>
-            </a:pPr>
-            <a:r>
-              <a:rPr lang="en-US" sz="1200" b="1" spc="140" kern="0" dirty="0">
+            <a:off x="914400" y="1325880"/>
+            <a:ext cx="10424160" cy="274320"/>
+          </a:xfrm>
+          <a:prstGeom prst="rect">
+            <a:avLst/>
+          </a:prstGeom>
+          <a:noFill/>
+          <a:ln/>
+        </p:spPr>
+        <p:txBody>
+          <a:bodyPr wrap="square" lIns="0" tIns="0" rIns="0" bIns="0" rtlCol="0" anchor="ctr"/>
+          <a:lstStyle/>
+          <a:p>
+            <a:pPr indent="0" marL="0">
+              <a:buNone/>
+            </a:pPr>
+            <a:r>
+              <a:rPr lang="en-US" sz="1100" b="1" spc="120" kern="0" dirty="0">
+                <a:solidFill>
+                  <a:srgbClr val="2E7D5B"/>
+                </a:solidFill>
+                <a:latin typeface="Inter" pitchFamily="34" charset="0"/>
+                <a:ea typeface="Inter" pitchFamily="34" charset="-122"/>
+                <a:cs typeface="Inter" pitchFamily="34" charset="-120"/>
+              </a:rPr>
+              <a:t>“FOOD WEBS: ENERGY ON THE MOVE (SUPPORT VERSION)”  ·  SENTENCES UNDER 12 WORDS</a:t>
+            </a:r>
+            <a:endParaRPr lang="en-US" sz="1100" dirty="0"/>
+          </a:p>
+        </p:txBody>
+      </p:sp>
+      <p:sp>
+        <p:nvSpPr>
+          <p:cNvPr id="16" name="Text 13"/>
+          <p:cNvSpPr/>
+          <p:nvPr/>
+        </p:nvSpPr>
+        <p:spPr>
+          <a:xfrm>
+            <a:off x="914400" y="1691640"/>
+            <a:ext cx="6537960" cy="3383280"/>
+          </a:xfrm>
+          <a:prstGeom prst="rect">
+            <a:avLst/>
+          </a:prstGeom>
+          <a:noFill/>
+          <a:ln/>
+        </p:spPr>
+        <p:txBody>
+          <a:bodyPr wrap="square" lIns="0" tIns="0" rIns="0" bIns="0" rtlCol="0" anchor="t"/>
+          <a:lstStyle/>
+          <a:p>
+            <a:pPr indent="0" marL="0">
+              <a:lnSpc>
+                <a:spcPct val="112000"/>
+              </a:lnSpc>
+              <a:buNone/>
+            </a:pPr>
+            <a:r>
+              <a:rPr lang="en-US" sz="1500" b="1" dirty="0">
                 <a:solidFill>
                   <a:srgbClr val="2A9D8F"/>
                 </a:solidFill>
@@ -19794,54 +19925,48 @@
                 <a:ea typeface="Inter" pitchFamily="34" charset="-122"/>
                 <a:cs typeface="Inter" pitchFamily="34" charset="-120"/>
               </a:rPr>
-              <a:t>CORE · ON GRADE</a:t>
-            </a:r>
-            <a:endParaRPr lang="en-US" sz="1200" dirty="0"/>
-          </a:p>
-        </p:txBody>
-      </p:sp>
-      <p:sp>
-        <p:nvSpPr>
-          <p:cNvPr id="16" name="Text 13"/>
-          <p:cNvSpPr/>
-          <p:nvPr/>
-        </p:nvSpPr>
-        <p:spPr>
-          <a:xfrm>
-            <a:off x="914400" y="1700784"/>
-            <a:ext cx="4800600" cy="1371600"/>
-          </a:xfrm>
-          <a:prstGeom prst="rect">
-            <a:avLst/>
-          </a:prstGeom>
-          <a:noFill/>
-          <a:ln/>
-        </p:spPr>
-        <p:txBody>
-          <a:bodyPr wrap="square" lIns="0" tIns="0" rIns="0" bIns="0" rtlCol="0" anchor="t"/>
-          <a:lstStyle/>
-          <a:p>
+              <a:t>Section 1 · What a food web shows
+</a:t>
+            </a:r>
             <a:pPr indent="0" marL="0">
               <a:lnSpc>
-                <a:spcPct val="114000"/>
+                <a:spcPct val="112000"/>
               </a:lnSpc>
               <a:buNone/>
             </a:pPr>
             <a:r>
+              <a:rPr lang="en-US" sz="1500" dirty="0">
+                <a:solidFill>
+                  <a:srgbClr val="1B1F24"/>
+                </a:solidFill>
+                <a:latin typeface="Inter" pitchFamily="34" charset="0"/>
+                <a:ea typeface="Inter" pitchFamily="34" charset="-122"/>
+                <a:cs typeface="Inter" pitchFamily="34" charset="-120"/>
+              </a:rPr>
+              <a:t>Every living thing needs energy. A food web maps where that energy goes. Producers make their own food. Grasses and oak trees use sunlight. Consumers cannot make food. They eat other living things. A rabbit eats the grass. A hawk eats the rabbit.
+</a:t>
+            </a:r>
+            <a:pPr indent="0" marL="0">
+              <a:lnSpc>
+                <a:spcPct val="112000"/>
+              </a:lnSpc>
+              <a:buNone/>
+            </a:pPr>
+            <a:r>
               <a:rPr lang="en-US" sz="1500" b="1" dirty="0">
                 <a:solidFill>
-                  <a:srgbClr val="13293D"/>
-                </a:solidFill>
-                <a:latin typeface="Inter" pitchFamily="34" charset="0"/>
-                <a:ea typeface="Inter" pitchFamily="34" charset="-122"/>
-                <a:cs typeface="Inter" pitchFamily="34" charset="-120"/>
-              </a:rPr>
-              <a:t>“Food Webs: Energy on the Move”
+                  <a:srgbClr val="2A9D8F"/>
+                </a:solidFill>
+                <a:latin typeface="Inter" pitchFamily="34" charset="0"/>
+                <a:ea typeface="Inter" pitchFamily="34" charset="-122"/>
+                <a:cs typeface="Inter" pitchFamily="34" charset="-120"/>
+              </a:rPr>
+              <a:t>Section 4 · When one link breaks
 </a:t>
             </a:r>
             <a:pPr indent="0" marL="0">
               <a:lnSpc>
-                <a:spcPct val="114000"/>
+                <a:spcPct val="112000"/>
               </a:lnSpc>
               <a:buNone/>
             </a:pPr>
@@ -19854,7 +19979,7 @@
                 <a:ea typeface="Inter" pitchFamily="34" charset="-122"/>
                 <a:cs typeface="Inter" pitchFamily="34" charset="-120"/>
               </a:rPr>
-              <a:t>Four sections, unchanged. “Producers, such as grasses and oak trees, capture sunlight and build their own food.”</a:t>
+              <a:t>Take the hawks out of the food web. More than the rabbits will change. The rabbits eat the grasses down to the roots. Bare soil has no cover left. Decomposers live on fallen leaves. Now they lose their supply.</a:t>
             </a:r>
             <a:endParaRPr lang="en-US" sz="1500" dirty="0"/>
           </a:p>
@@ -19868,20 +19993,20 @@
         </p:nvSpPr>
         <p:spPr>
           <a:xfrm>
-            <a:off x="6263640" y="1225296"/>
-            <a:ext cx="5349240" cy="1975104"/>
+            <a:off x="7726680" y="1691640"/>
+            <a:ext cx="3611880" cy="3200400"/>
           </a:xfrm>
           <a:prstGeom prst="roundRect">
             <a:avLst>
-              <a:gd name="adj" fmla="val 4167"/>
+              <a:gd name="adj" fmla="val 2571"/>
             </a:avLst>
           </a:prstGeom>
           <a:solidFill>
-            <a:srgbClr val="F7F5F0"/>
+            <a:srgbClr val="FFFFFF"/>
           </a:solidFill>
           <a:ln w="12700">
             <a:solidFill>
-              <a:srgbClr val="F7F5F0"/>
+              <a:srgbClr val="FFFFFF"/>
             </a:solidFill>
             <a:prstDash val="solid"/>
           </a:ln>
@@ -19895,34 +20020,34 @@
         </p:nvSpPr>
         <p:spPr>
           <a:xfrm>
-            <a:off x="6537960" y="1371600"/>
-            <a:ext cx="4800600" cy="274320"/>
-          </a:xfrm>
-          <a:prstGeom prst="rect">
-            <a:avLst/>
-          </a:prstGeom>
-          <a:noFill/>
-          <a:ln/>
-        </p:spPr>
-        <p:txBody>
-          <a:bodyPr wrap="square" lIns="0" tIns="0" rIns="0" bIns="0" rtlCol="0" anchor="ctr"/>
-          <a:lstStyle/>
-          <a:p>
-            <a:pPr indent="0" marL="0">
-              <a:buNone/>
-            </a:pPr>
-            <a:r>
-              <a:rPr lang="en-US" sz="1200" b="1" spc="140" kern="0" dirty="0">
-                <a:solidFill>
-                  <a:srgbClr val="2E7D5B"/>
-                </a:solidFill>
-                <a:latin typeface="Inter" pitchFamily="34" charset="0"/>
-                <a:ea typeface="Inter" pitchFamily="34" charset="-122"/>
-                <a:cs typeface="Inter" pitchFamily="34" charset="-120"/>
-              </a:rPr>
-              <a:t>SUPPORT · ABOUT TWO YEARS BELOW</a:t>
-            </a:r>
-            <a:endParaRPr lang="en-US" sz="1200" dirty="0"/>
+            <a:off x="7955280" y="1828800"/>
+            <a:ext cx="3200400" cy="237744"/>
+          </a:xfrm>
+          <a:prstGeom prst="rect">
+            <a:avLst/>
+          </a:prstGeom>
+          <a:noFill/>
+          <a:ln/>
+        </p:spPr>
+        <p:txBody>
+          <a:bodyPr wrap="square" lIns="0" tIns="0" rIns="0" bIns="0" rtlCol="0" anchor="ctr"/>
+          <a:lstStyle/>
+          <a:p>
+            <a:pPr indent="0" marL="0">
+              <a:buNone/>
+            </a:pPr>
+            <a:r>
+              <a:rPr lang="en-US" sz="1000" b="1" spc="120" kern="0" dirty="0">
+                <a:solidFill>
+                  <a:srgbClr val="5B6B7A"/>
+                </a:solidFill>
+                <a:latin typeface="Inter" pitchFamily="34" charset="0"/>
+                <a:ea typeface="Inter" pitchFamily="34" charset="-122"/>
+                <a:cs typeface="Inter" pitchFamily="34" charset="-120"/>
+              </a:rPr>
+              <a:t>VOCABULARY BOX · 5 WORDS</a:t>
+            </a:r>
+            <a:endParaRPr lang="en-US" sz="1000" dirty="0"/>
           </a:p>
         </p:txBody>
       </p:sp>
@@ -19934,8 +20059,8 @@
         </p:nvSpPr>
         <p:spPr>
           <a:xfrm>
-            <a:off x="6537960" y="1700784"/>
-            <a:ext cx="4800600" cy="1371600"/>
+            <a:off x="7955280" y="2121408"/>
+            <a:ext cx="3200400" cy="2651760"/>
           </a:xfrm>
           <a:prstGeom prst="rect">
             <a:avLst/>
@@ -19949,12 +20074,12 @@
           <a:p>
             <a:pPr indent="0" marL="0">
               <a:lnSpc>
-                <a:spcPct val="114000"/>
+                <a:spcPct val="110000"/>
               </a:lnSpc>
               <a:buNone/>
             </a:pPr>
             <a:r>
-              <a:rPr lang="en-US" sz="1500" b="1" dirty="0">
+              <a:rPr lang="en-US" sz="1250" b="1" dirty="0">
                 <a:solidFill>
                   <a:srgbClr val="13293D"/>
                 </a:solidFill>
@@ -19962,17 +20087,51 @@
                 <a:ea typeface="Inter" pitchFamily="34" charset="-122"/>
                 <a:cs typeface="Inter" pitchFamily="34" charset="-120"/>
               </a:rPr>
-              <a:t>“Food Webs: Energy on the Move (Support)”
+              <a:t>producer  </a:t>
+            </a:r>
+            <a:pPr indent="0" marL="0">
+              <a:lnSpc>
+                <a:spcPct val="110000"/>
+              </a:lnSpc>
+              <a:buNone/>
+            </a:pPr>
+            <a:r>
+              <a:rPr lang="en-US" sz="1250" dirty="0">
+                <a:solidFill>
+                  <a:srgbClr val="1B1F24"/>
+                </a:solidFill>
+                <a:latin typeface="Inter" pitchFamily="34" charset="0"/>
+                <a:ea typeface="Inter" pitchFamily="34" charset="-122"/>
+                <a:cs typeface="Inter" pitchFamily="34" charset="-120"/>
+              </a:rPr>
+              <a:t>makes its own food
 </a:t>
             </a:r>
             <a:pPr indent="0" marL="0">
               <a:lnSpc>
-                <a:spcPct val="114000"/>
+                <a:spcPct val="110000"/>
               </a:lnSpc>
               <a:buNone/>
             </a:pPr>
             <a:r>
-              <a:rPr lang="en-US" sz="1500" dirty="0">
+              <a:rPr lang="en-US" sz="1250" b="1" dirty="0">
+                <a:solidFill>
+                  <a:srgbClr val="13293D"/>
+                </a:solidFill>
+                <a:latin typeface="Inter" pitchFamily="34" charset="0"/>
+                <a:ea typeface="Inter" pitchFamily="34" charset="-122"/>
+                <a:cs typeface="Inter" pitchFamily="34" charset="-120"/>
+              </a:rPr>
+              <a:t>consumer  </a:t>
+            </a:r>
+            <a:pPr indent="0" marL="0">
+              <a:lnSpc>
+                <a:spcPct val="110000"/>
+              </a:lnSpc>
+              <a:buNone/>
+            </a:pPr>
+            <a:r>
+              <a:rPr lang="en-US" sz="1250" dirty="0">
                 <a:solidFill>
                   <a:srgbClr val="1B1F24"/>
                 </a:solidFill>
@@ -19980,107 +20139,17 @@
                 <a:ea typeface="Inter" pitchFamily="34" charset="-122"/>
                 <a:cs typeface="Inter" pitchFamily="34" charset="-120"/>
               </a:rPr>
-              <a:t>Same four sections. “A rabbit eats the grass. A hawk eats the rabbit.” Vocabulary box, five sentence starters, one worked example.</a:t>
-            </a:r>
-            <a:endParaRPr lang="en-US" sz="1500" dirty="0"/>
-          </a:p>
-        </p:txBody>
-      </p:sp>
-      <p:sp>
-        <p:nvSpPr>
-          <p:cNvPr id="20" name="Shape 17"/>
-          <p:cNvSpPr/>
-          <p:nvPr/>
-        </p:nvSpPr>
-        <p:spPr>
-          <a:xfrm>
-            <a:off x="640080" y="3310128"/>
-            <a:ext cx="5349240" cy="1975104"/>
-          </a:xfrm>
-          <a:prstGeom prst="roundRect">
-            <a:avLst>
-              <a:gd name="adj" fmla="val 4167"/>
-            </a:avLst>
-          </a:prstGeom>
-          <a:solidFill>
-            <a:srgbClr val="F7F5F0"/>
-          </a:solidFill>
-          <a:ln w="12700">
-            <a:solidFill>
-              <a:srgbClr val="F7F5F0"/>
-            </a:solidFill>
-            <a:prstDash val="solid"/>
-          </a:ln>
-        </p:spPr>
-      </p:sp>
-      <p:sp>
-        <p:nvSpPr>
-          <p:cNvPr id="21" name="Text 18"/>
-          <p:cNvSpPr/>
-          <p:nvPr/>
-        </p:nvSpPr>
-        <p:spPr>
-          <a:xfrm>
-            <a:off x="914400" y="3456432"/>
-            <a:ext cx="4800600" cy="274320"/>
-          </a:xfrm>
-          <a:prstGeom prst="rect">
-            <a:avLst/>
-          </a:prstGeom>
-          <a:noFill/>
-          <a:ln/>
-        </p:spPr>
-        <p:txBody>
-          <a:bodyPr wrap="square" lIns="0" tIns="0" rIns="0" bIns="0" rtlCol="0" anchor="ctr"/>
-          <a:lstStyle/>
-          <a:p>
-            <a:pPr indent="0" marL="0">
-              <a:buNone/>
-            </a:pPr>
-            <a:r>
-              <a:rPr lang="en-US" sz="1200" b="1" spc="140" kern="0" dirty="0">
-                <a:solidFill>
-                  <a:srgbClr val="B07914"/>
-                </a:solidFill>
-                <a:latin typeface="Inter" pitchFamily="34" charset="0"/>
-                <a:ea typeface="Inter" pitchFamily="34" charset="-122"/>
-                <a:cs typeface="Inter" pitchFamily="34" charset="-120"/>
-              </a:rPr>
-              <a:t>STRETCH · DEPTH, NOT VOLUME</a:t>
-            </a:r>
-            <a:endParaRPr lang="en-US" sz="1200" dirty="0"/>
-          </a:p>
-        </p:txBody>
-      </p:sp>
-      <p:sp>
-        <p:nvSpPr>
-          <p:cNvPr id="22" name="Text 19"/>
-          <p:cNvSpPr/>
-          <p:nvPr/>
-        </p:nvSpPr>
-        <p:spPr>
-          <a:xfrm>
-            <a:off x="914400" y="3785616"/>
-            <a:ext cx="4800600" cy="1371600"/>
-          </a:xfrm>
-          <a:prstGeom prst="rect">
-            <a:avLst/>
-          </a:prstGeom>
-          <a:noFill/>
-          <a:ln/>
-        </p:spPr>
-        <p:txBody>
-          <a:bodyPr wrap="square" lIns="0" tIns="0" rIns="0" bIns="0" rtlCol="0" anchor="t"/>
-          <a:lstStyle/>
-          <a:p>
+              <a:t>eats other living things
+</a:t>
+            </a:r>
             <a:pPr indent="0" marL="0">
               <a:lnSpc>
-                <a:spcPct val="114000"/>
+                <a:spcPct val="110000"/>
               </a:lnSpc>
               <a:buNone/>
             </a:pPr>
             <a:r>
-              <a:rPr lang="en-US" sz="1500" b="1" dirty="0">
+              <a:rPr lang="en-US" sz="1250" b="1" dirty="0">
                 <a:solidFill>
                   <a:srgbClr val="13293D"/>
                 </a:solidFill>
@@ -20088,17 +20157,51 @@
                 <a:ea typeface="Inter" pitchFamily="34" charset="-122"/>
                 <a:cs typeface="Inter" pitchFamily="34" charset="-120"/>
               </a:rPr>
-              <a:t>Three prompts, no extra worksheet
+              <a:t>decomposer  </a:t>
+            </a:r>
+            <a:pPr indent="0" marL="0">
+              <a:lnSpc>
+                <a:spcPct val="110000"/>
+              </a:lnSpc>
+              <a:buNone/>
+            </a:pPr>
+            <a:r>
+              <a:rPr lang="en-US" sz="1250" dirty="0">
+                <a:solidFill>
+                  <a:srgbClr val="1B1F24"/>
+                </a:solidFill>
+                <a:latin typeface="Inter" pitchFamily="34" charset="0"/>
+                <a:ea typeface="Inter" pitchFamily="34" charset="-122"/>
+                <a:cs typeface="Inter" pitchFamily="34" charset="-120"/>
+              </a:rPr>
+              <a:t>breaks down dead matter
 </a:t>
             </a:r>
             <a:pPr indent="0" marL="0">
               <a:lnSpc>
-                <a:spcPct val="114000"/>
+                <a:spcPct val="110000"/>
               </a:lnSpc>
               <a:buNone/>
             </a:pPr>
             <a:r>
-              <a:rPr lang="en-US" sz="1500" dirty="0">
+              <a:rPr lang="en-US" sz="1250" b="1" dirty="0">
+                <a:solidFill>
+                  <a:srgbClr val="13293D"/>
+                </a:solidFill>
+                <a:latin typeface="Inter" pitchFamily="34" charset="0"/>
+                <a:ea typeface="Inter" pitchFamily="34" charset="-122"/>
+                <a:cs typeface="Inter" pitchFamily="34" charset="-120"/>
+              </a:rPr>
+              <a:t>energy  </a:t>
+            </a:r>
+            <a:pPr indent="0" marL="0">
+              <a:lnSpc>
+                <a:spcPct val="110000"/>
+              </a:lnSpc>
+              <a:buNone/>
+            </a:pPr>
+            <a:r>
+              <a:rPr lang="en-US" sz="1250" dirty="0">
                 <a:solidFill>
                   <a:srgbClr val="1B1F24"/>
                 </a:solidFill>
@@ -20106,65 +20209,17 @@
                 <a:ea typeface="Inter" pitchFamily="34" charset="-122"/>
                 <a:cs typeface="Inter" pitchFamily="34" charset="-120"/>
               </a:rPr>
-              <a:t>Apply it to a desert food web. Find the flaw in a broken web. Teach it to a 3rd grader in your own words.</a:t>
-            </a:r>
-            <a:endParaRPr lang="en-US" sz="1500" dirty="0"/>
-          </a:p>
-        </p:txBody>
-      </p:sp>
-      <p:sp>
-        <p:nvSpPr>
-          <p:cNvPr id="23" name="Shape 20"/>
-          <p:cNvSpPr/>
-          <p:nvPr/>
-        </p:nvSpPr>
-        <p:spPr>
-          <a:xfrm>
-            <a:off x="6263640" y="3310128"/>
-            <a:ext cx="5349240" cy="1975104"/>
-          </a:xfrm>
-          <a:prstGeom prst="roundRect">
-            <a:avLst>
-              <a:gd name="adj" fmla="val 4167"/>
-            </a:avLst>
-          </a:prstGeom>
-          <a:solidFill>
-            <a:srgbClr val="F7F5F0"/>
-          </a:solidFill>
-          <a:ln w="12700">
-            <a:solidFill>
-              <a:srgbClr val="F7F5F0"/>
-            </a:solidFill>
-            <a:prstDash val="solid"/>
-          </a:ln>
-        </p:spPr>
-      </p:sp>
-      <p:sp>
-        <p:nvSpPr>
-          <p:cNvPr id="24" name="Text 21"/>
-          <p:cNvSpPr/>
-          <p:nvPr/>
-        </p:nvSpPr>
-        <p:spPr>
-          <a:xfrm>
-            <a:off x="6537960" y="3456432"/>
-            <a:ext cx="4800600" cy="274320"/>
-          </a:xfrm>
-          <a:prstGeom prst="rect">
-            <a:avLst/>
-          </a:prstGeom>
-          <a:noFill/>
-          <a:ln/>
-        </p:spPr>
-        <p:txBody>
-          <a:bodyPr wrap="square" lIns="0" tIns="0" rIns="0" bIns="0" rtlCol="0" anchor="ctr"/>
-          <a:lstStyle/>
-          <a:p>
-            <a:pPr indent="0" marL="0">
-              <a:buNone/>
-            </a:pPr>
-            <a:r>
-              <a:rPr lang="en-US" sz="1200" b="1" spc="140" kern="0" dirty="0">
+              <a:t>what living things need to grow
+</a:t>
+            </a:r>
+            <a:pPr indent="0" marL="0">
+              <a:lnSpc>
+                <a:spcPct val="110000"/>
+              </a:lnSpc>
+              <a:buNone/>
+            </a:pPr>
+            <a:r>
+              <a:rPr lang="en-US" sz="1250" b="1" dirty="0">
                 <a:solidFill>
                   <a:srgbClr val="13293D"/>
                 </a:solidFill>
@@ -20172,59 +20227,16 @@
                 <a:ea typeface="Inter" pitchFamily="34" charset="-122"/>
                 <a:cs typeface="Inter" pitchFamily="34" charset="-120"/>
               </a:rPr>
-              <a:t>REFORMAT · SAME CONTENT, NEW SHAPE</a:t>
-            </a:r>
-            <a:endParaRPr lang="en-US" sz="1200" dirty="0"/>
-          </a:p>
-        </p:txBody>
-      </p:sp>
-      <p:sp>
-        <p:nvSpPr>
-          <p:cNvPr id="25" name="Text 22"/>
-          <p:cNvSpPr/>
-          <p:nvPr/>
-        </p:nvSpPr>
-        <p:spPr>
-          <a:xfrm>
-            <a:off x="6537960" y="3785616"/>
-            <a:ext cx="4800600" cy="1371600"/>
-          </a:xfrm>
-          <a:prstGeom prst="rect">
-            <a:avLst/>
-          </a:prstGeom>
-          <a:noFill/>
-          <a:ln/>
-        </p:spPr>
-        <p:txBody>
-          <a:bodyPr wrap="square" lIns="0" tIns="0" rIns="0" bIns="0" rtlCol="0" anchor="t"/>
-          <a:lstStyle/>
-          <a:p>
+              <a:t>ecosystem  </a:t>
+            </a:r>
             <a:pPr indent="0" marL="0">
               <a:lnSpc>
-                <a:spcPct val="114000"/>
+                <a:spcPct val="110000"/>
               </a:lnSpc>
               <a:buNone/>
             </a:pPr>
             <a:r>
-              <a:rPr lang="en-US" sz="1500" b="1" dirty="0">
-                <a:solidFill>
-                  <a:srgbClr val="13293D"/>
-                </a:solidFill>
-                <a:latin typeface="Inter" pitchFamily="34" charset="0"/>
-                <a:ea typeface="Inter" pitchFamily="34" charset="-122"/>
-                <a:cs typeface="Inter" pitchFamily="34" charset="-120"/>
-              </a:rPr>
-              <a:t>Four station directions, eight cards
-</a:t>
-            </a:r>
-            <a:pPr indent="0" marL="0">
-              <a:lnSpc>
-                <a:spcPct val="114000"/>
-              </a:lnSpc>
-              <a:buNone/>
-            </a:pPr>
-            <a:r>
-              <a:rPr lang="en-US" sz="1500" dirty="0">
+              <a:rPr lang="en-US" sz="1250" dirty="0">
                 <a:solidFill>
                   <a:srgbClr val="1B1F24"/>
                 </a:solidFill>
@@ -20232,49 +20244,22 @@
                 <a:ea typeface="Inter" pitchFamily="34" charset="-122"/>
                 <a:cs typeface="Inter" pitchFamily="34" charset="-120"/>
               </a:rPr>
-              <a:t>The same food web content, labeled and ready to print, so Tuesday can run as stations instead of a read-aloud.</a:t>
-            </a:r>
-            <a:endParaRPr lang="en-US" sz="1500" dirty="0"/>
-          </a:p>
-        </p:txBody>
-      </p:sp>
-      <p:sp>
-        <p:nvSpPr>
-          <p:cNvPr id="26" name="Shape 23"/>
-          <p:cNvSpPr/>
-          <p:nvPr/>
-        </p:nvSpPr>
-        <p:spPr>
-          <a:xfrm>
-            <a:off x="640080" y="5440680"/>
-            <a:ext cx="10972800" cy="658368"/>
-          </a:xfrm>
-          <a:prstGeom prst="roundRect">
-            <a:avLst>
-              <a:gd name="adj" fmla="val 12500"/>
-            </a:avLst>
-          </a:prstGeom>
-          <a:solidFill>
-            <a:srgbClr val="13293D"/>
-          </a:solidFill>
-          <a:ln w="12700">
-            <a:solidFill>
-              <a:srgbClr val="13293D"/>
-            </a:solidFill>
-            <a:prstDash val="solid"/>
-          </a:ln>
-        </p:spPr>
-      </p:sp>
-      <p:sp>
-        <p:nvSpPr>
-          <p:cNvPr id="27" name="Text 24"/>
-          <p:cNvSpPr/>
-          <p:nvPr/>
-        </p:nvSpPr>
-        <p:spPr>
-          <a:xfrm>
-            <a:off x="960120" y="5440680"/>
-            <a:ext cx="10332720" cy="658368"/>
+              <a:t>the living and nonliving things in one place</a:t>
+            </a:r>
+            <a:endParaRPr lang="en-US" sz="1250" dirty="0"/>
+          </a:p>
+        </p:txBody>
+      </p:sp>
+      <p:sp>
+        <p:nvSpPr>
+          <p:cNvPr id="20" name="Text 17"/>
+          <p:cNvSpPr/>
+          <p:nvPr/>
+        </p:nvSpPr>
+        <p:spPr>
+          <a:xfrm>
+            <a:off x="640080" y="5394960"/>
+            <a:ext cx="10972800" cy="685800"/>
           </a:xfrm>
           <a:prstGeom prst="rect">
             <a:avLst/>
@@ -20290,31 +20275,31 @@
               <a:buNone/>
             </a:pPr>
             <a:r>
-              <a:rPr lang="en-US" sz="1600" b="1" dirty="0">
-                <a:solidFill>
-                  <a:srgbClr val="2A9D8F"/>
-                </a:solidFill>
-                <a:latin typeface="Inter" pitchFamily="34" charset="0"/>
-                <a:ea typeface="Inter" pitchFamily="34" charset="-122"/>
-                <a:cs typeface="Inter" pitchFamily="34" charset="-120"/>
-              </a:rPr>
-              <a:t>Accurate · At level · Fits her students · Sounds like her.  </a:t>
+              <a:rPr lang="en-US" sz="1400" b="1" dirty="0">
+                <a:solidFill>
+                  <a:srgbClr val="5B6B7A"/>
+                </a:solidFill>
+                <a:latin typeface="Inter" pitchFamily="34" charset="0"/>
+                <a:ea typeface="Inter" pitchFamily="34" charset="-122"/>
+                <a:cs typeface="Inter" pitchFamily="34" charset="-120"/>
+              </a:rPr>
+              <a:t>On grade it read: </a:t>
             </a:r>
             <a:pPr algn="ctr" indent="0" marL="0">
               <a:buNone/>
             </a:pPr>
             <a:r>
-              <a:rPr lang="en-US" sz="1600" dirty="0">
-                <a:solidFill>
-                  <a:srgbClr val="FFFFFF"/>
-                </a:solidFill>
-                <a:latin typeface="Inter" pitchFamily="34" charset="0"/>
-                <a:ea typeface="Inter" pitchFamily="34" charset="-122"/>
-                <a:cs typeface="Inter" pitchFamily="34" charset="-120"/>
-              </a:rPr>
-              <a:t>All four passed, after two fixes. One passage in, four teachable versions out.</a:t>
-            </a:r>
-            <a:endParaRPr lang="en-US" sz="1600" dirty="0"/>
+              <a:rPr lang="en-US" sz="1400" i="1" dirty="0">
+                <a:solidFill>
+                  <a:srgbClr val="5B6B7A"/>
+                </a:solidFill>
+                <a:latin typeface="Inter" pitchFamily="34" charset="0"/>
+                <a:ea typeface="Inter" pitchFamily="34" charset="-122"/>
+                <a:cs typeface="Inter" pitchFamily="34" charset="-120"/>
+              </a:rPr>
+              <a:t>“Consumers get their energy secondhand: a rabbit eats the grass, a hawk eats the rabbit.”  Same science. Same key words. Sentences a struggling reader can hold.</a:t>
+            </a:r>
+            <a:endParaRPr lang="en-US" sz="1400" dirty="0"/>
           </a:p>
         </p:txBody>
       </p:sp>
@@ -20667,7 +20652,7 @@
                 <a:ea typeface="Inter" pitchFamily="34" charset="-122"/>
                 <a:cs typeface="Inter" pitchFamily="34" charset="-120"/>
               </a:rPr>
-              <a:t>Her share-out: what the review caught in her food webs passage, told first.</a:t>
+              <a:t>Her stretch and her stations, finished: depth for some, a new shape for Tuesday.</a:t>
             </a:r>
             <a:endParaRPr lang="en-US" sz="1000" dirty="0"/>
           </a:p>
@@ -20706,7 +20691,7 @@
                 <a:ea typeface="Inter" pitchFamily="34" charset="-122"/>
                 <a:cs typeface="Inter" pitchFamily="34" charset="-120"/>
               </a:rPr>
-              <a:t>SHARE-OUT · 3–4 VOICES</a:t>
+              <a:t>LAB · THE FINISHED PRODUCT · HER STRETCH AND HER STATIONS</a:t>
             </a:r>
             <a:endParaRPr lang="en-US" sz="1200" dirty="0"/>
           </a:p>
@@ -20737,7 +20722,7 @@
               <a:buNone/>
             </a:pPr>
             <a:r>
-              <a:rPr lang="en-US" sz="3200" b="1" dirty="0">
+              <a:rPr lang="en-US" sz="2800" b="1" dirty="0">
                 <a:solidFill>
                   <a:srgbClr val="13293D"/>
                 </a:solidFill>
@@ -20745,42 +20730,124 @@
                 <a:ea typeface="Inter" pitchFamily="34" charset="-122"/>
                 <a:cs typeface="Inter" pitchFamily="34" charset="-120"/>
               </a:rPr>
-              <a:t>What did you build?</a:t>
-            </a:r>
-            <a:endParaRPr lang="en-US" sz="3200" dirty="0"/>
-          </a:p>
-        </p:txBody>
-      </p:sp>
-      <p:sp>
-        <p:nvSpPr>
-          <p:cNvPr id="14" name="Text 11"/>
-          <p:cNvSpPr/>
-          <p:nvPr/>
-        </p:nvSpPr>
-        <p:spPr>
-          <a:xfrm>
-            <a:off x="640080" y="1554480"/>
-            <a:ext cx="10908792" cy="2560320"/>
-          </a:xfrm>
-          <a:prstGeom prst="rect">
-            <a:avLst/>
-          </a:prstGeom>
-          <a:noFill/>
-          <a:ln/>
-        </p:spPr>
-        <p:txBody>
-          <a:bodyPr wrap="square" rtlCol="0" anchor="t"/>
-          <a:lstStyle/>
-          <a:p>
-            <a:pPr marL="342900" indent="-342900">
-              <a:spcAft>
-                <a:spcPts val="1000"/>
-              </a:spcAft>
-              <a:buSzPct val="100000"/>
-              <a:buChar char="•"/>
-            </a:pPr>
-            <a:r>
-              <a:rPr lang="en-US" sz="2200" dirty="0">
+              <a:t>The other two versions, word for word</a:t>
+            </a:r>
+            <a:endParaRPr lang="en-US" sz="2800" dirty="0"/>
+          </a:p>
+        </p:txBody>
+      </p:sp>
+      <p:sp>
+        <p:nvSpPr>
+          <p:cNvPr id="14" name="Shape 11"/>
+          <p:cNvSpPr/>
+          <p:nvPr/>
+        </p:nvSpPr>
+        <p:spPr>
+          <a:xfrm>
+            <a:off x="640080" y="1188720"/>
+            <a:ext cx="5349240" cy="3611880"/>
+          </a:xfrm>
+          <a:prstGeom prst="roundRect">
+            <a:avLst>
+              <a:gd name="adj" fmla="val 2278"/>
+            </a:avLst>
+          </a:prstGeom>
+          <a:solidFill>
+            <a:srgbClr val="F7F5F0"/>
+          </a:solidFill>
+          <a:ln w="12700">
+            <a:solidFill>
+              <a:srgbClr val="F7F5F0"/>
+            </a:solidFill>
+            <a:prstDash val="solid"/>
+          </a:ln>
+        </p:spPr>
+      </p:sp>
+      <p:sp>
+        <p:nvSpPr>
+          <p:cNvPr id="15" name="Text 12"/>
+          <p:cNvSpPr/>
+          <p:nvPr/>
+        </p:nvSpPr>
+        <p:spPr>
+          <a:xfrm>
+            <a:off x="914400" y="1325880"/>
+            <a:ext cx="4800600" cy="274320"/>
+          </a:xfrm>
+          <a:prstGeom prst="rect">
+            <a:avLst/>
+          </a:prstGeom>
+          <a:noFill/>
+          <a:ln/>
+        </p:spPr>
+        <p:txBody>
+          <a:bodyPr wrap="square" lIns="0" tIns="0" rIns="0" bIns="0" rtlCol="0" anchor="ctr"/>
+          <a:lstStyle/>
+          <a:p>
+            <a:pPr indent="0" marL="0">
+              <a:buNone/>
+            </a:pPr>
+            <a:r>
+              <a:rPr lang="en-US" sz="1100" b="1" spc="120" kern="0" dirty="0">
+                <a:solidFill>
+                  <a:srgbClr val="B07914"/>
+                </a:solidFill>
+                <a:latin typeface="Inter" pitchFamily="34" charset="0"/>
+                <a:ea typeface="Inter" pitchFamily="34" charset="-122"/>
+                <a:cs typeface="Inter" pitchFamily="34" charset="-120"/>
+              </a:rPr>
+              <a:t>THREE STRETCH PROMPTS · DEPTH, NOT VOLUME</a:t>
+            </a:r>
+            <a:endParaRPr lang="en-US" sz="1100" dirty="0"/>
+          </a:p>
+        </p:txBody>
+      </p:sp>
+      <p:sp>
+        <p:nvSpPr>
+          <p:cNvPr id="16" name="Text 13"/>
+          <p:cNvSpPr/>
+          <p:nvPr/>
+        </p:nvSpPr>
+        <p:spPr>
+          <a:xfrm>
+            <a:off x="914400" y="1691640"/>
+            <a:ext cx="4800600" cy="3291840"/>
+          </a:xfrm>
+          <a:prstGeom prst="rect">
+            <a:avLst/>
+          </a:prstGeom>
+          <a:noFill/>
+          <a:ln/>
+        </p:spPr>
+        <p:txBody>
+          <a:bodyPr wrap="square" lIns="0" tIns="0" rIns="0" bIns="0" rtlCol="0" anchor="t"/>
+          <a:lstStyle/>
+          <a:p>
+            <a:pPr indent="0" marL="0">
+              <a:lnSpc>
+                <a:spcPct val="112000"/>
+              </a:lnSpc>
+              <a:buNone/>
+            </a:pPr>
+            <a:r>
+              <a:rPr lang="en-US" sz="1400" b="1" dirty="0">
+                <a:solidFill>
+                  <a:srgbClr val="13293D"/>
+                </a:solidFill>
+                <a:latin typeface="Inter" pitchFamily="34" charset="0"/>
+                <a:ea typeface="Inter" pitchFamily="34" charset="-122"/>
+                <a:cs typeface="Inter" pitchFamily="34" charset="-120"/>
+              </a:rPr>
+              <a:t>1. </a:t>
+            </a:r>
+            <a:pPr indent="0" marL="0">
+              <a:lnSpc>
+                <a:spcPct val="112000"/>
+              </a:lnSpc>
+              <a:buNone/>
+            </a:pPr>
+            <a:r>
+              <a:rPr lang="en-US" sz="1400" dirty="0">
                 <a:solidFill>
                   <a:srgbClr val="1B1F24"/>
                 </a:solidFill>
@@ -20788,20 +20855,34 @@
                 <a:ea typeface="Inter" pitchFamily="34" charset="-122"/>
                 <a:cs typeface="Inter" pitchFamily="34" charset="-120"/>
               </a:rPr>
-              <a:t>What’s your artifact, and which direction surprised you?</a:t>
-            </a:r>
-            <a:endParaRPr lang="en-US" sz="2200" dirty="0"/>
-          </a:p>
-          <a:p>
-            <a:pPr marL="342900" indent="-342900">
-              <a:spcAft>
-                <a:spcPts val="1000"/>
-              </a:spcAft>
-              <a:buSzPct val="100000"/>
-              <a:buChar char="•"/>
-            </a:pPr>
-            <a:r>
-              <a:rPr lang="en-US" sz="2200" dirty="0">
+              <a:t>“A desert food web has no grasses. Draw one and explain where the energy starts.”
+</a:t>
+            </a:r>
+            <a:pPr indent="0" marL="0">
+              <a:lnSpc>
+                <a:spcPct val="112000"/>
+              </a:lnSpc>
+              <a:buNone/>
+            </a:pPr>
+            <a:r>
+              <a:rPr lang="en-US" sz="1400" b="1" dirty="0">
+                <a:solidFill>
+                  <a:srgbClr val="13293D"/>
+                </a:solidFill>
+                <a:latin typeface="Inter" pitchFamily="34" charset="0"/>
+                <a:ea typeface="Inter" pitchFamily="34" charset="-122"/>
+                <a:cs typeface="Inter" pitchFamily="34" charset="-120"/>
+              </a:rPr>
+              <a:t>2. </a:t>
+            </a:r>
+            <a:pPr indent="0" marL="0">
+              <a:lnSpc>
+                <a:spcPct val="112000"/>
+              </a:lnSpc>
+              <a:buNone/>
+            </a:pPr>
+            <a:r>
+              <a:rPr lang="en-US" sz="1400" dirty="0">
                 <a:solidFill>
                   <a:srgbClr val="1B1F24"/>
                 </a:solidFill>
@@ -20809,20 +20890,17 @@
                 <a:ea typeface="Inter" pitchFamily="34" charset="-122"/>
                 <a:cs typeface="Inter" pitchFamily="34" charset="-120"/>
               </a:rPr>
-              <a:t>Did the 4-point review catch anything?</a:t>
-            </a:r>
-            <a:endParaRPr lang="en-US" sz="2200" dirty="0"/>
-          </a:p>
-          <a:p>
-            <a:pPr marL="342900" indent="-342900">
-              <a:spcAft>
-                <a:spcPts val="1000"/>
-              </a:spcAft>
-              <a:buSzPct val="100000"/>
-              <a:buChar char="•"/>
-            </a:pPr>
-            <a:r>
-              <a:rPr lang="en-US" sz="2200" b="1" dirty="0">
+              <a:t>“Here is a food web with the arrows pointing from the hawk to the rabbit. Explain what is wrong, then fix it.”
+</a:t>
+            </a:r>
+            <a:pPr indent="0" marL="0">
+              <a:lnSpc>
+                <a:spcPct val="112000"/>
+              </a:lnSpc>
+              <a:buNone/>
+            </a:pPr>
+            <a:r>
+              <a:rPr lang="en-US" sz="1400" b="1" dirty="0">
                 <a:solidFill>
                   <a:srgbClr val="13293D"/>
                 </a:solidFill>
@@ -20830,9 +20908,336 @@
                 <a:ea typeface="Inter" pitchFamily="34" charset="-122"/>
                 <a:cs typeface="Inter" pitchFamily="34" charset="-120"/>
               </a:rPr>
-              <a:t>If the AI got a level wrong or invented something, that story goes first.</a:t>
-            </a:r>
-            <a:endParaRPr lang="en-US" sz="2200" dirty="0"/>
+              <a:t>3. </a:t>
+            </a:r>
+            <a:pPr indent="0" marL="0">
+              <a:lnSpc>
+                <a:spcPct val="112000"/>
+              </a:lnSpc>
+              <a:buNone/>
+            </a:pPr>
+            <a:r>
+              <a:rPr lang="en-US" sz="1400" dirty="0">
+                <a:solidFill>
+                  <a:srgbClr val="1B1F24"/>
+                </a:solidFill>
+                <a:latin typeface="Inter" pitchFamily="34" charset="0"/>
+                <a:ea typeface="Inter" pitchFamily="34" charset="-122"/>
+                <a:cs typeface="Inter" pitchFamily="34" charset="-120"/>
+              </a:rPr>
+              <a:t>“Explain to a 3rd grader why removing one animal changes the whole web. Use your own words.”</a:t>
+            </a:r>
+            <a:endParaRPr lang="en-US" sz="1400" dirty="0"/>
+          </a:p>
+        </p:txBody>
+      </p:sp>
+      <p:sp>
+        <p:nvSpPr>
+          <p:cNvPr id="17" name="Shape 14"/>
+          <p:cNvSpPr/>
+          <p:nvPr/>
+        </p:nvSpPr>
+        <p:spPr>
+          <a:xfrm>
+            <a:off x="6263640" y="1188720"/>
+            <a:ext cx="5349240" cy="3611880"/>
+          </a:xfrm>
+          <a:prstGeom prst="roundRect">
+            <a:avLst>
+              <a:gd name="adj" fmla="val 2278"/>
+            </a:avLst>
+          </a:prstGeom>
+          <a:solidFill>
+            <a:srgbClr val="F7F5F0"/>
+          </a:solidFill>
+          <a:ln w="12700">
+            <a:solidFill>
+              <a:srgbClr val="F7F5F0"/>
+            </a:solidFill>
+            <a:prstDash val="solid"/>
+          </a:ln>
+        </p:spPr>
+      </p:sp>
+      <p:sp>
+        <p:nvSpPr>
+          <p:cNvPr id="18" name="Text 15"/>
+          <p:cNvSpPr/>
+          <p:nvPr/>
+        </p:nvSpPr>
+        <p:spPr>
+          <a:xfrm>
+            <a:off x="6537960" y="1325880"/>
+            <a:ext cx="4800600" cy="274320"/>
+          </a:xfrm>
+          <a:prstGeom prst="rect">
+            <a:avLst/>
+          </a:prstGeom>
+          <a:noFill/>
+          <a:ln/>
+        </p:spPr>
+        <p:txBody>
+          <a:bodyPr wrap="square" lIns="0" tIns="0" rIns="0" bIns="0" rtlCol="0" anchor="ctr"/>
+          <a:lstStyle/>
+          <a:p>
+            <a:pPr indent="0" marL="0">
+              <a:buNone/>
+            </a:pPr>
+            <a:r>
+              <a:rPr lang="en-US" sz="1100" b="1" spc="120" kern="0" dirty="0">
+                <a:solidFill>
+                  <a:srgbClr val="13293D"/>
+                </a:solidFill>
+                <a:latin typeface="Inter" pitchFamily="34" charset="0"/>
+                <a:ea typeface="Inter" pitchFamily="34" charset="-122"/>
+                <a:cs typeface="Inter" pitchFamily="34" charset="-120"/>
+              </a:rPr>
+              <a:t>FOUR STATION DIRECTIONS · A NEW SHAPE</a:t>
+            </a:r>
+            <a:endParaRPr lang="en-US" sz="1100" dirty="0"/>
+          </a:p>
+        </p:txBody>
+      </p:sp>
+      <p:sp>
+        <p:nvSpPr>
+          <p:cNvPr id="19" name="Text 16"/>
+          <p:cNvSpPr/>
+          <p:nvPr/>
+        </p:nvSpPr>
+        <p:spPr>
+          <a:xfrm>
+            <a:off x="6537960" y="1691640"/>
+            <a:ext cx="4800600" cy="3291840"/>
+          </a:xfrm>
+          <a:prstGeom prst="rect">
+            <a:avLst/>
+          </a:prstGeom>
+          <a:noFill/>
+          <a:ln/>
+        </p:spPr>
+        <p:txBody>
+          <a:bodyPr wrap="square" lIns="0" tIns="0" rIns="0" bIns="0" rtlCol="0" anchor="t"/>
+          <a:lstStyle/>
+          <a:p>
+            <a:pPr indent="0" marL="0">
+              <a:lnSpc>
+                <a:spcPct val="112000"/>
+              </a:lnSpc>
+              <a:buNone/>
+            </a:pPr>
+            <a:r>
+              <a:rPr lang="en-US" sz="1400" b="1" dirty="0">
+                <a:solidFill>
+                  <a:srgbClr val="2A9D8F"/>
+                </a:solidFill>
+                <a:latin typeface="Inter" pitchFamily="34" charset="0"/>
+                <a:ea typeface="Inter" pitchFamily="34" charset="-122"/>
+                <a:cs typeface="Inter" pitchFamily="34" charset="-120"/>
+              </a:rPr>
+              <a:t>Station 1 · Build it   </a:t>
+            </a:r>
+            <a:pPr indent="0" marL="0">
+              <a:lnSpc>
+                <a:spcPct val="112000"/>
+              </a:lnSpc>
+              <a:buNone/>
+            </a:pPr>
+            <a:r>
+              <a:rPr lang="en-US" sz="1400" dirty="0">
+                <a:solidFill>
+                  <a:srgbClr val="1B1F24"/>
+                </a:solidFill>
+                <a:latin typeface="Inter" pitchFamily="34" charset="0"/>
+                <a:ea typeface="Inter" pitchFamily="34" charset="-122"/>
+                <a:cs typeface="Inter" pitchFamily="34" charset="-120"/>
+              </a:rPr>
+              <a:t>“Use the cards to build a schoolyard food web. Producers go at the bottom.”
+</a:t>
+            </a:r>
+            <a:pPr indent="0" marL="0">
+              <a:lnSpc>
+                <a:spcPct val="112000"/>
+              </a:lnSpc>
+              <a:buNone/>
+            </a:pPr>
+            <a:r>
+              <a:rPr lang="en-US" sz="1400" b="1" dirty="0">
+                <a:solidFill>
+                  <a:srgbClr val="2A9D8F"/>
+                </a:solidFill>
+                <a:latin typeface="Inter" pitchFamily="34" charset="0"/>
+                <a:ea typeface="Inter" pitchFamily="34" charset="-122"/>
+                <a:cs typeface="Inter" pitchFamily="34" charset="-120"/>
+              </a:rPr>
+              <a:t>Station 2 · Break it   </a:t>
+            </a:r>
+            <a:pPr indent="0" marL="0">
+              <a:lnSpc>
+                <a:spcPct val="112000"/>
+              </a:lnSpc>
+              <a:buNone/>
+            </a:pPr>
+            <a:r>
+              <a:rPr lang="en-US" sz="1400" dirty="0">
+                <a:solidFill>
+                  <a:srgbClr val="1B1F24"/>
+                </a:solidFill>
+                <a:latin typeface="Inter" pitchFamily="34" charset="0"/>
+                <a:ea typeface="Inter" pitchFamily="34" charset="-122"/>
+                <a:cs typeface="Inter" pitchFamily="34" charset="-120"/>
+              </a:rPr>
+              <a:t>“Take one card out. List three things that change.”
+</a:t>
+            </a:r>
+            <a:pPr indent="0" marL="0">
+              <a:lnSpc>
+                <a:spcPct val="112000"/>
+              </a:lnSpc>
+              <a:buNone/>
+            </a:pPr>
+            <a:r>
+              <a:rPr lang="en-US" sz="1400" b="1" dirty="0">
+                <a:solidFill>
+                  <a:srgbClr val="2A9D8F"/>
+                </a:solidFill>
+                <a:latin typeface="Inter" pitchFamily="34" charset="0"/>
+                <a:ea typeface="Inter" pitchFamily="34" charset="-122"/>
+                <a:cs typeface="Inter" pitchFamily="34" charset="-120"/>
+              </a:rPr>
+              <a:t>Station 3 · Read it   </a:t>
+            </a:r>
+            <a:pPr indent="0" marL="0">
+              <a:lnSpc>
+                <a:spcPct val="112000"/>
+              </a:lnSpc>
+              <a:buNone/>
+            </a:pPr>
+            <a:r>
+              <a:rPr lang="en-US" sz="1400" dirty="0">
+                <a:solidFill>
+                  <a:srgbClr val="1B1F24"/>
+                </a:solidFill>
+                <a:latin typeface="Inter" pitchFamily="34" charset="0"/>
+                <a:ea typeface="Inter" pitchFamily="34" charset="-122"/>
+                <a:cs typeface="Inter" pitchFamily="34" charset="-120"/>
+              </a:rPr>
+              <a:t>“Read the passage with a partner. Find all five vocabulary words.”
+</a:t>
+            </a:r>
+            <a:pPr indent="0" marL="0">
+              <a:lnSpc>
+                <a:spcPct val="112000"/>
+              </a:lnSpc>
+              <a:buNone/>
+            </a:pPr>
+            <a:r>
+              <a:rPr lang="en-US" sz="1400" b="1" dirty="0">
+                <a:solidFill>
+                  <a:srgbClr val="2A9D8F"/>
+                </a:solidFill>
+                <a:latin typeface="Inter" pitchFamily="34" charset="0"/>
+                <a:ea typeface="Inter" pitchFamily="34" charset="-122"/>
+                <a:cs typeface="Inter" pitchFamily="34" charset="-120"/>
+              </a:rPr>
+              <a:t>Station 4 · Explain it   </a:t>
+            </a:r>
+            <a:pPr indent="0" marL="0">
+              <a:lnSpc>
+                <a:spcPct val="112000"/>
+              </a:lnSpc>
+              <a:buNone/>
+            </a:pPr>
+            <a:r>
+              <a:rPr lang="en-US" sz="1400" dirty="0">
+                <a:solidFill>
+                  <a:srgbClr val="1B1F24"/>
+                </a:solidFill>
+                <a:latin typeface="Inter" pitchFamily="34" charset="0"/>
+                <a:ea typeface="Inter" pitchFamily="34" charset="-122"/>
+                <a:cs typeface="Inter" pitchFamily="34" charset="-120"/>
+              </a:rPr>
+              <a:t>“Teach your web to the next group, in your own words.”</a:t>
+            </a:r>
+            <a:endParaRPr lang="en-US" sz="1400" dirty="0"/>
+          </a:p>
+        </p:txBody>
+      </p:sp>
+      <p:sp>
+        <p:nvSpPr>
+          <p:cNvPr id="20" name="Shape 17"/>
+          <p:cNvSpPr/>
+          <p:nvPr/>
+        </p:nvSpPr>
+        <p:spPr>
+          <a:xfrm>
+            <a:off x="640080" y="5074920"/>
+            <a:ext cx="10972800" cy="658368"/>
+          </a:xfrm>
+          <a:prstGeom prst="roundRect">
+            <a:avLst>
+              <a:gd name="adj" fmla="val 12500"/>
+            </a:avLst>
+          </a:prstGeom>
+          <a:solidFill>
+            <a:srgbClr val="13293D"/>
+          </a:solidFill>
+          <a:ln w="12700">
+            <a:solidFill>
+              <a:srgbClr val="13293D"/>
+            </a:solidFill>
+            <a:prstDash val="solid"/>
+          </a:ln>
+        </p:spPr>
+      </p:sp>
+      <p:sp>
+        <p:nvSpPr>
+          <p:cNvPr id="21" name="Text 18"/>
+          <p:cNvSpPr/>
+          <p:nvPr/>
+        </p:nvSpPr>
+        <p:spPr>
+          <a:xfrm>
+            <a:off x="960120" y="5074920"/>
+            <a:ext cx="10332720" cy="658368"/>
+          </a:xfrm>
+          <a:prstGeom prst="rect">
+            <a:avLst/>
+          </a:prstGeom>
+          <a:noFill/>
+          <a:ln/>
+        </p:spPr>
+        <p:txBody>
+          <a:bodyPr wrap="square" lIns="0" tIns="0" rIns="0" bIns="0" rtlCol="0" anchor="ctr"/>
+          <a:lstStyle/>
+          <a:p>
+            <a:pPr algn="ctr" indent="0" marL="0">
+              <a:buNone/>
+            </a:pPr>
+            <a:r>
+              <a:rPr lang="en-US" sz="1600" b="1" dirty="0">
+                <a:solidFill>
+                  <a:srgbClr val="2A9D8F"/>
+                </a:solidFill>
+                <a:latin typeface="Inter" pitchFamily="34" charset="0"/>
+                <a:ea typeface="Inter" pitchFamily="34" charset="-122"/>
+                <a:cs typeface="Inter" pitchFamily="34" charset="-120"/>
+              </a:rPr>
+              <a:t>Accurate · At level · Fits her students · Sounds like her.  </a:t>
+            </a:r>
+            <a:pPr algn="ctr" indent="0" marL="0">
+              <a:buNone/>
+            </a:pPr>
+            <a:r>
+              <a:rPr lang="en-US" sz="1600" dirty="0">
+                <a:solidFill>
+                  <a:srgbClr val="FFFFFF"/>
+                </a:solidFill>
+                <a:latin typeface="Inter" pitchFamily="34" charset="0"/>
+                <a:ea typeface="Inter" pitchFamily="34" charset="-122"/>
+                <a:cs typeface="Inter" pitchFamily="34" charset="-120"/>
+              </a:rPr>
+              <a:t>All four passed, after two fixes. One passage in, four teachable versions out.</a:t>
+            </a:r>
+            <a:endParaRPr lang="en-US" sz="1600" dirty="0"/>
           </a:p>
         </p:txBody>
       </p:sp>
@@ -21185,7 +21590,7 @@
                 <a:ea typeface="Inter" pitchFamily="34" charset="-122"/>
                 <a:cs typeface="Inter" pitchFamily="34" charset="-120"/>
               </a:rPr>
-              <a:t>Her twenty minutes: one food webs passage became four teachable versions.</a:t>
+              <a:t>Her share-out: what the review caught in her food webs passage, told first.</a:t>
             </a:r>
             <a:endParaRPr lang="en-US" sz="1000" dirty="0"/>
           </a:p>
@@ -21224,7 +21629,7 @@
                 <a:ea typeface="Inter" pitchFamily="34" charset="-122"/>
                 <a:cs typeface="Inter" pitchFamily="34" charset="-120"/>
               </a:rPr>
-              <a:t>NINETEEN MINUTES AGO THIS DIDN’T EXIST</a:t>
+              <a:t>SHARE-OUT · 3–4 VOICES</a:t>
             </a:r>
             <a:endParaRPr lang="en-US" sz="1200" dirty="0"/>
           </a:p>
@@ -21263,7 +21668,7 @@
                 <a:ea typeface="Inter" pitchFamily="34" charset="-122"/>
                 <a:cs typeface="Inter" pitchFamily="34" charset="-120"/>
               </a:rPr>
-              <a:t>From good intentions to materials</a:t>
+              <a:t>What did you build?</a:t>
             </a:r>
             <a:endParaRPr lang="en-US" sz="3200" dirty="0"/>
           </a:p>
@@ -21271,57 +21676,76 @@
       </p:sp>
       <p:sp>
         <p:nvSpPr>
-          <p:cNvPr id="14" name="Shape 11"/>
-          <p:cNvSpPr/>
-          <p:nvPr/>
-        </p:nvSpPr>
-        <p:spPr>
-          <a:xfrm>
-            <a:off x="640080" y="1645920"/>
-            <a:ext cx="10972800" cy="3291840"/>
-          </a:xfrm>
-          <a:prstGeom prst="roundRect">
-            <a:avLst>
-              <a:gd name="adj" fmla="val 2500"/>
-            </a:avLst>
-          </a:prstGeom>
-          <a:solidFill>
-            <a:srgbClr val="F7F5F0"/>
-          </a:solidFill>
-          <a:ln w="12700">
-            <a:solidFill>
-              <a:srgbClr val="F7F5F0"/>
-            </a:solidFill>
-            <a:prstDash val="solid"/>
-          </a:ln>
-        </p:spPr>
-      </p:sp>
-      <p:sp>
-        <p:nvSpPr>
-          <p:cNvPr id="15" name="Text 12"/>
-          <p:cNvSpPr/>
-          <p:nvPr/>
-        </p:nvSpPr>
-        <p:spPr>
-          <a:xfrm>
-            <a:off x="1005840" y="1920240"/>
-            <a:ext cx="10241280" cy="2743200"/>
-          </a:xfrm>
-          <a:prstGeom prst="rect">
-            <a:avLst/>
-          </a:prstGeom>
-          <a:noFill/>
-          <a:ln/>
-        </p:spPr>
-        <p:txBody>
-          <a:bodyPr wrap="square" lIns="0" tIns="0" rIns="0" bIns="0" rtlCol="0" anchor="ctr"/>
-          <a:lstStyle/>
-          <a:p>
-            <a:pPr indent="0" marL="0">
-              <a:buNone/>
-            </a:pPr>
-            <a:r>
-              <a:rPr lang="en-US" sz="2000" b="1" dirty="0">
+          <p:cNvPr id="14" name="Text 11"/>
+          <p:cNvSpPr/>
+          <p:nvPr/>
+        </p:nvSpPr>
+        <p:spPr>
+          <a:xfrm>
+            <a:off x="640080" y="1554480"/>
+            <a:ext cx="10908792" cy="2560320"/>
+          </a:xfrm>
+          <a:prstGeom prst="rect">
+            <a:avLst/>
+          </a:prstGeom>
+          <a:noFill/>
+          <a:ln/>
+        </p:spPr>
+        <p:txBody>
+          <a:bodyPr wrap="square" rtlCol="0" anchor="t"/>
+          <a:lstStyle/>
+          <a:p>
+            <a:pPr marL="342900" indent="-342900">
+              <a:spcAft>
+                <a:spcPts val="1000"/>
+              </a:spcAft>
+              <a:buSzPct val="100000"/>
+              <a:buChar char="•"/>
+            </a:pPr>
+            <a:r>
+              <a:rPr lang="en-US" sz="2200" dirty="0">
+                <a:solidFill>
+                  <a:srgbClr val="1B1F24"/>
+                </a:solidFill>
+                <a:latin typeface="Inter" pitchFamily="34" charset="0"/>
+                <a:ea typeface="Inter" pitchFamily="34" charset="-122"/>
+                <a:cs typeface="Inter" pitchFamily="34" charset="-120"/>
+              </a:rPr>
+              <a:t>What’s your artifact, and which direction surprised you?</a:t>
+            </a:r>
+            <a:endParaRPr lang="en-US" sz="2200" dirty="0"/>
+          </a:p>
+          <a:p>
+            <a:pPr marL="342900" indent="-342900">
+              <a:spcAft>
+                <a:spcPts val="1000"/>
+              </a:spcAft>
+              <a:buSzPct val="100000"/>
+              <a:buChar char="•"/>
+            </a:pPr>
+            <a:r>
+              <a:rPr lang="en-US" sz="2200" dirty="0">
+                <a:solidFill>
+                  <a:srgbClr val="1B1F24"/>
+                </a:solidFill>
+                <a:latin typeface="Inter" pitchFamily="34" charset="0"/>
+                <a:ea typeface="Inter" pitchFamily="34" charset="-122"/>
+                <a:cs typeface="Inter" pitchFamily="34" charset="-120"/>
+              </a:rPr>
+              <a:t>Did the 4-point review catch anything?</a:t>
+            </a:r>
+            <a:endParaRPr lang="en-US" sz="2200" dirty="0"/>
+          </a:p>
+          <a:p>
+            <a:pPr marL="342900" indent="-342900">
+              <a:spcAft>
+                <a:spcPts val="1000"/>
+              </a:spcAft>
+              <a:buSzPct val="100000"/>
+              <a:buChar char="•"/>
+            </a:pPr>
+            <a:r>
+              <a:rPr lang="en-US" sz="2200" b="1" dirty="0">
                 <a:solidFill>
                   <a:srgbClr val="13293D"/>
                 </a:solidFill>
@@ -21329,24 +21753,9 @@
                 <a:ea typeface="Inter" pitchFamily="34" charset="-122"/>
                 <a:cs typeface="Inter" pitchFamily="34" charset="-120"/>
               </a:rPr>
-              <a:t>A core artifact. A support version. An extension. All reviewed by the one person qualified to review them.
-</a:t>
-            </a:r>
-            <a:pPr indent="0" marL="0">
-              <a:buNone/>
-            </a:pPr>
-            <a:r>
-              <a:rPr lang="en-US" sz="2000" dirty="0">
-                <a:solidFill>
-                  <a:srgbClr val="1B1F24"/>
-                </a:solidFill>
-                <a:latin typeface="Inter" pitchFamily="34" charset="0"/>
-                <a:ea typeface="Inter" pitchFamily="34" charset="-122"/>
-                <a:cs typeface="Inter" pitchFamily="34" charset="-120"/>
-              </a:rPr>
-              <a:t>The research said differentiation works best embedded and technology-supported. That’s not a description of some other school anymore. It’s what’s on your screen.</a:t>
-            </a:r>
-            <a:endParaRPr lang="en-US" sz="2000" dirty="0"/>
+              <a:t>If the AI got a level wrong or invented something, that story goes first.</a:t>
+            </a:r>
+            <a:endParaRPr lang="en-US" sz="2200" dirty="0"/>
           </a:p>
         </p:txBody>
       </p:sp>
@@ -21699,7 +22108,7 @@
                 <a:ea typeface="Inter" pitchFamily="34" charset="-122"/>
                 <a:cs typeface="Inter" pitchFamily="34" charset="-120"/>
               </a:rPr>
-              <a:t>Her habit: one differentiated artifact a week. Small and steady.</a:t>
+              <a:t>Her twenty minutes: one food webs passage became four teachable versions.</a:t>
             </a:r>
             <a:endParaRPr lang="en-US" sz="1000" dirty="0"/>
           </a:p>
@@ -21738,7 +22147,7 @@
                 <a:ea typeface="Inter" pitchFamily="34" charset="-122"/>
                 <a:cs typeface="Inter" pitchFamily="34" charset="-120"/>
               </a:rPr>
-              <a:t>THE HABIT THAT COMPOUNDS</a:t>
+              <a:t>NINETEEN MINUTES AGO THIS DIDN’T EXIST</a:t>
             </a:r>
             <a:endParaRPr lang="en-US" sz="1200" dirty="0"/>
           </a:p>
@@ -21769,7 +22178,7 @@
               <a:buNone/>
             </a:pPr>
             <a:r>
-              <a:rPr lang="en-US" sz="2800" b="1" dirty="0">
+              <a:rPr lang="en-US" sz="3200" b="1" dirty="0">
                 <a:solidFill>
                   <a:srgbClr val="13293D"/>
                 </a:solidFill>
@@ -21777,119 +22186,34 @@
                 <a:ea typeface="Inter" pitchFamily="34" charset="-122"/>
                 <a:cs typeface="Inter" pitchFamily="34" charset="-120"/>
               </a:rPr>
-              <a:t>One differentiated artifact per week</a:t>
-            </a:r>
-            <a:endParaRPr lang="en-US" sz="2800" dirty="0"/>
-          </a:p>
-        </p:txBody>
-      </p:sp>
-      <p:sp>
-        <p:nvSpPr>
-          <p:cNvPr id="14" name="Text 11"/>
-          <p:cNvSpPr/>
-          <p:nvPr/>
-        </p:nvSpPr>
-        <p:spPr>
-          <a:xfrm>
-            <a:off x="640080" y="1463040"/>
-            <a:ext cx="10908792" cy="2377440"/>
-          </a:xfrm>
-          <a:prstGeom prst="rect">
-            <a:avLst/>
-          </a:prstGeom>
-          <a:noFill/>
-          <a:ln/>
-        </p:spPr>
-        <p:txBody>
-          <a:bodyPr wrap="square" rtlCol="0" anchor="t"/>
-          <a:lstStyle/>
-          <a:p>
-            <a:pPr marL="342900" indent="-342900">
-              <a:spcAft>
-                <a:spcPts val="1000"/>
-              </a:spcAft>
-              <a:buSzPct val="100000"/>
-              <a:buChar char="•"/>
-            </a:pPr>
-            <a:r>
-              <a:rPr lang="en-US" sz="2100" dirty="0">
-                <a:solidFill>
-                  <a:srgbClr val="1B1F24"/>
-                </a:solidFill>
-                <a:latin typeface="Inter" pitchFamily="34" charset="0"/>
-                <a:ea typeface="Inter" pitchFamily="34" charset="-122"/>
-                <a:cs typeface="Inter" pitchFamily="34" charset="-120"/>
-              </a:rPr>
-              <a:t>Not a differentiated everything; that’s burnout dressed up as ambition</a:t>
-            </a:r>
-            <a:endParaRPr lang="en-US" sz="2100" dirty="0"/>
-          </a:p>
-          <a:p>
-            <a:pPr marL="342900" indent="-342900">
-              <a:spcAft>
-                <a:spcPts val="1000"/>
-              </a:spcAft>
-              <a:buSzPct val="100000"/>
-              <a:buChar char="•"/>
-            </a:pPr>
-            <a:r>
-              <a:rPr lang="en-US" sz="2100" dirty="0">
-                <a:solidFill>
-                  <a:srgbClr val="1B1F24"/>
-                </a:solidFill>
-                <a:latin typeface="Inter" pitchFamily="34" charset="0"/>
-                <a:ea typeface="Inter" pitchFamily="34" charset="-122"/>
-                <a:cs typeface="Inter" pitchFamily="34" charset="-120"/>
-              </a:rPr>
-              <a:t>One lesson a week gets the full treatment: core, support, extension, review</a:t>
-            </a:r>
-            <a:endParaRPr lang="en-US" sz="2100" dirty="0"/>
-          </a:p>
-          <a:p>
-            <a:pPr marL="342900" indent="-342900">
-              <a:spcAft>
-                <a:spcPts val="1000"/>
-              </a:spcAft>
-              <a:buSzPct val="100000"/>
-              <a:buChar char="•"/>
-            </a:pPr>
-            <a:r>
-              <a:rPr lang="en-US" sz="2100" b="1" dirty="0">
-                <a:solidFill>
-                  <a:srgbClr val="13293D"/>
-                </a:solidFill>
-                <a:latin typeface="Inter" pitchFamily="34" charset="0"/>
-                <a:ea typeface="Inter" pitchFamily="34" charset="-122"/>
-                <a:cs typeface="Inter" pitchFamily="34" charset="-120"/>
-              </a:rPr>
-              <a:t>Fifteen weeks in: fifteen lessons deep with materials for every learner on your roster</a:t>
-            </a:r>
-            <a:endParaRPr lang="en-US" sz="2100" dirty="0"/>
-          </a:p>
-        </p:txBody>
-      </p:sp>
-      <p:sp>
-        <p:nvSpPr>
-          <p:cNvPr id="15" name="Shape 12"/>
-          <p:cNvSpPr/>
-          <p:nvPr/>
-        </p:nvSpPr>
-        <p:spPr>
-          <a:xfrm>
-            <a:off x="640080" y="4023360"/>
-            <a:ext cx="10972800" cy="1554480"/>
+              <a:t>From good intentions to materials</a:t>
+            </a:r>
+            <a:endParaRPr lang="en-US" sz="3200" dirty="0"/>
+          </a:p>
+        </p:txBody>
+      </p:sp>
+      <p:sp>
+        <p:nvSpPr>
+          <p:cNvPr id="14" name="Shape 11"/>
+          <p:cNvSpPr/>
+          <p:nvPr/>
+        </p:nvSpPr>
+        <p:spPr>
+          <a:xfrm>
+            <a:off x="640080" y="1645920"/>
+            <a:ext cx="10972800" cy="3291840"/>
           </a:xfrm>
           <a:prstGeom prst="roundRect">
             <a:avLst>
-              <a:gd name="adj" fmla="val 5294"/>
+              <a:gd name="adj" fmla="val 2500"/>
             </a:avLst>
           </a:prstGeom>
           <a:solidFill>
-            <a:srgbClr val="EAF5F3"/>
+            <a:srgbClr val="F7F5F0"/>
           </a:solidFill>
           <a:ln w="12700">
             <a:solidFill>
-              <a:srgbClr val="EAF5F3"/>
+              <a:srgbClr val="F7F5F0"/>
             </a:solidFill>
             <a:prstDash val="solid"/>
           </a:ln>
@@ -21897,30 +22221,30 @@
       </p:sp>
       <p:sp>
         <p:nvSpPr>
-          <p:cNvPr id="16" name="Text 13"/>
-          <p:cNvSpPr/>
-          <p:nvPr/>
-        </p:nvSpPr>
-        <p:spPr>
-          <a:xfrm>
-            <a:off x="960120" y="4206240"/>
-            <a:ext cx="10332720" cy="1188720"/>
-          </a:xfrm>
-          <a:prstGeom prst="rect">
-            <a:avLst/>
-          </a:prstGeom>
-          <a:noFill/>
-          <a:ln/>
-        </p:spPr>
-        <p:txBody>
-          <a:bodyPr wrap="square" lIns="0" tIns="0" rIns="0" bIns="0" rtlCol="0" anchor="ctr"/>
-          <a:lstStyle/>
-          <a:p>
-            <a:pPr indent="0" marL="0">
-              <a:buNone/>
-            </a:pPr>
-            <a:r>
-              <a:rPr lang="en-US" sz="2400" b="1" dirty="0">
+          <p:cNvPr id="15" name="Text 12"/>
+          <p:cNvSpPr/>
+          <p:nvPr/>
+        </p:nvSpPr>
+        <p:spPr>
+          <a:xfrm>
+            <a:off x="1005840" y="1920240"/>
+            <a:ext cx="10241280" cy="2743200"/>
+          </a:xfrm>
+          <a:prstGeom prst="rect">
+            <a:avLst/>
+          </a:prstGeom>
+          <a:noFill/>
+          <a:ln/>
+        </p:spPr>
+        <p:txBody>
+          <a:bodyPr wrap="square" lIns="0" tIns="0" rIns="0" bIns="0" rtlCol="0" anchor="ctr"/>
+          <a:lstStyle/>
+          <a:p>
+            <a:pPr indent="0" marL="0">
+              <a:buNone/>
+            </a:pPr>
+            <a:r>
+              <a:rPr lang="en-US" sz="2000" b="1" dirty="0">
                 <a:solidFill>
                   <a:srgbClr val="13293D"/>
                 </a:solidFill>
@@ -21928,9 +22252,24 @@
                 <a:ea typeface="Inter" pitchFamily="34" charset="-122"/>
                 <a:cs typeface="Inter" pitchFamily="34" charset="-120"/>
               </a:rPr>
-              <a:t>Small, steady, sustainable. That’s the whole strategy.</a:t>
-            </a:r>
-            <a:endParaRPr lang="en-US" sz="2400" dirty="0"/>
+              <a:t>A core artifact. A support version. An extension. All reviewed by the one person qualified to review them.
+</a:t>
+            </a:r>
+            <a:pPr indent="0" marL="0">
+              <a:buNone/>
+            </a:pPr>
+            <a:r>
+              <a:rPr lang="en-US" sz="2000" dirty="0">
+                <a:solidFill>
+                  <a:srgbClr val="1B1F24"/>
+                </a:solidFill>
+                <a:latin typeface="Inter" pitchFamily="34" charset="0"/>
+                <a:ea typeface="Inter" pitchFamily="34" charset="-122"/>
+                <a:cs typeface="Inter" pitchFamily="34" charset="-120"/>
+              </a:rPr>
+              <a:t>The research said differentiation works best embedded and technology-supported. That’s not a description of some other school anymore. It’s what’s on your screen.</a:t>
+            </a:r>
+            <a:endParaRPr lang="en-US" sz="2000" dirty="0"/>
           </a:p>
         </p:txBody>
       </p:sp>
@@ -22664,6 +23003,590 @@
     <p:bg>
       <p:bgPr>
         <a:solidFill>
+          <a:srgbClr val="FFFFFF"/>
+        </a:solidFill>
+      </p:bgPr>
+    </p:bg>
+    <p:spTree>
+      <p:nvGrpSpPr>
+        <p:cNvPr id="1" name=""/>
+        <p:cNvGrpSpPr/>
+        <p:nvPr/>
+      </p:nvGrpSpPr>
+      <p:grpSpPr>
+        <a:xfrm>
+          <a:off x="0" y="0"/>
+          <a:ext cx="0" cy="0"/>
+          <a:chOff x="0" y="0"/>
+          <a:chExt cx="0" cy="0"/>
+        </a:xfrm>
+      </p:grpSpPr>
+      <p:pic>
+        <p:nvPicPr>
+          <p:cNvPr id="2" name="Image 0" descr="preencoded.png">    </p:cNvPr>
+          <p:cNvPicPr>
+            <a:picLocks noChangeAspect="1"/>
+          </p:cNvPicPr>
+          <p:nvPr/>
+        </p:nvPicPr>
+        <p:blipFill>
+          <a:blip r:embed="rId1"/>
+          <a:stretch>
+            <a:fillRect/>
+          </a:stretch>
+        </p:blipFill>
+        <p:spPr>
+          <a:xfrm>
+            <a:off x="411480" y="6473952"/>
+            <a:ext cx="237744" cy="219456"/>
+          </a:xfrm>
+          <a:prstGeom prst="rect">
+            <a:avLst/>
+          </a:prstGeom>
+        </p:spPr>
+      </p:pic>
+      <p:sp>
+        <p:nvSpPr>
+          <p:cNvPr id="3" name="Text 0"/>
+          <p:cNvSpPr/>
+          <p:nvPr/>
+        </p:nvSpPr>
+        <p:spPr>
+          <a:xfrm>
+            <a:off x="685800" y="6428232"/>
+            <a:ext cx="2011680" cy="292608"/>
+          </a:xfrm>
+          <a:prstGeom prst="rect">
+            <a:avLst/>
+          </a:prstGeom>
+          <a:noFill/>
+          <a:ln/>
+        </p:spPr>
+        <p:txBody>
+          <a:bodyPr wrap="square" lIns="0" tIns="0" rIns="0" bIns="0" rtlCol="0" anchor="ctr"/>
+          <a:lstStyle/>
+          <a:p>
+            <a:pPr indent="0" marL="0">
+              <a:buNone/>
+            </a:pPr>
+            <a:r>
+              <a:rPr lang="en-US" sz="1000" b="1" dirty="0">
+                <a:solidFill>
+                  <a:srgbClr val="2A9D8F"/>
+                </a:solidFill>
+                <a:latin typeface="Inter" pitchFamily="34" charset="0"/>
+                <a:ea typeface="Inter" pitchFamily="34" charset="-122"/>
+                <a:cs typeface="Inter" pitchFamily="34" charset="-120"/>
+              </a:rPr>
+              <a:t>AI-Ready</a:t>
+            </a:r>
+            <a:pPr indent="0" marL="0">
+              <a:buNone/>
+            </a:pPr>
+            <a:r>
+              <a:rPr lang="en-US" sz="1000" b="1" dirty="0">
+                <a:solidFill>
+                  <a:srgbClr val="13293D"/>
+                </a:solidFill>
+                <a:latin typeface="Inter" pitchFamily="34" charset="0"/>
+                <a:ea typeface="Inter" pitchFamily="34" charset="-122"/>
+                <a:cs typeface="Inter" pitchFamily="34" charset="-120"/>
+              </a:rPr>
+              <a:t> School</a:t>
+            </a:r>
+            <a:endParaRPr lang="en-US" sz="1000" dirty="0"/>
+          </a:p>
+        </p:txBody>
+      </p:sp>
+      <p:sp>
+        <p:nvSpPr>
+          <p:cNvPr id="4" name="Text 1"/>
+          <p:cNvSpPr/>
+          <p:nvPr/>
+        </p:nvSpPr>
+        <p:spPr>
+          <a:xfrm>
+            <a:off x="7982712" y="6428232"/>
+            <a:ext cx="3794760" cy="292608"/>
+          </a:xfrm>
+          <a:prstGeom prst="rect">
+            <a:avLst/>
+          </a:prstGeom>
+          <a:noFill/>
+          <a:ln/>
+        </p:spPr>
+        <p:txBody>
+          <a:bodyPr wrap="square" lIns="0" tIns="0" rIns="0" bIns="0" rtlCol="0" anchor="ctr"/>
+          <a:lstStyle/>
+          <a:p>
+            <a:pPr algn="r" indent="0" marL="0">
+              <a:buNone/>
+            </a:pPr>
+            <a:r>
+              <a:rPr lang="en-US" sz="900" dirty="0">
+                <a:solidFill>
+                  <a:srgbClr val="5B6B7A"/>
+                </a:solidFill>
+                <a:latin typeface="Inter" pitchFamily="34" charset="0"/>
+                <a:ea typeface="Inter" pitchFamily="34" charset="-122"/>
+                <a:cs typeface="Inter" pitchFamily="34" charset="-120"/>
+              </a:rPr>
+              <a:t>Kit 3 · Planning &amp; Differentiation   |   30</a:t>
+            </a:r>
+            <a:endParaRPr lang="en-US" sz="900" dirty="0"/>
+          </a:p>
+        </p:txBody>
+      </p:sp>
+      <p:sp>
+        <p:nvSpPr>
+          <p:cNvPr id="5" name="Shape 2"/>
+          <p:cNvSpPr/>
+          <p:nvPr/>
+        </p:nvSpPr>
+        <p:spPr>
+          <a:xfrm>
+            <a:off x="8732520" y="109728"/>
+            <a:ext cx="2926080" cy="896112"/>
+          </a:xfrm>
+          <a:prstGeom prst="roundRect">
+            <a:avLst>
+              <a:gd name="adj" fmla="val 7143"/>
+            </a:avLst>
+          </a:prstGeom>
+          <a:solidFill>
+            <a:srgbClr val="F7F5F0"/>
+          </a:solidFill>
+          <a:ln w="12700">
+            <a:solidFill>
+              <a:srgbClr val="DCE3EA"/>
+            </a:solidFill>
+            <a:prstDash val="solid"/>
+          </a:ln>
+        </p:spPr>
+      </p:sp>
+      <p:sp>
+        <p:nvSpPr>
+          <p:cNvPr id="6" name="Shape 3"/>
+          <p:cNvSpPr/>
+          <p:nvPr/>
+        </p:nvSpPr>
+        <p:spPr>
+          <a:xfrm>
+            <a:off x="8732520" y="109728"/>
+            <a:ext cx="2926080" cy="237744"/>
+          </a:xfrm>
+          <a:prstGeom prst="roundRect">
+            <a:avLst>
+              <a:gd name="adj" fmla="val 26923"/>
+            </a:avLst>
+          </a:prstGeom>
+          <a:solidFill>
+            <a:srgbClr val="0D1E2E"/>
+          </a:solidFill>
+          <a:ln w="12700">
+            <a:solidFill>
+              <a:srgbClr val="0D1E2E"/>
+            </a:solidFill>
+            <a:prstDash val="solid"/>
+          </a:ln>
+        </p:spPr>
+      </p:sp>
+      <p:sp>
+        <p:nvSpPr>
+          <p:cNvPr id="7" name="Shape 4"/>
+          <p:cNvSpPr/>
+          <p:nvPr/>
+        </p:nvSpPr>
+        <p:spPr>
+          <a:xfrm>
+            <a:off x="8823960" y="182880"/>
+            <a:ext cx="91440" cy="91440"/>
+          </a:xfrm>
+          <a:prstGeom prst="ellipse">
+            <a:avLst/>
+          </a:prstGeom>
+          <a:solidFill>
+            <a:srgbClr val="E8837A"/>
+          </a:solidFill>
+          <a:ln w="12700">
+            <a:solidFill>
+              <a:srgbClr val="E8837A"/>
+            </a:solidFill>
+            <a:prstDash val="solid"/>
+          </a:ln>
+        </p:spPr>
+      </p:sp>
+      <p:sp>
+        <p:nvSpPr>
+          <p:cNvPr id="8" name="Shape 5"/>
+          <p:cNvSpPr/>
+          <p:nvPr/>
+        </p:nvSpPr>
+        <p:spPr>
+          <a:xfrm>
+            <a:off x="8970264" y="182880"/>
+            <a:ext cx="91440" cy="91440"/>
+          </a:xfrm>
+          <a:prstGeom prst="ellipse">
+            <a:avLst/>
+          </a:prstGeom>
+          <a:solidFill>
+            <a:srgbClr val="F4A825"/>
+          </a:solidFill>
+          <a:ln w="12700">
+            <a:solidFill>
+              <a:srgbClr val="F4A825"/>
+            </a:solidFill>
+            <a:prstDash val="solid"/>
+          </a:ln>
+        </p:spPr>
+      </p:sp>
+      <p:sp>
+        <p:nvSpPr>
+          <p:cNvPr id="9" name="Shape 6"/>
+          <p:cNvSpPr/>
+          <p:nvPr/>
+        </p:nvSpPr>
+        <p:spPr>
+          <a:xfrm>
+            <a:off x="9116568" y="182880"/>
+            <a:ext cx="91440" cy="91440"/>
+          </a:xfrm>
+          <a:prstGeom prst="ellipse">
+            <a:avLst/>
+          </a:prstGeom>
+          <a:solidFill>
+            <a:srgbClr val="2E7D5B"/>
+          </a:solidFill>
+          <a:ln w="12700">
+            <a:solidFill>
+              <a:srgbClr val="2E7D5B"/>
+            </a:solidFill>
+            <a:prstDash val="solid"/>
+          </a:ln>
+        </p:spPr>
+      </p:sp>
+      <p:sp>
+        <p:nvSpPr>
+          <p:cNvPr id="10" name="Text 7"/>
+          <p:cNvSpPr/>
+          <p:nvPr/>
+        </p:nvSpPr>
+        <p:spPr>
+          <a:xfrm>
+            <a:off x="9299448" y="109728"/>
+            <a:ext cx="2286000" cy="237744"/>
+          </a:xfrm>
+          <a:prstGeom prst="rect">
+            <a:avLst/>
+          </a:prstGeom>
+          <a:noFill/>
+          <a:ln/>
+        </p:spPr>
+        <p:txBody>
+          <a:bodyPr wrap="square" lIns="0" tIns="0" rIns="0" bIns="0" rtlCol="0" anchor="ctr"/>
+          <a:lstStyle/>
+          <a:p>
+            <a:pPr indent="0" marL="0">
+              <a:buNone/>
+            </a:pPr>
+            <a:r>
+              <a:rPr lang="en-US" sz="800" b="1" spc="100" kern="0" dirty="0">
+                <a:solidFill>
+                  <a:srgbClr val="9FB2C2"/>
+                </a:solidFill>
+                <a:latin typeface="Inter" pitchFamily="34" charset="0"/>
+                <a:ea typeface="Inter" pitchFamily="34" charset="-122"/>
+                <a:cs typeface="Inter" pitchFamily="34" charset="-120"/>
+              </a:rPr>
+              <a:t>MS. RIVERA'S SCREEN · SO FAR</a:t>
+            </a:r>
+            <a:endParaRPr lang="en-US" sz="800" dirty="0"/>
+          </a:p>
+        </p:txBody>
+      </p:sp>
+      <p:sp>
+        <p:nvSpPr>
+          <p:cNvPr id="11" name="Text 8"/>
+          <p:cNvSpPr/>
+          <p:nvPr/>
+        </p:nvSpPr>
+        <p:spPr>
+          <a:xfrm>
+            <a:off x="8860536" y="365760"/>
+            <a:ext cx="2670048" cy="566928"/>
+          </a:xfrm>
+          <a:prstGeom prst="rect">
+            <a:avLst/>
+          </a:prstGeom>
+          <a:noFill/>
+          <a:ln/>
+        </p:spPr>
+        <p:txBody>
+          <a:bodyPr wrap="square" lIns="0" tIns="0" rIns="0" bIns="0" rtlCol="0" anchor="ctr"/>
+          <a:lstStyle/>
+          <a:p>
+            <a:pPr indent="0" marL="0">
+              <a:buNone/>
+            </a:pPr>
+            <a:r>
+              <a:rPr lang="en-US" sz="1000" dirty="0">
+                <a:solidFill>
+                  <a:srgbClr val="1B1F24"/>
+                </a:solidFill>
+                <a:latin typeface="Inter" pitchFamily="34" charset="0"/>
+                <a:ea typeface="Inter" pitchFamily="34" charset="-122"/>
+                <a:cs typeface="Inter" pitchFamily="34" charset="-120"/>
+              </a:rPr>
+              <a:t>Her habit: one differentiated artifact a week. Small and steady.</a:t>
+            </a:r>
+            <a:endParaRPr lang="en-US" sz="1000" dirty="0"/>
+          </a:p>
+        </p:txBody>
+      </p:sp>
+      <p:sp>
+        <p:nvSpPr>
+          <p:cNvPr id="12" name="Text 9"/>
+          <p:cNvSpPr/>
+          <p:nvPr/>
+        </p:nvSpPr>
+        <p:spPr>
+          <a:xfrm>
+            <a:off x="566928" y="128016"/>
+            <a:ext cx="7955280" cy="274320"/>
+          </a:xfrm>
+          <a:prstGeom prst="rect">
+            <a:avLst/>
+          </a:prstGeom>
+          <a:noFill/>
+          <a:ln/>
+        </p:spPr>
+        <p:txBody>
+          <a:bodyPr wrap="square" lIns="0" tIns="0" rIns="0" bIns="0" rtlCol="0" anchor="ctr"/>
+          <a:lstStyle/>
+          <a:p>
+            <a:pPr indent="0" marL="0">
+              <a:buNone/>
+            </a:pPr>
+            <a:r>
+              <a:rPr lang="en-US" sz="1200" b="1" spc="200" kern="0" dirty="0">
+                <a:solidFill>
+                  <a:srgbClr val="2A9D8F"/>
+                </a:solidFill>
+                <a:latin typeface="Inter" pitchFamily="34" charset="0"/>
+                <a:ea typeface="Inter" pitchFamily="34" charset="-122"/>
+                <a:cs typeface="Inter" pitchFamily="34" charset="-120"/>
+              </a:rPr>
+              <a:t>THE HABIT THAT COMPOUNDS</a:t>
+            </a:r>
+            <a:endParaRPr lang="en-US" sz="1200" dirty="0"/>
+          </a:p>
+        </p:txBody>
+      </p:sp>
+      <p:sp>
+        <p:nvSpPr>
+          <p:cNvPr id="13" name="Text 10"/>
+          <p:cNvSpPr/>
+          <p:nvPr/>
+        </p:nvSpPr>
+        <p:spPr>
+          <a:xfrm>
+            <a:off x="548640" y="384048"/>
+            <a:ext cx="7955280" cy="777240"/>
+          </a:xfrm>
+          <a:prstGeom prst="rect">
+            <a:avLst/>
+          </a:prstGeom>
+          <a:noFill/>
+          <a:ln/>
+        </p:spPr>
+        <p:txBody>
+          <a:bodyPr wrap="square" lIns="0" tIns="0" rIns="0" bIns="0" rtlCol="0" anchor="ctr"/>
+          <a:lstStyle/>
+          <a:p>
+            <a:pPr indent="0" marL="0">
+              <a:buNone/>
+            </a:pPr>
+            <a:r>
+              <a:rPr lang="en-US" sz="2800" b="1" dirty="0">
+                <a:solidFill>
+                  <a:srgbClr val="13293D"/>
+                </a:solidFill>
+                <a:latin typeface="Inter" pitchFamily="34" charset="0"/>
+                <a:ea typeface="Inter" pitchFamily="34" charset="-122"/>
+                <a:cs typeface="Inter" pitchFamily="34" charset="-120"/>
+              </a:rPr>
+              <a:t>One differentiated artifact per week</a:t>
+            </a:r>
+            <a:endParaRPr lang="en-US" sz="2800" dirty="0"/>
+          </a:p>
+        </p:txBody>
+      </p:sp>
+      <p:sp>
+        <p:nvSpPr>
+          <p:cNvPr id="14" name="Text 11"/>
+          <p:cNvSpPr/>
+          <p:nvPr/>
+        </p:nvSpPr>
+        <p:spPr>
+          <a:xfrm>
+            <a:off x="640080" y="1463040"/>
+            <a:ext cx="10908792" cy="2377440"/>
+          </a:xfrm>
+          <a:prstGeom prst="rect">
+            <a:avLst/>
+          </a:prstGeom>
+          <a:noFill/>
+          <a:ln/>
+        </p:spPr>
+        <p:txBody>
+          <a:bodyPr wrap="square" rtlCol="0" anchor="t"/>
+          <a:lstStyle/>
+          <a:p>
+            <a:pPr marL="342900" indent="-342900">
+              <a:spcAft>
+                <a:spcPts val="1000"/>
+              </a:spcAft>
+              <a:buSzPct val="100000"/>
+              <a:buChar char="•"/>
+            </a:pPr>
+            <a:r>
+              <a:rPr lang="en-US" sz="2100" dirty="0">
+                <a:solidFill>
+                  <a:srgbClr val="1B1F24"/>
+                </a:solidFill>
+                <a:latin typeface="Inter" pitchFamily="34" charset="0"/>
+                <a:ea typeface="Inter" pitchFamily="34" charset="-122"/>
+                <a:cs typeface="Inter" pitchFamily="34" charset="-120"/>
+              </a:rPr>
+              <a:t>Not a differentiated everything; that’s burnout dressed up as ambition</a:t>
+            </a:r>
+            <a:endParaRPr lang="en-US" sz="2100" dirty="0"/>
+          </a:p>
+          <a:p>
+            <a:pPr marL="342900" indent="-342900">
+              <a:spcAft>
+                <a:spcPts val="1000"/>
+              </a:spcAft>
+              <a:buSzPct val="100000"/>
+              <a:buChar char="•"/>
+            </a:pPr>
+            <a:r>
+              <a:rPr lang="en-US" sz="2100" dirty="0">
+                <a:solidFill>
+                  <a:srgbClr val="1B1F24"/>
+                </a:solidFill>
+                <a:latin typeface="Inter" pitchFamily="34" charset="0"/>
+                <a:ea typeface="Inter" pitchFamily="34" charset="-122"/>
+                <a:cs typeface="Inter" pitchFamily="34" charset="-120"/>
+              </a:rPr>
+              <a:t>One lesson a week gets the full treatment: core, support, extension, review</a:t>
+            </a:r>
+            <a:endParaRPr lang="en-US" sz="2100" dirty="0"/>
+          </a:p>
+          <a:p>
+            <a:pPr marL="342900" indent="-342900">
+              <a:spcAft>
+                <a:spcPts val="1000"/>
+              </a:spcAft>
+              <a:buSzPct val="100000"/>
+              <a:buChar char="•"/>
+            </a:pPr>
+            <a:r>
+              <a:rPr lang="en-US" sz="2100" b="1" dirty="0">
+                <a:solidFill>
+                  <a:srgbClr val="13293D"/>
+                </a:solidFill>
+                <a:latin typeface="Inter" pitchFamily="34" charset="0"/>
+                <a:ea typeface="Inter" pitchFamily="34" charset="-122"/>
+                <a:cs typeface="Inter" pitchFamily="34" charset="-120"/>
+              </a:rPr>
+              <a:t>Fifteen weeks in: fifteen lessons deep with materials for every learner on your roster</a:t>
+            </a:r>
+            <a:endParaRPr lang="en-US" sz="2100" dirty="0"/>
+          </a:p>
+        </p:txBody>
+      </p:sp>
+      <p:sp>
+        <p:nvSpPr>
+          <p:cNvPr id="15" name="Shape 12"/>
+          <p:cNvSpPr/>
+          <p:nvPr/>
+        </p:nvSpPr>
+        <p:spPr>
+          <a:xfrm>
+            <a:off x="640080" y="4023360"/>
+            <a:ext cx="10972800" cy="1554480"/>
+          </a:xfrm>
+          <a:prstGeom prst="roundRect">
+            <a:avLst>
+              <a:gd name="adj" fmla="val 5294"/>
+            </a:avLst>
+          </a:prstGeom>
+          <a:solidFill>
+            <a:srgbClr val="EAF5F3"/>
+          </a:solidFill>
+          <a:ln w="12700">
+            <a:solidFill>
+              <a:srgbClr val="EAF5F3"/>
+            </a:solidFill>
+            <a:prstDash val="solid"/>
+          </a:ln>
+        </p:spPr>
+      </p:sp>
+      <p:sp>
+        <p:nvSpPr>
+          <p:cNvPr id="16" name="Text 13"/>
+          <p:cNvSpPr/>
+          <p:nvPr/>
+        </p:nvSpPr>
+        <p:spPr>
+          <a:xfrm>
+            <a:off x="960120" y="4206240"/>
+            <a:ext cx="10332720" cy="1188720"/>
+          </a:xfrm>
+          <a:prstGeom prst="rect">
+            <a:avLst/>
+          </a:prstGeom>
+          <a:noFill/>
+          <a:ln/>
+        </p:spPr>
+        <p:txBody>
+          <a:bodyPr wrap="square" lIns="0" tIns="0" rIns="0" bIns="0" rtlCol="0" anchor="ctr"/>
+          <a:lstStyle/>
+          <a:p>
+            <a:pPr indent="0" marL="0">
+              <a:buNone/>
+            </a:pPr>
+            <a:r>
+              <a:rPr lang="en-US" sz="2400" b="1" dirty="0">
+                <a:solidFill>
+                  <a:srgbClr val="13293D"/>
+                </a:solidFill>
+                <a:latin typeface="Inter" pitchFamily="34" charset="0"/>
+                <a:ea typeface="Inter" pitchFamily="34" charset="-122"/>
+                <a:cs typeface="Inter" pitchFamily="34" charset="-120"/>
+              </a:rPr>
+              <a:t>Small, steady, sustainable. That’s the whole strategy.</a:t>
+            </a:r>
+            <a:endParaRPr lang="en-US" sz="2400" dirty="0"/>
+          </a:p>
+        </p:txBody>
+      </p:sp>
+    </p:spTree>
+  </p:cSld>
+  <p:clrMapOvr>
+    <a:masterClrMapping/>
+  </p:clrMapOvr>
+</p:sld>
+</file>
+
+<file path=ppt/slides/slide31.xml><?xml version="1.0" encoding="utf-8"?>
+<p:sld xmlns:a="http://schemas.openxmlformats.org/drawingml/2006/main" xmlns:r="http://schemas.openxmlformats.org/officeDocument/2006/relationships" xmlns:p="http://schemas.openxmlformats.org/presentationml/2006/main">
+  <p:cSld name="Slide 31">
+    <p:bg>
+      <p:bgPr>
+        <a:solidFill>
           <a:srgbClr val="13293D"/>
         </a:solidFill>
       </p:bgPr>
@@ -22792,7 +23715,7 @@
                 <a:ea typeface="Inter" pitchFamily="34" charset="-122"/>
                 <a:cs typeface="Inter" pitchFamily="34" charset="-120"/>
               </a:rPr>
-              <a:t>Kit 3 · Planning &amp; Differentiation   |   30</a:t>
+              <a:t>Kit 3 · Planning &amp; Differentiation   |   31</a:t>
             </a:r>
             <a:endParaRPr lang="en-US" sz="900" dirty="0"/>
           </a:p>
@@ -23181,1047 +24104,6 @@
               <a:t>Can I get a nod on that?</a:t>
             </a:r>
             <a:endParaRPr lang="en-US" sz="2000" dirty="0"/>
-          </a:p>
-        </p:txBody>
-      </p:sp>
-    </p:spTree>
-  </p:cSld>
-  <p:clrMapOvr>
-    <a:masterClrMapping/>
-  </p:clrMapOvr>
-</p:sld>
-</file>
-
-<file path=ppt/slides/slide31.xml><?xml version="1.0" encoding="utf-8"?>
-<p:sld xmlns:a="http://schemas.openxmlformats.org/drawingml/2006/main" xmlns:r="http://schemas.openxmlformats.org/officeDocument/2006/relationships" xmlns:p="http://schemas.openxmlformats.org/presentationml/2006/main">
-  <p:cSld name="Slide 31">
-    <p:bg>
-      <p:bgPr>
-        <a:solidFill>
-          <a:srgbClr val="FFFFFF"/>
-        </a:solidFill>
-      </p:bgPr>
-    </p:bg>
-    <p:spTree>
-      <p:nvGrpSpPr>
-        <p:cNvPr id="1" name=""/>
-        <p:cNvGrpSpPr/>
-        <p:nvPr/>
-      </p:nvGrpSpPr>
-      <p:grpSpPr>
-        <a:xfrm>
-          <a:off x="0" y="0"/>
-          <a:ext cx="0" cy="0"/>
-          <a:chOff x="0" y="0"/>
-          <a:chExt cx="0" cy="0"/>
-        </a:xfrm>
-      </p:grpSpPr>
-      <p:pic>
-        <p:nvPicPr>
-          <p:cNvPr id="2" name="Image 0" descr="preencoded.png">    </p:cNvPr>
-          <p:cNvPicPr>
-            <a:picLocks noChangeAspect="1"/>
-          </p:cNvPicPr>
-          <p:nvPr/>
-        </p:nvPicPr>
-        <p:blipFill>
-          <a:blip r:embed="rId1"/>
-          <a:stretch>
-            <a:fillRect/>
-          </a:stretch>
-        </p:blipFill>
-        <p:spPr>
-          <a:xfrm>
-            <a:off x="411480" y="6473952"/>
-            <a:ext cx="237744" cy="219456"/>
-          </a:xfrm>
-          <a:prstGeom prst="rect">
-            <a:avLst/>
-          </a:prstGeom>
-        </p:spPr>
-      </p:pic>
-      <p:sp>
-        <p:nvSpPr>
-          <p:cNvPr id="3" name="Text 0"/>
-          <p:cNvSpPr/>
-          <p:nvPr/>
-        </p:nvSpPr>
-        <p:spPr>
-          <a:xfrm>
-            <a:off x="685800" y="6428232"/>
-            <a:ext cx="2011680" cy="292608"/>
-          </a:xfrm>
-          <a:prstGeom prst="rect">
-            <a:avLst/>
-          </a:prstGeom>
-          <a:noFill/>
-          <a:ln/>
-        </p:spPr>
-        <p:txBody>
-          <a:bodyPr wrap="square" lIns="0" tIns="0" rIns="0" bIns="0" rtlCol="0" anchor="ctr"/>
-          <a:lstStyle/>
-          <a:p>
-            <a:pPr indent="0" marL="0">
-              <a:buNone/>
-            </a:pPr>
-            <a:r>
-              <a:rPr lang="en-US" sz="1000" b="1" dirty="0">
-                <a:solidFill>
-                  <a:srgbClr val="2A9D8F"/>
-                </a:solidFill>
-                <a:latin typeface="Inter" pitchFamily="34" charset="0"/>
-                <a:ea typeface="Inter" pitchFamily="34" charset="-122"/>
-                <a:cs typeface="Inter" pitchFamily="34" charset="-120"/>
-              </a:rPr>
-              <a:t>AI-Ready</a:t>
-            </a:r>
-            <a:pPr indent="0" marL="0">
-              <a:buNone/>
-            </a:pPr>
-            <a:r>
-              <a:rPr lang="en-US" sz="1000" b="1" dirty="0">
-                <a:solidFill>
-                  <a:srgbClr val="13293D"/>
-                </a:solidFill>
-                <a:latin typeface="Inter" pitchFamily="34" charset="0"/>
-                <a:ea typeface="Inter" pitchFamily="34" charset="-122"/>
-                <a:cs typeface="Inter" pitchFamily="34" charset="-120"/>
-              </a:rPr>
-              <a:t> School</a:t>
-            </a:r>
-            <a:endParaRPr lang="en-US" sz="1000" dirty="0"/>
-          </a:p>
-        </p:txBody>
-      </p:sp>
-      <p:sp>
-        <p:nvSpPr>
-          <p:cNvPr id="4" name="Text 1"/>
-          <p:cNvSpPr/>
-          <p:nvPr/>
-        </p:nvSpPr>
-        <p:spPr>
-          <a:xfrm>
-            <a:off x="7982712" y="6428232"/>
-            <a:ext cx="3794760" cy="292608"/>
-          </a:xfrm>
-          <a:prstGeom prst="rect">
-            <a:avLst/>
-          </a:prstGeom>
-          <a:noFill/>
-          <a:ln/>
-        </p:spPr>
-        <p:txBody>
-          <a:bodyPr wrap="square" lIns="0" tIns="0" rIns="0" bIns="0" rtlCol="0" anchor="ctr"/>
-          <a:lstStyle/>
-          <a:p>
-            <a:pPr algn="r" indent="0" marL="0">
-              <a:buNone/>
-            </a:pPr>
-            <a:r>
-              <a:rPr lang="en-US" sz="900" dirty="0">
-                <a:solidFill>
-                  <a:srgbClr val="5B6B7A"/>
-                </a:solidFill>
-                <a:latin typeface="Inter" pitchFamily="34" charset="0"/>
-                <a:ea typeface="Inter" pitchFamily="34" charset="-122"/>
-                <a:cs typeface="Inter" pitchFamily="34" charset="-120"/>
-              </a:rPr>
-              <a:t>Kit 3 · Planning &amp; Differentiation   |   31</a:t>
-            </a:r>
-            <a:endParaRPr lang="en-US" sz="900" dirty="0"/>
-          </a:p>
-        </p:txBody>
-      </p:sp>
-      <p:sp>
-        <p:nvSpPr>
-          <p:cNvPr id="5" name="Shape 2"/>
-          <p:cNvSpPr/>
-          <p:nvPr/>
-        </p:nvSpPr>
-        <p:spPr>
-          <a:xfrm>
-            <a:off x="8732520" y="109728"/>
-            <a:ext cx="2926080" cy="896112"/>
-          </a:xfrm>
-          <a:prstGeom prst="roundRect">
-            <a:avLst>
-              <a:gd name="adj" fmla="val 7143"/>
-            </a:avLst>
-          </a:prstGeom>
-          <a:solidFill>
-            <a:srgbClr val="F7F5F0"/>
-          </a:solidFill>
-          <a:ln w="12700">
-            <a:solidFill>
-              <a:srgbClr val="DCE3EA"/>
-            </a:solidFill>
-            <a:prstDash val="solid"/>
-          </a:ln>
-        </p:spPr>
-      </p:sp>
-      <p:sp>
-        <p:nvSpPr>
-          <p:cNvPr id="6" name="Shape 3"/>
-          <p:cNvSpPr/>
-          <p:nvPr/>
-        </p:nvSpPr>
-        <p:spPr>
-          <a:xfrm>
-            <a:off x="8732520" y="109728"/>
-            <a:ext cx="2926080" cy="237744"/>
-          </a:xfrm>
-          <a:prstGeom prst="roundRect">
-            <a:avLst>
-              <a:gd name="adj" fmla="val 26923"/>
-            </a:avLst>
-          </a:prstGeom>
-          <a:solidFill>
-            <a:srgbClr val="0D1E2E"/>
-          </a:solidFill>
-          <a:ln w="12700">
-            <a:solidFill>
-              <a:srgbClr val="0D1E2E"/>
-            </a:solidFill>
-            <a:prstDash val="solid"/>
-          </a:ln>
-        </p:spPr>
-      </p:sp>
-      <p:sp>
-        <p:nvSpPr>
-          <p:cNvPr id="7" name="Shape 4"/>
-          <p:cNvSpPr/>
-          <p:nvPr/>
-        </p:nvSpPr>
-        <p:spPr>
-          <a:xfrm>
-            <a:off x="8823960" y="182880"/>
-            <a:ext cx="91440" cy="91440"/>
-          </a:xfrm>
-          <a:prstGeom prst="ellipse">
-            <a:avLst/>
-          </a:prstGeom>
-          <a:solidFill>
-            <a:srgbClr val="E8837A"/>
-          </a:solidFill>
-          <a:ln w="12700">
-            <a:solidFill>
-              <a:srgbClr val="E8837A"/>
-            </a:solidFill>
-            <a:prstDash val="solid"/>
-          </a:ln>
-        </p:spPr>
-      </p:sp>
-      <p:sp>
-        <p:nvSpPr>
-          <p:cNvPr id="8" name="Shape 5"/>
-          <p:cNvSpPr/>
-          <p:nvPr/>
-        </p:nvSpPr>
-        <p:spPr>
-          <a:xfrm>
-            <a:off x="8970264" y="182880"/>
-            <a:ext cx="91440" cy="91440"/>
-          </a:xfrm>
-          <a:prstGeom prst="ellipse">
-            <a:avLst/>
-          </a:prstGeom>
-          <a:solidFill>
-            <a:srgbClr val="F4A825"/>
-          </a:solidFill>
-          <a:ln w="12700">
-            <a:solidFill>
-              <a:srgbClr val="F4A825"/>
-            </a:solidFill>
-            <a:prstDash val="solid"/>
-          </a:ln>
-        </p:spPr>
-      </p:sp>
-      <p:sp>
-        <p:nvSpPr>
-          <p:cNvPr id="9" name="Shape 6"/>
-          <p:cNvSpPr/>
-          <p:nvPr/>
-        </p:nvSpPr>
-        <p:spPr>
-          <a:xfrm>
-            <a:off x="9116568" y="182880"/>
-            <a:ext cx="91440" cy="91440"/>
-          </a:xfrm>
-          <a:prstGeom prst="ellipse">
-            <a:avLst/>
-          </a:prstGeom>
-          <a:solidFill>
-            <a:srgbClr val="2E7D5B"/>
-          </a:solidFill>
-          <a:ln w="12700">
-            <a:solidFill>
-              <a:srgbClr val="2E7D5B"/>
-            </a:solidFill>
-            <a:prstDash val="solid"/>
-          </a:ln>
-        </p:spPr>
-      </p:sp>
-      <p:sp>
-        <p:nvSpPr>
-          <p:cNvPr id="10" name="Text 7"/>
-          <p:cNvSpPr/>
-          <p:nvPr/>
-        </p:nvSpPr>
-        <p:spPr>
-          <a:xfrm>
-            <a:off x="9299448" y="109728"/>
-            <a:ext cx="2286000" cy="237744"/>
-          </a:xfrm>
-          <a:prstGeom prst="rect">
-            <a:avLst/>
-          </a:prstGeom>
-          <a:noFill/>
-          <a:ln/>
-        </p:spPr>
-        <p:txBody>
-          <a:bodyPr wrap="square" lIns="0" tIns="0" rIns="0" bIns="0" rtlCol="0" anchor="ctr"/>
-          <a:lstStyle/>
-          <a:p>
-            <a:pPr indent="0" marL="0">
-              <a:buNone/>
-            </a:pPr>
-            <a:r>
-              <a:rPr lang="en-US" sz="800" b="1" spc="100" kern="0" dirty="0">
-                <a:solidFill>
-                  <a:srgbClr val="9FB2C2"/>
-                </a:solidFill>
-                <a:latin typeface="Inter" pitchFamily="34" charset="0"/>
-                <a:ea typeface="Inter" pitchFamily="34" charset="-122"/>
-                <a:cs typeface="Inter" pitchFamily="34" charset="-120"/>
-              </a:rPr>
-              <a:t>MS. RIVERA'S SCREEN · SO FAR</a:t>
-            </a:r>
-            <a:endParaRPr lang="en-US" sz="800" dirty="0"/>
-          </a:p>
-        </p:txBody>
-      </p:sp>
-      <p:sp>
-        <p:nvSpPr>
-          <p:cNvPr id="11" name="Text 8"/>
-          <p:cNvSpPr/>
-          <p:nvPr/>
-        </p:nvSpPr>
-        <p:spPr>
-          <a:xfrm>
-            <a:off x="8860536" y="365760"/>
-            <a:ext cx="2670048" cy="566928"/>
-          </a:xfrm>
-          <a:prstGeom prst="rect">
-            <a:avLst/>
-          </a:prstGeom>
-          <a:noFill/>
-          <a:ln/>
-        </p:spPr>
-        <p:txBody>
-          <a:bodyPr wrap="square" lIns="0" tIns="0" rIns="0" bIns="0" rtlCol="0" anchor="ctr"/>
-          <a:lstStyle/>
-          <a:p>
-            <a:pPr indent="0" marL="0">
-              <a:buNone/>
-            </a:pPr>
-            <a:r>
-              <a:rPr lang="en-US" sz="1000" dirty="0">
-                <a:solidFill>
-                  <a:srgbClr val="1B1F24"/>
-                </a:solidFill>
-                <a:latin typeface="Inter" pitchFamily="34" charset="0"/>
-                <a:ea typeface="Inter" pitchFamily="34" charset="-122"/>
-                <a:cs typeface="Inter" pitchFamily="34" charset="-120"/>
-              </a:rPr>
-              <a:t>Her next kit: assessment. Rubrics and question banks from her notes.</a:t>
-            </a:r>
-            <a:endParaRPr lang="en-US" sz="1000" dirty="0"/>
-          </a:p>
-        </p:txBody>
-      </p:sp>
-      <p:sp>
-        <p:nvSpPr>
-          <p:cNvPr id="12" name="Text 9"/>
-          <p:cNvSpPr/>
-          <p:nvPr/>
-        </p:nvSpPr>
-        <p:spPr>
-          <a:xfrm>
-            <a:off x="566928" y="128016"/>
-            <a:ext cx="7955280" cy="274320"/>
-          </a:xfrm>
-          <a:prstGeom prst="rect">
-            <a:avLst/>
-          </a:prstGeom>
-          <a:noFill/>
-          <a:ln/>
-        </p:spPr>
-        <p:txBody>
-          <a:bodyPr wrap="square" lIns="0" tIns="0" rIns="0" bIns="0" rtlCol="0" anchor="ctr"/>
-          <a:lstStyle/>
-          <a:p>
-            <a:pPr indent="0" marL="0">
-              <a:buNone/>
-            </a:pPr>
-            <a:r>
-              <a:rPr lang="en-US" sz="1200" b="1" spc="200" kern="0" dirty="0">
-                <a:solidFill>
-                  <a:srgbClr val="2A9D8F"/>
-                </a:solidFill>
-                <a:latin typeface="Inter" pitchFamily="34" charset="0"/>
-                <a:ea typeface="Inter" pitchFamily="34" charset="-122"/>
-                <a:cs typeface="Inter" pitchFamily="34" charset="-120"/>
-              </a:rPr>
-              <a:t>KIT 3 OF 8 · TRACK A</a:t>
-            </a:r>
-            <a:endParaRPr lang="en-US" sz="1200" dirty="0"/>
-          </a:p>
-        </p:txBody>
-      </p:sp>
-      <p:sp>
-        <p:nvSpPr>
-          <p:cNvPr id="13" name="Text 10"/>
-          <p:cNvSpPr/>
-          <p:nvPr/>
-        </p:nvSpPr>
-        <p:spPr>
-          <a:xfrm>
-            <a:off x="548640" y="384048"/>
-            <a:ext cx="7955280" cy="777240"/>
-          </a:xfrm>
-          <a:prstGeom prst="rect">
-            <a:avLst/>
-          </a:prstGeom>
-          <a:noFill/>
-          <a:ln/>
-        </p:spPr>
-        <p:txBody>
-          <a:bodyPr wrap="square" lIns="0" tIns="0" rIns="0" bIns="0" rtlCol="0" anchor="ctr"/>
-          <a:lstStyle/>
-          <a:p>
-            <a:pPr indent="0" marL="0">
-              <a:buNone/>
-            </a:pPr>
-            <a:r>
-              <a:rPr lang="en-US" sz="3200" b="1" dirty="0">
-                <a:solidFill>
-                  <a:srgbClr val="13293D"/>
-                </a:solidFill>
-                <a:latin typeface="Inter" pitchFamily="34" charset="0"/>
-                <a:ea typeface="Inter" pitchFamily="34" charset="-122"/>
-                <a:cs typeface="Inter" pitchFamily="34" charset="-120"/>
-              </a:rPr>
-              <a:t>Where this series goes next</a:t>
-            </a:r>
-            <a:endParaRPr lang="en-US" sz="3200" dirty="0"/>
-          </a:p>
-        </p:txBody>
-      </p:sp>
-      <p:sp>
-        <p:nvSpPr>
-          <p:cNvPr id="14" name="Shape 11"/>
-          <p:cNvSpPr/>
-          <p:nvPr/>
-        </p:nvSpPr>
-        <p:spPr>
-          <a:xfrm>
-            <a:off x="640080" y="1554480"/>
-            <a:ext cx="2651760" cy="1005840"/>
-          </a:xfrm>
-          <a:prstGeom prst="roundRect">
-            <a:avLst>
-              <a:gd name="adj" fmla="val 8182"/>
-            </a:avLst>
-          </a:prstGeom>
-          <a:solidFill>
-            <a:srgbClr val="EAF5F3"/>
-          </a:solidFill>
-          <a:ln w="12700">
-            <a:solidFill>
-              <a:srgbClr val="EAF5F3"/>
-            </a:solidFill>
-            <a:prstDash val="solid"/>
-          </a:ln>
-        </p:spPr>
-      </p:sp>
-      <p:sp>
-        <p:nvSpPr>
-          <p:cNvPr id="15" name="Text 12"/>
-          <p:cNvSpPr/>
-          <p:nvPr/>
-        </p:nvSpPr>
-        <p:spPr>
-          <a:xfrm>
-            <a:off x="822960" y="1645920"/>
-            <a:ext cx="2286000" cy="822960"/>
-          </a:xfrm>
-          <a:prstGeom prst="rect">
-            <a:avLst/>
-          </a:prstGeom>
-          <a:noFill/>
-          <a:ln/>
-        </p:spPr>
-        <p:txBody>
-          <a:bodyPr wrap="square" lIns="0" tIns="0" rIns="0" bIns="0" rtlCol="0" anchor="ctr"/>
-          <a:lstStyle/>
-          <a:p>
-            <a:pPr indent="0" marL="0">
-              <a:buNone/>
-            </a:pPr>
-            <a:r>
-              <a:rPr lang="en-US" sz="1450" b="1" dirty="0">
-                <a:solidFill>
-                  <a:srgbClr val="13293D"/>
-                </a:solidFill>
-                <a:latin typeface="Inter" pitchFamily="34" charset="0"/>
-                <a:ea typeface="Inter" pitchFamily="34" charset="-122"/>
-                <a:cs typeface="Inter" pitchFamily="34" charset="-120"/>
-              </a:rPr>
-              <a:t>1 · Foundations &amp; Safety  ✔</a:t>
-            </a:r>
-            <a:endParaRPr lang="en-US" sz="1450" dirty="0"/>
-          </a:p>
-        </p:txBody>
-      </p:sp>
-      <p:sp>
-        <p:nvSpPr>
-          <p:cNvPr id="16" name="Shape 13"/>
-          <p:cNvSpPr/>
-          <p:nvPr/>
-        </p:nvSpPr>
-        <p:spPr>
-          <a:xfrm>
-            <a:off x="3474720" y="1554480"/>
-            <a:ext cx="2651760" cy="1005840"/>
-          </a:xfrm>
-          <a:prstGeom prst="roundRect">
-            <a:avLst>
-              <a:gd name="adj" fmla="val 8182"/>
-            </a:avLst>
-          </a:prstGeom>
-          <a:solidFill>
-            <a:srgbClr val="EAF5F3"/>
-          </a:solidFill>
-          <a:ln w="12700">
-            <a:solidFill>
-              <a:srgbClr val="EAF5F3"/>
-            </a:solidFill>
-            <a:prstDash val="solid"/>
-          </a:ln>
-        </p:spPr>
-      </p:sp>
-      <p:sp>
-        <p:nvSpPr>
-          <p:cNvPr id="17" name="Text 14"/>
-          <p:cNvSpPr/>
-          <p:nvPr/>
-        </p:nvSpPr>
-        <p:spPr>
-          <a:xfrm>
-            <a:off x="3657600" y="1645920"/>
-            <a:ext cx="2286000" cy="822960"/>
-          </a:xfrm>
-          <a:prstGeom prst="rect">
-            <a:avLst/>
-          </a:prstGeom>
-          <a:noFill/>
-          <a:ln/>
-        </p:spPr>
-        <p:txBody>
-          <a:bodyPr wrap="square" lIns="0" tIns="0" rIns="0" bIns="0" rtlCol="0" anchor="ctr"/>
-          <a:lstStyle/>
-          <a:p>
-            <a:pPr indent="0" marL="0">
-              <a:buNone/>
-            </a:pPr>
-            <a:r>
-              <a:rPr lang="en-US" sz="1450" b="1" dirty="0">
-                <a:solidFill>
-                  <a:srgbClr val="13293D"/>
-                </a:solidFill>
-                <a:latin typeface="Inter" pitchFamily="34" charset="0"/>
-                <a:ea typeface="Inter" pitchFamily="34" charset="-122"/>
-                <a:cs typeface="Inter" pitchFamily="34" charset="-120"/>
-              </a:rPr>
-              <a:t>2 · Prompting Basics  ✔</a:t>
-            </a:r>
-            <a:endParaRPr lang="en-US" sz="1450" dirty="0"/>
-          </a:p>
-        </p:txBody>
-      </p:sp>
-      <p:sp>
-        <p:nvSpPr>
-          <p:cNvPr id="18" name="Shape 15"/>
-          <p:cNvSpPr/>
-          <p:nvPr/>
-        </p:nvSpPr>
-        <p:spPr>
-          <a:xfrm>
-            <a:off x="6309360" y="1554480"/>
-            <a:ext cx="2651760" cy="1005840"/>
-          </a:xfrm>
-          <a:prstGeom prst="roundRect">
-            <a:avLst>
-              <a:gd name="adj" fmla="val 8182"/>
-            </a:avLst>
-          </a:prstGeom>
-          <a:solidFill>
-            <a:srgbClr val="EAF5F3"/>
-          </a:solidFill>
-          <a:ln w="12700">
-            <a:solidFill>
-              <a:srgbClr val="EAF5F3"/>
-            </a:solidFill>
-            <a:prstDash val="solid"/>
-          </a:ln>
-        </p:spPr>
-      </p:sp>
-      <p:sp>
-        <p:nvSpPr>
-          <p:cNvPr id="19" name="Text 16"/>
-          <p:cNvSpPr/>
-          <p:nvPr/>
-        </p:nvSpPr>
-        <p:spPr>
-          <a:xfrm>
-            <a:off x="6492240" y="1645920"/>
-            <a:ext cx="2286000" cy="822960"/>
-          </a:xfrm>
-          <a:prstGeom prst="rect">
-            <a:avLst/>
-          </a:prstGeom>
-          <a:noFill/>
-          <a:ln/>
-        </p:spPr>
-        <p:txBody>
-          <a:bodyPr wrap="square" lIns="0" tIns="0" rIns="0" bIns="0" rtlCol="0" anchor="ctr"/>
-          <a:lstStyle/>
-          <a:p>
-            <a:pPr indent="0" marL="0">
-              <a:buNone/>
-            </a:pPr>
-            <a:r>
-              <a:rPr lang="en-US" sz="1450" b="1" dirty="0">
-                <a:solidFill>
-                  <a:srgbClr val="13293D"/>
-                </a:solidFill>
-                <a:latin typeface="Inter" pitchFamily="34" charset="0"/>
-                <a:ea typeface="Inter" pitchFamily="34" charset="-122"/>
-                <a:cs typeface="Inter" pitchFamily="34" charset="-120"/>
-              </a:rPr>
-              <a:t>3 · Planning &amp; Differentiation  ✔</a:t>
-            </a:r>
-            <a:endParaRPr lang="en-US" sz="1450" dirty="0"/>
-          </a:p>
-        </p:txBody>
-      </p:sp>
-      <p:sp>
-        <p:nvSpPr>
-          <p:cNvPr id="20" name="Shape 17"/>
-          <p:cNvSpPr/>
-          <p:nvPr/>
-        </p:nvSpPr>
-        <p:spPr>
-          <a:xfrm>
-            <a:off x="9144000" y="1554480"/>
-            <a:ext cx="2651760" cy="1005840"/>
-          </a:xfrm>
-          <a:prstGeom prst="roundRect">
-            <a:avLst>
-              <a:gd name="adj" fmla="val 8182"/>
-            </a:avLst>
-          </a:prstGeom>
-          <a:solidFill>
-            <a:srgbClr val="F7F5F0"/>
-          </a:solidFill>
-          <a:ln w="12700">
-            <a:solidFill>
-              <a:srgbClr val="F7F5F0"/>
-            </a:solidFill>
-            <a:prstDash val="solid"/>
-          </a:ln>
-        </p:spPr>
-      </p:sp>
-      <p:sp>
-        <p:nvSpPr>
-          <p:cNvPr id="21" name="Text 18"/>
-          <p:cNvSpPr/>
-          <p:nvPr/>
-        </p:nvSpPr>
-        <p:spPr>
-          <a:xfrm>
-            <a:off x="9326880" y="1645920"/>
-            <a:ext cx="2286000" cy="822960"/>
-          </a:xfrm>
-          <a:prstGeom prst="rect">
-            <a:avLst/>
-          </a:prstGeom>
-          <a:noFill/>
-          <a:ln/>
-        </p:spPr>
-        <p:txBody>
-          <a:bodyPr wrap="square" lIns="0" tIns="0" rIns="0" bIns="0" rtlCol="0" anchor="ctr"/>
-          <a:lstStyle/>
-          <a:p>
-            <a:pPr indent="0" marL="0">
-              <a:buNone/>
-            </a:pPr>
-            <a:r>
-              <a:rPr lang="en-US" sz="1450" dirty="0">
-                <a:solidFill>
-                  <a:srgbClr val="13293D"/>
-                </a:solidFill>
-                <a:latin typeface="Inter" pitchFamily="34" charset="0"/>
-                <a:ea typeface="Inter" pitchFamily="34" charset="-122"/>
-                <a:cs typeface="Inter" pitchFamily="34" charset="-120"/>
-              </a:rPr>
-              <a:t>4 · Assessment</a:t>
-            </a:r>
-            <a:endParaRPr lang="en-US" sz="1450" dirty="0"/>
-          </a:p>
-        </p:txBody>
-      </p:sp>
-      <p:sp>
-        <p:nvSpPr>
-          <p:cNvPr id="22" name="Shape 19"/>
-          <p:cNvSpPr/>
-          <p:nvPr/>
-        </p:nvSpPr>
-        <p:spPr>
-          <a:xfrm>
-            <a:off x="640080" y="2743200"/>
-            <a:ext cx="2651760" cy="1005840"/>
-          </a:xfrm>
-          <a:prstGeom prst="roundRect">
-            <a:avLst>
-              <a:gd name="adj" fmla="val 8182"/>
-            </a:avLst>
-          </a:prstGeom>
-          <a:solidFill>
-            <a:srgbClr val="F7F5F0"/>
-          </a:solidFill>
-          <a:ln w="12700">
-            <a:solidFill>
-              <a:srgbClr val="F7F5F0"/>
-            </a:solidFill>
-            <a:prstDash val="solid"/>
-          </a:ln>
-        </p:spPr>
-      </p:sp>
-      <p:sp>
-        <p:nvSpPr>
-          <p:cNvPr id="23" name="Text 20"/>
-          <p:cNvSpPr/>
-          <p:nvPr/>
-        </p:nvSpPr>
-        <p:spPr>
-          <a:xfrm>
-            <a:off x="822960" y="2834640"/>
-            <a:ext cx="2286000" cy="822960"/>
-          </a:xfrm>
-          <a:prstGeom prst="rect">
-            <a:avLst/>
-          </a:prstGeom>
-          <a:noFill/>
-          <a:ln/>
-        </p:spPr>
-        <p:txBody>
-          <a:bodyPr wrap="square" lIns="0" tIns="0" rIns="0" bIns="0" rtlCol="0" anchor="ctr"/>
-          <a:lstStyle/>
-          <a:p>
-            <a:pPr indent="0" marL="0">
-              <a:buNone/>
-            </a:pPr>
-            <a:r>
-              <a:rPr lang="en-US" sz="1450" dirty="0">
-                <a:solidFill>
-                  <a:srgbClr val="13293D"/>
-                </a:solidFill>
-                <a:latin typeface="Inter" pitchFamily="34" charset="0"/>
-                <a:ea typeface="Inter" pitchFamily="34" charset="-122"/>
-                <a:cs typeface="Inter" pitchFamily="34" charset="-120"/>
-              </a:rPr>
-              <a:t>5 · Academic Integrity</a:t>
-            </a:r>
-            <a:endParaRPr lang="en-US" sz="1450" dirty="0"/>
-          </a:p>
-        </p:txBody>
-      </p:sp>
-      <p:sp>
-        <p:nvSpPr>
-          <p:cNvPr id="24" name="Shape 21"/>
-          <p:cNvSpPr/>
-          <p:nvPr/>
-        </p:nvSpPr>
-        <p:spPr>
-          <a:xfrm>
-            <a:off x="3474720" y="2743200"/>
-            <a:ext cx="2651760" cy="1005840"/>
-          </a:xfrm>
-          <a:prstGeom prst="roundRect">
-            <a:avLst>
-              <a:gd name="adj" fmla="val 8182"/>
-            </a:avLst>
-          </a:prstGeom>
-          <a:solidFill>
-            <a:srgbClr val="F7F5F0"/>
-          </a:solidFill>
-          <a:ln w="12700">
-            <a:solidFill>
-              <a:srgbClr val="F7F5F0"/>
-            </a:solidFill>
-            <a:prstDash val="solid"/>
-          </a:ln>
-        </p:spPr>
-      </p:sp>
-      <p:sp>
-        <p:nvSpPr>
-          <p:cNvPr id="25" name="Text 22"/>
-          <p:cNvSpPr/>
-          <p:nvPr/>
-        </p:nvSpPr>
-        <p:spPr>
-          <a:xfrm>
-            <a:off x="3657600" y="2834640"/>
-            <a:ext cx="2286000" cy="822960"/>
-          </a:xfrm>
-          <a:prstGeom prst="rect">
-            <a:avLst/>
-          </a:prstGeom>
-          <a:noFill/>
-          <a:ln/>
-        </p:spPr>
-        <p:txBody>
-          <a:bodyPr wrap="square" lIns="0" tIns="0" rIns="0" bIns="0" rtlCol="0" anchor="ctr"/>
-          <a:lstStyle/>
-          <a:p>
-            <a:pPr indent="0" marL="0">
-              <a:buNone/>
-            </a:pPr>
-            <a:r>
-              <a:rPr lang="en-US" sz="1450" dirty="0">
-                <a:solidFill>
-                  <a:srgbClr val="13293D"/>
-                </a:solidFill>
-                <a:latin typeface="Inter" pitchFamily="34" charset="0"/>
-                <a:ea typeface="Inter" pitchFamily="34" charset="-122"/>
-                <a:cs typeface="Inter" pitchFamily="34" charset="-120"/>
-              </a:rPr>
-              <a:t>6 · Communication</a:t>
-            </a:r>
-            <a:endParaRPr lang="en-US" sz="1450" dirty="0"/>
-          </a:p>
-        </p:txBody>
-      </p:sp>
-      <p:sp>
-        <p:nvSpPr>
-          <p:cNvPr id="26" name="Shape 23"/>
-          <p:cNvSpPr/>
-          <p:nvPr/>
-        </p:nvSpPr>
-        <p:spPr>
-          <a:xfrm>
-            <a:off x="6309360" y="2743200"/>
-            <a:ext cx="2651760" cy="1005840"/>
-          </a:xfrm>
-          <a:prstGeom prst="roundRect">
-            <a:avLst>
-              <a:gd name="adj" fmla="val 8182"/>
-            </a:avLst>
-          </a:prstGeom>
-          <a:solidFill>
-            <a:srgbClr val="F7F5F0"/>
-          </a:solidFill>
-          <a:ln w="12700">
-            <a:solidFill>
-              <a:srgbClr val="F7F5F0"/>
-            </a:solidFill>
-            <a:prstDash val="solid"/>
-          </a:ln>
-        </p:spPr>
-      </p:sp>
-      <p:sp>
-        <p:nvSpPr>
-          <p:cNvPr id="27" name="Text 24"/>
-          <p:cNvSpPr/>
-          <p:nvPr/>
-        </p:nvSpPr>
-        <p:spPr>
-          <a:xfrm>
-            <a:off x="6492240" y="2834640"/>
-            <a:ext cx="2286000" cy="822960"/>
-          </a:xfrm>
-          <a:prstGeom prst="rect">
-            <a:avLst/>
-          </a:prstGeom>
-          <a:noFill/>
-          <a:ln/>
-        </p:spPr>
-        <p:txBody>
-          <a:bodyPr wrap="square" lIns="0" tIns="0" rIns="0" bIns="0" rtlCol="0" anchor="ctr"/>
-          <a:lstStyle/>
-          <a:p>
-            <a:pPr indent="0" marL="0">
-              <a:buNone/>
-            </a:pPr>
-            <a:r>
-              <a:rPr lang="en-US" sz="1450" dirty="0">
-                <a:solidFill>
-                  <a:srgbClr val="13293D"/>
-                </a:solidFill>
-                <a:latin typeface="Inter" pitchFamily="34" charset="0"/>
-                <a:ea typeface="Inter" pitchFamily="34" charset="-122"/>
-                <a:cs typeface="Inter" pitchFamily="34" charset="-120"/>
-              </a:rPr>
-              <a:t>7 · Workload</a:t>
-            </a:r>
-            <a:endParaRPr lang="en-US" sz="1450" dirty="0"/>
-          </a:p>
-        </p:txBody>
-      </p:sp>
-      <p:sp>
-        <p:nvSpPr>
-          <p:cNvPr id="28" name="Shape 25"/>
-          <p:cNvSpPr/>
-          <p:nvPr/>
-        </p:nvSpPr>
-        <p:spPr>
-          <a:xfrm>
-            <a:off x="9144000" y="2743200"/>
-            <a:ext cx="2651760" cy="1005840"/>
-          </a:xfrm>
-          <a:prstGeom prst="roundRect">
-            <a:avLst>
-              <a:gd name="adj" fmla="val 8182"/>
-            </a:avLst>
-          </a:prstGeom>
-          <a:solidFill>
-            <a:srgbClr val="F7F5F0"/>
-          </a:solidFill>
-          <a:ln w="12700">
-            <a:solidFill>
-              <a:srgbClr val="F7F5F0"/>
-            </a:solidFill>
-            <a:prstDash val="solid"/>
-          </a:ln>
-        </p:spPr>
-      </p:sp>
-      <p:sp>
-        <p:nvSpPr>
-          <p:cNvPr id="29" name="Text 26"/>
-          <p:cNvSpPr/>
-          <p:nvPr/>
-        </p:nvSpPr>
-        <p:spPr>
-          <a:xfrm>
-            <a:off x="9326880" y="2834640"/>
-            <a:ext cx="2286000" cy="822960"/>
-          </a:xfrm>
-          <a:prstGeom prst="rect">
-            <a:avLst/>
-          </a:prstGeom>
-          <a:noFill/>
-          <a:ln/>
-        </p:spPr>
-        <p:txBody>
-          <a:bodyPr wrap="square" lIns="0" tIns="0" rIns="0" bIns="0" rtlCol="0" anchor="ctr"/>
-          <a:lstStyle/>
-          <a:p>
-            <a:pPr indent="0" marL="0">
-              <a:buNone/>
-            </a:pPr>
-            <a:r>
-              <a:rPr lang="en-US" sz="1450" dirty="0">
-                <a:solidFill>
-                  <a:srgbClr val="13293D"/>
-                </a:solidFill>
-                <a:latin typeface="Inter" pitchFamily="34" charset="0"/>
-                <a:ea typeface="Inter" pitchFamily="34" charset="-122"/>
-                <a:cs typeface="Inter" pitchFamily="34" charset="-120"/>
-              </a:rPr>
-              <a:t>8 · Your School’s AI Culture</a:t>
-            </a:r>
-            <a:endParaRPr lang="en-US" sz="1450" dirty="0"/>
-          </a:p>
-        </p:txBody>
-      </p:sp>
-      <p:sp>
-        <p:nvSpPr>
-          <p:cNvPr id="30" name="Shape 27"/>
-          <p:cNvSpPr/>
-          <p:nvPr/>
-        </p:nvSpPr>
-        <p:spPr>
-          <a:xfrm>
-            <a:off x="640080" y="4206240"/>
-            <a:ext cx="10972800" cy="1463040"/>
-          </a:xfrm>
-          <a:prstGeom prst="roundRect">
-            <a:avLst>
-              <a:gd name="adj" fmla="val 5625"/>
-            </a:avLst>
-          </a:prstGeom>
-          <a:solidFill>
-            <a:srgbClr val="13293D"/>
-          </a:solidFill>
-          <a:ln w="12700">
-            <a:solidFill>
-              <a:srgbClr val="13293D"/>
-            </a:solidFill>
-            <a:prstDash val="solid"/>
-          </a:ln>
-        </p:spPr>
-      </p:sp>
-      <p:sp>
-        <p:nvSpPr>
-          <p:cNvPr id="31" name="Text 28"/>
-          <p:cNvSpPr/>
-          <p:nvPr/>
-        </p:nvSpPr>
-        <p:spPr>
-          <a:xfrm>
-            <a:off x="960120" y="4389120"/>
-            <a:ext cx="10332720" cy="1097280"/>
-          </a:xfrm>
-          <a:prstGeom prst="rect">
-            <a:avLst/>
-          </a:prstGeom>
-          <a:noFill/>
-          <a:ln/>
-        </p:spPr>
-        <p:txBody>
-          <a:bodyPr wrap="square" lIns="0" tIns="0" rIns="0" bIns="0" rtlCol="0" anchor="ctr"/>
-          <a:lstStyle/>
-          <a:p>
-            <a:pPr indent="0" marL="0">
-              <a:buNone/>
-            </a:pPr>
-            <a:r>
-              <a:rPr lang="en-US" sz="1700" b="1" dirty="0">
-                <a:solidFill>
-                  <a:srgbClr val="FFFFFF"/>
-                </a:solidFill>
-                <a:latin typeface="Inter" pitchFamily="34" charset="0"/>
-                <a:ea typeface="Inter" pitchFamily="34" charset="-122"/>
-                <a:cs typeface="Inter" pitchFamily="34" charset="-120"/>
-              </a:rPr>
-              <a:t>Next: Kit 4, AI for Assessment. </a:t>
-            </a:r>
-            <a:pPr indent="0" marL="0">
-              <a:buNone/>
-            </a:pPr>
-            <a:r>
-              <a:rPr lang="en-US" sz="1700" dirty="0">
-                <a:solidFill>
-                  <a:srgbClr val="C9D4DE"/>
-                </a:solidFill>
-                <a:latin typeface="Inter" pitchFamily="34" charset="0"/>
-                <a:ea typeface="Inter" pitchFamily="34" charset="-122"/>
-                <a:cs typeface="Inter" pitchFamily="34" charset="-120"/>
-              </a:rPr>
-              <a:t>You built the materials for the range of learners in your room; next we build the ways to find out what they learned: question banks, rubrics, feedback that doesn’t eat your Sunday.</a:t>
-            </a:r>
-            <a:endParaRPr lang="en-US" sz="1700" dirty="0"/>
           </a:p>
         </p:txBody>
       </p:sp>
@@ -24574,7 +24456,7 @@
                 <a:ea typeface="Inter" pitchFamily="34" charset="-122"/>
                 <a:cs typeface="Inter" pitchFamily="34" charset="-120"/>
               </a:rPr>
-              <a:t>Her 48 hours: teach the support version, run one review, post one prompt.</a:t>
+              <a:t>Her next kit: assessment. Rubrics and question banks from her notes.</a:t>
             </a:r>
             <a:endParaRPr lang="en-US" sz="1000" dirty="0"/>
           </a:p>
@@ -24613,7 +24495,7 @@
                 <a:ea typeface="Inter" pitchFamily="34" charset="-122"/>
                 <a:cs typeface="Inter" pitchFamily="34" charset="-120"/>
               </a:rPr>
-              <a:t>BEFORE FRIDAY BECOMES A MEMORY</a:t>
+              <a:t>KIT 3 OF 8 · TRACK A</a:t>
             </a:r>
             <a:endParaRPr lang="en-US" sz="1200" dirty="0"/>
           </a:p>
@@ -24644,7 +24526,7 @@
               <a:buNone/>
             </a:pPr>
             <a:r>
-              <a:rPr lang="en-US" sz="2800" b="1" dirty="0">
+              <a:rPr lang="en-US" sz="3200" b="1" dirty="0">
                 <a:solidFill>
                   <a:srgbClr val="13293D"/>
                 </a:solidFill>
@@ -24652,9 +24534,9 @@
                 <a:ea typeface="Inter" pitchFamily="34" charset="-122"/>
                 <a:cs typeface="Inter" pitchFamily="34" charset="-120"/>
               </a:rPr>
-              <a:t>Your first 48 hours: three small things</a:t>
-            </a:r>
-            <a:endParaRPr lang="en-US" sz="2800" dirty="0"/>
+              <a:t>Where this series goes next</a:t>
+            </a:r>
+            <a:endParaRPr lang="en-US" sz="3200" dirty="0"/>
           </a:p>
         </p:txBody>
       </p:sp>
@@ -24666,12 +24548,210 @@
         </p:nvSpPr>
         <p:spPr>
           <a:xfrm>
-            <a:off x="640080" y="1463040"/>
-            <a:ext cx="10972800" cy="1234440"/>
+            <a:off x="640080" y="1554480"/>
+            <a:ext cx="2651760" cy="1005840"/>
           </a:xfrm>
           <a:prstGeom prst="roundRect">
             <a:avLst>
-              <a:gd name="adj" fmla="val 6667"/>
+              <a:gd name="adj" fmla="val 8182"/>
+            </a:avLst>
+          </a:prstGeom>
+          <a:solidFill>
+            <a:srgbClr val="EAF5F3"/>
+          </a:solidFill>
+          <a:ln w="12700">
+            <a:solidFill>
+              <a:srgbClr val="EAF5F3"/>
+            </a:solidFill>
+            <a:prstDash val="solid"/>
+          </a:ln>
+        </p:spPr>
+      </p:sp>
+      <p:sp>
+        <p:nvSpPr>
+          <p:cNvPr id="15" name="Text 12"/>
+          <p:cNvSpPr/>
+          <p:nvPr/>
+        </p:nvSpPr>
+        <p:spPr>
+          <a:xfrm>
+            <a:off x="822960" y="1645920"/>
+            <a:ext cx="2286000" cy="822960"/>
+          </a:xfrm>
+          <a:prstGeom prst="rect">
+            <a:avLst/>
+          </a:prstGeom>
+          <a:noFill/>
+          <a:ln/>
+        </p:spPr>
+        <p:txBody>
+          <a:bodyPr wrap="square" lIns="0" tIns="0" rIns="0" bIns="0" rtlCol="0" anchor="ctr"/>
+          <a:lstStyle/>
+          <a:p>
+            <a:pPr indent="0" marL="0">
+              <a:buNone/>
+            </a:pPr>
+            <a:r>
+              <a:rPr lang="en-US" sz="1450" b="1" dirty="0">
+                <a:solidFill>
+                  <a:srgbClr val="13293D"/>
+                </a:solidFill>
+                <a:latin typeface="Inter" pitchFamily="34" charset="0"/>
+                <a:ea typeface="Inter" pitchFamily="34" charset="-122"/>
+                <a:cs typeface="Inter" pitchFamily="34" charset="-120"/>
+              </a:rPr>
+              <a:t>1 · Foundations &amp; Safety  ✔</a:t>
+            </a:r>
+            <a:endParaRPr lang="en-US" sz="1450" dirty="0"/>
+          </a:p>
+        </p:txBody>
+      </p:sp>
+      <p:sp>
+        <p:nvSpPr>
+          <p:cNvPr id="16" name="Shape 13"/>
+          <p:cNvSpPr/>
+          <p:nvPr/>
+        </p:nvSpPr>
+        <p:spPr>
+          <a:xfrm>
+            <a:off x="3474720" y="1554480"/>
+            <a:ext cx="2651760" cy="1005840"/>
+          </a:xfrm>
+          <a:prstGeom prst="roundRect">
+            <a:avLst>
+              <a:gd name="adj" fmla="val 8182"/>
+            </a:avLst>
+          </a:prstGeom>
+          <a:solidFill>
+            <a:srgbClr val="EAF5F3"/>
+          </a:solidFill>
+          <a:ln w="12700">
+            <a:solidFill>
+              <a:srgbClr val="EAF5F3"/>
+            </a:solidFill>
+            <a:prstDash val="solid"/>
+          </a:ln>
+        </p:spPr>
+      </p:sp>
+      <p:sp>
+        <p:nvSpPr>
+          <p:cNvPr id="17" name="Text 14"/>
+          <p:cNvSpPr/>
+          <p:nvPr/>
+        </p:nvSpPr>
+        <p:spPr>
+          <a:xfrm>
+            <a:off x="3657600" y="1645920"/>
+            <a:ext cx="2286000" cy="822960"/>
+          </a:xfrm>
+          <a:prstGeom prst="rect">
+            <a:avLst/>
+          </a:prstGeom>
+          <a:noFill/>
+          <a:ln/>
+        </p:spPr>
+        <p:txBody>
+          <a:bodyPr wrap="square" lIns="0" tIns="0" rIns="0" bIns="0" rtlCol="0" anchor="ctr"/>
+          <a:lstStyle/>
+          <a:p>
+            <a:pPr indent="0" marL="0">
+              <a:buNone/>
+            </a:pPr>
+            <a:r>
+              <a:rPr lang="en-US" sz="1450" b="1" dirty="0">
+                <a:solidFill>
+                  <a:srgbClr val="13293D"/>
+                </a:solidFill>
+                <a:latin typeface="Inter" pitchFamily="34" charset="0"/>
+                <a:ea typeface="Inter" pitchFamily="34" charset="-122"/>
+                <a:cs typeface="Inter" pitchFamily="34" charset="-120"/>
+              </a:rPr>
+              <a:t>2 · Prompting Basics  ✔</a:t>
+            </a:r>
+            <a:endParaRPr lang="en-US" sz="1450" dirty="0"/>
+          </a:p>
+        </p:txBody>
+      </p:sp>
+      <p:sp>
+        <p:nvSpPr>
+          <p:cNvPr id="18" name="Shape 15"/>
+          <p:cNvSpPr/>
+          <p:nvPr/>
+        </p:nvSpPr>
+        <p:spPr>
+          <a:xfrm>
+            <a:off x="6309360" y="1554480"/>
+            <a:ext cx="2651760" cy="1005840"/>
+          </a:xfrm>
+          <a:prstGeom prst="roundRect">
+            <a:avLst>
+              <a:gd name="adj" fmla="val 8182"/>
+            </a:avLst>
+          </a:prstGeom>
+          <a:solidFill>
+            <a:srgbClr val="EAF5F3"/>
+          </a:solidFill>
+          <a:ln w="12700">
+            <a:solidFill>
+              <a:srgbClr val="EAF5F3"/>
+            </a:solidFill>
+            <a:prstDash val="solid"/>
+          </a:ln>
+        </p:spPr>
+      </p:sp>
+      <p:sp>
+        <p:nvSpPr>
+          <p:cNvPr id="19" name="Text 16"/>
+          <p:cNvSpPr/>
+          <p:nvPr/>
+        </p:nvSpPr>
+        <p:spPr>
+          <a:xfrm>
+            <a:off x="6492240" y="1645920"/>
+            <a:ext cx="2286000" cy="822960"/>
+          </a:xfrm>
+          <a:prstGeom prst="rect">
+            <a:avLst/>
+          </a:prstGeom>
+          <a:noFill/>
+          <a:ln/>
+        </p:spPr>
+        <p:txBody>
+          <a:bodyPr wrap="square" lIns="0" tIns="0" rIns="0" bIns="0" rtlCol="0" anchor="ctr"/>
+          <a:lstStyle/>
+          <a:p>
+            <a:pPr indent="0" marL="0">
+              <a:buNone/>
+            </a:pPr>
+            <a:r>
+              <a:rPr lang="en-US" sz="1450" b="1" dirty="0">
+                <a:solidFill>
+                  <a:srgbClr val="13293D"/>
+                </a:solidFill>
+                <a:latin typeface="Inter" pitchFamily="34" charset="0"/>
+                <a:ea typeface="Inter" pitchFamily="34" charset="-122"/>
+                <a:cs typeface="Inter" pitchFamily="34" charset="-120"/>
+              </a:rPr>
+              <a:t>3 · Planning &amp; Differentiation  ✔</a:t>
+            </a:r>
+            <a:endParaRPr lang="en-US" sz="1450" dirty="0"/>
+          </a:p>
+        </p:txBody>
+      </p:sp>
+      <p:sp>
+        <p:nvSpPr>
+          <p:cNvPr id="20" name="Shape 17"/>
+          <p:cNvSpPr/>
+          <p:nvPr/>
+        </p:nvSpPr>
+        <p:spPr>
+          <a:xfrm>
+            <a:off x="9144000" y="1554480"/>
+            <a:ext cx="2651760" cy="1005840"/>
+          </a:xfrm>
+          <a:prstGeom prst="roundRect">
+            <a:avLst>
+              <a:gd name="adj" fmla="val 8182"/>
             </a:avLst>
           </a:prstGeom>
           <a:solidFill>
@@ -24687,69 +24767,30 @@
       </p:sp>
       <p:sp>
         <p:nvSpPr>
-          <p:cNvPr id="15" name="Text 12"/>
-          <p:cNvSpPr/>
-          <p:nvPr/>
-        </p:nvSpPr>
-        <p:spPr>
-          <a:xfrm>
-            <a:off x="914400" y="1847088"/>
-            <a:ext cx="1371600" cy="457200"/>
-          </a:xfrm>
-          <a:prstGeom prst="rect">
-            <a:avLst/>
-          </a:prstGeom>
-          <a:noFill/>
-          <a:ln/>
-        </p:spPr>
-        <p:txBody>
-          <a:bodyPr wrap="square" lIns="0" tIns="0" rIns="0" bIns="0" rtlCol="0" anchor="ctr"/>
-          <a:lstStyle/>
-          <a:p>
-            <a:pPr indent="0" marL="0">
-              <a:buNone/>
-            </a:pPr>
-            <a:r>
-              <a:rPr lang="en-US" sz="1700" b="1" dirty="0">
-                <a:solidFill>
-                  <a:srgbClr val="2A9D8F"/>
-                </a:solidFill>
-                <a:latin typeface="Inter" pitchFamily="34" charset="0"/>
-                <a:ea typeface="Inter" pitchFamily="34" charset="-122"/>
-                <a:cs typeface="Inter" pitchFamily="34" charset="-120"/>
-              </a:rPr>
-              <a:t>~10 min</a:t>
-            </a:r>
-            <a:endParaRPr lang="en-US" sz="1700" dirty="0"/>
-          </a:p>
-        </p:txBody>
-      </p:sp>
-      <p:sp>
-        <p:nvSpPr>
-          <p:cNvPr id="16" name="Text 13"/>
-          <p:cNvSpPr/>
-          <p:nvPr/>
-        </p:nvSpPr>
-        <p:spPr>
-          <a:xfrm>
-            <a:off x="2377440" y="1609344"/>
-            <a:ext cx="9052560" cy="457200"/>
-          </a:xfrm>
-          <a:prstGeom prst="rect">
-            <a:avLst/>
-          </a:prstGeom>
-          <a:noFill/>
-          <a:ln/>
-        </p:spPr>
-        <p:txBody>
-          <a:bodyPr wrap="square" lIns="0" tIns="0" rIns="0" bIns="0" rtlCol="0" anchor="ctr"/>
-          <a:lstStyle/>
-          <a:p>
-            <a:pPr indent="0" marL="0">
-              <a:buNone/>
-            </a:pPr>
-            <a:r>
-              <a:rPr lang="en-US" sz="2000" b="1" dirty="0">
+          <p:cNvPr id="21" name="Text 18"/>
+          <p:cNvSpPr/>
+          <p:nvPr/>
+        </p:nvSpPr>
+        <p:spPr>
+          <a:xfrm>
+            <a:off x="9326880" y="1645920"/>
+            <a:ext cx="2286000" cy="822960"/>
+          </a:xfrm>
+          <a:prstGeom prst="rect">
+            <a:avLst/>
+          </a:prstGeom>
+          <a:noFill/>
+          <a:ln/>
+        </p:spPr>
+        <p:txBody>
+          <a:bodyPr wrap="square" lIns="0" tIns="0" rIns="0" bIns="0" rtlCol="0" anchor="ctr"/>
+          <a:lstStyle/>
+          <a:p>
+            <a:pPr indent="0" marL="0">
+              <a:buNone/>
+            </a:pPr>
+            <a:r>
+              <a:rPr lang="en-US" sz="1450" dirty="0">
                 <a:solidFill>
                   <a:srgbClr val="13293D"/>
                 </a:solidFill>
@@ -24757,65 +24798,26 @@
                 <a:ea typeface="Inter" pitchFamily="34" charset="-122"/>
                 <a:cs typeface="Inter" pitchFamily="34" charset="-120"/>
               </a:rPr>
-              <a:t>Teach with your lab artifact</a:t>
-            </a:r>
-            <a:endParaRPr lang="en-US" sz="2000" dirty="0"/>
-          </a:p>
-        </p:txBody>
-      </p:sp>
-      <p:sp>
-        <p:nvSpPr>
-          <p:cNvPr id="17" name="Text 14"/>
-          <p:cNvSpPr/>
-          <p:nvPr/>
-        </p:nvSpPr>
-        <p:spPr>
-          <a:xfrm>
-            <a:off x="2377440" y="2084832"/>
-            <a:ext cx="9052560" cy="548640"/>
-          </a:xfrm>
-          <a:prstGeom prst="rect">
-            <a:avLst/>
-          </a:prstGeom>
-          <a:noFill/>
-          <a:ln/>
-        </p:spPr>
-        <p:txBody>
-          <a:bodyPr wrap="square" lIns="0" tIns="0" rIns="0" bIns="0" rtlCol="0" anchor="ctr"/>
-          <a:lstStyle/>
-          <a:p>
-            <a:pPr indent="0" marL="0">
-              <a:buNone/>
-            </a:pPr>
-            <a:r>
-              <a:rPr lang="en-US" sz="1600" dirty="0">
-                <a:solidFill>
-                  <a:srgbClr val="1B1F24"/>
-                </a:solidFill>
-                <a:latin typeface="Inter" pitchFamily="34" charset="0"/>
-                <a:ea typeface="Inter" pitchFamily="34" charset="-122"/>
-                <a:cs typeface="Inter" pitchFamily="34" charset="-120"/>
-              </a:rPr>
-              <a:t>Then jot one line: what did the support kids and stretch kids actually do?</a:t>
-            </a:r>
-            <a:endParaRPr lang="en-US" sz="1600" dirty="0"/>
-          </a:p>
-        </p:txBody>
-      </p:sp>
-      <p:sp>
-        <p:nvSpPr>
-          <p:cNvPr id="18" name="Shape 15"/>
-          <p:cNvSpPr/>
-          <p:nvPr/>
-        </p:nvSpPr>
-        <p:spPr>
-          <a:xfrm>
-            <a:off x="640080" y="2880360"/>
-            <a:ext cx="10972800" cy="1234440"/>
+              <a:t>4 · Assessment</a:t>
+            </a:r>
+            <a:endParaRPr lang="en-US" sz="1450" dirty="0"/>
+          </a:p>
+        </p:txBody>
+      </p:sp>
+      <p:sp>
+        <p:nvSpPr>
+          <p:cNvPr id="22" name="Shape 19"/>
+          <p:cNvSpPr/>
+          <p:nvPr/>
+        </p:nvSpPr>
+        <p:spPr>
+          <a:xfrm>
+            <a:off x="640080" y="2743200"/>
+            <a:ext cx="2651760" cy="1005840"/>
           </a:xfrm>
           <a:prstGeom prst="roundRect">
             <a:avLst>
-              <a:gd name="adj" fmla="val 6667"/>
+              <a:gd name="adj" fmla="val 8182"/>
             </a:avLst>
           </a:prstGeom>
           <a:solidFill>
@@ -24831,69 +24833,30 @@
       </p:sp>
       <p:sp>
         <p:nvSpPr>
-          <p:cNvPr id="19" name="Text 16"/>
-          <p:cNvSpPr/>
-          <p:nvPr/>
-        </p:nvSpPr>
-        <p:spPr>
-          <a:xfrm>
-            <a:off x="914400" y="3264408"/>
-            <a:ext cx="1371600" cy="457200"/>
-          </a:xfrm>
-          <a:prstGeom prst="rect">
-            <a:avLst/>
-          </a:prstGeom>
-          <a:noFill/>
-          <a:ln/>
-        </p:spPr>
-        <p:txBody>
-          <a:bodyPr wrap="square" lIns="0" tIns="0" rIns="0" bIns="0" rtlCol="0" anchor="ctr"/>
-          <a:lstStyle/>
-          <a:p>
-            <a:pPr indent="0" marL="0">
-              <a:buNone/>
-            </a:pPr>
-            <a:r>
-              <a:rPr lang="en-US" sz="1700" b="1" dirty="0">
-                <a:solidFill>
-                  <a:srgbClr val="2A9D8F"/>
-                </a:solidFill>
-                <a:latin typeface="Inter" pitchFamily="34" charset="0"/>
-                <a:ea typeface="Inter" pitchFamily="34" charset="-122"/>
-                <a:cs typeface="Inter" pitchFamily="34" charset="-120"/>
-              </a:rPr>
-              <a:t>~10 min</a:t>
-            </a:r>
-            <a:endParaRPr lang="en-US" sz="1700" dirty="0"/>
-          </a:p>
-        </p:txBody>
-      </p:sp>
-      <p:sp>
-        <p:nvSpPr>
-          <p:cNvPr id="20" name="Text 17"/>
-          <p:cNvSpPr/>
-          <p:nvPr/>
-        </p:nvSpPr>
-        <p:spPr>
-          <a:xfrm>
-            <a:off x="2377440" y="3026664"/>
-            <a:ext cx="9052560" cy="457200"/>
-          </a:xfrm>
-          <a:prstGeom prst="rect">
-            <a:avLst/>
-          </a:prstGeom>
-          <a:noFill/>
-          <a:ln/>
-        </p:spPr>
-        <p:txBody>
-          <a:bodyPr wrap="square" lIns="0" tIns="0" rIns="0" bIns="0" rtlCol="0" anchor="ctr"/>
-          <a:lstStyle/>
-          <a:p>
-            <a:pPr indent="0" marL="0">
-              <a:buNone/>
-            </a:pPr>
-            <a:r>
-              <a:rPr lang="en-US" sz="2000" b="1" dirty="0">
+          <p:cNvPr id="23" name="Text 20"/>
+          <p:cNvSpPr/>
+          <p:nvPr/>
+        </p:nvSpPr>
+        <p:spPr>
+          <a:xfrm>
+            <a:off x="822960" y="2834640"/>
+            <a:ext cx="2286000" cy="822960"/>
+          </a:xfrm>
+          <a:prstGeom prst="rect">
+            <a:avLst/>
+          </a:prstGeom>
+          <a:noFill/>
+          <a:ln/>
+        </p:spPr>
+        <p:txBody>
+          <a:bodyPr wrap="square" lIns="0" tIns="0" rIns="0" bIns="0" rtlCol="0" anchor="ctr"/>
+          <a:lstStyle/>
+          <a:p>
+            <a:pPr indent="0" marL="0">
+              <a:buNone/>
+            </a:pPr>
+            <a:r>
+              <a:rPr lang="en-US" sz="1450" dirty="0">
                 <a:solidFill>
                   <a:srgbClr val="13293D"/>
                 </a:solidFill>
@@ -24901,65 +24864,26 @@
                 <a:ea typeface="Inter" pitchFamily="34" charset="-122"/>
                 <a:cs typeface="Inter" pitchFamily="34" charset="-120"/>
               </a:rPr>
-              <a:t>Level one more text, then check the level</a:t>
-            </a:r>
-            <a:endParaRPr lang="en-US" sz="2000" dirty="0"/>
-          </a:p>
-        </p:txBody>
-      </p:sp>
-      <p:sp>
-        <p:nvSpPr>
-          <p:cNvPr id="21" name="Text 18"/>
-          <p:cNvSpPr/>
-          <p:nvPr/>
-        </p:nvSpPr>
-        <p:spPr>
-          <a:xfrm>
-            <a:off x="2377440" y="3502152"/>
-            <a:ext cx="9052560" cy="548640"/>
-          </a:xfrm>
-          <a:prstGeom prst="rect">
-            <a:avLst/>
-          </a:prstGeom>
-          <a:noFill/>
-          <a:ln/>
-        </p:spPr>
-        <p:txBody>
-          <a:bodyPr wrap="square" lIns="0" tIns="0" rIns="0" bIns="0" rtlCol="0" anchor="ctr"/>
-          <a:lstStyle/>
-          <a:p>
-            <a:pPr indent="0" marL="0">
-              <a:buNone/>
-            </a:pPr>
-            <a:r>
-              <a:rPr lang="en-US" sz="1600" dirty="0">
-                <a:solidFill>
-                  <a:srgbClr val="1B1F24"/>
-                </a:solidFill>
-                <a:latin typeface="Inter" pitchFamily="34" charset="0"/>
-                <a:ea typeface="Inter" pitchFamily="34" charset="-122"/>
-                <a:cs typeface="Inter" pitchFamily="34" charset="-120"/>
-              </a:rPr>
-              <a:t>Read it aloud, eyeball sentence length, fix what the label got wrong</a:t>
-            </a:r>
-            <a:endParaRPr lang="en-US" sz="1600" dirty="0"/>
-          </a:p>
-        </p:txBody>
-      </p:sp>
-      <p:sp>
-        <p:nvSpPr>
-          <p:cNvPr id="22" name="Shape 19"/>
-          <p:cNvSpPr/>
-          <p:nvPr/>
-        </p:nvSpPr>
-        <p:spPr>
-          <a:xfrm>
-            <a:off x="640080" y="4297680"/>
-            <a:ext cx="10972800" cy="1234440"/>
+              <a:t>5 · Academic Integrity</a:t>
+            </a:r>
+            <a:endParaRPr lang="en-US" sz="1450" dirty="0"/>
+          </a:p>
+        </p:txBody>
+      </p:sp>
+      <p:sp>
+        <p:nvSpPr>
+          <p:cNvPr id="24" name="Shape 21"/>
+          <p:cNvSpPr/>
+          <p:nvPr/>
+        </p:nvSpPr>
+        <p:spPr>
+          <a:xfrm>
+            <a:off x="3474720" y="2743200"/>
+            <a:ext cx="2651760" cy="1005840"/>
           </a:xfrm>
           <a:prstGeom prst="roundRect">
             <a:avLst>
-              <a:gd name="adj" fmla="val 6667"/>
+              <a:gd name="adj" fmla="val 8182"/>
             </a:avLst>
           </a:prstGeom>
           <a:solidFill>
@@ -24975,14 +24899,212 @@
       </p:sp>
       <p:sp>
         <p:nvSpPr>
-          <p:cNvPr id="23" name="Text 20"/>
-          <p:cNvSpPr/>
-          <p:nvPr/>
-        </p:nvSpPr>
-        <p:spPr>
-          <a:xfrm>
-            <a:off x="914400" y="4681728"/>
-            <a:ext cx="1371600" cy="457200"/>
+          <p:cNvPr id="25" name="Text 22"/>
+          <p:cNvSpPr/>
+          <p:nvPr/>
+        </p:nvSpPr>
+        <p:spPr>
+          <a:xfrm>
+            <a:off x="3657600" y="2834640"/>
+            <a:ext cx="2286000" cy="822960"/>
+          </a:xfrm>
+          <a:prstGeom prst="rect">
+            <a:avLst/>
+          </a:prstGeom>
+          <a:noFill/>
+          <a:ln/>
+        </p:spPr>
+        <p:txBody>
+          <a:bodyPr wrap="square" lIns="0" tIns="0" rIns="0" bIns="0" rtlCol="0" anchor="ctr"/>
+          <a:lstStyle/>
+          <a:p>
+            <a:pPr indent="0" marL="0">
+              <a:buNone/>
+            </a:pPr>
+            <a:r>
+              <a:rPr lang="en-US" sz="1450" dirty="0">
+                <a:solidFill>
+                  <a:srgbClr val="13293D"/>
+                </a:solidFill>
+                <a:latin typeface="Inter" pitchFamily="34" charset="0"/>
+                <a:ea typeface="Inter" pitchFamily="34" charset="-122"/>
+                <a:cs typeface="Inter" pitchFamily="34" charset="-120"/>
+              </a:rPr>
+              <a:t>6 · Communication</a:t>
+            </a:r>
+            <a:endParaRPr lang="en-US" sz="1450" dirty="0"/>
+          </a:p>
+        </p:txBody>
+      </p:sp>
+      <p:sp>
+        <p:nvSpPr>
+          <p:cNvPr id="26" name="Shape 23"/>
+          <p:cNvSpPr/>
+          <p:nvPr/>
+        </p:nvSpPr>
+        <p:spPr>
+          <a:xfrm>
+            <a:off x="6309360" y="2743200"/>
+            <a:ext cx="2651760" cy="1005840"/>
+          </a:xfrm>
+          <a:prstGeom prst="roundRect">
+            <a:avLst>
+              <a:gd name="adj" fmla="val 8182"/>
+            </a:avLst>
+          </a:prstGeom>
+          <a:solidFill>
+            <a:srgbClr val="F7F5F0"/>
+          </a:solidFill>
+          <a:ln w="12700">
+            <a:solidFill>
+              <a:srgbClr val="F7F5F0"/>
+            </a:solidFill>
+            <a:prstDash val="solid"/>
+          </a:ln>
+        </p:spPr>
+      </p:sp>
+      <p:sp>
+        <p:nvSpPr>
+          <p:cNvPr id="27" name="Text 24"/>
+          <p:cNvSpPr/>
+          <p:nvPr/>
+        </p:nvSpPr>
+        <p:spPr>
+          <a:xfrm>
+            <a:off x="6492240" y="2834640"/>
+            <a:ext cx="2286000" cy="822960"/>
+          </a:xfrm>
+          <a:prstGeom prst="rect">
+            <a:avLst/>
+          </a:prstGeom>
+          <a:noFill/>
+          <a:ln/>
+        </p:spPr>
+        <p:txBody>
+          <a:bodyPr wrap="square" lIns="0" tIns="0" rIns="0" bIns="0" rtlCol="0" anchor="ctr"/>
+          <a:lstStyle/>
+          <a:p>
+            <a:pPr indent="0" marL="0">
+              <a:buNone/>
+            </a:pPr>
+            <a:r>
+              <a:rPr lang="en-US" sz="1450" dirty="0">
+                <a:solidFill>
+                  <a:srgbClr val="13293D"/>
+                </a:solidFill>
+                <a:latin typeface="Inter" pitchFamily="34" charset="0"/>
+                <a:ea typeface="Inter" pitchFamily="34" charset="-122"/>
+                <a:cs typeface="Inter" pitchFamily="34" charset="-120"/>
+              </a:rPr>
+              <a:t>7 · Workload</a:t>
+            </a:r>
+            <a:endParaRPr lang="en-US" sz="1450" dirty="0"/>
+          </a:p>
+        </p:txBody>
+      </p:sp>
+      <p:sp>
+        <p:nvSpPr>
+          <p:cNvPr id="28" name="Shape 25"/>
+          <p:cNvSpPr/>
+          <p:nvPr/>
+        </p:nvSpPr>
+        <p:spPr>
+          <a:xfrm>
+            <a:off x="9144000" y="2743200"/>
+            <a:ext cx="2651760" cy="1005840"/>
+          </a:xfrm>
+          <a:prstGeom prst="roundRect">
+            <a:avLst>
+              <a:gd name="adj" fmla="val 8182"/>
+            </a:avLst>
+          </a:prstGeom>
+          <a:solidFill>
+            <a:srgbClr val="F7F5F0"/>
+          </a:solidFill>
+          <a:ln w="12700">
+            <a:solidFill>
+              <a:srgbClr val="F7F5F0"/>
+            </a:solidFill>
+            <a:prstDash val="solid"/>
+          </a:ln>
+        </p:spPr>
+      </p:sp>
+      <p:sp>
+        <p:nvSpPr>
+          <p:cNvPr id="29" name="Text 26"/>
+          <p:cNvSpPr/>
+          <p:nvPr/>
+        </p:nvSpPr>
+        <p:spPr>
+          <a:xfrm>
+            <a:off x="9326880" y="2834640"/>
+            <a:ext cx="2286000" cy="822960"/>
+          </a:xfrm>
+          <a:prstGeom prst="rect">
+            <a:avLst/>
+          </a:prstGeom>
+          <a:noFill/>
+          <a:ln/>
+        </p:spPr>
+        <p:txBody>
+          <a:bodyPr wrap="square" lIns="0" tIns="0" rIns="0" bIns="0" rtlCol="0" anchor="ctr"/>
+          <a:lstStyle/>
+          <a:p>
+            <a:pPr indent="0" marL="0">
+              <a:buNone/>
+            </a:pPr>
+            <a:r>
+              <a:rPr lang="en-US" sz="1450" dirty="0">
+                <a:solidFill>
+                  <a:srgbClr val="13293D"/>
+                </a:solidFill>
+                <a:latin typeface="Inter" pitchFamily="34" charset="0"/>
+                <a:ea typeface="Inter" pitchFamily="34" charset="-122"/>
+                <a:cs typeface="Inter" pitchFamily="34" charset="-120"/>
+              </a:rPr>
+              <a:t>8 · Your School’s AI Culture</a:t>
+            </a:r>
+            <a:endParaRPr lang="en-US" sz="1450" dirty="0"/>
+          </a:p>
+        </p:txBody>
+      </p:sp>
+      <p:sp>
+        <p:nvSpPr>
+          <p:cNvPr id="30" name="Shape 27"/>
+          <p:cNvSpPr/>
+          <p:nvPr/>
+        </p:nvSpPr>
+        <p:spPr>
+          <a:xfrm>
+            <a:off x="640080" y="4206240"/>
+            <a:ext cx="10972800" cy="1463040"/>
+          </a:xfrm>
+          <a:prstGeom prst="roundRect">
+            <a:avLst>
+              <a:gd name="adj" fmla="val 5625"/>
+            </a:avLst>
+          </a:prstGeom>
+          <a:solidFill>
+            <a:srgbClr val="13293D"/>
+          </a:solidFill>
+          <a:ln w="12700">
+            <a:solidFill>
+              <a:srgbClr val="13293D"/>
+            </a:solidFill>
+            <a:prstDash val="solid"/>
+          </a:ln>
+        </p:spPr>
+      </p:sp>
+      <p:sp>
+        <p:nvSpPr>
+          <p:cNvPr id="31" name="Text 28"/>
+          <p:cNvSpPr/>
+          <p:nvPr/>
+        </p:nvSpPr>
+        <p:spPr>
+          <a:xfrm>
+            <a:off x="960120" y="4389120"/>
+            <a:ext cx="10332720" cy="1097280"/>
           </a:xfrm>
           <a:prstGeom prst="rect">
             <a:avLst/>
@@ -25000,93 +25122,29 @@
             <a:r>
               <a:rPr lang="en-US" sz="1700" b="1" dirty="0">
                 <a:solidFill>
-                  <a:srgbClr val="2A9D8F"/>
-                </a:solidFill>
-                <a:latin typeface="Inter" pitchFamily="34" charset="0"/>
-                <a:ea typeface="Inter" pitchFamily="34" charset="-122"/>
-                <a:cs typeface="Inter" pitchFamily="34" charset="-120"/>
-              </a:rPr>
-              <a:t>~2 min</a:t>
+                  <a:srgbClr val="FFFFFF"/>
+                </a:solidFill>
+                <a:latin typeface="Inter" pitchFamily="34" charset="0"/>
+                <a:ea typeface="Inter" pitchFamily="34" charset="-122"/>
+                <a:cs typeface="Inter" pitchFamily="34" charset="-120"/>
+              </a:rPr>
+              <a:t>Next: Kit 4, AI for Assessment. </a:t>
+            </a:r>
+            <a:pPr indent="0" marL="0">
+              <a:buNone/>
+            </a:pPr>
+            <a:r>
+              <a:rPr lang="en-US" sz="1700" dirty="0">
+                <a:solidFill>
+                  <a:srgbClr val="C9D4DE"/>
+                </a:solidFill>
+                <a:latin typeface="Inter" pitchFamily="34" charset="0"/>
+                <a:ea typeface="Inter" pitchFamily="34" charset="-122"/>
+                <a:cs typeface="Inter" pitchFamily="34" charset="-120"/>
+              </a:rPr>
+              <a:t>You built the materials for the range of learners in your room; next we build the ways to find out what they learned: question banks, rubrics, feedback that doesn’t eat your Sunday.</a:t>
             </a:r>
             <a:endParaRPr lang="en-US" sz="1700" dirty="0"/>
-          </a:p>
-        </p:txBody>
-      </p:sp>
-      <p:sp>
-        <p:nvSpPr>
-          <p:cNvPr id="24" name="Text 21"/>
-          <p:cNvSpPr/>
-          <p:nvPr/>
-        </p:nvSpPr>
-        <p:spPr>
-          <a:xfrm>
-            <a:off x="2377440" y="4443984"/>
-            <a:ext cx="9052560" cy="457200"/>
-          </a:xfrm>
-          <a:prstGeom prst="rect">
-            <a:avLst/>
-          </a:prstGeom>
-          <a:noFill/>
-          <a:ln/>
-        </p:spPr>
-        <p:txBody>
-          <a:bodyPr wrap="square" lIns="0" tIns="0" rIns="0" bIns="0" rtlCol="0" anchor="ctr"/>
-          <a:lstStyle/>
-          <a:p>
-            <a:pPr indent="0" marL="0">
-              <a:buNone/>
-            </a:pPr>
-            <a:r>
-              <a:rPr lang="en-US" sz="2000" b="1" dirty="0">
-                <a:solidFill>
-                  <a:srgbClr val="13293D"/>
-                </a:solidFill>
-                <a:latin typeface="Inter" pitchFamily="34" charset="0"/>
-                <a:ea typeface="Inter" pitchFamily="34" charset="-122"/>
-                <a:cs typeface="Inter" pitchFamily="34" charset="-120"/>
-              </a:rPr>
-              <a:t>Post your best prompt to the staff doc</a:t>
-            </a:r>
-            <a:endParaRPr lang="en-US" sz="2000" dirty="0"/>
-          </a:p>
-        </p:txBody>
-      </p:sp>
-      <p:sp>
-        <p:nvSpPr>
-          <p:cNvPr id="25" name="Text 22"/>
-          <p:cNvSpPr/>
-          <p:nvPr/>
-        </p:nvSpPr>
-        <p:spPr>
-          <a:xfrm>
-            <a:off x="2377440" y="4919472"/>
-            <a:ext cx="9052560" cy="548640"/>
-          </a:xfrm>
-          <a:prstGeom prst="rect">
-            <a:avLst/>
-          </a:prstGeom>
-          <a:noFill/>
-          <a:ln/>
-        </p:spPr>
-        <p:txBody>
-          <a:bodyPr wrap="square" lIns="0" tIns="0" rIns="0" bIns="0" rtlCol="0" anchor="ctr"/>
-          <a:lstStyle/>
-          <a:p>
-            <a:pPr indent="0" marL="0">
-              <a:buNone/>
-            </a:pPr>
-            <a:r>
-              <a:rPr lang="en-US" sz="1600" dirty="0">
-                <a:solidFill>
-                  <a:srgbClr val="1B1F24"/>
-                </a:solidFill>
-                <a:latin typeface="Inter" pitchFamily="34" charset="0"/>
-                <a:ea typeface="Inter" pitchFamily="34" charset="-122"/>
-                <a:cs typeface="Inter" pitchFamily="34" charset="-120"/>
-              </a:rPr>
-              <a:t>Your move, your name, one line about the lesson it fit</a:t>
-            </a:r>
-            <a:endParaRPr lang="en-US" sz="1600" dirty="0"/>
           </a:p>
         </p:txBody>
       </p:sp>
@@ -25439,7 +25497,7 @@
                 <a:ea typeface="Inter" pitchFamily="34" charset="-122"/>
                 <a:cs typeface="Inter" pitchFamily="34" charset="-120"/>
               </a:rPr>
-              <a:t>Her exit ticket: the artifact built, the direction that surprised her.</a:t>
+              <a:t>Her 48 hours: teach the support version, run one review, post one prompt.</a:t>
             </a:r>
             <a:endParaRPr lang="en-US" sz="1000" dirty="0"/>
           </a:p>
@@ -25478,7 +25536,7 @@
                 <a:ea typeface="Inter" pitchFamily="34" charset="-122"/>
                 <a:cs typeface="Inter" pitchFamily="34" charset="-120"/>
               </a:rPr>
-              <a:t>TWO MINUTES</a:t>
+              <a:t>BEFORE FRIDAY BECOMES A MEMORY</a:t>
             </a:r>
             <a:endParaRPr lang="en-US" sz="1200" dirty="0"/>
           </a:p>
@@ -25509,7 +25567,7 @@
               <a:buNone/>
             </a:pPr>
             <a:r>
-              <a:rPr lang="en-US" sz="3200" b="1" dirty="0">
+              <a:rPr lang="en-US" sz="2800" b="1" dirty="0">
                 <a:solidFill>
                   <a:srgbClr val="13293D"/>
                 </a:solidFill>
@@ -25517,42 +25575,143 @@
                 <a:ea typeface="Inter" pitchFamily="34" charset="-122"/>
                 <a:cs typeface="Inter" pitchFamily="34" charset="-120"/>
               </a:rPr>
-              <a:t>Exit ticket</a:t>
-            </a:r>
-            <a:endParaRPr lang="en-US" sz="3200" dirty="0"/>
-          </a:p>
-        </p:txBody>
-      </p:sp>
-      <p:sp>
-        <p:nvSpPr>
-          <p:cNvPr id="14" name="Text 11"/>
-          <p:cNvSpPr/>
-          <p:nvPr/>
-        </p:nvSpPr>
-        <p:spPr>
-          <a:xfrm>
-            <a:off x="640080" y="1554480"/>
-            <a:ext cx="10908792" cy="2377440"/>
-          </a:xfrm>
-          <a:prstGeom prst="rect">
-            <a:avLst/>
-          </a:prstGeom>
-          <a:noFill/>
-          <a:ln/>
-        </p:spPr>
-        <p:txBody>
-          <a:bodyPr wrap="square" rtlCol="0" anchor="t"/>
-          <a:lstStyle/>
-          <a:p>
-            <a:pPr marL="342900" indent="-342900">
-              <a:spcAft>
-                <a:spcPts val="1000"/>
-              </a:spcAft>
-              <a:buSzPct val="100000"/>
-              <a:buChar char="•"/>
-            </a:pPr>
-            <a:r>
-              <a:rPr lang="en-US" sz="2400" dirty="0">
+              <a:t>Your first 48 hours: three small things</a:t>
+            </a:r>
+            <a:endParaRPr lang="en-US" sz="2800" dirty="0"/>
+          </a:p>
+        </p:txBody>
+      </p:sp>
+      <p:sp>
+        <p:nvSpPr>
+          <p:cNvPr id="14" name="Shape 11"/>
+          <p:cNvSpPr/>
+          <p:nvPr/>
+        </p:nvSpPr>
+        <p:spPr>
+          <a:xfrm>
+            <a:off x="640080" y="1463040"/>
+            <a:ext cx="10972800" cy="1234440"/>
+          </a:xfrm>
+          <a:prstGeom prst="roundRect">
+            <a:avLst>
+              <a:gd name="adj" fmla="val 6667"/>
+            </a:avLst>
+          </a:prstGeom>
+          <a:solidFill>
+            <a:srgbClr val="F7F5F0"/>
+          </a:solidFill>
+          <a:ln w="12700">
+            <a:solidFill>
+              <a:srgbClr val="F7F5F0"/>
+            </a:solidFill>
+            <a:prstDash val="solid"/>
+          </a:ln>
+        </p:spPr>
+      </p:sp>
+      <p:sp>
+        <p:nvSpPr>
+          <p:cNvPr id="15" name="Text 12"/>
+          <p:cNvSpPr/>
+          <p:nvPr/>
+        </p:nvSpPr>
+        <p:spPr>
+          <a:xfrm>
+            <a:off x="914400" y="1847088"/>
+            <a:ext cx="1371600" cy="457200"/>
+          </a:xfrm>
+          <a:prstGeom prst="rect">
+            <a:avLst/>
+          </a:prstGeom>
+          <a:noFill/>
+          <a:ln/>
+        </p:spPr>
+        <p:txBody>
+          <a:bodyPr wrap="square" lIns="0" tIns="0" rIns="0" bIns="0" rtlCol="0" anchor="ctr"/>
+          <a:lstStyle/>
+          <a:p>
+            <a:pPr indent="0" marL="0">
+              <a:buNone/>
+            </a:pPr>
+            <a:r>
+              <a:rPr lang="en-US" sz="1700" b="1" dirty="0">
+                <a:solidFill>
+                  <a:srgbClr val="2A9D8F"/>
+                </a:solidFill>
+                <a:latin typeface="Inter" pitchFamily="34" charset="0"/>
+                <a:ea typeface="Inter" pitchFamily="34" charset="-122"/>
+                <a:cs typeface="Inter" pitchFamily="34" charset="-120"/>
+              </a:rPr>
+              <a:t>~10 min</a:t>
+            </a:r>
+            <a:endParaRPr lang="en-US" sz="1700" dirty="0"/>
+          </a:p>
+        </p:txBody>
+      </p:sp>
+      <p:sp>
+        <p:nvSpPr>
+          <p:cNvPr id="16" name="Text 13"/>
+          <p:cNvSpPr/>
+          <p:nvPr/>
+        </p:nvSpPr>
+        <p:spPr>
+          <a:xfrm>
+            <a:off x="2377440" y="1609344"/>
+            <a:ext cx="9052560" cy="457200"/>
+          </a:xfrm>
+          <a:prstGeom prst="rect">
+            <a:avLst/>
+          </a:prstGeom>
+          <a:noFill/>
+          <a:ln/>
+        </p:spPr>
+        <p:txBody>
+          <a:bodyPr wrap="square" lIns="0" tIns="0" rIns="0" bIns="0" rtlCol="0" anchor="ctr"/>
+          <a:lstStyle/>
+          <a:p>
+            <a:pPr indent="0" marL="0">
+              <a:buNone/>
+            </a:pPr>
+            <a:r>
+              <a:rPr lang="en-US" sz="2000" b="1" dirty="0">
+                <a:solidFill>
+                  <a:srgbClr val="13293D"/>
+                </a:solidFill>
+                <a:latin typeface="Inter" pitchFamily="34" charset="0"/>
+                <a:ea typeface="Inter" pitchFamily="34" charset="-122"/>
+                <a:cs typeface="Inter" pitchFamily="34" charset="-120"/>
+              </a:rPr>
+              <a:t>Teach with your lab artifact</a:t>
+            </a:r>
+            <a:endParaRPr lang="en-US" sz="2000" dirty="0"/>
+          </a:p>
+        </p:txBody>
+      </p:sp>
+      <p:sp>
+        <p:nvSpPr>
+          <p:cNvPr id="17" name="Text 14"/>
+          <p:cNvSpPr/>
+          <p:nvPr/>
+        </p:nvSpPr>
+        <p:spPr>
+          <a:xfrm>
+            <a:off x="2377440" y="2084832"/>
+            <a:ext cx="9052560" cy="548640"/>
+          </a:xfrm>
+          <a:prstGeom prst="rect">
+            <a:avLst/>
+          </a:prstGeom>
+          <a:noFill/>
+          <a:ln/>
+        </p:spPr>
+        <p:txBody>
+          <a:bodyPr wrap="square" lIns="0" tIns="0" rIns="0" bIns="0" rtlCol="0" anchor="ctr"/>
+          <a:lstStyle/>
+          <a:p>
+            <a:pPr indent="0" marL="0">
+              <a:buNone/>
+            </a:pPr>
+            <a:r>
+              <a:rPr lang="en-US" sz="1600" dirty="0">
                 <a:solidFill>
                   <a:srgbClr val="1B1F24"/>
                 </a:solidFill>
@@ -25560,20 +25719,143 @@
                 <a:ea typeface="Inter" pitchFamily="34" charset="-122"/>
                 <a:cs typeface="Inter" pitchFamily="34" charset="-120"/>
               </a:rPr>
-              <a:t>The differentiation move you’ll use first</a:t>
-            </a:r>
-            <a:endParaRPr lang="en-US" sz="2400" dirty="0"/>
-          </a:p>
-          <a:p>
-            <a:pPr marL="342900" indent="-342900">
-              <a:spcAft>
-                <a:spcPts val="1000"/>
-              </a:spcAft>
-              <a:buSzPct val="100000"/>
-              <a:buChar char="•"/>
-            </a:pPr>
-            <a:r>
-              <a:rPr lang="en-US" sz="2400" dirty="0">
+              <a:t>Then jot one line: what did the support kids and stretch kids actually do?</a:t>
+            </a:r>
+            <a:endParaRPr lang="en-US" sz="1600" dirty="0"/>
+          </a:p>
+        </p:txBody>
+      </p:sp>
+      <p:sp>
+        <p:nvSpPr>
+          <p:cNvPr id="18" name="Shape 15"/>
+          <p:cNvSpPr/>
+          <p:nvPr/>
+        </p:nvSpPr>
+        <p:spPr>
+          <a:xfrm>
+            <a:off x="640080" y="2880360"/>
+            <a:ext cx="10972800" cy="1234440"/>
+          </a:xfrm>
+          <a:prstGeom prst="roundRect">
+            <a:avLst>
+              <a:gd name="adj" fmla="val 6667"/>
+            </a:avLst>
+          </a:prstGeom>
+          <a:solidFill>
+            <a:srgbClr val="F7F5F0"/>
+          </a:solidFill>
+          <a:ln w="12700">
+            <a:solidFill>
+              <a:srgbClr val="F7F5F0"/>
+            </a:solidFill>
+            <a:prstDash val="solid"/>
+          </a:ln>
+        </p:spPr>
+      </p:sp>
+      <p:sp>
+        <p:nvSpPr>
+          <p:cNvPr id="19" name="Text 16"/>
+          <p:cNvSpPr/>
+          <p:nvPr/>
+        </p:nvSpPr>
+        <p:spPr>
+          <a:xfrm>
+            <a:off x="914400" y="3264408"/>
+            <a:ext cx="1371600" cy="457200"/>
+          </a:xfrm>
+          <a:prstGeom prst="rect">
+            <a:avLst/>
+          </a:prstGeom>
+          <a:noFill/>
+          <a:ln/>
+        </p:spPr>
+        <p:txBody>
+          <a:bodyPr wrap="square" lIns="0" tIns="0" rIns="0" bIns="0" rtlCol="0" anchor="ctr"/>
+          <a:lstStyle/>
+          <a:p>
+            <a:pPr indent="0" marL="0">
+              <a:buNone/>
+            </a:pPr>
+            <a:r>
+              <a:rPr lang="en-US" sz="1700" b="1" dirty="0">
+                <a:solidFill>
+                  <a:srgbClr val="2A9D8F"/>
+                </a:solidFill>
+                <a:latin typeface="Inter" pitchFamily="34" charset="0"/>
+                <a:ea typeface="Inter" pitchFamily="34" charset="-122"/>
+                <a:cs typeface="Inter" pitchFamily="34" charset="-120"/>
+              </a:rPr>
+              <a:t>~10 min</a:t>
+            </a:r>
+            <a:endParaRPr lang="en-US" sz="1700" dirty="0"/>
+          </a:p>
+        </p:txBody>
+      </p:sp>
+      <p:sp>
+        <p:nvSpPr>
+          <p:cNvPr id="20" name="Text 17"/>
+          <p:cNvSpPr/>
+          <p:nvPr/>
+        </p:nvSpPr>
+        <p:spPr>
+          <a:xfrm>
+            <a:off x="2377440" y="3026664"/>
+            <a:ext cx="9052560" cy="457200"/>
+          </a:xfrm>
+          <a:prstGeom prst="rect">
+            <a:avLst/>
+          </a:prstGeom>
+          <a:noFill/>
+          <a:ln/>
+        </p:spPr>
+        <p:txBody>
+          <a:bodyPr wrap="square" lIns="0" tIns="0" rIns="0" bIns="0" rtlCol="0" anchor="ctr"/>
+          <a:lstStyle/>
+          <a:p>
+            <a:pPr indent="0" marL="0">
+              <a:buNone/>
+            </a:pPr>
+            <a:r>
+              <a:rPr lang="en-US" sz="2000" b="1" dirty="0">
+                <a:solidFill>
+                  <a:srgbClr val="13293D"/>
+                </a:solidFill>
+                <a:latin typeface="Inter" pitchFamily="34" charset="0"/>
+                <a:ea typeface="Inter" pitchFamily="34" charset="-122"/>
+                <a:cs typeface="Inter" pitchFamily="34" charset="-120"/>
+              </a:rPr>
+              <a:t>Level one more text, then check the level</a:t>
+            </a:r>
+            <a:endParaRPr lang="en-US" sz="2000" dirty="0"/>
+          </a:p>
+        </p:txBody>
+      </p:sp>
+      <p:sp>
+        <p:nvSpPr>
+          <p:cNvPr id="21" name="Text 18"/>
+          <p:cNvSpPr/>
+          <p:nvPr/>
+        </p:nvSpPr>
+        <p:spPr>
+          <a:xfrm>
+            <a:off x="2377440" y="3502152"/>
+            <a:ext cx="9052560" cy="548640"/>
+          </a:xfrm>
+          <a:prstGeom prst="rect">
+            <a:avLst/>
+          </a:prstGeom>
+          <a:noFill/>
+          <a:ln/>
+        </p:spPr>
+        <p:txBody>
+          <a:bodyPr wrap="square" lIns="0" tIns="0" rIns="0" bIns="0" rtlCol="0" anchor="ctr"/>
+          <a:lstStyle/>
+          <a:p>
+            <a:pPr indent="0" marL="0">
+              <a:buNone/>
+            </a:pPr>
+            <a:r>
+              <a:rPr lang="en-US" sz="1600" dirty="0">
                 <a:solidFill>
                   <a:srgbClr val="1B1F24"/>
                 </a:solidFill>
@@ -25581,20 +25863,143 @@
                 <a:ea typeface="Inter" pitchFamily="34" charset="-122"/>
                 <a:cs typeface="Inter" pitchFamily="34" charset="-120"/>
               </a:rPr>
-              <a:t>The artifact you built in the lab</a:t>
-            </a:r>
-            <a:endParaRPr lang="en-US" sz="2400" dirty="0"/>
-          </a:p>
-          <a:p>
-            <a:pPr marL="342900" indent="-342900">
-              <a:spcAft>
-                <a:spcPts val="1000"/>
-              </a:spcAft>
-              <a:buSzPct val="100000"/>
-              <a:buChar char="•"/>
-            </a:pPr>
-            <a:r>
-              <a:rPr lang="en-US" sz="2400" dirty="0">
+              <a:t>Read it aloud, eyeball sentence length, fix what the label got wrong</a:t>
+            </a:r>
+            <a:endParaRPr lang="en-US" sz="1600" dirty="0"/>
+          </a:p>
+        </p:txBody>
+      </p:sp>
+      <p:sp>
+        <p:nvSpPr>
+          <p:cNvPr id="22" name="Shape 19"/>
+          <p:cNvSpPr/>
+          <p:nvPr/>
+        </p:nvSpPr>
+        <p:spPr>
+          <a:xfrm>
+            <a:off x="640080" y="4297680"/>
+            <a:ext cx="10972800" cy="1234440"/>
+          </a:xfrm>
+          <a:prstGeom prst="roundRect">
+            <a:avLst>
+              <a:gd name="adj" fmla="val 6667"/>
+            </a:avLst>
+          </a:prstGeom>
+          <a:solidFill>
+            <a:srgbClr val="F7F5F0"/>
+          </a:solidFill>
+          <a:ln w="12700">
+            <a:solidFill>
+              <a:srgbClr val="F7F5F0"/>
+            </a:solidFill>
+            <a:prstDash val="solid"/>
+          </a:ln>
+        </p:spPr>
+      </p:sp>
+      <p:sp>
+        <p:nvSpPr>
+          <p:cNvPr id="23" name="Text 20"/>
+          <p:cNvSpPr/>
+          <p:nvPr/>
+        </p:nvSpPr>
+        <p:spPr>
+          <a:xfrm>
+            <a:off x="914400" y="4681728"/>
+            <a:ext cx="1371600" cy="457200"/>
+          </a:xfrm>
+          <a:prstGeom prst="rect">
+            <a:avLst/>
+          </a:prstGeom>
+          <a:noFill/>
+          <a:ln/>
+        </p:spPr>
+        <p:txBody>
+          <a:bodyPr wrap="square" lIns="0" tIns="0" rIns="0" bIns="0" rtlCol="0" anchor="ctr"/>
+          <a:lstStyle/>
+          <a:p>
+            <a:pPr indent="0" marL="0">
+              <a:buNone/>
+            </a:pPr>
+            <a:r>
+              <a:rPr lang="en-US" sz="1700" b="1" dirty="0">
+                <a:solidFill>
+                  <a:srgbClr val="2A9D8F"/>
+                </a:solidFill>
+                <a:latin typeface="Inter" pitchFamily="34" charset="0"/>
+                <a:ea typeface="Inter" pitchFamily="34" charset="-122"/>
+                <a:cs typeface="Inter" pitchFamily="34" charset="-120"/>
+              </a:rPr>
+              <a:t>~2 min</a:t>
+            </a:r>
+            <a:endParaRPr lang="en-US" sz="1700" dirty="0"/>
+          </a:p>
+        </p:txBody>
+      </p:sp>
+      <p:sp>
+        <p:nvSpPr>
+          <p:cNvPr id="24" name="Text 21"/>
+          <p:cNvSpPr/>
+          <p:nvPr/>
+        </p:nvSpPr>
+        <p:spPr>
+          <a:xfrm>
+            <a:off x="2377440" y="4443984"/>
+            <a:ext cx="9052560" cy="457200"/>
+          </a:xfrm>
+          <a:prstGeom prst="rect">
+            <a:avLst/>
+          </a:prstGeom>
+          <a:noFill/>
+          <a:ln/>
+        </p:spPr>
+        <p:txBody>
+          <a:bodyPr wrap="square" lIns="0" tIns="0" rIns="0" bIns="0" rtlCol="0" anchor="ctr"/>
+          <a:lstStyle/>
+          <a:p>
+            <a:pPr indent="0" marL="0">
+              <a:buNone/>
+            </a:pPr>
+            <a:r>
+              <a:rPr lang="en-US" sz="2000" b="1" dirty="0">
+                <a:solidFill>
+                  <a:srgbClr val="13293D"/>
+                </a:solidFill>
+                <a:latin typeface="Inter" pitchFamily="34" charset="0"/>
+                <a:ea typeface="Inter" pitchFamily="34" charset="-122"/>
+                <a:cs typeface="Inter" pitchFamily="34" charset="-120"/>
+              </a:rPr>
+              <a:t>Post your best prompt to the staff doc</a:t>
+            </a:r>
+            <a:endParaRPr lang="en-US" sz="2000" dirty="0"/>
+          </a:p>
+        </p:txBody>
+      </p:sp>
+      <p:sp>
+        <p:nvSpPr>
+          <p:cNvPr id="25" name="Text 22"/>
+          <p:cNvSpPr/>
+          <p:nvPr/>
+        </p:nvSpPr>
+        <p:spPr>
+          <a:xfrm>
+            <a:off x="2377440" y="4919472"/>
+            <a:ext cx="9052560" cy="548640"/>
+          </a:xfrm>
+          <a:prstGeom prst="rect">
+            <a:avLst/>
+          </a:prstGeom>
+          <a:noFill/>
+          <a:ln/>
+        </p:spPr>
+        <p:txBody>
+          <a:bodyPr wrap="square" lIns="0" tIns="0" rIns="0" bIns="0" rtlCol="0" anchor="ctr"/>
+          <a:lstStyle/>
+          <a:p>
+            <a:pPr indent="0" marL="0">
+              <a:buNone/>
+            </a:pPr>
+            <a:r>
+              <a:rPr lang="en-US" sz="1600" dirty="0">
                 <a:solidFill>
                   <a:srgbClr val="1B1F24"/>
                 </a:solidFill>
@@ -25602,48 +26007,9 @@
                 <a:ea typeface="Inter" pitchFamily="34" charset="-122"/>
                 <a:cs typeface="Inter" pitchFamily="34" charset="-120"/>
               </a:rPr>
-              <a:t>One differentiation task you still want help with</a:t>
-            </a:r>
-            <a:endParaRPr lang="en-US" sz="2400" dirty="0"/>
-          </a:p>
-        </p:txBody>
-      </p:sp>
-      <p:sp>
-        <p:nvSpPr>
-          <p:cNvPr id="15" name="Text 12"/>
-          <p:cNvSpPr/>
-          <p:nvPr/>
-        </p:nvSpPr>
-        <p:spPr>
-          <a:xfrm>
-            <a:off x="640080" y="4297680"/>
-            <a:ext cx="10972800" cy="457200"/>
-          </a:xfrm>
-          <a:prstGeom prst="rect">
-            <a:avLst/>
-          </a:prstGeom>
-          <a:noFill/>
-          <a:ln/>
-        </p:spPr>
-        <p:txBody>
-          <a:bodyPr wrap="square" lIns="0" tIns="0" rIns="0" bIns="0" rtlCol="0" anchor="ctr"/>
-          <a:lstStyle/>
-          <a:p>
-            <a:pPr indent="0" marL="0">
-              <a:buNone/>
-            </a:pPr>
-            <a:r>
-              <a:rPr lang="en-US" sz="1900" i="1" dirty="0">
-                <a:solidFill>
-                  <a:srgbClr val="5B6B7A"/>
-                </a:solidFill>
-                <a:latin typeface="Inter" pitchFamily="34" charset="0"/>
-                <a:ea typeface="Inter" pitchFamily="34" charset="-122"/>
-                <a:cs typeface="Inter" pitchFamily="34" charset="-120"/>
-              </a:rPr>
-              <a:t>Your answers steer the PLC follow-ups. Be honest.</a:t>
-            </a:r>
-            <a:endParaRPr lang="en-US" sz="1900" dirty="0"/>
+              <a:t>Your move, your name, one line about the lesson it fit</a:t>
+            </a:r>
+            <a:endParaRPr lang="en-US" sz="1600" dirty="0"/>
           </a:p>
         </p:txBody>
       </p:sp>
@@ -25658,6 +26024,563 @@
 <file path=ppt/slides/slide34.xml><?xml version="1.0" encoding="utf-8"?>
 <p:sld xmlns:a="http://schemas.openxmlformats.org/drawingml/2006/main" xmlns:r="http://schemas.openxmlformats.org/officeDocument/2006/relationships" xmlns:p="http://schemas.openxmlformats.org/presentationml/2006/main">
   <p:cSld name="Slide 34">
+    <p:bg>
+      <p:bgPr>
+        <a:solidFill>
+          <a:srgbClr val="FFFFFF"/>
+        </a:solidFill>
+      </p:bgPr>
+    </p:bg>
+    <p:spTree>
+      <p:nvGrpSpPr>
+        <p:cNvPr id="1" name=""/>
+        <p:cNvGrpSpPr/>
+        <p:nvPr/>
+      </p:nvGrpSpPr>
+      <p:grpSpPr>
+        <a:xfrm>
+          <a:off x="0" y="0"/>
+          <a:ext cx="0" cy="0"/>
+          <a:chOff x="0" y="0"/>
+          <a:chExt cx="0" cy="0"/>
+        </a:xfrm>
+      </p:grpSpPr>
+      <p:pic>
+        <p:nvPicPr>
+          <p:cNvPr id="2" name="Image 0" descr="preencoded.png">    </p:cNvPr>
+          <p:cNvPicPr>
+            <a:picLocks noChangeAspect="1"/>
+          </p:cNvPicPr>
+          <p:nvPr/>
+        </p:nvPicPr>
+        <p:blipFill>
+          <a:blip r:embed="rId1"/>
+          <a:stretch>
+            <a:fillRect/>
+          </a:stretch>
+        </p:blipFill>
+        <p:spPr>
+          <a:xfrm>
+            <a:off x="411480" y="6473952"/>
+            <a:ext cx="237744" cy="219456"/>
+          </a:xfrm>
+          <a:prstGeom prst="rect">
+            <a:avLst/>
+          </a:prstGeom>
+        </p:spPr>
+      </p:pic>
+      <p:sp>
+        <p:nvSpPr>
+          <p:cNvPr id="3" name="Text 0"/>
+          <p:cNvSpPr/>
+          <p:nvPr/>
+        </p:nvSpPr>
+        <p:spPr>
+          <a:xfrm>
+            <a:off x="685800" y="6428232"/>
+            <a:ext cx="2011680" cy="292608"/>
+          </a:xfrm>
+          <a:prstGeom prst="rect">
+            <a:avLst/>
+          </a:prstGeom>
+          <a:noFill/>
+          <a:ln/>
+        </p:spPr>
+        <p:txBody>
+          <a:bodyPr wrap="square" lIns="0" tIns="0" rIns="0" bIns="0" rtlCol="0" anchor="ctr"/>
+          <a:lstStyle/>
+          <a:p>
+            <a:pPr indent="0" marL="0">
+              <a:buNone/>
+            </a:pPr>
+            <a:r>
+              <a:rPr lang="en-US" sz="1000" b="1" dirty="0">
+                <a:solidFill>
+                  <a:srgbClr val="2A9D8F"/>
+                </a:solidFill>
+                <a:latin typeface="Inter" pitchFamily="34" charset="0"/>
+                <a:ea typeface="Inter" pitchFamily="34" charset="-122"/>
+                <a:cs typeface="Inter" pitchFamily="34" charset="-120"/>
+              </a:rPr>
+              <a:t>AI-Ready</a:t>
+            </a:r>
+            <a:pPr indent="0" marL="0">
+              <a:buNone/>
+            </a:pPr>
+            <a:r>
+              <a:rPr lang="en-US" sz="1000" b="1" dirty="0">
+                <a:solidFill>
+                  <a:srgbClr val="13293D"/>
+                </a:solidFill>
+                <a:latin typeface="Inter" pitchFamily="34" charset="0"/>
+                <a:ea typeface="Inter" pitchFamily="34" charset="-122"/>
+                <a:cs typeface="Inter" pitchFamily="34" charset="-120"/>
+              </a:rPr>
+              <a:t> School</a:t>
+            </a:r>
+            <a:endParaRPr lang="en-US" sz="1000" dirty="0"/>
+          </a:p>
+        </p:txBody>
+      </p:sp>
+      <p:sp>
+        <p:nvSpPr>
+          <p:cNvPr id="4" name="Text 1"/>
+          <p:cNvSpPr/>
+          <p:nvPr/>
+        </p:nvSpPr>
+        <p:spPr>
+          <a:xfrm>
+            <a:off x="7982712" y="6428232"/>
+            <a:ext cx="3794760" cy="292608"/>
+          </a:xfrm>
+          <a:prstGeom prst="rect">
+            <a:avLst/>
+          </a:prstGeom>
+          <a:noFill/>
+          <a:ln/>
+        </p:spPr>
+        <p:txBody>
+          <a:bodyPr wrap="square" lIns="0" tIns="0" rIns="0" bIns="0" rtlCol="0" anchor="ctr"/>
+          <a:lstStyle/>
+          <a:p>
+            <a:pPr algn="r" indent="0" marL="0">
+              <a:buNone/>
+            </a:pPr>
+            <a:r>
+              <a:rPr lang="en-US" sz="900" dirty="0">
+                <a:solidFill>
+                  <a:srgbClr val="5B6B7A"/>
+                </a:solidFill>
+                <a:latin typeface="Inter" pitchFamily="34" charset="0"/>
+                <a:ea typeface="Inter" pitchFamily="34" charset="-122"/>
+                <a:cs typeface="Inter" pitchFamily="34" charset="-120"/>
+              </a:rPr>
+              <a:t>Kit 3 · Planning &amp; Differentiation   |   34</a:t>
+            </a:r>
+            <a:endParaRPr lang="en-US" sz="900" dirty="0"/>
+          </a:p>
+        </p:txBody>
+      </p:sp>
+      <p:sp>
+        <p:nvSpPr>
+          <p:cNvPr id="5" name="Shape 2"/>
+          <p:cNvSpPr/>
+          <p:nvPr/>
+        </p:nvSpPr>
+        <p:spPr>
+          <a:xfrm>
+            <a:off x="8732520" y="109728"/>
+            <a:ext cx="2926080" cy="896112"/>
+          </a:xfrm>
+          <a:prstGeom prst="roundRect">
+            <a:avLst>
+              <a:gd name="adj" fmla="val 7143"/>
+            </a:avLst>
+          </a:prstGeom>
+          <a:solidFill>
+            <a:srgbClr val="F7F5F0"/>
+          </a:solidFill>
+          <a:ln w="12700">
+            <a:solidFill>
+              <a:srgbClr val="DCE3EA"/>
+            </a:solidFill>
+            <a:prstDash val="solid"/>
+          </a:ln>
+        </p:spPr>
+      </p:sp>
+      <p:sp>
+        <p:nvSpPr>
+          <p:cNvPr id="6" name="Shape 3"/>
+          <p:cNvSpPr/>
+          <p:nvPr/>
+        </p:nvSpPr>
+        <p:spPr>
+          <a:xfrm>
+            <a:off x="8732520" y="109728"/>
+            <a:ext cx="2926080" cy="237744"/>
+          </a:xfrm>
+          <a:prstGeom prst="roundRect">
+            <a:avLst>
+              <a:gd name="adj" fmla="val 26923"/>
+            </a:avLst>
+          </a:prstGeom>
+          <a:solidFill>
+            <a:srgbClr val="0D1E2E"/>
+          </a:solidFill>
+          <a:ln w="12700">
+            <a:solidFill>
+              <a:srgbClr val="0D1E2E"/>
+            </a:solidFill>
+            <a:prstDash val="solid"/>
+          </a:ln>
+        </p:spPr>
+      </p:sp>
+      <p:sp>
+        <p:nvSpPr>
+          <p:cNvPr id="7" name="Shape 4"/>
+          <p:cNvSpPr/>
+          <p:nvPr/>
+        </p:nvSpPr>
+        <p:spPr>
+          <a:xfrm>
+            <a:off x="8823960" y="182880"/>
+            <a:ext cx="91440" cy="91440"/>
+          </a:xfrm>
+          <a:prstGeom prst="ellipse">
+            <a:avLst/>
+          </a:prstGeom>
+          <a:solidFill>
+            <a:srgbClr val="E8837A"/>
+          </a:solidFill>
+          <a:ln w="12700">
+            <a:solidFill>
+              <a:srgbClr val="E8837A"/>
+            </a:solidFill>
+            <a:prstDash val="solid"/>
+          </a:ln>
+        </p:spPr>
+      </p:sp>
+      <p:sp>
+        <p:nvSpPr>
+          <p:cNvPr id="8" name="Shape 5"/>
+          <p:cNvSpPr/>
+          <p:nvPr/>
+        </p:nvSpPr>
+        <p:spPr>
+          <a:xfrm>
+            <a:off x="8970264" y="182880"/>
+            <a:ext cx="91440" cy="91440"/>
+          </a:xfrm>
+          <a:prstGeom prst="ellipse">
+            <a:avLst/>
+          </a:prstGeom>
+          <a:solidFill>
+            <a:srgbClr val="F4A825"/>
+          </a:solidFill>
+          <a:ln w="12700">
+            <a:solidFill>
+              <a:srgbClr val="F4A825"/>
+            </a:solidFill>
+            <a:prstDash val="solid"/>
+          </a:ln>
+        </p:spPr>
+      </p:sp>
+      <p:sp>
+        <p:nvSpPr>
+          <p:cNvPr id="9" name="Shape 6"/>
+          <p:cNvSpPr/>
+          <p:nvPr/>
+        </p:nvSpPr>
+        <p:spPr>
+          <a:xfrm>
+            <a:off x="9116568" y="182880"/>
+            <a:ext cx="91440" cy="91440"/>
+          </a:xfrm>
+          <a:prstGeom prst="ellipse">
+            <a:avLst/>
+          </a:prstGeom>
+          <a:solidFill>
+            <a:srgbClr val="2E7D5B"/>
+          </a:solidFill>
+          <a:ln w="12700">
+            <a:solidFill>
+              <a:srgbClr val="2E7D5B"/>
+            </a:solidFill>
+            <a:prstDash val="solid"/>
+          </a:ln>
+        </p:spPr>
+      </p:sp>
+      <p:sp>
+        <p:nvSpPr>
+          <p:cNvPr id="10" name="Text 7"/>
+          <p:cNvSpPr/>
+          <p:nvPr/>
+        </p:nvSpPr>
+        <p:spPr>
+          <a:xfrm>
+            <a:off x="9299448" y="109728"/>
+            <a:ext cx="2286000" cy="237744"/>
+          </a:xfrm>
+          <a:prstGeom prst="rect">
+            <a:avLst/>
+          </a:prstGeom>
+          <a:noFill/>
+          <a:ln/>
+        </p:spPr>
+        <p:txBody>
+          <a:bodyPr wrap="square" lIns="0" tIns="0" rIns="0" bIns="0" rtlCol="0" anchor="ctr"/>
+          <a:lstStyle/>
+          <a:p>
+            <a:pPr indent="0" marL="0">
+              <a:buNone/>
+            </a:pPr>
+            <a:r>
+              <a:rPr lang="en-US" sz="800" b="1" spc="100" kern="0" dirty="0">
+                <a:solidFill>
+                  <a:srgbClr val="9FB2C2"/>
+                </a:solidFill>
+                <a:latin typeface="Inter" pitchFamily="34" charset="0"/>
+                <a:ea typeface="Inter" pitchFamily="34" charset="-122"/>
+                <a:cs typeface="Inter" pitchFamily="34" charset="-120"/>
+              </a:rPr>
+              <a:t>MS. RIVERA'S SCREEN · SO FAR</a:t>
+            </a:r>
+            <a:endParaRPr lang="en-US" sz="800" dirty="0"/>
+          </a:p>
+        </p:txBody>
+      </p:sp>
+      <p:sp>
+        <p:nvSpPr>
+          <p:cNvPr id="11" name="Text 8"/>
+          <p:cNvSpPr/>
+          <p:nvPr/>
+        </p:nvSpPr>
+        <p:spPr>
+          <a:xfrm>
+            <a:off x="8860536" y="365760"/>
+            <a:ext cx="2670048" cy="566928"/>
+          </a:xfrm>
+          <a:prstGeom prst="rect">
+            <a:avLst/>
+          </a:prstGeom>
+          <a:noFill/>
+          <a:ln/>
+        </p:spPr>
+        <p:txBody>
+          <a:bodyPr wrap="square" lIns="0" tIns="0" rIns="0" bIns="0" rtlCol="0" anchor="ctr"/>
+          <a:lstStyle/>
+          <a:p>
+            <a:pPr indent="0" marL="0">
+              <a:buNone/>
+            </a:pPr>
+            <a:r>
+              <a:rPr lang="en-US" sz="1000" dirty="0">
+                <a:solidFill>
+                  <a:srgbClr val="1B1F24"/>
+                </a:solidFill>
+                <a:latin typeface="Inter" pitchFamily="34" charset="0"/>
+                <a:ea typeface="Inter" pitchFamily="34" charset="-122"/>
+                <a:cs typeface="Inter" pitchFamily="34" charset="-120"/>
+              </a:rPr>
+              <a:t>Her exit ticket: the artifact built, the direction that surprised her.</a:t>
+            </a:r>
+            <a:endParaRPr lang="en-US" sz="1000" dirty="0"/>
+          </a:p>
+        </p:txBody>
+      </p:sp>
+      <p:sp>
+        <p:nvSpPr>
+          <p:cNvPr id="12" name="Text 9"/>
+          <p:cNvSpPr/>
+          <p:nvPr/>
+        </p:nvSpPr>
+        <p:spPr>
+          <a:xfrm>
+            <a:off x="566928" y="128016"/>
+            <a:ext cx="7955280" cy="274320"/>
+          </a:xfrm>
+          <a:prstGeom prst="rect">
+            <a:avLst/>
+          </a:prstGeom>
+          <a:noFill/>
+          <a:ln/>
+        </p:spPr>
+        <p:txBody>
+          <a:bodyPr wrap="square" lIns="0" tIns="0" rIns="0" bIns="0" rtlCol="0" anchor="ctr"/>
+          <a:lstStyle/>
+          <a:p>
+            <a:pPr indent="0" marL="0">
+              <a:buNone/>
+            </a:pPr>
+            <a:r>
+              <a:rPr lang="en-US" sz="1200" b="1" spc="200" kern="0" dirty="0">
+                <a:solidFill>
+                  <a:srgbClr val="2A9D8F"/>
+                </a:solidFill>
+                <a:latin typeface="Inter" pitchFamily="34" charset="0"/>
+                <a:ea typeface="Inter" pitchFamily="34" charset="-122"/>
+                <a:cs typeface="Inter" pitchFamily="34" charset="-120"/>
+              </a:rPr>
+              <a:t>TWO MINUTES</a:t>
+            </a:r>
+            <a:endParaRPr lang="en-US" sz="1200" dirty="0"/>
+          </a:p>
+        </p:txBody>
+      </p:sp>
+      <p:sp>
+        <p:nvSpPr>
+          <p:cNvPr id="13" name="Text 10"/>
+          <p:cNvSpPr/>
+          <p:nvPr/>
+        </p:nvSpPr>
+        <p:spPr>
+          <a:xfrm>
+            <a:off x="548640" y="384048"/>
+            <a:ext cx="7955280" cy="777240"/>
+          </a:xfrm>
+          <a:prstGeom prst="rect">
+            <a:avLst/>
+          </a:prstGeom>
+          <a:noFill/>
+          <a:ln/>
+        </p:spPr>
+        <p:txBody>
+          <a:bodyPr wrap="square" lIns="0" tIns="0" rIns="0" bIns="0" rtlCol="0" anchor="ctr"/>
+          <a:lstStyle/>
+          <a:p>
+            <a:pPr indent="0" marL="0">
+              <a:buNone/>
+            </a:pPr>
+            <a:r>
+              <a:rPr lang="en-US" sz="3200" b="1" dirty="0">
+                <a:solidFill>
+                  <a:srgbClr val="13293D"/>
+                </a:solidFill>
+                <a:latin typeface="Inter" pitchFamily="34" charset="0"/>
+                <a:ea typeface="Inter" pitchFamily="34" charset="-122"/>
+                <a:cs typeface="Inter" pitchFamily="34" charset="-120"/>
+              </a:rPr>
+              <a:t>Exit ticket</a:t>
+            </a:r>
+            <a:endParaRPr lang="en-US" sz="3200" dirty="0"/>
+          </a:p>
+        </p:txBody>
+      </p:sp>
+      <p:sp>
+        <p:nvSpPr>
+          <p:cNvPr id="14" name="Text 11"/>
+          <p:cNvSpPr/>
+          <p:nvPr/>
+        </p:nvSpPr>
+        <p:spPr>
+          <a:xfrm>
+            <a:off x="640080" y="1554480"/>
+            <a:ext cx="10908792" cy="2377440"/>
+          </a:xfrm>
+          <a:prstGeom prst="rect">
+            <a:avLst/>
+          </a:prstGeom>
+          <a:noFill/>
+          <a:ln/>
+        </p:spPr>
+        <p:txBody>
+          <a:bodyPr wrap="square" rtlCol="0" anchor="t"/>
+          <a:lstStyle/>
+          <a:p>
+            <a:pPr marL="342900" indent="-342900">
+              <a:spcAft>
+                <a:spcPts val="1000"/>
+              </a:spcAft>
+              <a:buSzPct val="100000"/>
+              <a:buChar char="•"/>
+            </a:pPr>
+            <a:r>
+              <a:rPr lang="en-US" sz="2400" dirty="0">
+                <a:solidFill>
+                  <a:srgbClr val="1B1F24"/>
+                </a:solidFill>
+                <a:latin typeface="Inter" pitchFamily="34" charset="0"/>
+                <a:ea typeface="Inter" pitchFamily="34" charset="-122"/>
+                <a:cs typeface="Inter" pitchFamily="34" charset="-120"/>
+              </a:rPr>
+              <a:t>The differentiation move you’ll use first</a:t>
+            </a:r>
+            <a:endParaRPr lang="en-US" sz="2400" dirty="0"/>
+          </a:p>
+          <a:p>
+            <a:pPr marL="342900" indent="-342900">
+              <a:spcAft>
+                <a:spcPts val="1000"/>
+              </a:spcAft>
+              <a:buSzPct val="100000"/>
+              <a:buChar char="•"/>
+            </a:pPr>
+            <a:r>
+              <a:rPr lang="en-US" sz="2400" dirty="0">
+                <a:solidFill>
+                  <a:srgbClr val="1B1F24"/>
+                </a:solidFill>
+                <a:latin typeface="Inter" pitchFamily="34" charset="0"/>
+                <a:ea typeface="Inter" pitchFamily="34" charset="-122"/>
+                <a:cs typeface="Inter" pitchFamily="34" charset="-120"/>
+              </a:rPr>
+              <a:t>The artifact you built in the lab</a:t>
+            </a:r>
+            <a:endParaRPr lang="en-US" sz="2400" dirty="0"/>
+          </a:p>
+          <a:p>
+            <a:pPr marL="342900" indent="-342900">
+              <a:spcAft>
+                <a:spcPts val="1000"/>
+              </a:spcAft>
+              <a:buSzPct val="100000"/>
+              <a:buChar char="•"/>
+            </a:pPr>
+            <a:r>
+              <a:rPr lang="en-US" sz="2400" dirty="0">
+                <a:solidFill>
+                  <a:srgbClr val="1B1F24"/>
+                </a:solidFill>
+                <a:latin typeface="Inter" pitchFamily="34" charset="0"/>
+                <a:ea typeface="Inter" pitchFamily="34" charset="-122"/>
+                <a:cs typeface="Inter" pitchFamily="34" charset="-120"/>
+              </a:rPr>
+              <a:t>One differentiation task you still want help with</a:t>
+            </a:r>
+            <a:endParaRPr lang="en-US" sz="2400" dirty="0"/>
+          </a:p>
+        </p:txBody>
+      </p:sp>
+      <p:sp>
+        <p:nvSpPr>
+          <p:cNvPr id="15" name="Text 12"/>
+          <p:cNvSpPr/>
+          <p:nvPr/>
+        </p:nvSpPr>
+        <p:spPr>
+          <a:xfrm>
+            <a:off x="640080" y="4297680"/>
+            <a:ext cx="10972800" cy="457200"/>
+          </a:xfrm>
+          <a:prstGeom prst="rect">
+            <a:avLst/>
+          </a:prstGeom>
+          <a:noFill/>
+          <a:ln/>
+        </p:spPr>
+        <p:txBody>
+          <a:bodyPr wrap="square" lIns="0" tIns="0" rIns="0" bIns="0" rtlCol="0" anchor="ctr"/>
+          <a:lstStyle/>
+          <a:p>
+            <a:pPr indent="0" marL="0">
+              <a:buNone/>
+            </a:pPr>
+            <a:r>
+              <a:rPr lang="en-US" sz="1900" i="1" dirty="0">
+                <a:solidFill>
+                  <a:srgbClr val="5B6B7A"/>
+                </a:solidFill>
+                <a:latin typeface="Inter" pitchFamily="34" charset="0"/>
+                <a:ea typeface="Inter" pitchFamily="34" charset="-122"/>
+                <a:cs typeface="Inter" pitchFamily="34" charset="-120"/>
+              </a:rPr>
+              <a:t>Your answers steer the PLC follow-ups. Be honest.</a:t>
+            </a:r>
+            <a:endParaRPr lang="en-US" sz="1900" dirty="0"/>
+          </a:p>
+        </p:txBody>
+      </p:sp>
+    </p:spTree>
+  </p:cSld>
+  <p:clrMapOvr>
+    <a:masterClrMapping/>
+  </p:clrMapOvr>
+</p:sld>
+</file>
+
+<file path=ppt/slides/slide35.xml><?xml version="1.0" encoding="utf-8"?>
+<p:sld xmlns:a="http://schemas.openxmlformats.org/drawingml/2006/main" xmlns:r="http://schemas.openxmlformats.org/officeDocument/2006/relationships" xmlns:p="http://schemas.openxmlformats.org/presentationml/2006/main">
+  <p:cSld name="Slide 35">
     <p:bg>
       <p:bgPr>
         <a:solidFill>
@@ -25789,7 +26712,7 @@
                 <a:ea typeface="Inter" pitchFamily="34" charset="-122"/>
                 <a:cs typeface="Inter" pitchFamily="34" charset="-120"/>
               </a:rPr>
-              <a:t>Kit 3 · Planning &amp; Differentiation   |   34</a:t>
+              <a:t>Kit 3 · Planning &amp; Differentiation   |   35</a:t>
             </a:r>
             <a:endParaRPr lang="en-US" sz="900" dirty="0"/>
           </a:p>

--- a/kits/kit03/Kit03_PresentationDeck.pptx
+++ b/kits/kit03/Kit03_PresentationDeck.pptx
@@ -4559,17 +4559,17 @@
         </p:nvSpPr>
         <p:spPr>
           <a:xfrm>
-            <a:off x="548640" y="384048"/>
-            <a:ext cx="7955280" cy="777240"/>
-          </a:xfrm>
-          <a:prstGeom prst="rect">
-            <a:avLst/>
-          </a:prstGeom>
-          <a:noFill/>
-          <a:ln/>
-        </p:spPr>
-        <p:txBody>
-          <a:bodyPr wrap="square" lIns="0" tIns="0" rIns="0" bIns="0" rtlCol="0" anchor="ctr"/>
+            <a:off x="548640" y="457200"/>
+            <a:ext cx="7955280" cy="914400"/>
+          </a:xfrm>
+          <a:prstGeom prst="rect">
+            <a:avLst/>
+          </a:prstGeom>
+          <a:noFill/>
+          <a:ln/>
+        </p:spPr>
+        <p:txBody>
+          <a:bodyPr wrap="square" lIns="0" tIns="0" rIns="0" bIns="0" rtlCol="0" anchor="t"/>
           <a:lstStyle/>
           <a:p>
             <a:pPr indent="0" marL="0">
@@ -6282,17 +6282,17 @@
         </p:nvSpPr>
         <p:spPr>
           <a:xfrm>
-            <a:off x="548640" y="384048"/>
-            <a:ext cx="7955280" cy="777240"/>
-          </a:xfrm>
-          <a:prstGeom prst="rect">
-            <a:avLst/>
-          </a:prstGeom>
-          <a:noFill/>
-          <a:ln/>
-        </p:spPr>
-        <p:txBody>
-          <a:bodyPr wrap="square" lIns="0" tIns="0" rIns="0" bIns="0" rtlCol="0" anchor="ctr"/>
+            <a:off x="548640" y="457200"/>
+            <a:ext cx="7955280" cy="914400"/>
+          </a:xfrm>
+          <a:prstGeom prst="rect">
+            <a:avLst/>
+          </a:prstGeom>
+          <a:noFill/>
+          <a:ln/>
+        </p:spPr>
+        <p:txBody>
+          <a:bodyPr wrap="square" lIns="0" tIns="0" rIns="0" bIns="0" rtlCol="0" anchor="t"/>
           <a:lstStyle/>
           <a:p>
             <a:pPr indent="0" marL="0">
@@ -8272,17 +8272,17 @@
         </p:nvSpPr>
         <p:spPr>
           <a:xfrm>
-            <a:off x="548640" y="384048"/>
-            <a:ext cx="7955280" cy="777240"/>
-          </a:xfrm>
-          <a:prstGeom prst="rect">
-            <a:avLst/>
-          </a:prstGeom>
-          <a:noFill/>
-          <a:ln/>
-        </p:spPr>
-        <p:txBody>
-          <a:bodyPr wrap="square" lIns="0" tIns="0" rIns="0" bIns="0" rtlCol="0" anchor="ctr"/>
+            <a:off x="548640" y="457200"/>
+            <a:ext cx="7955280" cy="914400"/>
+          </a:xfrm>
+          <a:prstGeom prst="rect">
+            <a:avLst/>
+          </a:prstGeom>
+          <a:noFill/>
+          <a:ln/>
+        </p:spPr>
+        <p:txBody>
+          <a:bodyPr wrap="square" lIns="0" tIns="0" rIns="0" bIns="0" rtlCol="0" anchor="t"/>
           <a:lstStyle/>
           <a:p>
             <a:pPr indent="0" marL="0">
@@ -9437,17 +9437,17 @@
         </p:nvSpPr>
         <p:spPr>
           <a:xfrm>
-            <a:off x="548640" y="384048"/>
-            <a:ext cx="7955280" cy="777240"/>
-          </a:xfrm>
-          <a:prstGeom prst="rect">
-            <a:avLst/>
-          </a:prstGeom>
-          <a:noFill/>
-          <a:ln/>
-        </p:spPr>
-        <p:txBody>
-          <a:bodyPr wrap="square" lIns="0" tIns="0" rIns="0" bIns="0" rtlCol="0" anchor="ctr"/>
+            <a:off x="548640" y="457200"/>
+            <a:ext cx="7955280" cy="914400"/>
+          </a:xfrm>
+          <a:prstGeom prst="rect">
+            <a:avLst/>
+          </a:prstGeom>
+          <a:noFill/>
+          <a:ln/>
+        </p:spPr>
+        <p:txBody>
+          <a:bodyPr wrap="square" lIns="0" tIns="0" rIns="0" bIns="0" rtlCol="0" anchor="t"/>
           <a:lstStyle/>
           <a:p>
             <a:pPr indent="0" marL="0">
@@ -12281,24 +12281,24 @@
         </p:nvSpPr>
         <p:spPr>
           <a:xfrm>
-            <a:off x="548640" y="384048"/>
-            <a:ext cx="7955280" cy="777240"/>
-          </a:xfrm>
-          <a:prstGeom prst="rect">
-            <a:avLst/>
-          </a:prstGeom>
-          <a:noFill/>
-          <a:ln/>
-        </p:spPr>
-        <p:txBody>
-          <a:bodyPr wrap="square" lIns="0" tIns="0" rIns="0" bIns="0" rtlCol="0" anchor="ctr"/>
-          <a:lstStyle/>
-          <a:p>
-            <a:pPr indent="0" marL="0">
-              <a:buNone/>
-            </a:pPr>
-            <a:r>
-              <a:rPr lang="en-US" sz="3200" b="1" dirty="0">
+            <a:off x="548640" y="457200"/>
+            <a:ext cx="7955280" cy="914400"/>
+          </a:xfrm>
+          <a:prstGeom prst="rect">
+            <a:avLst/>
+          </a:prstGeom>
+          <a:noFill/>
+          <a:ln/>
+        </p:spPr>
+        <p:txBody>
+          <a:bodyPr wrap="square" lIns="0" tIns="0" rIns="0" bIns="0" rtlCol="0" anchor="t"/>
+          <a:lstStyle/>
+          <a:p>
+            <a:pPr indent="0" marL="0">
+              <a:buNone/>
+            </a:pPr>
+            <a:r>
+              <a:rPr lang="en-US" sz="2800" b="1" dirty="0">
                 <a:solidFill>
                   <a:srgbClr val="13293D"/>
                 </a:solidFill>
@@ -12308,7 +12308,7 @@
               </a:rPr>
               <a:t>Narrow gaps. Don’t widen them.</a:t>
             </a:r>
-            <a:endParaRPr lang="en-US" sz="3200" dirty="0"/>
+            <a:endParaRPr lang="en-US" sz="2800" dirty="0"/>
           </a:p>
         </p:txBody>
       </p:sp>
@@ -15812,24 +15812,24 @@
         </p:nvSpPr>
         <p:spPr>
           <a:xfrm>
-            <a:off x="548640" y="384048"/>
-            <a:ext cx="7955280" cy="777240"/>
-          </a:xfrm>
-          <a:prstGeom prst="rect">
-            <a:avLst/>
-          </a:prstGeom>
-          <a:noFill/>
-          <a:ln/>
-        </p:spPr>
-        <p:txBody>
-          <a:bodyPr wrap="square" lIns="0" tIns="0" rIns="0" bIns="0" rtlCol="0" anchor="ctr"/>
-          <a:lstStyle/>
-          <a:p>
-            <a:pPr indent="0" marL="0">
-              <a:buNone/>
-            </a:pPr>
-            <a:r>
-              <a:rPr lang="en-US" sz="3200" b="1" dirty="0">
+            <a:off x="548640" y="457200"/>
+            <a:ext cx="7955280" cy="914400"/>
+          </a:xfrm>
+          <a:prstGeom prst="rect">
+            <a:avLst/>
+          </a:prstGeom>
+          <a:noFill/>
+          <a:ln/>
+        </p:spPr>
+        <p:txBody>
+          <a:bodyPr wrap="square" lIns="0" tIns="0" rIns="0" bIns="0" rtlCol="0" anchor="t"/>
+          <a:lstStyle/>
+          <a:p>
+            <a:pPr indent="0" marL="0">
+              <a:buNone/>
+            </a:pPr>
+            <a:r>
+              <a:rPr lang="en-US" sz="2800" b="1" dirty="0">
                 <a:solidFill>
                   <a:srgbClr val="13293D"/>
                 </a:solidFill>
@@ -15839,7 +15839,7 @@
               </a:rPr>
               <a:t>Differentiate it: two directions</a:t>
             </a:r>
-            <a:endParaRPr lang="en-US" sz="3200" dirty="0"/>
+            <a:endParaRPr lang="en-US" sz="2800" dirty="0"/>
           </a:p>
         </p:txBody>
       </p:sp>
@@ -18966,17 +18966,17 @@
         </p:nvSpPr>
         <p:spPr>
           <a:xfrm>
-            <a:off x="548640" y="384048"/>
-            <a:ext cx="7955280" cy="777240"/>
-          </a:xfrm>
-          <a:prstGeom prst="rect">
-            <a:avLst/>
-          </a:prstGeom>
-          <a:noFill/>
-          <a:ln/>
-        </p:spPr>
-        <p:txBody>
-          <a:bodyPr wrap="square" lIns="0" tIns="0" rIns="0" bIns="0" rtlCol="0" anchor="ctr"/>
+            <a:off x="548640" y="457200"/>
+            <a:ext cx="7955280" cy="914400"/>
+          </a:xfrm>
+          <a:prstGeom prst="rect">
+            <a:avLst/>
+          </a:prstGeom>
+          <a:noFill/>
+          <a:ln/>
+        </p:spPr>
+        <p:txBody>
+          <a:bodyPr wrap="square" lIns="0" tIns="0" rIns="0" bIns="0" rtlCol="0" anchor="t"/>
           <a:lstStyle/>
           <a:p>
             <a:pPr indent="0" marL="0">
@@ -20705,17 +20705,17 @@
         </p:nvSpPr>
         <p:spPr>
           <a:xfrm>
-            <a:off x="548640" y="384048"/>
-            <a:ext cx="7955280" cy="777240"/>
-          </a:xfrm>
-          <a:prstGeom prst="rect">
-            <a:avLst/>
-          </a:prstGeom>
-          <a:noFill/>
-          <a:ln/>
-        </p:spPr>
-        <p:txBody>
-          <a:bodyPr wrap="square" lIns="0" tIns="0" rIns="0" bIns="0" rtlCol="0" anchor="ctr"/>
+            <a:off x="548640" y="457200"/>
+            <a:ext cx="7955280" cy="914400"/>
+          </a:xfrm>
+          <a:prstGeom prst="rect">
+            <a:avLst/>
+          </a:prstGeom>
+          <a:noFill/>
+          <a:ln/>
+        </p:spPr>
+        <p:txBody>
+          <a:bodyPr wrap="square" lIns="0" tIns="0" rIns="0" bIns="0" rtlCol="0" anchor="t"/>
           <a:lstStyle/>
           <a:p>
             <a:pPr indent="0" marL="0">
@@ -22161,24 +22161,24 @@
         </p:nvSpPr>
         <p:spPr>
           <a:xfrm>
-            <a:off x="548640" y="384048"/>
-            <a:ext cx="7955280" cy="777240"/>
-          </a:xfrm>
-          <a:prstGeom prst="rect">
-            <a:avLst/>
-          </a:prstGeom>
-          <a:noFill/>
-          <a:ln/>
-        </p:spPr>
-        <p:txBody>
-          <a:bodyPr wrap="square" lIns="0" tIns="0" rIns="0" bIns="0" rtlCol="0" anchor="ctr"/>
-          <a:lstStyle/>
-          <a:p>
-            <a:pPr indent="0" marL="0">
-              <a:buNone/>
-            </a:pPr>
-            <a:r>
-              <a:rPr lang="en-US" sz="3200" b="1" dirty="0">
+            <a:off x="548640" y="457200"/>
+            <a:ext cx="7955280" cy="914400"/>
+          </a:xfrm>
+          <a:prstGeom prst="rect">
+            <a:avLst/>
+          </a:prstGeom>
+          <a:noFill/>
+          <a:ln/>
+        </p:spPr>
+        <p:txBody>
+          <a:bodyPr wrap="square" lIns="0" tIns="0" rIns="0" bIns="0" rtlCol="0" anchor="t"/>
+          <a:lstStyle/>
+          <a:p>
+            <a:pPr indent="0" marL="0">
+              <a:buNone/>
+            </a:pPr>
+            <a:r>
+              <a:rPr lang="en-US" sz="2800" b="1" dirty="0">
                 <a:solidFill>
                   <a:srgbClr val="13293D"/>
                 </a:solidFill>
@@ -22188,7 +22188,7 @@
               </a:rPr>
               <a:t>From good intentions to materials</a:t>
             </a:r>
-            <a:endParaRPr lang="en-US" sz="3200" dirty="0"/>
+            <a:endParaRPr lang="en-US" sz="2800" dirty="0"/>
           </a:p>
         </p:txBody>
       </p:sp>
@@ -22675,17 +22675,17 @@
         </p:nvSpPr>
         <p:spPr>
           <a:xfrm>
-            <a:off x="548640" y="384048"/>
-            <a:ext cx="7955280" cy="777240"/>
-          </a:xfrm>
-          <a:prstGeom prst="rect">
-            <a:avLst/>
-          </a:prstGeom>
-          <a:noFill/>
-          <a:ln/>
-        </p:spPr>
-        <p:txBody>
-          <a:bodyPr wrap="square" lIns="0" tIns="0" rIns="0" bIns="0" rtlCol="0" anchor="ctr"/>
+            <a:off x="548640" y="457200"/>
+            <a:ext cx="7955280" cy="914400"/>
+          </a:xfrm>
+          <a:prstGeom prst="rect">
+            <a:avLst/>
+          </a:prstGeom>
+          <a:noFill/>
+          <a:ln/>
+        </p:spPr>
+        <p:txBody>
+          <a:bodyPr wrap="square" lIns="0" tIns="0" rIns="0" bIns="0" rtlCol="0" anchor="t"/>
           <a:lstStyle/>
           <a:p>
             <a:pPr indent="0" marL="0">
@@ -23391,17 +23391,17 @@
         </p:nvSpPr>
         <p:spPr>
           <a:xfrm>
-            <a:off x="548640" y="384048"/>
-            <a:ext cx="7955280" cy="777240"/>
-          </a:xfrm>
-          <a:prstGeom prst="rect">
-            <a:avLst/>
-          </a:prstGeom>
-          <a:noFill/>
-          <a:ln/>
-        </p:spPr>
-        <p:txBody>
-          <a:bodyPr wrap="square" lIns="0" tIns="0" rIns="0" bIns="0" rtlCol="0" anchor="ctr"/>
+            <a:off x="548640" y="457200"/>
+            <a:ext cx="7955280" cy="914400"/>
+          </a:xfrm>
+          <a:prstGeom prst="rect">
+            <a:avLst/>
+          </a:prstGeom>
+          <a:noFill/>
+          <a:ln/>
+        </p:spPr>
+        <p:txBody>
+          <a:bodyPr wrap="square" lIns="0" tIns="0" rIns="0" bIns="0" rtlCol="0" anchor="t"/>
           <a:lstStyle/>
           <a:p>
             <a:pPr indent="0" marL="0">
@@ -25550,17 +25550,17 @@
         </p:nvSpPr>
         <p:spPr>
           <a:xfrm>
-            <a:off x="548640" y="384048"/>
-            <a:ext cx="7955280" cy="777240"/>
-          </a:xfrm>
-          <a:prstGeom prst="rect">
-            <a:avLst/>
-          </a:prstGeom>
-          <a:noFill/>
-          <a:ln/>
-        </p:spPr>
-        <p:txBody>
-          <a:bodyPr wrap="square" lIns="0" tIns="0" rIns="0" bIns="0" rtlCol="0" anchor="ctr"/>
+            <a:off x="548640" y="457200"/>
+            <a:ext cx="7955280" cy="914400"/>
+          </a:xfrm>
+          <a:prstGeom prst="rect">
+            <a:avLst/>
+          </a:prstGeom>
+          <a:noFill/>
+          <a:ln/>
+        </p:spPr>
+        <p:txBody>
+          <a:bodyPr wrap="square" lIns="0" tIns="0" rIns="0" bIns="0" rtlCol="0" anchor="t"/>
           <a:lstStyle/>
           <a:p>
             <a:pPr indent="0" marL="0">
@@ -28765,17 +28765,17 @@
         </p:nvSpPr>
         <p:spPr>
           <a:xfrm>
-            <a:off x="548640" y="384048"/>
-            <a:ext cx="7955280" cy="777240"/>
-          </a:xfrm>
-          <a:prstGeom prst="rect">
-            <a:avLst/>
-          </a:prstGeom>
-          <a:noFill/>
-          <a:ln/>
-        </p:spPr>
-        <p:txBody>
-          <a:bodyPr wrap="square" lIns="0" tIns="0" rIns="0" bIns="0" rtlCol="0" anchor="ctr"/>
+            <a:off x="548640" y="457200"/>
+            <a:ext cx="7955280" cy="914400"/>
+          </a:xfrm>
+          <a:prstGeom prst="rect">
+            <a:avLst/>
+          </a:prstGeom>
+          <a:noFill/>
+          <a:ln/>
+        </p:spPr>
+        <p:txBody>
+          <a:bodyPr wrap="square" lIns="0" tIns="0" rIns="0" bIns="0" rtlCol="0" anchor="t"/>
           <a:lstStyle/>
           <a:p>
             <a:pPr indent="0" marL="0">
@@ -29465,17 +29465,17 @@
         </p:nvSpPr>
         <p:spPr>
           <a:xfrm>
-            <a:off x="548640" y="384048"/>
-            <a:ext cx="7955280" cy="777240"/>
-          </a:xfrm>
-          <a:prstGeom prst="rect">
-            <a:avLst/>
-          </a:prstGeom>
-          <a:noFill/>
-          <a:ln/>
-        </p:spPr>
-        <p:txBody>
-          <a:bodyPr wrap="square" lIns="0" tIns="0" rIns="0" bIns="0" rtlCol="0" anchor="ctr"/>
+            <a:off x="548640" y="457200"/>
+            <a:ext cx="7955280" cy="914400"/>
+          </a:xfrm>
+          <a:prstGeom prst="rect">
+            <a:avLst/>
+          </a:prstGeom>
+          <a:noFill/>
+          <a:ln/>
+        </p:spPr>
+        <p:txBody>
+          <a:bodyPr wrap="square" lIns="0" tIns="0" rIns="0" bIns="0" rtlCol="0" anchor="t"/>
           <a:lstStyle/>
           <a:p>
             <a:pPr indent="0" marL="0">
@@ -30028,24 +30028,24 @@
         </p:nvSpPr>
         <p:spPr>
           <a:xfrm>
-            <a:off x="548640" y="384048"/>
-            <a:ext cx="7955280" cy="777240"/>
-          </a:xfrm>
-          <a:prstGeom prst="rect">
-            <a:avLst/>
-          </a:prstGeom>
-          <a:noFill/>
-          <a:ln/>
-        </p:spPr>
-        <p:txBody>
-          <a:bodyPr wrap="square" lIns="0" tIns="0" rIns="0" bIns="0" rtlCol="0" anchor="ctr"/>
-          <a:lstStyle/>
-          <a:p>
-            <a:pPr indent="0" marL="0">
-              <a:buNone/>
-            </a:pPr>
-            <a:r>
-              <a:rPr lang="en-US" sz="3200" b="1" dirty="0">
+            <a:off x="548640" y="457200"/>
+            <a:ext cx="7955280" cy="914400"/>
+          </a:xfrm>
+          <a:prstGeom prst="rect">
+            <a:avLst/>
+          </a:prstGeom>
+          <a:noFill/>
+          <a:ln/>
+        </p:spPr>
+        <p:txBody>
+          <a:bodyPr wrap="square" lIns="0" tIns="0" rIns="0" bIns="0" rtlCol="0" anchor="t"/>
+          <a:lstStyle/>
+          <a:p>
+            <a:pPr indent="0" marL="0">
+              <a:buNone/>
+            </a:pPr>
+            <a:r>
+              <a:rPr lang="en-US" sz="2800" b="1" dirty="0">
                 <a:solidFill>
                   <a:srgbClr val="13293D"/>
                 </a:solidFill>
@@ -30055,7 +30055,7 @@
               </a:rPr>
               <a:t>UDL: generate options, then choose</a:t>
             </a:r>
-            <a:endParaRPr lang="en-US" sz="3200" dirty="0"/>
+            <a:endParaRPr lang="en-US" sz="2800" dirty="0"/>
           </a:p>
         </p:txBody>
       </p:sp>

--- a/kits/kit03/Kit03_PresentationDeck.pptx
+++ b/kits/kit03/Kit03_PresentationDeck.pptx
@@ -3440,7 +3440,7 @@
           <a:p>
             <a:r>
               <a:rPr lang="en-US" dirty="0"/>
-              <a:t>CAST’s UDL Guidelines 3.0; Capp’s 2017 meta-analysis found UDL effective for improving learning across the board. If asked “is this learning styles?”: no; UDL builds flexible materials, it does not sort kids into types.</a:t>
+              <a:t>CAST’s UDL Guidelines 3.0; Capp’s 2017 meta-analysis found UDL effective for improving the learning PROCESS for all students, and said plainly that impact on educational outcomes had not been demonstrated. If someone asks whether UDL raises test scores, that is the honest answer: not shown yet. If asked “is this learning styles?”: no; UDL builds flexible materials, it does not sort kids into types.</a:t>
             </a:r>
             <a:endParaRPr lang="en-US" dirty="0"/>
           </a:p>
